--- a/산출물/통합반/이론_오프라인/08회차/통합반_오프라인_08회차.pptx
+++ b/산출물/통합반/이론_오프라인/08회차/통합반_오프라인_08회차.pptx
@@ -32,6 +32,13 @@
     <p:sldId id="280" r:id="rId32"/>
     <p:sldId id="281" r:id="rId33"/>
     <p:sldId id="282" r:id="rId34"/>
+    <p:sldId id="283" r:id="rId35"/>
+    <p:sldId id="284" r:id="rId36"/>
+    <p:sldId id="285" r:id="rId37"/>
+    <p:sldId id="286" r:id="rId38"/>
+    <p:sldId id="287" r:id="rId39"/>
+    <p:sldId id="288" r:id="rId40"/>
+    <p:sldId id="289" r:id="rId41"/>
   </p:sldIdLst>
   <p:sldSz cx="12191695" cy="6858000" type="screen4x3"/>
   <p:notesSz cx="6858000" cy="9144000"/>
@@ -533,12 +540,12 @@
           </a:p>
           <a:p>
             <a:r>
-              <a:t>· 지난 회차까지 에이전트 하나가 맡은 일을 만들고 검증했다 → 오늘은 그 결과가 승인 · 명령 · 확인 · 보고로 이어지는 업무 전체를 그린다</a:t>
-            </a:r>
-          </a:p>
-          <a:p>
-            <a:r>
-              <a:t>· 네 교시: 이론 50분 → 기본 승인 흐름에서 설비 대응 흐름으로 → 승인 · 거절 · 지연 경로 → 등록된 실행 연결과 비교</a:t>
+              <a:t>· 앞에서 에이전트 하나가 맡은 일을 만들고 검증했다 → 오늘은 그 결과가 승인 · 명령 · 확인 · 보고로 이어지는 업무 전체를 그린다</a:t>
+            </a:r>
+          </a:p>
+          <a:p>
+            <a:r>
+              <a:t>· 오늘의 흐름: 이론 → 기본 승인 흐름에서 설비 대응 흐름으로 → 승인 · 거절 · 지연 경로 → 등록된 실행 연결과 비교</a:t>
             </a:r>
           </a:p>
           <a:p>
@@ -628,7 +635,7 @@
           </a:p>
           <a:p>
             <a:r>
-              <a:t>· 2교시에 bpmn.io로 시작 → 요청 확인 → 승인 또는 반려 → 종료를 그린다</a:t>
+              <a:t>· 실습에서 bpmn.io로 시작 → 요청 확인 → 승인 또는 반려 → 종료를 그린다</a:t>
             </a:r>
           </a:p>
           <a:p>
@@ -823,7 +830,7 @@
           </a:p>
           <a:p>
             <a:r>
-              <a:t>· 표식 없는 작업: 원인 진단 · 냉각 조치 제안. BPMN 표준에 에이전트 작업 요소가 없어, HYD는 표식 없는 작업으로 그리고 맡을 에이전트는 연결할 때 정한다 — 4교시 실습에서 매핑 자료로</a:t>
+              <a:t>· 표식 없는 작업: 원인 진단 · 냉각 조치 제안. BPMN 표준에 에이전트 작업 요소가 없어, HYD는 표식 없는 작업으로 그리고 맡을 에이전트는 연결할 때 정한다 — 실습에서 매핑 자료로</a:t>
             </a:r>
           </a:p>
           <a:p>
@@ -1108,7 +1115,7 @@
           </a:p>
           <a:p>
             <a:r>
-              <a:t>· 3교시에 승인 · 거절 경로를 잇고 승인 작업을 취소하지 않는 지연 알림을 더한다</a:t>
+              <a:t>· 실습에서 승인 · 거절 경로를 잇고 승인 작업을 취소하지 않는 지연 알림을 더한다</a:t>
             </a:r>
           </a:p>
           <a:p>
@@ -1598,17 +1605,17 @@
           </a:p>
           <a:p>
             <a:r>
-              <a:t>· 2 이벤트 · 작업 · 분기: 2교시에 기본 승인 흐름을 그리고 설비 대응으로 확장</a:t>
-            </a:r>
-          </a:p>
-          <a:p>
-            <a:r>
-              <a:t>· 3 레인과 지연 알림: 에이전트 · 사람 · 시스템의 칸, 승인을 취소하지 않는 알림 → 3교시</a:t>
-            </a:r>
-          </a:p>
-          <a:p>
-            <a:r>
-              <a:t>· 4 실행 연결: 그림은 설계도, 엔진이 읽어 작업을 연다. 거절로 닫힌 것과 승인을 기다리는 것은 다른 상태 → 4교시 비교</a:t>
+              <a:t>· 2 이벤트 · 작업 · 분기: 실습에서 기본 승인 흐름을 그리고 설비 대응으로 확장</a:t>
+            </a:r>
+          </a:p>
+          <a:p>
+            <a:r>
+              <a:t>· 3 레인과 지연 알림: 에이전트 · 사람 · 시스템의 칸, 승인을 취소하지 않는 알림</a:t>
+            </a:r>
+          </a:p>
+          <a:p>
+            <a:r>
+              <a:t>· 4 실행 연결: 그림은 설계도, 엔진이 읽어 작업을 연다. 거절로 닫힌 것과 승인을 기다리는 것은 다른 상태</a:t>
             </a:r>
           </a:p>
           <a:p>
@@ -1793,7 +1800,7 @@
           </a:p>
           <a:p>
             <a:r>
-              <a:t>· 4교시에 내 그림의 작업마다 대응하는 실행 기능을 표시한다</a:t>
+              <a:t>· 실습에서 내 그림의 작업마다 대응하는 실행 기능을 표시한다</a:t>
             </a:r>
           </a:p>
           <a:p>
@@ -2083,7 +2090,7 @@
           </a:p>
           <a:p>
             <a:r>
-              <a:t>[다음] 승인 대기</a:t>
+              <a:t>[다음] 토큰</a:t>
             </a:r>
           </a:p>
         </p:txBody>
@@ -2153,37 +2160,32 @@
           <a:lstStyle/>
           <a:p>
             <a:r>
-              <a:t>[짚을 곳] 왼쪽 기록 맨 위 status → 둘째 줄 current_activity_ids → 아래 단계 상태 다섯 줄</a:t>
-            </a:r>
-          </a:p>
-          <a:p>
-            <a:r>
-              <a:t>· 쿨러 사건과 같은 정의에서 열렸지만 운전원이 한동안 응답하지 않은 다른 처리 건</a:t>
-            </a:r>
-          </a:p>
-          <a:p>
-            <a:r>
-              <a:t>· RUNNING: 아직 안 끝남. 열린 단계 T_approve(운전원 승인) = 토큰의 자리</a:t>
-            </a:r>
-          </a:p>
-          <a:p>
-            <a:r>
-              <a:t>· 단계: 그림의 작업이 이 처리 건에서 실제로 실행되는 자리. T_agent DONE, T_approve IN_PROGRESS, 나머지 TODO</a:t>
-            </a:r>
-          </a:p>
-          <a:p>
-            <a:r>
-              <a:t>· 닿지 않은 단계도 처음부터 기록에 있다(열릴 때 미리 만든다) → 남은 일까지 보인다</a:t>
-            </a:r>
-          </a:p>
-          <a:p>
-            <a:r>
-              <a:t>· 승인 대기는 오류가 아니라 정상 실행 상태. 다만 담당자 부재 · 알림 실패로 길어졌는지는 따로</a:t>
-            </a:r>
-          </a:p>
-          <a:p>
-            <a:r>
-              <a:t>[다음] COMPLETED는 성공을 뜻하지 않는다</a:t>
+              <a:t>[짚을 곳] 운전원 승인 오른쪽 위의 파란 점</a:t>
+            </a:r>
+          </a:p>
+          <a:p>
+            <a:r>
+              <a:t>· 토큰(Token): 프로세스의 현재 위치 표식. 시작 이벤트에서 생겨, 작업이 끝날 때마다 선을 따라 옮기고, 게이트웨이에선 참인 선, 끝 이벤트에서 사라진다</a:t>
+            </a:r>
+          </a:p>
+          <a:p>
+            <a:r>
+              <a:t>· 지금은 운전원 승인에 있음: 에이전트 작업은 끝났고 냉각 명령엔 아직 — 운전원 차례</a:t>
+            </a:r>
+          </a:p>
+          <a:p>
+            <a:r>
+              <a:t>· 쿨러 사건: 에이전트 단계에 오래, 승인은 짧게, 냉각 명령은 순식간, 재관측에서 다시 한동안 → 단계마다 닿은 시각 · 끝난 시각이 토큰의 흔적 = 모니터링이 읽는 것</a:t>
+            </a:r>
+          </a:p>
+          <a:p>
+            <a:r>
+              <a:t>· BPMN 실행 설명의 표준 개념. HYD 화면엔 토큰이란 물체 대신 열린 단계와 기록. 언어 모델의 입력 토큰과 다른 개념</a:t>
+            </a:r>
+          </a:p>
+          <a:p>
+            <a:r>
+              <a:t>[다음] 승인 대기</a:t>
             </a:r>
           </a:p>
         </p:txBody>
@@ -2253,37 +2255,37 @@
           <a:lstStyle/>
           <a:p>
             <a:r>
-              <a:t>[짚을 곳] 두 칸의 맨 위 줄(status) 견주기 → 아래 줄들 → 왼쪽 칸 마지막 줄</a:t>
-            </a:r>
-          </a:p>
-          <a:p>
-            <a:r>
-              <a:t>· 둘 다 COMPLETED</a:t>
-            </a:r>
-          </a:p>
-          <a:p>
-            <a:r>
-              <a:t>· 승인된 처리 건: end_event E_end, 정상 보고, 설비 명령 1건</a:t>
-            </a:r>
-          </a:p>
-          <a:p>
-            <a:r>
-              <a:t>· 거절된 처리 건: E_rejected(거절 종결), 거절 보고(기록의 값은 반려), 설비 명령 없음, 냉각 명령 · 재관측 · 작업지시 등록은 CANCELLED</a:t>
-            </a:r>
-          </a:p>
-          <a:p>
-            <a:r>
-              <a:t>· COMPLETED = 실행이 끝났다는 뜻일 뿐, 업무 결과는 닿은 끝 이벤트와 결과 보고로</a:t>
-            </a:r>
-          </a:p>
-          <a:p>
-            <a:r>
-              <a:t>· 승인했는데 회복 미달이어도 끝 이벤트는 E_end — 결과 보고가 정상인지 미달인지로 구분</a:t>
-            </a:r>
-          </a:p>
-          <a:p>
-            <a:r>
-              <a:t>[다음] 오늘의 실습과 남길 결과</a:t>
+              <a:t>[짚을 곳] 왼쪽 기록 맨 위 status → 둘째 줄 current_activity_ids → 아래 단계 상태 다섯 줄</a:t>
+            </a:r>
+          </a:p>
+          <a:p>
+            <a:r>
+              <a:t>· 쿨러 사건과 같은 정의에서 열렸지만 운전원이 한동안 응답하지 않은 다른 처리 건</a:t>
+            </a:r>
+          </a:p>
+          <a:p>
+            <a:r>
+              <a:t>· RUNNING: 아직 안 끝남. 열린 단계 T_approve(운전원 승인) = 토큰의 자리</a:t>
+            </a:r>
+          </a:p>
+          <a:p>
+            <a:r>
+              <a:t>· 단계: 그림의 작업이 이 처리 건에서 실제로 실행되는 자리. T_agent DONE, T_approve IN_PROGRESS, 나머지 TODO</a:t>
+            </a:r>
+          </a:p>
+          <a:p>
+            <a:r>
+              <a:t>· 닿지 않은 단계도 처음부터 기록에 있다(열릴 때 미리 만든다) → 남은 일까지 보인다</a:t>
+            </a:r>
+          </a:p>
+          <a:p>
+            <a:r>
+              <a:t>· 승인 대기는 오류가 아니라 정상 실행 상태. 다만 담당자 부재 · 알림 실패로 길어졌는지는 따로</a:t>
+            </a:r>
+          </a:p>
+          <a:p>
+            <a:r>
+              <a:t>[다음] COMPLETED는 성공을 뜻하지 않는다</a:t>
             </a:r>
           </a:p>
         </p:txBody>
@@ -2353,32 +2355,232 @@
           <a:lstStyle/>
           <a:p>
             <a:r>
-              <a:t>[짚을 곳] 표 세 줄: 교시 → 실습 → 남길 결과, 강조한 4교시</a:t>
-            </a:r>
-          </a:p>
-          <a:p>
-            <a:r>
-              <a:t>· 2교시: bpmn.io에서 시작 → 요청 확인 → 승인 또는 반려 → 종료, 이어 쿨러 경보 → 원인 분석 · 조치 제안 → 운전원 승인 → 설비 명령 → 효과 확인 → 보고로 넓히고 역할별 레인에</a:t>
-            </a:r>
-          </a:p>
-          <a:p>
-            <a:r>
-              <a:t>· 3교시: 승인 · 거절 분기와 각 끝 경로, 거절 경로가 설비 명령으로 가지 않는지, 승인 작업을 취소하지 않는 지연 알림 타이머</a:t>
-            </a:r>
-          </a:p>
-          <a:p>
-            <a:r>
-              <a:t>· 4교시: 내 그림을 포털에 등록된 기준 흐름과 비교(여기서 기준 흐름 = 강사가 배포해 둔 수업 흐름 「냉각 긴급 대응」과 그 제공 매핑). 시작 이벤트 · 에이전트 · 운전원 승인 · 설비 명령 · 재관측의 연결을 찾아 내 작업마다 표시</a:t>
-            </a:r>
-          </a:p>
-          <a:p>
-            <a:r>
-              <a:t>· 진행은 실습마다 핸즈온 가이드를 따른다. 다음 회차에 등록된 흐름을 실행해 이 그림과 실제 처리 이력을 대조한다</a:t>
-            </a:r>
-          </a:p>
-          <a:p>
-            <a:r>
-              <a:t>[다음] 실습으로</a:t>
+              <a:t>[짚을 곳] 두 칸의 맨 위 줄(status) 견주기 → 아래 줄들 → 왼쪽 칸 마지막 줄</a:t>
+            </a:r>
+          </a:p>
+          <a:p>
+            <a:r>
+              <a:t>· 둘 다 COMPLETED</a:t>
+            </a:r>
+          </a:p>
+          <a:p>
+            <a:r>
+              <a:t>· 승인된 처리 건: end_event E_end, 정상 보고, 설비 명령 1건</a:t>
+            </a:r>
+          </a:p>
+          <a:p>
+            <a:r>
+              <a:t>· 거절된 처리 건: E_rejected(거절 종결), 거절 보고(기록의 값은 반려), 설비 명령 없음, 냉각 명령 · 재관측 · 작업지시 등록은 CANCELLED</a:t>
+            </a:r>
+          </a:p>
+          <a:p>
+            <a:r>
+              <a:t>· COMPLETED = 실행이 끝났다는 뜻일 뿐, 업무 결과는 닿은 끝 이벤트와 결과 보고로</a:t>
+            </a:r>
+          </a:p>
+          <a:p>
+            <a:r>
+              <a:t>· 승인했는데 회복 미달이어도 끝 이벤트는 E_end — 결과 보고가 정상인지 미달인지로 구분</a:t>
+            </a:r>
+          </a:p>
+          <a:p>
+            <a:r>
+              <a:t>[다음] 복습</a:t>
+            </a:r>
+          </a:p>
+        </p:txBody>
+      </p:sp>
+      <p:sp>
+        <p:nvSpPr>
+          <p:cNvPr id="4" name="Slide Number Placeholder 3"/>
+          <p:cNvSpPr>
+            <a:spLocks noGrp="1"/>
+          </p:cNvSpPr>
+          <p:nvPr>
+            <p:ph type="sldNum" idx="5" sz="quarter"/>
+          </p:nvPr>
+        </p:nvSpPr>
+        <p:spPr/>
+      </p:sp>
+    </p:spTree>
+  </p:cSld>
+  <p:clrMapOvr>
+    <a:masterClrMapping/>
+  </p:clrMapOvr>
+</p:notes>
+</file>
+
+<file path=ppt/notesSlides/notesSlide28.xml><?xml version="1.0" encoding="utf-8"?>
+<p:notes xmlns:a="http://schemas.openxmlformats.org/drawingml/2006/main" xmlns:p="http://schemas.openxmlformats.org/presentationml/2006/main" xmlns:r="http://schemas.openxmlformats.org/officeDocument/2006/relationships">
+  <p:cSld>
+    <p:spTree>
+      <p:nvGrpSpPr>
+        <p:cNvPr id="1" name=""/>
+        <p:cNvGrpSpPr/>
+        <p:nvPr/>
+      </p:nvGrpSpPr>
+      <p:grpSpPr>
+        <a:xfrm>
+          <a:off x="0" y="0"/>
+          <a:ext cx="0" cy="0"/>
+          <a:chOff x="0" y="0"/>
+          <a:chExt cx="0" cy="0"/>
+        </a:xfrm>
+      </p:grpSpPr>
+      <p:sp>
+        <p:nvSpPr>
+          <p:cNvPr id="2" name="Slide Image Placeholder 1"/>
+          <p:cNvSpPr>
+            <a:spLocks noGrp="1"/>
+          </p:cNvSpPr>
+          <p:nvPr>
+            <p:ph type="sldImg" idx="2"/>
+          </p:nvPr>
+        </p:nvSpPr>
+        <p:spPr/>
+      </p:sp>
+      <p:sp>
+        <p:nvSpPr>
+          <p:cNvPr id="3" name="Notes Placeholder 2"/>
+          <p:cNvSpPr>
+            <a:spLocks noGrp="1"/>
+          </p:cNvSpPr>
+          <p:nvPr>
+            <p:ph type="body" idx="3" sz="quarter"/>
+          </p:nvPr>
+        </p:nvSpPr>
+        <p:spPr/>
+        <p:txBody>
+          <a:bodyPr/>
+          <a:lstStyle/>
+          <a:p>
+            <a:r>
+              <a:t>[짚을 곳] 표 여섯 줄: 왼쪽 장면 → 가운데 프로세스의 말 → 오른쪽 헷갈리는 짝. 학생이 먼저 말해 보게 한다(약 20초)</a:t>
+            </a:r>
+          </a:p>
+          <a:p>
+            <a:r>
+              <a:t>· 경보 도착 · 처리 건 열림: 메시지 시작 이벤트, 프로세스라는 틀에서 처리 건 하나(틀 ↔ 건)</a:t>
+            </a:r>
+          </a:p>
+          <a:p>
+            <a:r>
+              <a:t>· 추천안 나옴 · 팬은 그대로: Task 하나 끝남, 처리 건은 진행 중</a:t>
+            </a:r>
+          </a:p>
+          <a:p>
+            <a:r>
+              <a:t>· 운전원 승인에서 기다림: 토큰이 사용자 작업에 머문 RUNNING(승인 대기 ↔ 오류)</a:t>
+            </a:r>
+          </a:p>
+          <a:p>
+            <a:r>
+              <a:t>· 승인 쪽으로 감: approval 변수를 읽는 조건(에이전트의 판단 ↔ 갈림의 조건)</a:t>
+            </a:r>
+          </a:p>
+          <a:p>
+            <a:r>
+              <a:t>· 기한 안에 승인: 비중단형 타이머가 함께 거둬짐, 늦었다면 알림 가지만(알림 ↔ 종료). 정상 보고로 끝남: E_end · COMPLETED(COMPLETED ↔ 성공 — 거절 건도 COMPLETED)</a:t>
+            </a:r>
+          </a:p>
+          <a:p>
+            <a:r>
+              <a:t>[다음] 오늘 다룬 핵심 개념과 주요 용어 정리</a:t>
+            </a:r>
+          </a:p>
+        </p:txBody>
+      </p:sp>
+      <p:sp>
+        <p:nvSpPr>
+          <p:cNvPr id="4" name="Slide Number Placeholder 3"/>
+          <p:cNvSpPr>
+            <a:spLocks noGrp="1"/>
+          </p:cNvSpPr>
+          <p:nvPr>
+            <p:ph type="sldNum" idx="5" sz="quarter"/>
+          </p:nvPr>
+        </p:nvSpPr>
+        <p:spPr/>
+      </p:sp>
+    </p:spTree>
+  </p:cSld>
+  <p:clrMapOvr>
+    <a:masterClrMapping/>
+  </p:clrMapOvr>
+</p:notes>
+</file>
+
+<file path=ppt/notesSlides/notesSlide29.xml><?xml version="1.0" encoding="utf-8"?>
+<p:notes xmlns:a="http://schemas.openxmlformats.org/drawingml/2006/main" xmlns:p="http://schemas.openxmlformats.org/presentationml/2006/main" xmlns:r="http://schemas.openxmlformats.org/officeDocument/2006/relationships">
+  <p:cSld>
+    <p:spTree>
+      <p:nvGrpSpPr>
+        <p:cNvPr id="1" name=""/>
+        <p:cNvGrpSpPr/>
+        <p:nvPr/>
+      </p:nvGrpSpPr>
+      <p:grpSpPr>
+        <a:xfrm>
+          <a:off x="0" y="0"/>
+          <a:ext cx="0" cy="0"/>
+          <a:chOff x="0" y="0"/>
+          <a:chExt cx="0" cy="0"/>
+        </a:xfrm>
+      </p:grpSpPr>
+      <p:sp>
+        <p:nvSpPr>
+          <p:cNvPr id="2" name="Slide Image Placeholder 1"/>
+          <p:cNvSpPr>
+            <a:spLocks noGrp="1"/>
+          </p:cNvSpPr>
+          <p:nvPr>
+            <p:ph type="sldImg" idx="2"/>
+          </p:nvPr>
+        </p:nvSpPr>
+        <p:spPr/>
+      </p:sp>
+      <p:sp>
+        <p:nvSpPr>
+          <p:cNvPr id="3" name="Notes Placeholder 2"/>
+          <p:cNvSpPr>
+            <a:spLocks noGrp="1"/>
+          </p:cNvSpPr>
+          <p:nvPr>
+            <p:ph type="body" idx="3" sz="quarter"/>
+          </p:nvPr>
+        </p:nvSpPr>
+        <p:spPr/>
+        <p:txBody>
+          <a:bodyPr/>
+          <a:lstStyle/>
+          <a:p>
+            <a:r>
+              <a:t>[짚을 곳] 표 여섯 줄 위에서부터</a:t>
+            </a:r>
+          </a:p>
+          <a:p>
+            <a:r>
+              <a:t>· 비즈니스 프로세스: 결과를 내기 위한 작업과 흐름의 묶음. BPMN: 도형과 선의 뜻을 정한 업무 프로세스 표기 표준</a:t>
+            </a:r>
+          </a:p>
+          <a:p>
+            <a:r>
+              <a:t>· 경계 이벤트(Boundary Event): 작업 테두리에 붙어 진행 중에 생기는 일에 반응</a:t>
+            </a:r>
+          </a:p>
+          <a:p>
+            <a:r>
+              <a:t>· 프로세스 엔진: 정의를 읽어 작업을 차례로 열고 결과를 넘기는 소프트웨어. 오케스트레이션: 중앙 조정자가 순서와 호출을 이끄는 방식</a:t>
+            </a:r>
+          </a:p>
+          <a:p>
+            <a:r>
+              <a:t>· 토큰: 실행 중인 프로세스의 지금 위치 표식</a:t>
+            </a:r>
+          </a:p>
+          <a:p>
+            <a:r>
+              <a:t>[다음] Review Quiz</a:t>
             </a:r>
           </a:p>
         </p:txBody>
@@ -2468,12 +2670,492 @@
           </a:p>
           <a:p>
             <a:r>
-              <a:t>· 04 엔진이 작업을 여는 법, 승인 대기와 거절 종결</a:t>
+              <a:t>· 04 엔진이 작업을 여는 법, 현재 위치를 나타내는 토큰, 승인 대기와 거절 종결</a:t>
             </a:r>
           </a:p>
           <a:p>
             <a:r>
               <a:t>[다음] 추천안 뒤의 업무와 BPMN</a:t>
+            </a:r>
+          </a:p>
+        </p:txBody>
+      </p:sp>
+      <p:sp>
+        <p:nvSpPr>
+          <p:cNvPr id="4" name="Slide Number Placeholder 3"/>
+          <p:cNvSpPr>
+            <a:spLocks noGrp="1"/>
+          </p:cNvSpPr>
+          <p:nvPr>
+            <p:ph type="sldNum" idx="5" sz="quarter"/>
+          </p:nvPr>
+        </p:nvSpPr>
+        <p:spPr/>
+      </p:sp>
+    </p:spTree>
+  </p:cSld>
+  <p:clrMapOvr>
+    <a:masterClrMapping/>
+  </p:clrMapOvr>
+</p:notes>
+</file>
+
+<file path=ppt/notesSlides/notesSlide30.xml><?xml version="1.0" encoding="utf-8"?>
+<p:notes xmlns:a="http://schemas.openxmlformats.org/drawingml/2006/main" xmlns:p="http://schemas.openxmlformats.org/presentationml/2006/main" xmlns:r="http://schemas.openxmlformats.org/officeDocument/2006/relationships">
+  <p:cSld>
+    <p:spTree>
+      <p:nvGrpSpPr>
+        <p:cNvPr id="1" name=""/>
+        <p:cNvGrpSpPr/>
+        <p:nvPr/>
+      </p:nvGrpSpPr>
+      <p:grpSpPr>
+        <a:xfrm>
+          <a:off x="0" y="0"/>
+          <a:ext cx="0" cy="0"/>
+          <a:chOff x="0" y="0"/>
+          <a:chExt cx="0" cy="0"/>
+        </a:xfrm>
+      </p:grpSpPr>
+      <p:sp>
+        <p:nvSpPr>
+          <p:cNvPr id="2" name="Slide Image Placeholder 1"/>
+          <p:cNvSpPr>
+            <a:spLocks noGrp="1"/>
+          </p:cNvSpPr>
+          <p:nvPr>
+            <p:ph type="sldImg" idx="2"/>
+          </p:nvPr>
+        </p:nvSpPr>
+        <p:spPr/>
+      </p:sp>
+      <p:sp>
+        <p:nvSpPr>
+          <p:cNvPr id="3" name="Notes Placeholder 2"/>
+          <p:cNvSpPr>
+            <a:spLocks noGrp="1"/>
+          </p:cNvSpPr>
+          <p:nvPr>
+            <p:ph type="body" idx="3" sz="quarter"/>
+          </p:nvPr>
+        </p:nvSpPr>
+        <p:spPr/>
+        <p:txBody>
+          <a:bodyPr/>
+          <a:lstStyle/>
+          <a:p>
+            <a:r>
+              <a:t>[짚을 곳] 간지 제목 → 부제</a:t>
+            </a:r>
+          </a:p>
+          <a:p>
+            <a:r>
+              <a:t>· 세 문제: 용어 암기보다 기록과 그림을 보고 무슨 일이 일어났는지 설명할 수 있는지</a:t>
+            </a:r>
+          </a:p>
+          <a:p>
+            <a:r>
+              <a:t>· 문제마다 고를 시간, 정답과 까닭은 세 문항 뒤에</a:t>
+            </a:r>
+          </a:p>
+          <a:p>
+            <a:r>
+              <a:t>[다음] Quiz 1. 승인 지연 알림이 나간 처리 건</a:t>
+            </a:r>
+          </a:p>
+        </p:txBody>
+      </p:sp>
+      <p:sp>
+        <p:nvSpPr>
+          <p:cNvPr id="4" name="Slide Number Placeholder 3"/>
+          <p:cNvSpPr>
+            <a:spLocks noGrp="1"/>
+          </p:cNvSpPr>
+          <p:nvPr>
+            <p:ph type="sldNum" idx="5" sz="quarter"/>
+          </p:nvPr>
+        </p:nvSpPr>
+        <p:spPr/>
+      </p:sp>
+    </p:spTree>
+  </p:cSld>
+  <p:clrMapOvr>
+    <a:masterClrMapping/>
+  </p:clrMapOvr>
+</p:notes>
+</file>
+
+<file path=ppt/notesSlides/notesSlide31.xml><?xml version="1.0" encoding="utf-8"?>
+<p:notes xmlns:a="http://schemas.openxmlformats.org/drawingml/2006/main" xmlns:p="http://schemas.openxmlformats.org/presentationml/2006/main" xmlns:r="http://schemas.openxmlformats.org/officeDocument/2006/relationships">
+  <p:cSld>
+    <p:spTree>
+      <p:nvGrpSpPr>
+        <p:cNvPr id="1" name=""/>
+        <p:cNvGrpSpPr/>
+        <p:nvPr/>
+      </p:nvGrpSpPr>
+      <p:grpSpPr>
+        <a:xfrm>
+          <a:off x="0" y="0"/>
+          <a:ext cx="0" cy="0"/>
+          <a:chOff x="0" y="0"/>
+          <a:chExt cx="0" cy="0"/>
+        </a:xfrm>
+      </p:grpSpPr>
+      <p:sp>
+        <p:nvSpPr>
+          <p:cNvPr id="2" name="Slide Image Placeholder 1"/>
+          <p:cNvSpPr>
+            <a:spLocks noGrp="1"/>
+          </p:cNvSpPr>
+          <p:nvPr>
+            <p:ph type="sldImg" idx="2"/>
+          </p:nvPr>
+        </p:nvSpPr>
+        <p:spPr/>
+      </p:sp>
+      <p:sp>
+        <p:nvSpPr>
+          <p:cNvPr id="3" name="Notes Placeholder 2"/>
+          <p:cNvSpPr>
+            <a:spLocks noGrp="1"/>
+          </p:cNvSpPr>
+          <p:nvPr>
+            <p:ph type="body" idx="3" sz="quarter"/>
+          </p:nvPr>
+        </p:nvSpPr>
+        <p:spPr/>
+        <p:txBody>
+          <a:bodyPr/>
+          <a:lstStyle/>
+          <a:p>
+            <a:r>
+              <a:t>[짚을 곳] 위 상황 → 물음 → 보기 넷</a:t>
+            </a:r>
+          </a:p>
+          <a:p>
+            <a:r>
+              <a:t>· 상황: 처리 건 RUNNING, 열린 단계는 운전원 승인, 승인 지연 알림은 이미 나갔다</a:t>
+            </a:r>
+          </a:p>
+          <a:p>
+            <a:r>
+              <a:t>· 물음: 이 처리 건에 대한 옳은 설명은?</a:t>
+            </a:r>
+          </a:p>
+          <a:p>
+            <a:r>
+              <a:t>· 생각할 거리: 승인 지연 타이머의 종류(중단형 · 비중단형)와 처리 건의 상태</a:t>
+            </a:r>
+          </a:p>
+          <a:p>
+            <a:r>
+              <a:t>· 약 20초</a:t>
+            </a:r>
+          </a:p>
+          <a:p>
+            <a:r>
+              <a:t>[다음] Quiz 2. 설비 명령이 나갔는지를 판단하는 근거</a:t>
+            </a:r>
+          </a:p>
+        </p:txBody>
+      </p:sp>
+      <p:sp>
+        <p:nvSpPr>
+          <p:cNvPr id="4" name="Slide Number Placeholder 3"/>
+          <p:cNvSpPr>
+            <a:spLocks noGrp="1"/>
+          </p:cNvSpPr>
+          <p:nvPr>
+            <p:ph type="sldNum" idx="5" sz="quarter"/>
+          </p:nvPr>
+        </p:nvSpPr>
+        <p:spPr/>
+      </p:sp>
+    </p:spTree>
+  </p:cSld>
+  <p:clrMapOvr>
+    <a:masterClrMapping/>
+  </p:clrMapOvr>
+</p:notes>
+</file>
+
+<file path=ppt/notesSlides/notesSlide32.xml><?xml version="1.0" encoding="utf-8"?>
+<p:notes xmlns:a="http://schemas.openxmlformats.org/drawingml/2006/main" xmlns:p="http://schemas.openxmlformats.org/presentationml/2006/main" xmlns:r="http://schemas.openxmlformats.org/officeDocument/2006/relationships">
+  <p:cSld>
+    <p:spTree>
+      <p:nvGrpSpPr>
+        <p:cNvPr id="1" name=""/>
+        <p:cNvGrpSpPr/>
+        <p:nvPr/>
+      </p:nvGrpSpPr>
+      <p:grpSpPr>
+        <a:xfrm>
+          <a:off x="0" y="0"/>
+          <a:ext cx="0" cy="0"/>
+          <a:chOff x="0" y="0"/>
+          <a:chExt cx="0" cy="0"/>
+        </a:xfrm>
+      </p:grpSpPr>
+      <p:sp>
+        <p:nvSpPr>
+          <p:cNvPr id="2" name="Slide Image Placeholder 1"/>
+          <p:cNvSpPr>
+            <a:spLocks noGrp="1"/>
+          </p:cNvSpPr>
+          <p:nvPr>
+            <p:ph type="sldImg" idx="2"/>
+          </p:nvPr>
+        </p:nvSpPr>
+        <p:spPr/>
+      </p:sp>
+      <p:sp>
+        <p:nvSpPr>
+          <p:cNvPr id="3" name="Notes Placeholder 2"/>
+          <p:cNvSpPr>
+            <a:spLocks noGrp="1"/>
+          </p:cNvSpPr>
+          <p:nvPr>
+            <p:ph type="body" idx="3" sz="quarter"/>
+          </p:nvPr>
+        </p:nvSpPr>
+        <p:spPr/>
+        <p:txBody>
+          <a:bodyPr/>
+          <a:lstStyle/>
+          <a:p>
+            <a:r>
+              <a:t>[짚을 곳] 위 상황 → 물음 → 보기 넷</a:t>
+            </a:r>
+          </a:p>
+          <a:p>
+            <a:r>
+              <a:t>· 상황: COMPLETED · E_rejected, 냉각 명령 단계는 선택되지 않아 CANCELLED</a:t>
+            </a:r>
+          </a:p>
+          <a:p>
+            <a:r>
+              <a:t>· 물음: 냉각 명령이 설비에 나갔는지 판단한 것으로 옳은 것은?</a:t>
+            </a:r>
+          </a:p>
+          <a:p>
+            <a:r>
+              <a:t>· 생각할 거리: 처리 건 상태 · 끝 이벤트 · 단계 상태가 각각 무엇을 알려 주나</a:t>
+            </a:r>
+          </a:p>
+          <a:p>
+            <a:r>
+              <a:t>· 약 20초</a:t>
+            </a:r>
+          </a:p>
+          <a:p>
+            <a:r>
+              <a:t>[다음] Quiz 3. 냉각 명령 작업을 여는 쪽</a:t>
+            </a:r>
+          </a:p>
+        </p:txBody>
+      </p:sp>
+      <p:sp>
+        <p:nvSpPr>
+          <p:cNvPr id="4" name="Slide Number Placeholder 3"/>
+          <p:cNvSpPr>
+            <a:spLocks noGrp="1"/>
+          </p:cNvSpPr>
+          <p:nvPr>
+            <p:ph type="sldNum" idx="5" sz="quarter"/>
+          </p:nvPr>
+        </p:nvSpPr>
+        <p:spPr/>
+      </p:sp>
+    </p:spTree>
+  </p:cSld>
+  <p:clrMapOvr>
+    <a:masterClrMapping/>
+  </p:clrMapOvr>
+</p:notes>
+</file>
+
+<file path=ppt/notesSlides/notesSlide33.xml><?xml version="1.0" encoding="utf-8"?>
+<p:notes xmlns:a="http://schemas.openxmlformats.org/drawingml/2006/main" xmlns:p="http://schemas.openxmlformats.org/presentationml/2006/main" xmlns:r="http://schemas.openxmlformats.org/officeDocument/2006/relationships">
+  <p:cSld>
+    <p:spTree>
+      <p:nvGrpSpPr>
+        <p:cNvPr id="1" name=""/>
+        <p:cNvGrpSpPr/>
+        <p:nvPr/>
+      </p:nvGrpSpPr>
+      <p:grpSpPr>
+        <a:xfrm>
+          <a:off x="0" y="0"/>
+          <a:ext cx="0" cy="0"/>
+          <a:chOff x="0" y="0"/>
+          <a:chExt cx="0" cy="0"/>
+        </a:xfrm>
+      </p:grpSpPr>
+      <p:sp>
+        <p:nvSpPr>
+          <p:cNvPr id="2" name="Slide Image Placeholder 1"/>
+          <p:cNvSpPr>
+            <a:spLocks noGrp="1"/>
+          </p:cNvSpPr>
+          <p:nvPr>
+            <p:ph type="sldImg" idx="2"/>
+          </p:nvPr>
+        </p:nvSpPr>
+        <p:spPr/>
+      </p:sp>
+      <p:sp>
+        <p:nvSpPr>
+          <p:cNvPr id="3" name="Notes Placeholder 2"/>
+          <p:cNvSpPr>
+            <a:spLocks noGrp="1"/>
+          </p:cNvSpPr>
+          <p:nvPr>
+            <p:ph type="body" idx="3" sz="quarter"/>
+          </p:nvPr>
+        </p:nvSpPr>
+        <p:spPr/>
+        <p:txBody>
+          <a:bodyPr/>
+          <a:lstStyle/>
+          <a:p>
+            <a:r>
+              <a:t>[짚을 곳] 위 상황 → 물음 → 보기 넷</a:t>
+            </a:r>
+          </a:p>
+          <a:p>
+            <a:r>
+              <a:t>· 상황: 에이전트가 팬 최대 운전 추천안을 제출, 처리 건은 운전원 승인에서 대기</a:t>
+            </a:r>
+          </a:p>
+          <a:p>
+            <a:r>
+              <a:t>· 물음: 유효한 승인과 실행 조건 검사를 거친 뒤 냉각 명령 작업을 여는 것은?</a:t>
+            </a:r>
+          </a:p>
+          <a:p>
+            <a:r>
+              <a:t>· 생각할 거리: 추천하는 쪽 · 결정하는 쪽 · 다음 작업을 여는 쪽 · 명령을 전하는 쪽</a:t>
+            </a:r>
+          </a:p>
+          <a:p>
+            <a:r>
+              <a:t>· 약 20초</a:t>
+            </a:r>
+          </a:p>
+          <a:p>
+            <a:r>
+              <a:t>[다음] 정답과 판단 기준</a:t>
+            </a:r>
+          </a:p>
+        </p:txBody>
+      </p:sp>
+      <p:sp>
+        <p:nvSpPr>
+          <p:cNvPr id="4" name="Slide Number Placeholder 3"/>
+          <p:cNvSpPr>
+            <a:spLocks noGrp="1"/>
+          </p:cNvSpPr>
+          <p:nvPr>
+            <p:ph type="sldNum" idx="5" sz="quarter"/>
+          </p:nvPr>
+        </p:nvSpPr>
+        <p:spPr/>
+      </p:sp>
+    </p:spTree>
+  </p:cSld>
+  <p:clrMapOvr>
+    <a:masterClrMapping/>
+  </p:clrMapOvr>
+</p:notes>
+</file>
+
+<file path=ppt/notesSlides/notesSlide34.xml><?xml version="1.0" encoding="utf-8"?>
+<p:notes xmlns:a="http://schemas.openxmlformats.org/drawingml/2006/main" xmlns:p="http://schemas.openxmlformats.org/presentationml/2006/main" xmlns:r="http://schemas.openxmlformats.org/officeDocument/2006/relationships">
+  <p:cSld>
+    <p:spTree>
+      <p:nvGrpSpPr>
+        <p:cNvPr id="1" name=""/>
+        <p:cNvGrpSpPr/>
+        <p:nvPr/>
+      </p:nvGrpSpPr>
+      <p:grpSpPr>
+        <a:xfrm>
+          <a:off x="0" y="0"/>
+          <a:ext cx="0" cy="0"/>
+          <a:chOff x="0" y="0"/>
+          <a:chExt cx="0" cy="0"/>
+        </a:xfrm>
+      </p:grpSpPr>
+      <p:sp>
+        <p:nvSpPr>
+          <p:cNvPr id="2" name="Slide Image Placeholder 1"/>
+          <p:cNvSpPr>
+            <a:spLocks noGrp="1"/>
+          </p:cNvSpPr>
+          <p:nvPr>
+            <p:ph type="sldImg" idx="2"/>
+          </p:nvPr>
+        </p:nvSpPr>
+        <p:spPr/>
+      </p:sp>
+      <p:sp>
+        <p:nvSpPr>
+          <p:cNvPr id="3" name="Notes Placeholder 2"/>
+          <p:cNvSpPr>
+            <a:spLocks noGrp="1"/>
+          </p:cNvSpPr>
+          <p:nvPr>
+            <p:ph type="body" idx="3" sz="quarter"/>
+          </p:nvPr>
+        </p:nvSpPr>
+        <p:spPr/>
+        <p:txBody>
+          <a:bodyPr/>
+          <a:lstStyle/>
+          <a:p>
+            <a:r>
+              <a:t>[짚을 곳] 표 세 줄 위에서부터, 판단 기준 → 정답</a:t>
+            </a:r>
+          </a:p>
+          <a:p>
+            <a:r>
+              <a:t>· Quiz 1 정답 3번: 비중단형 타이머라 알림 가지만 끝나고 승인 작업은 열린 채 기다린다. 1 · 4번은 알림 가지의 끝을 처리 건의 끝으로 혼동, 2번처럼 기한이 지났다고 자동 실행되지 않는다</a:t>
+            </a:r>
+          </a:p>
+          <a:p>
+            <a:r>
+              <a:t>· Quiz 2 정답 1번: COMPLETED는 실행이 끝났다는 뜻일 뿐, 끝 이벤트 E_rejected와 냉각 명령 CANCELLED로 명령이 안 나갔다고 읽는다. 2번 끝남=성공 혼동, 3번 추천과 실행 혼동, 4번 남은 기록을 안 읽음</a:t>
+            </a:r>
+          </a:p>
+          <a:p>
+            <a:r>
+              <a:t>· Quiz 3 정답 4번 프로세스 엔진: 에이전트는 추천까지, 운전원은 승인까지, SCADA는 열린 명령을 PLC에 전함. 작업이 열린 것 ≠ 명령 처리 성공. 3번은 결정하는 쪽과 여는 쪽 혼동</a:t>
+            </a:r>
+          </a:p>
+          <a:p>
+            <a:r>
+              <a:t>· 맺음: 추천이 승인 · 실행 · 확인을 거쳐 끝난 업무가 되기까지를 프로세스로 정의하고, 그리고, 실행 기록으로 읽었다</a:t>
+            </a:r>
+          </a:p>
+          <a:p>
+            <a:r>
+              <a:t>· 이어지는 실습: bpmn.io에서 시작 → 요청 확인 → 승인 또는 반려 → 종료를 그린 뒤 쿨러 경보 → 원인 분석 · 조치 제안 → 운전원 승인 → 설비 명령 → 효과 확인 → 보고로 넓혀 역할별 레인에 놓고, 승인 · 거절의 끝 경로와 승인 작업을 취소하지 않는 지연 알림 타이머를 더한다</a:t>
+            </a:r>
+          </a:p>
+          <a:p>
+            <a:r>
+              <a:t>· 내 그림을 포털에 등록된 기준 흐름(강사가 배포한 「냉각 긴급 대응」과 제공 매핑)과 견주어 작업마다 대응하는 실행 기능을 표시한다 — 진행은 핸즈온 가이드</a:t>
+            </a:r>
+          </a:p>
+          <a:p>
+            <a:r>
+              <a:t>· 다음 회차: 등록된 흐름을 실행해 이 그림과 실제 처리 이력을 대조한다</a:t>
+            </a:r>
+          </a:p>
+          <a:p>
+            <a:r>
+              <a:t>[다음] 실습으로</a:t>
             </a:r>
           </a:p>
         </p:txBody>
@@ -6956,7 +7638,7 @@
       </p:sp>
       <p:pic>
         <p:nvPicPr>
-          <p:cNvPr id="6" name="삽화:이벤트.svg" descr="illust_7810897315358511707_1793113376.png"/>
+          <p:cNvPr id="6" name="삽화:이벤트.svg" descr="illust_544076058878879135_1793113376.png"/>
           <p:cNvPicPr>
             <a:picLocks noChangeAspect="1"/>
           </p:cNvPicPr>
@@ -7446,7 +8128,7 @@
       </p:sp>
       <p:pic>
         <p:nvPicPr>
-          <p:cNvPr id="6" name="삽화:작업종류.svg" descr="illust_3001832825471497879_1793113376.png"/>
+          <p:cNvPr id="6" name="삽화:작업종류.svg" descr="illust_6092367623924379861_1793113376.png"/>
           <p:cNvPicPr>
             <a:picLocks noChangeAspect="1"/>
           </p:cNvPicPr>
@@ -7957,7 +8639,7 @@
       </p:sp>
       <p:pic>
         <p:nvPicPr>
-          <p:cNvPr id="6" name="삽화:게이트웨이.svg" descr="illust_3580267831801923855_1793113376.png"/>
+          <p:cNvPr id="6" name="삽화:게이트웨이.svg" descr="illust_1442749405823302275_1793113376.png"/>
           <p:cNvPicPr>
             <a:picLocks noChangeAspect="1"/>
           </p:cNvPicPr>
@@ -9724,7 +10406,7 @@
       </p:sp>
       <p:pic>
         <p:nvPicPr>
-          <p:cNvPr id="6" name="삽화:풀과레인.svg" descr="illust_409826837462134847_1793113376.png"/>
+          <p:cNvPr id="6" name="삽화:풀과레인.svg" descr="illust_1093054581801260302_1793113376.png"/>
           <p:cNvPicPr>
             <a:picLocks noChangeAspect="1"/>
           </p:cNvPicPr>
@@ -11548,7 +12230,7 @@
       </p:sp>
       <p:pic>
         <p:nvPicPr>
-          <p:cNvPr id="6" name="삽화:경계타이머.svg" descr="illust_7997373513348593169_1793113376.png"/>
+          <p:cNvPr id="6" name="삽화:경계타이머.svg" descr="illust_6370616562040097849_1793113376.png"/>
           <p:cNvPicPr>
             <a:picLocks noChangeAspect="1"/>
           </p:cNvPicPr>
@@ -12038,7 +12720,7 @@
       </p:sp>
       <p:pic>
         <p:nvPicPr>
-          <p:cNvPr id="6" name="삽화:승인자리.svg" descr="illust_3961081503499410224_1793113376.png"/>
+          <p:cNvPr id="6" name="삽화:승인자리.svg" descr="illust_5119605850778934621_1793113376.png"/>
           <p:cNvPicPr>
             <a:picLocks noChangeAspect="1"/>
           </p:cNvPicPr>
@@ -17383,7 +18065,7 @@
                 <a:ea typeface="맑은 고딕"/>
                 <a:cs typeface="맑은 고딕"/>
               </a:rPr>
-              <a:t>승인 대기: 토큰이 사용자 작업에 머문 상태</a:t>
+              <a:t>토큰: 프로세스의 현재 위치</a:t>
             </a:r>
           </a:p>
         </p:txBody>
@@ -17422,7 +18104,7 @@
                 <a:ea typeface="맑은 고딕"/>
                 <a:cs typeface="맑은 고딕"/>
               </a:rPr>
-              <a:t>승인 대기는 멈춤이나 오류가 아니라, 토큰이 사용자 작업에 머물러 사람의 결정을 기다리는 정상적인 실행 상태이다.</a:t>
+              <a:t>토큰은 프로세스의 현재 위치를 나타내는 표식으로, 시작 이벤트에서 생겨 끝 이벤트에서 사라진다.</a:t>
             </a:r>
           </a:p>
         </p:txBody>
@@ -17495,37 +18177,30 @@
           </a:p>
         </p:txBody>
       </p:sp>
-      <p:sp>
-        <p:nvSpPr>
-          <p:cNvPr id="6" name="Rounded Rectangle 5"/>
-          <p:cNvSpPr/>
-          <p:nvPr/>
-        </p:nvSpPr>
-        <p:spPr>
-          <a:xfrm>
-            <a:off x="548640" y="2328291"/>
-            <a:ext cx="6766560" cy="3326129"/>
-          </a:xfrm>
-          <a:prstGeom prst="roundRect">
-            <a:avLst>
-              <a:gd name="adj" fmla="val 3000"/>
-            </a:avLst>
-          </a:prstGeom>
-          <a:solidFill>
-            <a:srgbClr val="13294B"/>
-          </a:solidFill>
-          <a:ln>
-            <a:noFill/>
-          </a:ln>
-        </p:spPr>
-        <p:txBody>
-          <a:bodyPr rtlCol="0" anchor="ctr"/>
-          <a:lstStyle/>
-          <a:p>
-            <a:pPr algn="ctr"/>
-          </a:p>
-        </p:txBody>
-      </p:sp>
+      <p:pic>
+        <p:nvPicPr>
+          <p:cNvPr id="6" name="삽화:흐름_토큰_승인대기.svg" descr="illust_3422145033427414730_1793113376.png"/>
+          <p:cNvPicPr>
+            <a:picLocks noChangeAspect="1"/>
+          </p:cNvPicPr>
+          <p:nvPr/>
+        </p:nvPicPr>
+        <p:blipFill>
+          <a:blip r:embed="rId3"/>
+          <a:stretch>
+            <a:fillRect/>
+          </a:stretch>
+        </p:blipFill>
+        <p:spPr>
+          <a:xfrm>
+            <a:off x="641100" y="1627632"/>
+            <a:ext cx="10909495" cy="4727448"/>
+          </a:xfrm>
+          <a:prstGeom prst="rect">
+            <a:avLst/>
+          </a:prstGeom>
+        </p:spPr>
+      </p:pic>
       <p:sp>
         <p:nvSpPr>
           <p:cNvPr id="7" name="TextBox 6"/>
@@ -17534,8 +18209,8 @@
         </p:nvSpPr>
         <p:spPr>
           <a:xfrm>
-            <a:off x="731520" y="2465451"/>
-            <a:ext cx="6400800" cy="3051810"/>
+            <a:off x="6641322" y="1769455"/>
+            <a:ext cx="4363798" cy="507618"/>
           </a:xfrm>
           <a:prstGeom prst="rect">
             <a:avLst/>
@@ -17546,194 +18221,331 @@
           <a:bodyPr wrap="square" anchor="t"/>
           <a:lstStyle/>
           <a:p>
-            <a:pPr algn="l" eaLnBrk="0">
+            <a:pPr algn="ctr" eaLnBrk="0">
               <a:lnSpc>
                 <a:spcPct val="110000"/>
               </a:lnSpc>
               <a:spcAft>
-                <a:spcPts val="200"/>
+                <a:spcPts val="100"/>
               </a:spcAft>
             </a:pPr>
             <a:r>
-              <a:rPr sz="1300" b="0">
-                <a:solidFill>
-                  <a:srgbClr val="E8EEF6"/>
-                </a:solidFill>
-                <a:latin typeface="Consolas"/>
-                <a:ea typeface="맑은 고딕"/>
-                <a:cs typeface="맑은 고딕"/>
-              </a:rPr>
-              <a:t>"status": "RUNNING",</a:t>
-            </a:r>
-          </a:p>
-          <a:p>
-            <a:pPr algn="l" eaLnBrk="0">
+              <a:rPr sz="1350" b="1">
+                <a:solidFill>
+                  <a:srgbClr val="1A6FC4"/>
+                </a:solidFill>
+                <a:latin typeface="맑은 고딕"/>
+                <a:ea typeface="맑은 고딕"/>
+                <a:cs typeface="맑은 고딕"/>
+              </a:rPr>
+              <a:t>토큰</a:t>
+            </a:r>
+          </a:p>
+          <a:p>
+            <a:pPr algn="ctr" eaLnBrk="0">
               <a:lnSpc>
                 <a:spcPct val="110000"/>
               </a:lnSpc>
               <a:spcAft>
-                <a:spcPts val="200"/>
+                <a:spcPts val="100"/>
               </a:spcAft>
             </a:pPr>
             <a:r>
-              <a:rPr sz="1300" b="0">
-                <a:solidFill>
-                  <a:srgbClr val="E8EEF6"/>
-                </a:solidFill>
-                <a:latin typeface="Consolas"/>
-                <a:ea typeface="맑은 고딕"/>
-                <a:cs typeface="맑은 고딕"/>
-              </a:rPr>
-              <a:t>"current_activity_ids": ["T_approve"]</a:t>
-            </a:r>
-          </a:p>
-          <a:p>
-            <a:pPr algn="l" eaLnBrk="0">
+              <a:rPr sz="1100" b="0">
+                <a:solidFill>
+                  <a:srgbClr val="556175"/>
+                </a:solidFill>
+                <a:latin typeface="맑은 고딕"/>
+                <a:ea typeface="맑은 고딕"/>
+                <a:cs typeface="맑은 고딕"/>
+              </a:rPr>
+              <a:t>Token · 프로세스의 현재 위치</a:t>
+            </a:r>
+          </a:p>
+        </p:txBody>
+      </p:sp>
+      <p:sp>
+        <p:nvSpPr>
+          <p:cNvPr id="8" name="TextBox 7"/>
+          <p:cNvSpPr txBox="1"/>
+          <p:nvPr/>
+        </p:nvSpPr>
+        <p:spPr>
+          <a:xfrm>
+            <a:off x="3564844" y="2027101"/>
+            <a:ext cx="1200044" cy="337185"/>
+          </a:xfrm>
+          <a:prstGeom prst="rect">
+            <a:avLst/>
+          </a:prstGeom>
+          <a:noFill/>
+        </p:spPr>
+        <p:txBody>
+          <a:bodyPr wrap="square" anchor="t"/>
+          <a:lstStyle/>
+          <a:p>
+            <a:pPr algn="ctr" eaLnBrk="0">
               <a:lnSpc>
                 <a:spcPct val="110000"/>
               </a:lnSpc>
               <a:spcAft>
-                <a:spcPts val="200"/>
+                <a:spcPts val="100"/>
               </a:spcAft>
             </a:pPr>
-          </a:p>
-          <a:p>
-            <a:pPr algn="l" eaLnBrk="0">
+            <a:r>
+              <a:rPr sz="1350" b="1">
+                <a:solidFill>
+                  <a:srgbClr val="13294B"/>
+                </a:solidFill>
+                <a:latin typeface="맑은 고딕"/>
+                <a:ea typeface="맑은 고딕"/>
+                <a:cs typeface="맑은 고딕"/>
+              </a:rPr>
+              <a:t>운전원 승인</a:t>
+            </a:r>
+          </a:p>
+        </p:txBody>
+      </p:sp>
+      <p:sp>
+        <p:nvSpPr>
+          <p:cNvPr id="9" name="TextBox 8"/>
+          <p:cNvSpPr txBox="1"/>
+          <p:nvPr/>
+        </p:nvSpPr>
+        <p:spPr>
+          <a:xfrm>
+            <a:off x="2282979" y="2870950"/>
+            <a:ext cx="1352777" cy="546353"/>
+          </a:xfrm>
+          <a:prstGeom prst="rect">
+            <a:avLst/>
+          </a:prstGeom>
+          <a:noFill/>
+        </p:spPr>
+        <p:txBody>
+          <a:bodyPr wrap="square" anchor="t"/>
+          <a:lstStyle/>
+          <a:p>
+            <a:pPr algn="ctr" eaLnBrk="0">
               <a:lnSpc>
                 <a:spcPct val="110000"/>
               </a:lnSpc>
               <a:spcAft>
-                <a:spcPts val="200"/>
+                <a:spcPts val="100"/>
               </a:spcAft>
             </a:pPr>
             <a:r>
-              <a:rPr sz="1300" b="0">
-                <a:solidFill>
-                  <a:srgbClr val="E8EEF6"/>
-                </a:solidFill>
-                <a:latin typeface="Consolas"/>
-                <a:ea typeface="맑은 고딕"/>
-                <a:cs typeface="맑은 고딕"/>
-              </a:rPr>
-              <a:t>T_agent     DONE</a:t>
-            </a:r>
-          </a:p>
-          <a:p>
-            <a:pPr algn="l" eaLnBrk="0">
+              <a:rPr sz="1350" b="1">
+                <a:solidFill>
+                  <a:srgbClr val="13294B"/>
+                </a:solidFill>
+                <a:latin typeface="맑은 고딕"/>
+                <a:ea typeface="맑은 고딕"/>
+                <a:cs typeface="맑은 고딕"/>
+              </a:rPr>
+              <a:t>원인 진단 · 냉각 조치 제안</a:t>
+            </a:r>
+          </a:p>
+        </p:txBody>
+      </p:sp>
+      <p:sp>
+        <p:nvSpPr>
+          <p:cNvPr id="10" name="TextBox 9"/>
+          <p:cNvSpPr txBox="1"/>
+          <p:nvPr/>
+        </p:nvSpPr>
+        <p:spPr>
+          <a:xfrm>
+            <a:off x="1546588" y="3424062"/>
+            <a:ext cx="872759" cy="546353"/>
+          </a:xfrm>
+          <a:prstGeom prst="rect">
+            <a:avLst/>
+          </a:prstGeom>
+          <a:noFill/>
+        </p:spPr>
+        <p:txBody>
+          <a:bodyPr wrap="square" anchor="t"/>
+          <a:lstStyle/>
+          <a:p>
+            <a:pPr algn="ctr" eaLnBrk="0">
               <a:lnSpc>
                 <a:spcPct val="110000"/>
               </a:lnSpc>
               <a:spcAft>
-                <a:spcPts val="200"/>
+                <a:spcPts val="100"/>
               </a:spcAft>
             </a:pPr>
             <a:r>
-              <a:rPr sz="1300" b="0">
-                <a:solidFill>
-                  <a:srgbClr val="E8EEF6"/>
-                </a:solidFill>
-                <a:latin typeface="Consolas"/>
-                <a:ea typeface="맑은 고딕"/>
-                <a:cs typeface="맑은 고딕"/>
-              </a:rPr>
-              <a:t>T_approve   IN_PROGRESS</a:t>
-            </a:r>
-          </a:p>
-          <a:p>
-            <a:pPr algn="l" eaLnBrk="0">
+              <a:rPr sz="1350" b="1">
+                <a:solidFill>
+                  <a:srgbClr val="13294B"/>
+                </a:solidFill>
+                <a:latin typeface="맑은 고딕"/>
+                <a:ea typeface="맑은 고딕"/>
+                <a:cs typeface="맑은 고딕"/>
+              </a:rPr>
+              <a:t>시작 이벤트</a:t>
+            </a:r>
+          </a:p>
+        </p:txBody>
+      </p:sp>
+      <p:sp>
+        <p:nvSpPr>
+          <p:cNvPr id="11" name="TextBox 10"/>
+          <p:cNvSpPr txBox="1"/>
+          <p:nvPr/>
+        </p:nvSpPr>
+        <p:spPr>
+          <a:xfrm>
+            <a:off x="10350550" y="3376787"/>
+            <a:ext cx="981854" cy="337185"/>
+          </a:xfrm>
+          <a:prstGeom prst="rect">
+            <a:avLst/>
+          </a:prstGeom>
+          <a:noFill/>
+        </p:spPr>
+        <p:txBody>
+          <a:bodyPr wrap="square" anchor="t"/>
+          <a:lstStyle/>
+          <a:p>
+            <a:pPr algn="ctr" eaLnBrk="0">
               <a:lnSpc>
                 <a:spcPct val="110000"/>
               </a:lnSpc>
               <a:spcAft>
-                <a:spcPts val="200"/>
+                <a:spcPts val="100"/>
               </a:spcAft>
             </a:pPr>
             <a:r>
-              <a:rPr sz="1300" b="0">
-                <a:solidFill>
-                  <a:srgbClr val="E8EEF6"/>
-                </a:solidFill>
-                <a:latin typeface="Consolas"/>
-                <a:ea typeface="맑은 고딕"/>
-                <a:cs typeface="맑은 고딕"/>
-              </a:rPr>
-              <a:t>T_cmd       TODO</a:t>
-            </a:r>
-          </a:p>
-          <a:p>
-            <a:pPr algn="l" eaLnBrk="0">
+              <a:rPr sz="1350" b="1">
+                <a:solidFill>
+                  <a:srgbClr val="13294B"/>
+                </a:solidFill>
+                <a:latin typeface="맑은 고딕"/>
+                <a:ea typeface="맑은 고딕"/>
+                <a:cs typeface="맑은 고딕"/>
+              </a:rPr>
+              <a:t>끝 이벤트</a:t>
+            </a:r>
+          </a:p>
+        </p:txBody>
+      </p:sp>
+      <p:sp>
+        <p:nvSpPr>
+          <p:cNvPr id="12" name="TextBox 11"/>
+          <p:cNvSpPr txBox="1"/>
+          <p:nvPr/>
+        </p:nvSpPr>
+        <p:spPr>
+          <a:xfrm>
+            <a:off x="4666703" y="4199363"/>
+            <a:ext cx="1200044" cy="337185"/>
+          </a:xfrm>
+          <a:prstGeom prst="rect">
+            <a:avLst/>
+          </a:prstGeom>
+          <a:noFill/>
+        </p:spPr>
+        <p:txBody>
+          <a:bodyPr wrap="square" anchor="t"/>
+          <a:lstStyle/>
+          <a:p>
+            <a:pPr algn="ctr" eaLnBrk="0">
               <a:lnSpc>
                 <a:spcPct val="110000"/>
               </a:lnSpc>
               <a:spcAft>
-                <a:spcPts val="200"/>
+                <a:spcPts val="100"/>
               </a:spcAft>
             </a:pPr>
             <a:r>
-              <a:rPr sz="1300" b="0">
-                <a:solidFill>
-                  <a:srgbClr val="E8EEF6"/>
-                </a:solidFill>
-                <a:latin typeface="Consolas"/>
-                <a:ea typeface="맑은 고딕"/>
-                <a:cs typeface="맑은 고딕"/>
-              </a:rPr>
-              <a:t>T_reobs     TODO</a:t>
-            </a:r>
-          </a:p>
-          <a:p>
-            <a:pPr algn="l" eaLnBrk="0">
+              <a:rPr sz="1350" b="1">
+                <a:solidFill>
+                  <a:srgbClr val="13294B"/>
+                </a:solidFill>
+                <a:latin typeface="맑은 고딕"/>
+                <a:ea typeface="맑은 고딕"/>
+                <a:cs typeface="맑은 고딕"/>
+              </a:rPr>
+              <a:t>냉각 명령</a:t>
+            </a:r>
+          </a:p>
+        </p:txBody>
+      </p:sp>
+      <p:sp>
+        <p:nvSpPr>
+          <p:cNvPr id="13" name="TextBox 12"/>
+          <p:cNvSpPr txBox="1"/>
+          <p:nvPr/>
+        </p:nvSpPr>
+        <p:spPr>
+          <a:xfrm>
+            <a:off x="6194033" y="4199363"/>
+            <a:ext cx="1090949" cy="337185"/>
+          </a:xfrm>
+          <a:prstGeom prst="rect">
+            <a:avLst/>
+          </a:prstGeom>
+          <a:noFill/>
+        </p:spPr>
+        <p:txBody>
+          <a:bodyPr wrap="square" anchor="t"/>
+          <a:lstStyle/>
+          <a:p>
+            <a:pPr algn="ctr" eaLnBrk="0">
               <a:lnSpc>
                 <a:spcPct val="110000"/>
               </a:lnSpc>
               <a:spcAft>
-                <a:spcPts val="200"/>
+                <a:spcPts val="100"/>
               </a:spcAft>
             </a:pPr>
             <a:r>
-              <a:rPr sz="1300" b="0">
-                <a:solidFill>
-                  <a:srgbClr val="E8EEF6"/>
-                </a:solidFill>
-                <a:latin typeface="Consolas"/>
-                <a:ea typeface="맑은 고딕"/>
-                <a:cs typeface="맑은 고딕"/>
-              </a:rPr>
-              <a:t>T_wo        TODO</a:t>
-            </a:r>
-          </a:p>
-        </p:txBody>
-      </p:sp>
-      <p:sp>
-        <p:nvSpPr>
-          <p:cNvPr id="8" name="TextBox 7"/>
-          <p:cNvSpPr txBox="1"/>
-          <p:nvPr/>
-        </p:nvSpPr>
-        <p:spPr>
-          <a:xfrm>
-            <a:off x="7635240" y="2328291"/>
-            <a:ext cx="4007815" cy="1108710"/>
-          </a:xfrm>
-          <a:prstGeom prst="rect">
-            <a:avLst/>
-          </a:prstGeom>
-          <a:noFill/>
-        </p:spPr>
-        <p:txBody>
-          <a:bodyPr wrap="square" anchor="ctr"/>
-          <a:lstStyle/>
-          <a:p>
-            <a:pPr algn="l" eaLnBrk="0">
+              <a:rPr sz="1350" b="1">
+                <a:solidFill>
+                  <a:srgbClr val="13294B"/>
+                </a:solidFill>
+                <a:latin typeface="맑은 고딕"/>
+                <a:ea typeface="맑은 고딕"/>
+                <a:cs typeface="맑은 고딕"/>
+              </a:rPr>
+              <a:t>재관측</a:t>
+            </a:r>
+          </a:p>
+        </p:txBody>
+      </p:sp>
+      <p:sp>
+        <p:nvSpPr>
+          <p:cNvPr id="14" name="TextBox 13"/>
+          <p:cNvSpPr txBox="1"/>
+          <p:nvPr/>
+        </p:nvSpPr>
+        <p:spPr>
+          <a:xfrm>
+            <a:off x="8397751" y="4081177"/>
+            <a:ext cx="981854" cy="546353"/>
+          </a:xfrm>
+          <a:prstGeom prst="rect">
+            <a:avLst/>
+          </a:prstGeom>
+          <a:noFill/>
+        </p:spPr>
+        <p:txBody>
+          <a:bodyPr wrap="square" anchor="t"/>
+          <a:lstStyle/>
+          <a:p>
+            <a:pPr algn="ctr" eaLnBrk="0">
               <a:lnSpc>
                 <a:spcPct val="110000"/>
               </a:lnSpc>
               <a:spcAft>
-                <a:spcPts val="400"/>
+                <a:spcPts val="100"/>
               </a:spcAft>
             </a:pPr>
             <a:r>
-              <a:rPr sz="1700" b="1">
+              <a:rPr sz="1350" b="1">
                 <a:solidFill>
                   <a:srgbClr val="13294B"/>
                 </a:solidFill>
@@ -17741,83 +18553,125 @@
                 <a:ea typeface="맑은 고딕"/>
                 <a:cs typeface="맑은 고딕"/>
               </a:rPr>
-              <a:t>처리 건의 상태</a:t>
-            </a:r>
-          </a:p>
-          <a:p>
-            <a:pPr algn="l" eaLnBrk="0">
+              <a:t>작업지시 등록</a:t>
+            </a:r>
+          </a:p>
+        </p:txBody>
+      </p:sp>
+      <p:sp>
+        <p:nvSpPr>
+          <p:cNvPr id="15" name="TextBox 14"/>
+          <p:cNvSpPr txBox="1"/>
+          <p:nvPr/>
+        </p:nvSpPr>
+        <p:spPr>
+          <a:xfrm>
+            <a:off x="9717799" y="4081177"/>
+            <a:ext cx="1090949" cy="546353"/>
+          </a:xfrm>
+          <a:prstGeom prst="rect">
+            <a:avLst/>
+          </a:prstGeom>
+          <a:noFill/>
+        </p:spPr>
+        <p:txBody>
+          <a:bodyPr wrap="square" anchor="t"/>
+          <a:lstStyle/>
+          <a:p>
+            <a:pPr algn="ctr" eaLnBrk="0">
               <a:lnSpc>
                 <a:spcPct val="110000"/>
               </a:lnSpc>
               <a:spcAft>
-                <a:spcPts val="400"/>
+                <a:spcPts val="100"/>
               </a:spcAft>
             </a:pPr>
             <a:r>
-              <a:rPr sz="1400" b="0">
-                <a:solidFill>
-                  <a:srgbClr val="1F2A3A"/>
-                </a:solidFill>
-                <a:latin typeface="맑은 고딕"/>
-                <a:ea typeface="맑은 고딕"/>
-                <a:cs typeface="맑은 고딕"/>
-              </a:rPr>
-              <a:t>끝나지 않았으므로</a:t>
-            </a:r>
-          </a:p>
-          <a:p>
-            <a:pPr algn="l" eaLnBrk="0">
+              <a:rPr sz="1350" b="1">
+                <a:solidFill>
+                  <a:srgbClr val="13294B"/>
+                </a:solidFill>
+                <a:latin typeface="맑은 고딕"/>
+                <a:ea typeface="맑은 고딕"/>
+                <a:cs typeface="맑은 고딕"/>
+              </a:rPr>
+              <a:t>결과 보고: 정상</a:t>
+            </a:r>
+          </a:p>
+        </p:txBody>
+      </p:sp>
+      <p:sp>
+        <p:nvSpPr>
+          <p:cNvPr id="16" name="TextBox 15"/>
+          <p:cNvSpPr txBox="1"/>
+          <p:nvPr/>
+        </p:nvSpPr>
+        <p:spPr>
+          <a:xfrm>
+            <a:off x="7284982" y="4941573"/>
+            <a:ext cx="1090949" cy="546353"/>
+          </a:xfrm>
+          <a:prstGeom prst="rect">
+            <a:avLst/>
+          </a:prstGeom>
+          <a:noFill/>
+        </p:spPr>
+        <p:txBody>
+          <a:bodyPr wrap="square" anchor="t"/>
+          <a:lstStyle/>
+          <a:p>
+            <a:pPr algn="ctr" eaLnBrk="0">
               <a:lnSpc>
                 <a:spcPct val="110000"/>
               </a:lnSpc>
               <a:spcAft>
-                <a:spcPts val="400"/>
+                <a:spcPts val="100"/>
               </a:spcAft>
             </a:pPr>
             <a:r>
-              <a:rPr sz="1400" b="0">
-                <a:solidFill>
-                  <a:srgbClr val="1F2A3A"/>
-                </a:solidFill>
-                <a:latin typeface="맑은 고딕"/>
-                <a:ea typeface="맑은 고딕"/>
-                <a:cs typeface="맑은 고딕"/>
-              </a:rPr>
-              <a:t>RUNNING이다.</a:t>
-            </a:r>
-          </a:p>
-        </p:txBody>
-      </p:sp>
-      <p:sp>
-        <p:nvSpPr>
-          <p:cNvPr id="9" name="TextBox 8"/>
-          <p:cNvSpPr txBox="1"/>
-          <p:nvPr/>
-        </p:nvSpPr>
-        <p:spPr>
-          <a:xfrm>
-            <a:off x="7635240" y="3437001"/>
-            <a:ext cx="4007815" cy="1108710"/>
-          </a:xfrm>
-          <a:prstGeom prst="rect">
-            <a:avLst/>
-          </a:prstGeom>
-          <a:noFill/>
-        </p:spPr>
-        <p:txBody>
-          <a:bodyPr wrap="square" anchor="ctr"/>
-          <a:lstStyle/>
-          <a:p>
-            <a:pPr algn="l" eaLnBrk="0">
+              <a:rPr sz="1350" b="1">
+                <a:solidFill>
+                  <a:srgbClr val="13294B"/>
+                </a:solidFill>
+                <a:latin typeface="맑은 고딕"/>
+                <a:ea typeface="맑은 고딕"/>
+                <a:cs typeface="맑은 고딕"/>
+              </a:rPr>
+              <a:t>결과 보고: 미달</a:t>
+            </a:r>
+          </a:p>
+        </p:txBody>
+      </p:sp>
+      <p:sp>
+        <p:nvSpPr>
+          <p:cNvPr id="17" name="TextBox 16"/>
+          <p:cNvSpPr txBox="1"/>
+          <p:nvPr/>
+        </p:nvSpPr>
+        <p:spPr>
+          <a:xfrm>
+            <a:off x="5474006" y="4941573"/>
+            <a:ext cx="1090949" cy="546353"/>
+          </a:xfrm>
+          <a:prstGeom prst="rect">
+            <a:avLst/>
+          </a:prstGeom>
+          <a:noFill/>
+        </p:spPr>
+        <p:txBody>
+          <a:bodyPr wrap="square" anchor="t"/>
+          <a:lstStyle/>
+          <a:p>
+            <a:pPr algn="ctr" eaLnBrk="0">
               <a:lnSpc>
                 <a:spcPct val="110000"/>
               </a:lnSpc>
               <a:spcAft>
-                <a:spcPts val="400"/>
+                <a:spcPts val="100"/>
               </a:spcAft>
             </a:pPr>
             <a:r>
-              <a:rPr sz="1700" b="1">
+              <a:rPr sz="1350" b="1">
                 <a:solidFill>
                   <a:srgbClr val="13294B"/>
                 </a:solidFill>
@@ -17825,83 +18679,41 @@
                 <a:ea typeface="맑은 고딕"/>
                 <a:cs typeface="맑은 고딕"/>
               </a:rPr>
-              <a:t>열려 있는 단계</a:t>
-            </a:r>
-          </a:p>
-          <a:p>
-            <a:pPr algn="l" eaLnBrk="0">
+              <a:t>결과 보고: 거절</a:t>
+            </a:r>
+          </a:p>
+        </p:txBody>
+      </p:sp>
+      <p:sp>
+        <p:nvSpPr>
+          <p:cNvPr id="18" name="TextBox 17"/>
+          <p:cNvSpPr txBox="1"/>
+          <p:nvPr/>
+        </p:nvSpPr>
+        <p:spPr>
+          <a:xfrm>
+            <a:off x="3968496" y="4941573"/>
+            <a:ext cx="981854" cy="546353"/>
+          </a:xfrm>
+          <a:prstGeom prst="rect">
+            <a:avLst/>
+          </a:prstGeom>
+          <a:noFill/>
+        </p:spPr>
+        <p:txBody>
+          <a:bodyPr wrap="square" anchor="t"/>
+          <a:lstStyle/>
+          <a:p>
+            <a:pPr algn="ctr" eaLnBrk="0">
               <a:lnSpc>
                 <a:spcPct val="110000"/>
               </a:lnSpc>
               <a:spcAft>
-                <a:spcPts val="400"/>
+                <a:spcPts val="100"/>
               </a:spcAft>
             </a:pPr>
             <a:r>
-              <a:rPr sz="1400" b="0">
-                <a:solidFill>
-                  <a:srgbClr val="1F2A3A"/>
-                </a:solidFill>
-                <a:latin typeface="맑은 고딕"/>
-                <a:ea typeface="맑은 고딕"/>
-                <a:cs typeface="맑은 고딕"/>
-              </a:rPr>
-              <a:t>토큰이 있는 곳이</a:t>
-            </a:r>
-          </a:p>
-          <a:p>
-            <a:pPr algn="l" eaLnBrk="0">
-              <a:lnSpc>
-                <a:spcPct val="110000"/>
-              </a:lnSpc>
-              <a:spcAft>
-                <a:spcPts val="400"/>
-              </a:spcAft>
-            </a:pPr>
-            <a:r>
-              <a:rPr sz="1400" b="0">
-                <a:solidFill>
-                  <a:srgbClr val="1F2A3A"/>
-                </a:solidFill>
-                <a:latin typeface="맑은 고딕"/>
-                <a:ea typeface="맑은 고딕"/>
-                <a:cs typeface="맑은 고딕"/>
-              </a:rPr>
-              <a:t>T_approve, 운전원 승인이다.</a:t>
-            </a:r>
-          </a:p>
-        </p:txBody>
-      </p:sp>
-      <p:sp>
-        <p:nvSpPr>
-          <p:cNvPr id="10" name="TextBox 9"/>
-          <p:cNvSpPr txBox="1"/>
-          <p:nvPr/>
-        </p:nvSpPr>
-        <p:spPr>
-          <a:xfrm>
-            <a:off x="7635240" y="4545711"/>
-            <a:ext cx="4007815" cy="1108710"/>
-          </a:xfrm>
-          <a:prstGeom prst="rect">
-            <a:avLst/>
-          </a:prstGeom>
-          <a:noFill/>
-        </p:spPr>
-        <p:txBody>
-          <a:bodyPr wrap="square" anchor="ctr"/>
-          <a:lstStyle/>
-          <a:p>
-            <a:pPr algn="l" eaLnBrk="0">
-              <a:lnSpc>
-                <a:spcPct val="110000"/>
-              </a:lnSpc>
-              <a:spcAft>
-                <a:spcPts val="400"/>
-              </a:spcAft>
-            </a:pPr>
-            <a:r>
-              <a:rPr sz="1700" b="1">
+              <a:rPr sz="1350" b="1">
                 <a:solidFill>
                   <a:srgbClr val="13294B"/>
                 </a:solidFill>
@@ -17909,49 +18721,7 @@
                 <a:ea typeface="맑은 고딕"/>
                 <a:cs typeface="맑은 고딕"/>
               </a:rPr>
-              <a:t>단계</a:t>
-            </a:r>
-          </a:p>
-          <a:p>
-            <a:pPr algn="l" eaLnBrk="0">
-              <a:lnSpc>
-                <a:spcPct val="110000"/>
-              </a:lnSpc>
-              <a:spcAft>
-                <a:spcPts val="400"/>
-              </a:spcAft>
-            </a:pPr>
-            <a:r>
-              <a:rPr sz="1400" b="0">
-                <a:solidFill>
-                  <a:srgbClr val="1F2A3A"/>
-                </a:solidFill>
-                <a:latin typeface="맑은 고딕"/>
-                <a:ea typeface="맑은 고딕"/>
-                <a:cs typeface="맑은 고딕"/>
-              </a:rPr>
-              <a:t>그림의 작업 하나가</a:t>
-            </a:r>
-          </a:p>
-          <a:p>
-            <a:pPr algn="l" eaLnBrk="0">
-              <a:lnSpc>
-                <a:spcPct val="110000"/>
-              </a:lnSpc>
-              <a:spcAft>
-                <a:spcPts val="400"/>
-              </a:spcAft>
-            </a:pPr>
-            <a:r>
-              <a:rPr sz="1400" b="0">
-                <a:solidFill>
-                  <a:srgbClr val="1F2A3A"/>
-                </a:solidFill>
-                <a:latin typeface="맑은 고딕"/>
-                <a:ea typeface="맑은 고딕"/>
-                <a:cs typeface="맑은 고딕"/>
-              </a:rPr>
-              <a:t>처리 건마다 단계 하나가 된다.</a:t>
+              <a:t>승인 지연 알림</a:t>
             </a:r>
           </a:p>
         </p:txBody>
@@ -18016,7 +18786,7 @@
                 <a:ea typeface="맑은 고딕"/>
                 <a:cs typeface="맑은 고딕"/>
               </a:rPr>
-              <a:t>COMPLETED는 성공을 뜻하지 않는다</a:t>
+              <a:t>승인 대기: 토큰이 사용자 작업에 머문 상태</a:t>
             </a:r>
           </a:p>
         </p:txBody>
@@ -18055,7 +18825,7 @@
                 <a:ea typeface="맑은 고딕"/>
                 <a:cs typeface="맑은 고딕"/>
               </a:rPr>
-              <a:t>거절로 닫힌 처리 건도 상태는 COMPLETED이므로, 업무의 결과는 닿은 끝 이벤트와 결과 보고의 내용으로 판단한다.</a:t>
+              <a:t>승인 대기는 멈춤이나 오류가 아니라, 토큰이 사용자 작업에 머물러 사람의 결정을 기다리는 정상적인 실행 상태이다.</a:t>
             </a:r>
           </a:p>
         </p:txBody>
@@ -18136,651 +18906,13 @@
         </p:nvSpPr>
         <p:spPr>
           <a:xfrm>
-            <a:off x="548640" y="2105406"/>
-            <a:ext cx="5181447" cy="3771900"/>
+            <a:off x="548640" y="2328291"/>
+            <a:ext cx="6766560" cy="3326129"/>
           </a:xfrm>
           <a:prstGeom prst="roundRect">
             <a:avLst>
-              <a:gd name="adj" fmla="val 4000"/>
+              <a:gd name="adj" fmla="val 3000"/>
             </a:avLst>
-          </a:prstGeom>
-          <a:solidFill>
-            <a:srgbClr val="F3F6F9"/>
-          </a:solidFill>
-          <a:ln>
-            <a:noFill/>
-          </a:ln>
-        </p:spPr>
-        <p:txBody>
-          <a:bodyPr rtlCol="0" anchor="ctr"/>
-          <a:lstStyle/>
-          <a:p>
-            <a:pPr algn="ctr"/>
-          </a:p>
-        </p:txBody>
-      </p:sp>
-      <p:sp>
-        <p:nvSpPr>
-          <p:cNvPr id="7" name="Oval 6"/>
-          <p:cNvSpPr/>
-          <p:nvPr/>
-        </p:nvSpPr>
-        <p:spPr>
-          <a:xfrm>
-            <a:off x="822959" y="2306574"/>
-            <a:ext cx="731520" cy="731520"/>
-          </a:xfrm>
-          <a:prstGeom prst="ellipse">
-            <a:avLst/>
-          </a:prstGeom>
-          <a:solidFill>
-            <a:srgbClr val="FFFFFF"/>
-          </a:solidFill>
-          <a:ln>
-            <a:noFill/>
-          </a:ln>
-        </p:spPr>
-        <p:txBody>
-          <a:bodyPr rtlCol="0" anchor="ctr"/>
-          <a:lstStyle/>
-          <a:p>
-            <a:pPr algn="ctr"/>
-          </a:p>
-        </p:txBody>
-      </p:sp>
-      <p:pic>
-        <p:nvPicPr>
-          <p:cNvPr id="8" name="아이콘:circle-check" descr="circle-check_13294B_1.6.png"/>
-          <p:cNvPicPr>
-            <a:picLocks noChangeAspect="1"/>
-          </p:cNvPicPr>
-          <p:nvPr/>
-        </p:nvPicPr>
-        <p:blipFill>
-          <a:blip r:embed="rId3"/>
-          <a:stretch>
-            <a:fillRect/>
-          </a:stretch>
-        </p:blipFill>
-        <p:spPr>
-          <a:xfrm>
-            <a:off x="976579" y="2460193"/>
-            <a:ext cx="424281" cy="424281"/>
-          </a:xfrm>
-          <a:prstGeom prst="rect">
-            <a:avLst/>
-          </a:prstGeom>
-        </p:spPr>
-      </p:pic>
-      <p:sp>
-        <p:nvSpPr>
-          <p:cNvPr id="9" name="TextBox 8"/>
-          <p:cNvSpPr txBox="1"/>
-          <p:nvPr/>
-        </p:nvSpPr>
-        <p:spPr>
-          <a:xfrm>
-            <a:off x="1691640" y="2306574"/>
-            <a:ext cx="3855567" cy="731520"/>
-          </a:xfrm>
-          <a:prstGeom prst="rect">
-            <a:avLst/>
-          </a:prstGeom>
-          <a:noFill/>
-        </p:spPr>
-        <p:txBody>
-          <a:bodyPr wrap="square" anchor="ctr"/>
-          <a:lstStyle/>
-          <a:p>
-            <a:pPr algn="l" eaLnBrk="0">
-              <a:lnSpc>
-                <a:spcPct val="110000"/>
-              </a:lnSpc>
-            </a:pPr>
-            <a:r>
-              <a:rPr sz="2000" b="1">
-                <a:solidFill>
-                  <a:srgbClr val="13294B"/>
-                </a:solidFill>
-                <a:latin typeface="맑은 고딕"/>
-                <a:ea typeface="맑은 고딕"/>
-                <a:cs typeface="맑은 고딕"/>
-              </a:rPr>
-              <a:t>승인된 처리 건</a:t>
-            </a:r>
-          </a:p>
-        </p:txBody>
-      </p:sp>
-      <p:sp>
-        <p:nvSpPr>
-          <p:cNvPr id="10" name="TextBox 9"/>
-          <p:cNvSpPr txBox="1"/>
-          <p:nvPr/>
-        </p:nvSpPr>
-        <p:spPr>
-          <a:xfrm>
-            <a:off x="822959" y="3156966"/>
-            <a:ext cx="4632807" cy="2171700"/>
-          </a:xfrm>
-          <a:prstGeom prst="rect">
-            <a:avLst/>
-          </a:prstGeom>
-          <a:noFill/>
-        </p:spPr>
-        <p:txBody>
-          <a:bodyPr wrap="square" anchor="t"/>
-          <a:lstStyle/>
-          <a:p>
-            <a:pPr algn="l" eaLnBrk="0" marL="171450" indent="-171450">
-              <a:lnSpc>
-                <a:spcPct val="110000"/>
-              </a:lnSpc>
-              <a:spcAft>
-                <a:spcPts val="600"/>
-              </a:spcAft>
-            </a:pPr>
-            <a:r>
-              <a:rPr sz="1500" b="0">
-                <a:solidFill>
-                  <a:srgbClr val="1F2A3A"/>
-                </a:solidFill>
-                <a:latin typeface="맑은 고딕"/>
-                <a:ea typeface="맑은 고딕"/>
-                <a:cs typeface="맑은 고딕"/>
-              </a:rPr>
-              <a:t>• status: COMPLETED</a:t>
-            </a:r>
-          </a:p>
-          <a:p>
-            <a:pPr algn="l" eaLnBrk="0" marL="171450" indent="-171450">
-              <a:lnSpc>
-                <a:spcPct val="110000"/>
-              </a:lnSpc>
-              <a:spcAft>
-                <a:spcPts val="600"/>
-              </a:spcAft>
-            </a:pPr>
-            <a:r>
-              <a:rPr sz="1500" b="0">
-                <a:solidFill>
-                  <a:srgbClr val="1F2A3A"/>
-                </a:solidFill>
-                <a:latin typeface="맑은 고딕"/>
-                <a:ea typeface="맑은 고딕"/>
-                <a:cs typeface="맑은 고딕"/>
-              </a:rPr>
-              <a:t>• end_event: E_end</a:t>
-            </a:r>
-          </a:p>
-          <a:p>
-            <a:pPr algn="l" eaLnBrk="0" marL="171450" indent="-171450">
-              <a:lnSpc>
-                <a:spcPct val="110000"/>
-              </a:lnSpc>
-              <a:spcAft>
-                <a:spcPts val="600"/>
-              </a:spcAft>
-            </a:pPr>
-            <a:r>
-              <a:rPr sz="1500" b="0">
-                <a:solidFill>
-                  <a:srgbClr val="1F2A3A"/>
-                </a:solidFill>
-                <a:latin typeface="맑은 고딕"/>
-                <a:ea typeface="맑은 고딕"/>
-                <a:cs typeface="맑은 고딕"/>
-              </a:rPr>
-              <a:t>• 결과 보고: 정상</a:t>
-            </a:r>
-          </a:p>
-          <a:p>
-            <a:pPr algn="l" eaLnBrk="0" marL="171450" indent="-171450">
-              <a:lnSpc>
-                <a:spcPct val="110000"/>
-              </a:lnSpc>
-              <a:spcAft>
-                <a:spcPts val="600"/>
-              </a:spcAft>
-            </a:pPr>
-            <a:r>
-              <a:rPr sz="1500" b="0">
-                <a:solidFill>
-                  <a:srgbClr val="1F2A3A"/>
-                </a:solidFill>
-                <a:latin typeface="맑은 고딕"/>
-                <a:ea typeface="맑은 고딕"/>
-                <a:cs typeface="맑은 고딕"/>
-              </a:rPr>
-              <a:t>• 설비 명령: 1건</a:t>
-            </a:r>
-          </a:p>
-          <a:p>
-            <a:pPr algn="l" eaLnBrk="0" marL="171450" indent="-171450">
-              <a:lnSpc>
-                <a:spcPct val="110000"/>
-              </a:lnSpc>
-              <a:spcAft>
-                <a:spcPts val="600"/>
-              </a:spcAft>
-            </a:pPr>
-            <a:r>
-              <a:rPr sz="1500" b="0">
-                <a:solidFill>
-                  <a:srgbClr val="1F2A3A"/>
-                </a:solidFill>
-                <a:latin typeface="맑은 고딕"/>
-                <a:ea typeface="맑은 고딕"/>
-                <a:cs typeface="맑은 고딕"/>
-              </a:rPr>
-              <a:t>• 회복에 미달해도 end_event는 E_end이고 결과 보고가 미달이 된다</a:t>
-            </a:r>
-          </a:p>
-        </p:txBody>
-      </p:sp>
-      <p:sp>
-        <p:nvSpPr>
-          <p:cNvPr id="11" name="Rounded Rectangle 10"/>
-          <p:cNvSpPr/>
-          <p:nvPr/>
-        </p:nvSpPr>
-        <p:spPr>
-          <a:xfrm>
-            <a:off x="868680" y="5420106"/>
-            <a:ext cx="822960" cy="292608"/>
-          </a:xfrm>
-          <a:prstGeom prst="roundRect">
-            <a:avLst>
-              <a:gd name="adj" fmla="val 50000"/>
-            </a:avLst>
-          </a:prstGeom>
-          <a:solidFill>
-            <a:srgbClr val="D3D9E1"/>
-          </a:solidFill>
-          <a:ln>
-            <a:noFill/>
-          </a:ln>
-        </p:spPr>
-        <p:txBody>
-          <a:bodyPr rtlCol="0" anchor="ctr"/>
-          <a:lstStyle/>
-          <a:p>
-            <a:pPr algn="ctr"/>
-          </a:p>
-        </p:txBody>
-      </p:sp>
-      <p:sp>
-        <p:nvSpPr>
-          <p:cNvPr id="12" name="TextBox 11"/>
-          <p:cNvSpPr txBox="1"/>
-          <p:nvPr/>
-        </p:nvSpPr>
-        <p:spPr>
-          <a:xfrm>
-            <a:off x="868680" y="5420106"/>
-            <a:ext cx="822960" cy="292608"/>
-          </a:xfrm>
-          <a:prstGeom prst="rect">
-            <a:avLst/>
-          </a:prstGeom>
-          <a:noFill/>
-        </p:spPr>
-        <p:txBody>
-          <a:bodyPr wrap="square" anchor="ctr"/>
-          <a:lstStyle/>
-          <a:p>
-            <a:pPr algn="ctr" eaLnBrk="0">
-              <a:lnSpc>
-                <a:spcPct val="110000"/>
-              </a:lnSpc>
-            </a:pPr>
-            <a:r>
-              <a:rPr sz="1200" b="1">
-                <a:solidFill>
-                  <a:srgbClr val="13294B"/>
-                </a:solidFill>
-                <a:latin typeface="맑은 고딕"/>
-                <a:ea typeface="맑은 고딕"/>
-                <a:cs typeface="맑은 고딕"/>
-              </a:rPr>
-              <a:t>끝</a:t>
-            </a:r>
-          </a:p>
-        </p:txBody>
-      </p:sp>
-      <p:sp>
-        <p:nvSpPr>
-          <p:cNvPr id="13" name="Rounded Rectangle 12"/>
-          <p:cNvSpPr/>
-          <p:nvPr/>
-        </p:nvSpPr>
-        <p:spPr>
-          <a:xfrm>
-            <a:off x="6461607" y="2105406"/>
-            <a:ext cx="5181447" cy="3771900"/>
-          </a:xfrm>
-          <a:prstGeom prst="roundRect">
-            <a:avLst>
-              <a:gd name="adj" fmla="val 4000"/>
-            </a:avLst>
-          </a:prstGeom>
-          <a:solidFill>
-            <a:srgbClr val="E7F3FD"/>
-          </a:solidFill>
-          <a:ln w="28575">
-            <a:solidFill>
-              <a:srgbClr val="5CB8F2"/>
-            </a:solidFill>
-          </a:ln>
-        </p:spPr>
-        <p:txBody>
-          <a:bodyPr rtlCol="0" anchor="ctr"/>
-          <a:lstStyle/>
-          <a:p>
-            <a:pPr algn="ctr"/>
-          </a:p>
-        </p:txBody>
-      </p:sp>
-      <p:sp>
-        <p:nvSpPr>
-          <p:cNvPr id="14" name="Oval 13"/>
-          <p:cNvSpPr/>
-          <p:nvPr/>
-        </p:nvSpPr>
-        <p:spPr>
-          <a:xfrm>
-            <a:off x="6735927" y="2306574"/>
-            <a:ext cx="731520" cy="731520"/>
-          </a:xfrm>
-          <a:prstGeom prst="ellipse">
-            <a:avLst/>
-          </a:prstGeom>
-          <a:solidFill>
-            <a:srgbClr val="5CB8F2"/>
-          </a:solidFill>
-          <a:ln>
-            <a:noFill/>
-          </a:ln>
-        </p:spPr>
-        <p:txBody>
-          <a:bodyPr rtlCol="0" anchor="ctr"/>
-          <a:lstStyle/>
-          <a:p>
-            <a:pPr algn="ctr"/>
-          </a:p>
-        </p:txBody>
-      </p:sp>
-      <p:pic>
-        <p:nvPicPr>
-          <p:cNvPr id="15" name="아이콘:ban" descr="ban_13294B_1.6.png"/>
-          <p:cNvPicPr>
-            <a:picLocks noChangeAspect="1"/>
-          </p:cNvPicPr>
-          <p:nvPr/>
-        </p:nvPicPr>
-        <p:blipFill>
-          <a:blip r:embed="rId4"/>
-          <a:stretch>
-            <a:fillRect/>
-          </a:stretch>
-        </p:blipFill>
-        <p:spPr>
-          <a:xfrm>
-            <a:off x="6889546" y="2460193"/>
-            <a:ext cx="424281" cy="424281"/>
-          </a:xfrm>
-          <a:prstGeom prst="rect">
-            <a:avLst/>
-          </a:prstGeom>
-        </p:spPr>
-      </p:pic>
-      <p:sp>
-        <p:nvSpPr>
-          <p:cNvPr id="16" name="TextBox 15"/>
-          <p:cNvSpPr txBox="1"/>
-          <p:nvPr/>
-        </p:nvSpPr>
-        <p:spPr>
-          <a:xfrm>
-            <a:off x="7604607" y="2306574"/>
-            <a:ext cx="3855567" cy="731520"/>
-          </a:xfrm>
-          <a:prstGeom prst="rect">
-            <a:avLst/>
-          </a:prstGeom>
-          <a:noFill/>
-        </p:spPr>
-        <p:txBody>
-          <a:bodyPr wrap="square" anchor="ctr"/>
-          <a:lstStyle/>
-          <a:p>
-            <a:pPr algn="l" eaLnBrk="0">
-              <a:lnSpc>
-                <a:spcPct val="110000"/>
-              </a:lnSpc>
-            </a:pPr>
-            <a:r>
-              <a:rPr sz="2000" b="1">
-                <a:solidFill>
-                  <a:srgbClr val="13294B"/>
-                </a:solidFill>
-                <a:latin typeface="맑은 고딕"/>
-                <a:ea typeface="맑은 고딕"/>
-                <a:cs typeface="맑은 고딕"/>
-              </a:rPr>
-              <a:t>거절된 처리 건</a:t>
-            </a:r>
-          </a:p>
-        </p:txBody>
-      </p:sp>
-      <p:sp>
-        <p:nvSpPr>
-          <p:cNvPr id="17" name="TextBox 16"/>
-          <p:cNvSpPr txBox="1"/>
-          <p:nvPr/>
-        </p:nvSpPr>
-        <p:spPr>
-          <a:xfrm>
-            <a:off x="6735927" y="3156966"/>
-            <a:ext cx="4632807" cy="2171700"/>
-          </a:xfrm>
-          <a:prstGeom prst="rect">
-            <a:avLst/>
-          </a:prstGeom>
-          <a:noFill/>
-        </p:spPr>
-        <p:txBody>
-          <a:bodyPr wrap="square" anchor="t"/>
-          <a:lstStyle/>
-          <a:p>
-            <a:pPr algn="l" eaLnBrk="0" marL="171450" indent="-171450">
-              <a:lnSpc>
-                <a:spcPct val="110000"/>
-              </a:lnSpc>
-              <a:spcAft>
-                <a:spcPts val="600"/>
-              </a:spcAft>
-            </a:pPr>
-            <a:r>
-              <a:rPr sz="1500" b="0">
-                <a:solidFill>
-                  <a:srgbClr val="1F2A3A"/>
-                </a:solidFill>
-                <a:latin typeface="맑은 고딕"/>
-                <a:ea typeface="맑은 고딕"/>
-                <a:cs typeface="맑은 고딕"/>
-              </a:rPr>
-              <a:t>• status: COMPLETED</a:t>
-            </a:r>
-          </a:p>
-          <a:p>
-            <a:pPr algn="l" eaLnBrk="0" marL="171450" indent="-171450">
-              <a:lnSpc>
-                <a:spcPct val="110000"/>
-              </a:lnSpc>
-              <a:spcAft>
-                <a:spcPts val="600"/>
-              </a:spcAft>
-            </a:pPr>
-            <a:r>
-              <a:rPr sz="1500" b="0">
-                <a:solidFill>
-                  <a:srgbClr val="1F2A3A"/>
-                </a:solidFill>
-                <a:latin typeface="맑은 고딕"/>
-                <a:ea typeface="맑은 고딕"/>
-                <a:cs typeface="맑은 고딕"/>
-              </a:rPr>
-              <a:t>• end_event: E_rejected</a:t>
-            </a:r>
-          </a:p>
-          <a:p>
-            <a:pPr algn="l" eaLnBrk="0" marL="171450" indent="-171450">
-              <a:lnSpc>
-                <a:spcPct val="110000"/>
-              </a:lnSpc>
-              <a:spcAft>
-                <a:spcPts val="600"/>
-              </a:spcAft>
-            </a:pPr>
-            <a:r>
-              <a:rPr sz="1500" b="0">
-                <a:solidFill>
-                  <a:srgbClr val="1F2A3A"/>
-                </a:solidFill>
-                <a:latin typeface="맑은 고딕"/>
-                <a:ea typeface="맑은 고딕"/>
-                <a:cs typeface="맑은 고딕"/>
-              </a:rPr>
-              <a:t>• 결과 보고: 거절(기록의 값은 반려)</a:t>
-            </a:r>
-          </a:p>
-          <a:p>
-            <a:pPr algn="l" eaLnBrk="0" marL="171450" indent="-171450">
-              <a:lnSpc>
-                <a:spcPct val="110000"/>
-              </a:lnSpc>
-              <a:spcAft>
-                <a:spcPts val="600"/>
-              </a:spcAft>
-            </a:pPr>
-            <a:r>
-              <a:rPr sz="1500" b="0">
-                <a:solidFill>
-                  <a:srgbClr val="1F2A3A"/>
-                </a:solidFill>
-                <a:latin typeface="맑은 고딕"/>
-                <a:ea typeface="맑은 고딕"/>
-                <a:cs typeface="맑은 고딕"/>
-              </a:rPr>
-              <a:t>• 설비 명령: 없음</a:t>
-            </a:r>
-          </a:p>
-          <a:p>
-            <a:pPr algn="l" eaLnBrk="0" marL="171450" indent="-171450">
-              <a:lnSpc>
-                <a:spcPct val="110000"/>
-              </a:lnSpc>
-              <a:spcAft>
-                <a:spcPts val="600"/>
-              </a:spcAft>
-            </a:pPr>
-            <a:r>
-              <a:rPr sz="1500" b="0">
-                <a:solidFill>
-                  <a:srgbClr val="1F2A3A"/>
-                </a:solidFill>
-                <a:latin typeface="맑은 고딕"/>
-                <a:ea typeface="맑은 고딕"/>
-                <a:cs typeface="맑은 고딕"/>
-              </a:rPr>
-              <a:t>• 냉각 명령, 재관측, 작업지시 등록은 CANCELLED</a:t>
-            </a:r>
-          </a:p>
-        </p:txBody>
-      </p:sp>
-      <p:sp>
-        <p:nvSpPr>
-          <p:cNvPr id="18" name="Rounded Rectangle 17"/>
-          <p:cNvSpPr/>
-          <p:nvPr/>
-        </p:nvSpPr>
-        <p:spPr>
-          <a:xfrm>
-            <a:off x="6781647" y="5420106"/>
-            <a:ext cx="1021080" cy="292608"/>
-          </a:xfrm>
-          <a:prstGeom prst="roundRect">
-            <a:avLst>
-              <a:gd name="adj" fmla="val 50000"/>
-            </a:avLst>
-          </a:prstGeom>
-          <a:solidFill>
-            <a:srgbClr val="5CB8F2"/>
-          </a:solidFill>
-          <a:ln>
-            <a:noFill/>
-          </a:ln>
-        </p:spPr>
-        <p:txBody>
-          <a:bodyPr rtlCol="0" anchor="ctr"/>
-          <a:lstStyle/>
-          <a:p>
-            <a:pPr algn="ctr"/>
-          </a:p>
-        </p:txBody>
-      </p:sp>
-      <p:sp>
-        <p:nvSpPr>
-          <p:cNvPr id="19" name="TextBox 18"/>
-          <p:cNvSpPr txBox="1"/>
-          <p:nvPr/>
-        </p:nvSpPr>
-        <p:spPr>
-          <a:xfrm>
-            <a:off x="6781647" y="5420106"/>
-            <a:ext cx="1021080" cy="292608"/>
-          </a:xfrm>
-          <a:prstGeom prst="rect">
-            <a:avLst/>
-          </a:prstGeom>
-          <a:noFill/>
-        </p:spPr>
-        <p:txBody>
-          <a:bodyPr wrap="square" anchor="ctr"/>
-          <a:lstStyle/>
-          <a:p>
-            <a:pPr algn="ctr" eaLnBrk="0">
-              <a:lnSpc>
-                <a:spcPct val="110000"/>
-              </a:lnSpc>
-            </a:pPr>
-            <a:r>
-              <a:rPr sz="1200" b="1">
-                <a:solidFill>
-                  <a:srgbClr val="13294B"/>
-                </a:solidFill>
-                <a:latin typeface="맑은 고딕"/>
-                <a:ea typeface="맑은 고딕"/>
-                <a:cs typeface="맑은 고딕"/>
-              </a:rPr>
-              <a:t>거절 종결</a:t>
-            </a:r>
-          </a:p>
-        </p:txBody>
-      </p:sp>
-      <p:sp>
-        <p:nvSpPr>
-          <p:cNvPr id="20" name="Oval 19"/>
-          <p:cNvSpPr/>
-          <p:nvPr/>
-        </p:nvSpPr>
-        <p:spPr>
-          <a:xfrm>
-            <a:off x="5821527" y="3717036"/>
-            <a:ext cx="548640" cy="548640"/>
-          </a:xfrm>
-          <a:prstGeom prst="ellipse">
-            <a:avLst/>
           </a:prstGeom>
           <a:solidFill>
             <a:srgbClr val="13294B"/>
@@ -18799,14 +18931,192 @@
       </p:sp>
       <p:sp>
         <p:nvSpPr>
-          <p:cNvPr id="21" name="TextBox 20"/>
-          <p:cNvSpPr txBox="1"/>
-          <p:nvPr/>
-        </p:nvSpPr>
-        <p:spPr>
-          <a:xfrm>
-            <a:off x="5821527" y="3717036"/>
-            <a:ext cx="548640" cy="548640"/>
+          <p:cNvPr id="7" name="TextBox 6"/>
+          <p:cNvSpPr txBox="1"/>
+          <p:nvPr/>
+        </p:nvSpPr>
+        <p:spPr>
+          <a:xfrm>
+            <a:off x="731520" y="2465451"/>
+            <a:ext cx="6400800" cy="3051810"/>
+          </a:xfrm>
+          <a:prstGeom prst="rect">
+            <a:avLst/>
+          </a:prstGeom>
+          <a:noFill/>
+        </p:spPr>
+        <p:txBody>
+          <a:bodyPr wrap="square" anchor="t"/>
+          <a:lstStyle/>
+          <a:p>
+            <a:pPr algn="l" eaLnBrk="0">
+              <a:lnSpc>
+                <a:spcPct val="110000"/>
+              </a:lnSpc>
+              <a:spcAft>
+                <a:spcPts val="200"/>
+              </a:spcAft>
+            </a:pPr>
+            <a:r>
+              <a:rPr sz="1300" b="0">
+                <a:solidFill>
+                  <a:srgbClr val="E8EEF6"/>
+                </a:solidFill>
+                <a:latin typeface="Consolas"/>
+                <a:ea typeface="맑은 고딕"/>
+                <a:cs typeface="맑은 고딕"/>
+              </a:rPr>
+              <a:t>"status": "RUNNING",</a:t>
+            </a:r>
+          </a:p>
+          <a:p>
+            <a:pPr algn="l" eaLnBrk="0">
+              <a:lnSpc>
+                <a:spcPct val="110000"/>
+              </a:lnSpc>
+              <a:spcAft>
+                <a:spcPts val="200"/>
+              </a:spcAft>
+            </a:pPr>
+            <a:r>
+              <a:rPr sz="1300" b="0">
+                <a:solidFill>
+                  <a:srgbClr val="E8EEF6"/>
+                </a:solidFill>
+                <a:latin typeface="Consolas"/>
+                <a:ea typeface="맑은 고딕"/>
+                <a:cs typeface="맑은 고딕"/>
+              </a:rPr>
+              <a:t>"current_activity_ids": ["T_approve"]</a:t>
+            </a:r>
+          </a:p>
+          <a:p>
+            <a:pPr algn="l" eaLnBrk="0">
+              <a:lnSpc>
+                <a:spcPct val="110000"/>
+              </a:lnSpc>
+              <a:spcAft>
+                <a:spcPts val="200"/>
+              </a:spcAft>
+            </a:pPr>
+          </a:p>
+          <a:p>
+            <a:pPr algn="l" eaLnBrk="0">
+              <a:lnSpc>
+                <a:spcPct val="110000"/>
+              </a:lnSpc>
+              <a:spcAft>
+                <a:spcPts val="200"/>
+              </a:spcAft>
+            </a:pPr>
+            <a:r>
+              <a:rPr sz="1300" b="0">
+                <a:solidFill>
+                  <a:srgbClr val="E8EEF6"/>
+                </a:solidFill>
+                <a:latin typeface="Consolas"/>
+                <a:ea typeface="맑은 고딕"/>
+                <a:cs typeface="맑은 고딕"/>
+              </a:rPr>
+              <a:t>T_agent     DONE</a:t>
+            </a:r>
+          </a:p>
+          <a:p>
+            <a:pPr algn="l" eaLnBrk="0">
+              <a:lnSpc>
+                <a:spcPct val="110000"/>
+              </a:lnSpc>
+              <a:spcAft>
+                <a:spcPts val="200"/>
+              </a:spcAft>
+            </a:pPr>
+            <a:r>
+              <a:rPr sz="1300" b="0">
+                <a:solidFill>
+                  <a:srgbClr val="E8EEF6"/>
+                </a:solidFill>
+                <a:latin typeface="Consolas"/>
+                <a:ea typeface="맑은 고딕"/>
+                <a:cs typeface="맑은 고딕"/>
+              </a:rPr>
+              <a:t>T_approve   IN_PROGRESS</a:t>
+            </a:r>
+          </a:p>
+          <a:p>
+            <a:pPr algn="l" eaLnBrk="0">
+              <a:lnSpc>
+                <a:spcPct val="110000"/>
+              </a:lnSpc>
+              <a:spcAft>
+                <a:spcPts val="200"/>
+              </a:spcAft>
+            </a:pPr>
+            <a:r>
+              <a:rPr sz="1300" b="0">
+                <a:solidFill>
+                  <a:srgbClr val="E8EEF6"/>
+                </a:solidFill>
+                <a:latin typeface="Consolas"/>
+                <a:ea typeface="맑은 고딕"/>
+                <a:cs typeface="맑은 고딕"/>
+              </a:rPr>
+              <a:t>T_cmd       TODO</a:t>
+            </a:r>
+          </a:p>
+          <a:p>
+            <a:pPr algn="l" eaLnBrk="0">
+              <a:lnSpc>
+                <a:spcPct val="110000"/>
+              </a:lnSpc>
+              <a:spcAft>
+                <a:spcPts val="200"/>
+              </a:spcAft>
+            </a:pPr>
+            <a:r>
+              <a:rPr sz="1300" b="0">
+                <a:solidFill>
+                  <a:srgbClr val="E8EEF6"/>
+                </a:solidFill>
+                <a:latin typeface="Consolas"/>
+                <a:ea typeface="맑은 고딕"/>
+                <a:cs typeface="맑은 고딕"/>
+              </a:rPr>
+              <a:t>T_reobs     TODO</a:t>
+            </a:r>
+          </a:p>
+          <a:p>
+            <a:pPr algn="l" eaLnBrk="0">
+              <a:lnSpc>
+                <a:spcPct val="110000"/>
+              </a:lnSpc>
+              <a:spcAft>
+                <a:spcPts val="200"/>
+              </a:spcAft>
+            </a:pPr>
+            <a:r>
+              <a:rPr sz="1300" b="0">
+                <a:solidFill>
+                  <a:srgbClr val="E8EEF6"/>
+                </a:solidFill>
+                <a:latin typeface="Consolas"/>
+                <a:ea typeface="맑은 고딕"/>
+                <a:cs typeface="맑은 고딕"/>
+              </a:rPr>
+              <a:t>T_wo        TODO</a:t>
+            </a:r>
+          </a:p>
+        </p:txBody>
+      </p:sp>
+      <p:sp>
+        <p:nvSpPr>
+          <p:cNvPr id="8" name="TextBox 7"/>
+          <p:cNvSpPr txBox="1"/>
+          <p:nvPr/>
+        </p:nvSpPr>
+        <p:spPr>
+          <a:xfrm>
+            <a:off x="7635240" y="2328291"/>
+            <a:ext cx="4007815" cy="1108710"/>
           </a:xfrm>
           <a:prstGeom prst="rect">
             <a:avLst/>
@@ -18817,21 +19127,234 @@
           <a:bodyPr wrap="square" anchor="ctr"/>
           <a:lstStyle/>
           <a:p>
-            <a:pPr algn="ctr" eaLnBrk="0">
-              <a:lnSpc>
-                <a:spcPct val="110000"/>
-              </a:lnSpc>
-            </a:pPr>
-            <a:r>
-              <a:rPr sz="1400" b="1">
-                <a:solidFill>
-                  <a:srgbClr val="FFFFFF"/>
-                </a:solidFill>
-                <a:latin typeface="맑은 고딕"/>
-                <a:ea typeface="맑은 고딕"/>
-                <a:cs typeface="맑은 고딕"/>
-              </a:rPr>
-              <a:t>vs</a:t>
+            <a:pPr algn="l" eaLnBrk="0">
+              <a:lnSpc>
+                <a:spcPct val="110000"/>
+              </a:lnSpc>
+              <a:spcAft>
+                <a:spcPts val="400"/>
+              </a:spcAft>
+            </a:pPr>
+            <a:r>
+              <a:rPr sz="1700" b="1">
+                <a:solidFill>
+                  <a:srgbClr val="13294B"/>
+                </a:solidFill>
+                <a:latin typeface="맑은 고딕"/>
+                <a:ea typeface="맑은 고딕"/>
+                <a:cs typeface="맑은 고딕"/>
+              </a:rPr>
+              <a:t>처리 건의 상태</a:t>
+            </a:r>
+          </a:p>
+          <a:p>
+            <a:pPr algn="l" eaLnBrk="0">
+              <a:lnSpc>
+                <a:spcPct val="110000"/>
+              </a:lnSpc>
+              <a:spcAft>
+                <a:spcPts val="400"/>
+              </a:spcAft>
+            </a:pPr>
+            <a:r>
+              <a:rPr sz="1400" b="0">
+                <a:solidFill>
+                  <a:srgbClr val="1F2A3A"/>
+                </a:solidFill>
+                <a:latin typeface="맑은 고딕"/>
+                <a:ea typeface="맑은 고딕"/>
+                <a:cs typeface="맑은 고딕"/>
+              </a:rPr>
+              <a:t>끝나지 않았으므로</a:t>
+            </a:r>
+          </a:p>
+          <a:p>
+            <a:pPr algn="l" eaLnBrk="0">
+              <a:lnSpc>
+                <a:spcPct val="110000"/>
+              </a:lnSpc>
+              <a:spcAft>
+                <a:spcPts val="400"/>
+              </a:spcAft>
+            </a:pPr>
+            <a:r>
+              <a:rPr sz="1400" b="0">
+                <a:solidFill>
+                  <a:srgbClr val="1F2A3A"/>
+                </a:solidFill>
+                <a:latin typeface="맑은 고딕"/>
+                <a:ea typeface="맑은 고딕"/>
+                <a:cs typeface="맑은 고딕"/>
+              </a:rPr>
+              <a:t>RUNNING이다.</a:t>
+            </a:r>
+          </a:p>
+        </p:txBody>
+      </p:sp>
+      <p:sp>
+        <p:nvSpPr>
+          <p:cNvPr id="9" name="TextBox 8"/>
+          <p:cNvSpPr txBox="1"/>
+          <p:nvPr/>
+        </p:nvSpPr>
+        <p:spPr>
+          <a:xfrm>
+            <a:off x="7635240" y="3437001"/>
+            <a:ext cx="4007815" cy="1108710"/>
+          </a:xfrm>
+          <a:prstGeom prst="rect">
+            <a:avLst/>
+          </a:prstGeom>
+          <a:noFill/>
+        </p:spPr>
+        <p:txBody>
+          <a:bodyPr wrap="square" anchor="ctr"/>
+          <a:lstStyle/>
+          <a:p>
+            <a:pPr algn="l" eaLnBrk="0">
+              <a:lnSpc>
+                <a:spcPct val="110000"/>
+              </a:lnSpc>
+              <a:spcAft>
+                <a:spcPts val="400"/>
+              </a:spcAft>
+            </a:pPr>
+            <a:r>
+              <a:rPr sz="1700" b="1">
+                <a:solidFill>
+                  <a:srgbClr val="13294B"/>
+                </a:solidFill>
+                <a:latin typeface="맑은 고딕"/>
+                <a:ea typeface="맑은 고딕"/>
+                <a:cs typeface="맑은 고딕"/>
+              </a:rPr>
+              <a:t>열려 있는 단계</a:t>
+            </a:r>
+          </a:p>
+          <a:p>
+            <a:pPr algn="l" eaLnBrk="0">
+              <a:lnSpc>
+                <a:spcPct val="110000"/>
+              </a:lnSpc>
+              <a:spcAft>
+                <a:spcPts val="400"/>
+              </a:spcAft>
+            </a:pPr>
+            <a:r>
+              <a:rPr sz="1400" b="0">
+                <a:solidFill>
+                  <a:srgbClr val="1F2A3A"/>
+                </a:solidFill>
+                <a:latin typeface="맑은 고딕"/>
+                <a:ea typeface="맑은 고딕"/>
+                <a:cs typeface="맑은 고딕"/>
+              </a:rPr>
+              <a:t>토큰이 있는 곳이</a:t>
+            </a:r>
+          </a:p>
+          <a:p>
+            <a:pPr algn="l" eaLnBrk="0">
+              <a:lnSpc>
+                <a:spcPct val="110000"/>
+              </a:lnSpc>
+              <a:spcAft>
+                <a:spcPts val="400"/>
+              </a:spcAft>
+            </a:pPr>
+            <a:r>
+              <a:rPr sz="1400" b="0">
+                <a:solidFill>
+                  <a:srgbClr val="1F2A3A"/>
+                </a:solidFill>
+                <a:latin typeface="맑은 고딕"/>
+                <a:ea typeface="맑은 고딕"/>
+                <a:cs typeface="맑은 고딕"/>
+              </a:rPr>
+              <a:t>T_approve, 운전원 승인이다.</a:t>
+            </a:r>
+          </a:p>
+        </p:txBody>
+      </p:sp>
+      <p:sp>
+        <p:nvSpPr>
+          <p:cNvPr id="10" name="TextBox 9"/>
+          <p:cNvSpPr txBox="1"/>
+          <p:nvPr/>
+        </p:nvSpPr>
+        <p:spPr>
+          <a:xfrm>
+            <a:off x="7635240" y="4545711"/>
+            <a:ext cx="4007815" cy="1108710"/>
+          </a:xfrm>
+          <a:prstGeom prst="rect">
+            <a:avLst/>
+          </a:prstGeom>
+          <a:noFill/>
+        </p:spPr>
+        <p:txBody>
+          <a:bodyPr wrap="square" anchor="ctr"/>
+          <a:lstStyle/>
+          <a:p>
+            <a:pPr algn="l" eaLnBrk="0">
+              <a:lnSpc>
+                <a:spcPct val="110000"/>
+              </a:lnSpc>
+              <a:spcAft>
+                <a:spcPts val="400"/>
+              </a:spcAft>
+            </a:pPr>
+            <a:r>
+              <a:rPr sz="1700" b="1">
+                <a:solidFill>
+                  <a:srgbClr val="13294B"/>
+                </a:solidFill>
+                <a:latin typeface="맑은 고딕"/>
+                <a:ea typeface="맑은 고딕"/>
+                <a:cs typeface="맑은 고딕"/>
+              </a:rPr>
+              <a:t>단계</a:t>
+            </a:r>
+          </a:p>
+          <a:p>
+            <a:pPr algn="l" eaLnBrk="0">
+              <a:lnSpc>
+                <a:spcPct val="110000"/>
+              </a:lnSpc>
+              <a:spcAft>
+                <a:spcPts val="400"/>
+              </a:spcAft>
+            </a:pPr>
+            <a:r>
+              <a:rPr sz="1400" b="0">
+                <a:solidFill>
+                  <a:srgbClr val="1F2A3A"/>
+                </a:solidFill>
+                <a:latin typeface="맑은 고딕"/>
+                <a:ea typeface="맑은 고딕"/>
+                <a:cs typeface="맑은 고딕"/>
+              </a:rPr>
+              <a:t>그림의 작업 하나가</a:t>
+            </a:r>
+          </a:p>
+          <a:p>
+            <a:pPr algn="l" eaLnBrk="0">
+              <a:lnSpc>
+                <a:spcPct val="110000"/>
+              </a:lnSpc>
+              <a:spcAft>
+                <a:spcPts val="400"/>
+              </a:spcAft>
+            </a:pPr>
+            <a:r>
+              <a:rPr sz="1400" b="0">
+                <a:solidFill>
+                  <a:srgbClr val="1F2A3A"/>
+                </a:solidFill>
+                <a:latin typeface="맑은 고딕"/>
+                <a:ea typeface="맑은 고딕"/>
+                <a:cs typeface="맑은 고딕"/>
+              </a:rPr>
+              <a:t>처리 건마다 단계 하나가 된다.</a:t>
             </a:r>
           </a:p>
         </p:txBody>
@@ -18896,7 +19419,7 @@
                 <a:ea typeface="맑은 고딕"/>
                 <a:cs typeface="맑은 고딕"/>
               </a:rPr>
-              <a:t>오늘의 실습과 남길 결과</a:t>
+              <a:t>COMPLETED는 성공을 뜻하지 않는다</a:t>
             </a:r>
           </a:p>
         </p:txBody>
@@ -18935,7 +19458,7 @@
                 <a:ea typeface="맑은 고딕"/>
                 <a:cs typeface="맑은 고딕"/>
               </a:rPr>
-              <a:t>이론 뒤 세 교시는 설비 대응 흐름을 그리고, 세 경로를 완성한 뒤, 등록된 실행 연결과 비교한다.</a:t>
+              <a:t>거절로 닫힌 처리 건도 상태는 COMPLETED이므로, 업무의 결과는 닿은 끝 이벤트와 결과 보고의 내용으로 판단한다.</a:t>
             </a:r>
           </a:p>
         </p:txBody>
@@ -19016,13 +19539,651 @@
         </p:nvSpPr>
         <p:spPr>
           <a:xfrm>
-            <a:off x="548640" y="2418587"/>
-            <a:ext cx="11094415" cy="347472"/>
+            <a:off x="548640" y="2105406"/>
+            <a:ext cx="5181447" cy="3771900"/>
           </a:xfrm>
           <a:prstGeom prst="roundRect">
             <a:avLst>
-              <a:gd name="adj" fmla="val 12000"/>
+              <a:gd name="adj" fmla="val 4000"/>
             </a:avLst>
+          </a:prstGeom>
+          <a:solidFill>
+            <a:srgbClr val="F3F6F9"/>
+          </a:solidFill>
+          <a:ln>
+            <a:noFill/>
+          </a:ln>
+        </p:spPr>
+        <p:txBody>
+          <a:bodyPr rtlCol="0" anchor="ctr"/>
+          <a:lstStyle/>
+          <a:p>
+            <a:pPr algn="ctr"/>
+          </a:p>
+        </p:txBody>
+      </p:sp>
+      <p:sp>
+        <p:nvSpPr>
+          <p:cNvPr id="7" name="Oval 6"/>
+          <p:cNvSpPr/>
+          <p:nvPr/>
+        </p:nvSpPr>
+        <p:spPr>
+          <a:xfrm>
+            <a:off x="822959" y="2306574"/>
+            <a:ext cx="731520" cy="731520"/>
+          </a:xfrm>
+          <a:prstGeom prst="ellipse">
+            <a:avLst/>
+          </a:prstGeom>
+          <a:solidFill>
+            <a:srgbClr val="FFFFFF"/>
+          </a:solidFill>
+          <a:ln>
+            <a:noFill/>
+          </a:ln>
+        </p:spPr>
+        <p:txBody>
+          <a:bodyPr rtlCol="0" anchor="ctr"/>
+          <a:lstStyle/>
+          <a:p>
+            <a:pPr algn="ctr"/>
+          </a:p>
+        </p:txBody>
+      </p:sp>
+      <p:pic>
+        <p:nvPicPr>
+          <p:cNvPr id="8" name="아이콘:circle-check" descr="circle-check_13294B_1.6.png"/>
+          <p:cNvPicPr>
+            <a:picLocks noChangeAspect="1"/>
+          </p:cNvPicPr>
+          <p:nvPr/>
+        </p:nvPicPr>
+        <p:blipFill>
+          <a:blip r:embed="rId3"/>
+          <a:stretch>
+            <a:fillRect/>
+          </a:stretch>
+        </p:blipFill>
+        <p:spPr>
+          <a:xfrm>
+            <a:off x="976579" y="2460193"/>
+            <a:ext cx="424281" cy="424281"/>
+          </a:xfrm>
+          <a:prstGeom prst="rect">
+            <a:avLst/>
+          </a:prstGeom>
+        </p:spPr>
+      </p:pic>
+      <p:sp>
+        <p:nvSpPr>
+          <p:cNvPr id="9" name="TextBox 8"/>
+          <p:cNvSpPr txBox="1"/>
+          <p:nvPr/>
+        </p:nvSpPr>
+        <p:spPr>
+          <a:xfrm>
+            <a:off x="1691640" y="2306574"/>
+            <a:ext cx="3855567" cy="731520"/>
+          </a:xfrm>
+          <a:prstGeom prst="rect">
+            <a:avLst/>
+          </a:prstGeom>
+          <a:noFill/>
+        </p:spPr>
+        <p:txBody>
+          <a:bodyPr wrap="square" anchor="ctr"/>
+          <a:lstStyle/>
+          <a:p>
+            <a:pPr algn="l" eaLnBrk="0">
+              <a:lnSpc>
+                <a:spcPct val="110000"/>
+              </a:lnSpc>
+            </a:pPr>
+            <a:r>
+              <a:rPr sz="2000" b="1">
+                <a:solidFill>
+                  <a:srgbClr val="13294B"/>
+                </a:solidFill>
+                <a:latin typeface="맑은 고딕"/>
+                <a:ea typeface="맑은 고딕"/>
+                <a:cs typeface="맑은 고딕"/>
+              </a:rPr>
+              <a:t>승인된 처리 건</a:t>
+            </a:r>
+          </a:p>
+        </p:txBody>
+      </p:sp>
+      <p:sp>
+        <p:nvSpPr>
+          <p:cNvPr id="10" name="TextBox 9"/>
+          <p:cNvSpPr txBox="1"/>
+          <p:nvPr/>
+        </p:nvSpPr>
+        <p:spPr>
+          <a:xfrm>
+            <a:off x="822959" y="3156966"/>
+            <a:ext cx="4632807" cy="2171700"/>
+          </a:xfrm>
+          <a:prstGeom prst="rect">
+            <a:avLst/>
+          </a:prstGeom>
+          <a:noFill/>
+        </p:spPr>
+        <p:txBody>
+          <a:bodyPr wrap="square" anchor="t"/>
+          <a:lstStyle/>
+          <a:p>
+            <a:pPr algn="l" eaLnBrk="0" marL="171450" indent="-171450">
+              <a:lnSpc>
+                <a:spcPct val="110000"/>
+              </a:lnSpc>
+              <a:spcAft>
+                <a:spcPts val="600"/>
+              </a:spcAft>
+            </a:pPr>
+            <a:r>
+              <a:rPr sz="1500" b="0">
+                <a:solidFill>
+                  <a:srgbClr val="1F2A3A"/>
+                </a:solidFill>
+                <a:latin typeface="맑은 고딕"/>
+                <a:ea typeface="맑은 고딕"/>
+                <a:cs typeface="맑은 고딕"/>
+              </a:rPr>
+              <a:t>• status: COMPLETED</a:t>
+            </a:r>
+          </a:p>
+          <a:p>
+            <a:pPr algn="l" eaLnBrk="0" marL="171450" indent="-171450">
+              <a:lnSpc>
+                <a:spcPct val="110000"/>
+              </a:lnSpc>
+              <a:spcAft>
+                <a:spcPts val="600"/>
+              </a:spcAft>
+            </a:pPr>
+            <a:r>
+              <a:rPr sz="1500" b="0">
+                <a:solidFill>
+                  <a:srgbClr val="1F2A3A"/>
+                </a:solidFill>
+                <a:latin typeface="맑은 고딕"/>
+                <a:ea typeface="맑은 고딕"/>
+                <a:cs typeface="맑은 고딕"/>
+              </a:rPr>
+              <a:t>• end_event: E_end</a:t>
+            </a:r>
+          </a:p>
+          <a:p>
+            <a:pPr algn="l" eaLnBrk="0" marL="171450" indent="-171450">
+              <a:lnSpc>
+                <a:spcPct val="110000"/>
+              </a:lnSpc>
+              <a:spcAft>
+                <a:spcPts val="600"/>
+              </a:spcAft>
+            </a:pPr>
+            <a:r>
+              <a:rPr sz="1500" b="0">
+                <a:solidFill>
+                  <a:srgbClr val="1F2A3A"/>
+                </a:solidFill>
+                <a:latin typeface="맑은 고딕"/>
+                <a:ea typeface="맑은 고딕"/>
+                <a:cs typeface="맑은 고딕"/>
+              </a:rPr>
+              <a:t>• 결과 보고: 정상</a:t>
+            </a:r>
+          </a:p>
+          <a:p>
+            <a:pPr algn="l" eaLnBrk="0" marL="171450" indent="-171450">
+              <a:lnSpc>
+                <a:spcPct val="110000"/>
+              </a:lnSpc>
+              <a:spcAft>
+                <a:spcPts val="600"/>
+              </a:spcAft>
+            </a:pPr>
+            <a:r>
+              <a:rPr sz="1500" b="0">
+                <a:solidFill>
+                  <a:srgbClr val="1F2A3A"/>
+                </a:solidFill>
+                <a:latin typeface="맑은 고딕"/>
+                <a:ea typeface="맑은 고딕"/>
+                <a:cs typeface="맑은 고딕"/>
+              </a:rPr>
+              <a:t>• 설비 명령: 1건</a:t>
+            </a:r>
+          </a:p>
+          <a:p>
+            <a:pPr algn="l" eaLnBrk="0" marL="171450" indent="-171450">
+              <a:lnSpc>
+                <a:spcPct val="110000"/>
+              </a:lnSpc>
+              <a:spcAft>
+                <a:spcPts val="600"/>
+              </a:spcAft>
+            </a:pPr>
+            <a:r>
+              <a:rPr sz="1500" b="0">
+                <a:solidFill>
+                  <a:srgbClr val="1F2A3A"/>
+                </a:solidFill>
+                <a:latin typeface="맑은 고딕"/>
+                <a:ea typeface="맑은 고딕"/>
+                <a:cs typeface="맑은 고딕"/>
+              </a:rPr>
+              <a:t>• 회복에 미달해도 end_event는 E_end이고 결과 보고가 미달이 된다</a:t>
+            </a:r>
+          </a:p>
+        </p:txBody>
+      </p:sp>
+      <p:sp>
+        <p:nvSpPr>
+          <p:cNvPr id="11" name="Rounded Rectangle 10"/>
+          <p:cNvSpPr/>
+          <p:nvPr/>
+        </p:nvSpPr>
+        <p:spPr>
+          <a:xfrm>
+            <a:off x="868680" y="5420106"/>
+            <a:ext cx="822960" cy="292608"/>
+          </a:xfrm>
+          <a:prstGeom prst="roundRect">
+            <a:avLst>
+              <a:gd name="adj" fmla="val 50000"/>
+            </a:avLst>
+          </a:prstGeom>
+          <a:solidFill>
+            <a:srgbClr val="D3D9E1"/>
+          </a:solidFill>
+          <a:ln>
+            <a:noFill/>
+          </a:ln>
+        </p:spPr>
+        <p:txBody>
+          <a:bodyPr rtlCol="0" anchor="ctr"/>
+          <a:lstStyle/>
+          <a:p>
+            <a:pPr algn="ctr"/>
+          </a:p>
+        </p:txBody>
+      </p:sp>
+      <p:sp>
+        <p:nvSpPr>
+          <p:cNvPr id="12" name="TextBox 11"/>
+          <p:cNvSpPr txBox="1"/>
+          <p:nvPr/>
+        </p:nvSpPr>
+        <p:spPr>
+          <a:xfrm>
+            <a:off x="868680" y="5420106"/>
+            <a:ext cx="822960" cy="292608"/>
+          </a:xfrm>
+          <a:prstGeom prst="rect">
+            <a:avLst/>
+          </a:prstGeom>
+          <a:noFill/>
+        </p:spPr>
+        <p:txBody>
+          <a:bodyPr wrap="square" anchor="ctr"/>
+          <a:lstStyle/>
+          <a:p>
+            <a:pPr algn="ctr" eaLnBrk="0">
+              <a:lnSpc>
+                <a:spcPct val="110000"/>
+              </a:lnSpc>
+            </a:pPr>
+            <a:r>
+              <a:rPr sz="1200" b="1">
+                <a:solidFill>
+                  <a:srgbClr val="13294B"/>
+                </a:solidFill>
+                <a:latin typeface="맑은 고딕"/>
+                <a:ea typeface="맑은 고딕"/>
+                <a:cs typeface="맑은 고딕"/>
+              </a:rPr>
+              <a:t>끝</a:t>
+            </a:r>
+          </a:p>
+        </p:txBody>
+      </p:sp>
+      <p:sp>
+        <p:nvSpPr>
+          <p:cNvPr id="13" name="Rounded Rectangle 12"/>
+          <p:cNvSpPr/>
+          <p:nvPr/>
+        </p:nvSpPr>
+        <p:spPr>
+          <a:xfrm>
+            <a:off x="6461607" y="2105406"/>
+            <a:ext cx="5181447" cy="3771900"/>
+          </a:xfrm>
+          <a:prstGeom prst="roundRect">
+            <a:avLst>
+              <a:gd name="adj" fmla="val 4000"/>
+            </a:avLst>
+          </a:prstGeom>
+          <a:solidFill>
+            <a:srgbClr val="E7F3FD"/>
+          </a:solidFill>
+          <a:ln w="28575">
+            <a:solidFill>
+              <a:srgbClr val="5CB8F2"/>
+            </a:solidFill>
+          </a:ln>
+        </p:spPr>
+        <p:txBody>
+          <a:bodyPr rtlCol="0" anchor="ctr"/>
+          <a:lstStyle/>
+          <a:p>
+            <a:pPr algn="ctr"/>
+          </a:p>
+        </p:txBody>
+      </p:sp>
+      <p:sp>
+        <p:nvSpPr>
+          <p:cNvPr id="14" name="Oval 13"/>
+          <p:cNvSpPr/>
+          <p:nvPr/>
+        </p:nvSpPr>
+        <p:spPr>
+          <a:xfrm>
+            <a:off x="6735927" y="2306574"/>
+            <a:ext cx="731520" cy="731520"/>
+          </a:xfrm>
+          <a:prstGeom prst="ellipse">
+            <a:avLst/>
+          </a:prstGeom>
+          <a:solidFill>
+            <a:srgbClr val="5CB8F2"/>
+          </a:solidFill>
+          <a:ln>
+            <a:noFill/>
+          </a:ln>
+        </p:spPr>
+        <p:txBody>
+          <a:bodyPr rtlCol="0" anchor="ctr"/>
+          <a:lstStyle/>
+          <a:p>
+            <a:pPr algn="ctr"/>
+          </a:p>
+        </p:txBody>
+      </p:sp>
+      <p:pic>
+        <p:nvPicPr>
+          <p:cNvPr id="15" name="아이콘:ban" descr="ban_13294B_1.6.png"/>
+          <p:cNvPicPr>
+            <a:picLocks noChangeAspect="1"/>
+          </p:cNvPicPr>
+          <p:nvPr/>
+        </p:nvPicPr>
+        <p:blipFill>
+          <a:blip r:embed="rId4"/>
+          <a:stretch>
+            <a:fillRect/>
+          </a:stretch>
+        </p:blipFill>
+        <p:spPr>
+          <a:xfrm>
+            <a:off x="6889546" y="2460193"/>
+            <a:ext cx="424281" cy="424281"/>
+          </a:xfrm>
+          <a:prstGeom prst="rect">
+            <a:avLst/>
+          </a:prstGeom>
+        </p:spPr>
+      </p:pic>
+      <p:sp>
+        <p:nvSpPr>
+          <p:cNvPr id="16" name="TextBox 15"/>
+          <p:cNvSpPr txBox="1"/>
+          <p:nvPr/>
+        </p:nvSpPr>
+        <p:spPr>
+          <a:xfrm>
+            <a:off x="7604607" y="2306574"/>
+            <a:ext cx="3855567" cy="731520"/>
+          </a:xfrm>
+          <a:prstGeom prst="rect">
+            <a:avLst/>
+          </a:prstGeom>
+          <a:noFill/>
+        </p:spPr>
+        <p:txBody>
+          <a:bodyPr wrap="square" anchor="ctr"/>
+          <a:lstStyle/>
+          <a:p>
+            <a:pPr algn="l" eaLnBrk="0">
+              <a:lnSpc>
+                <a:spcPct val="110000"/>
+              </a:lnSpc>
+            </a:pPr>
+            <a:r>
+              <a:rPr sz="2000" b="1">
+                <a:solidFill>
+                  <a:srgbClr val="13294B"/>
+                </a:solidFill>
+                <a:latin typeface="맑은 고딕"/>
+                <a:ea typeface="맑은 고딕"/>
+                <a:cs typeface="맑은 고딕"/>
+              </a:rPr>
+              <a:t>거절된 처리 건</a:t>
+            </a:r>
+          </a:p>
+        </p:txBody>
+      </p:sp>
+      <p:sp>
+        <p:nvSpPr>
+          <p:cNvPr id="17" name="TextBox 16"/>
+          <p:cNvSpPr txBox="1"/>
+          <p:nvPr/>
+        </p:nvSpPr>
+        <p:spPr>
+          <a:xfrm>
+            <a:off x="6735927" y="3156966"/>
+            <a:ext cx="4632807" cy="2171700"/>
+          </a:xfrm>
+          <a:prstGeom prst="rect">
+            <a:avLst/>
+          </a:prstGeom>
+          <a:noFill/>
+        </p:spPr>
+        <p:txBody>
+          <a:bodyPr wrap="square" anchor="t"/>
+          <a:lstStyle/>
+          <a:p>
+            <a:pPr algn="l" eaLnBrk="0" marL="171450" indent="-171450">
+              <a:lnSpc>
+                <a:spcPct val="110000"/>
+              </a:lnSpc>
+              <a:spcAft>
+                <a:spcPts val="600"/>
+              </a:spcAft>
+            </a:pPr>
+            <a:r>
+              <a:rPr sz="1500" b="0">
+                <a:solidFill>
+                  <a:srgbClr val="1F2A3A"/>
+                </a:solidFill>
+                <a:latin typeface="맑은 고딕"/>
+                <a:ea typeface="맑은 고딕"/>
+                <a:cs typeface="맑은 고딕"/>
+              </a:rPr>
+              <a:t>• status: COMPLETED</a:t>
+            </a:r>
+          </a:p>
+          <a:p>
+            <a:pPr algn="l" eaLnBrk="0" marL="171450" indent="-171450">
+              <a:lnSpc>
+                <a:spcPct val="110000"/>
+              </a:lnSpc>
+              <a:spcAft>
+                <a:spcPts val="600"/>
+              </a:spcAft>
+            </a:pPr>
+            <a:r>
+              <a:rPr sz="1500" b="0">
+                <a:solidFill>
+                  <a:srgbClr val="1F2A3A"/>
+                </a:solidFill>
+                <a:latin typeface="맑은 고딕"/>
+                <a:ea typeface="맑은 고딕"/>
+                <a:cs typeface="맑은 고딕"/>
+              </a:rPr>
+              <a:t>• end_event: E_rejected</a:t>
+            </a:r>
+          </a:p>
+          <a:p>
+            <a:pPr algn="l" eaLnBrk="0" marL="171450" indent="-171450">
+              <a:lnSpc>
+                <a:spcPct val="110000"/>
+              </a:lnSpc>
+              <a:spcAft>
+                <a:spcPts val="600"/>
+              </a:spcAft>
+            </a:pPr>
+            <a:r>
+              <a:rPr sz="1500" b="0">
+                <a:solidFill>
+                  <a:srgbClr val="1F2A3A"/>
+                </a:solidFill>
+                <a:latin typeface="맑은 고딕"/>
+                <a:ea typeface="맑은 고딕"/>
+                <a:cs typeface="맑은 고딕"/>
+              </a:rPr>
+              <a:t>• 결과 보고: 거절(기록의 값은 반려)</a:t>
+            </a:r>
+          </a:p>
+          <a:p>
+            <a:pPr algn="l" eaLnBrk="0" marL="171450" indent="-171450">
+              <a:lnSpc>
+                <a:spcPct val="110000"/>
+              </a:lnSpc>
+              <a:spcAft>
+                <a:spcPts val="600"/>
+              </a:spcAft>
+            </a:pPr>
+            <a:r>
+              <a:rPr sz="1500" b="0">
+                <a:solidFill>
+                  <a:srgbClr val="1F2A3A"/>
+                </a:solidFill>
+                <a:latin typeface="맑은 고딕"/>
+                <a:ea typeface="맑은 고딕"/>
+                <a:cs typeface="맑은 고딕"/>
+              </a:rPr>
+              <a:t>• 설비 명령: 없음</a:t>
+            </a:r>
+          </a:p>
+          <a:p>
+            <a:pPr algn="l" eaLnBrk="0" marL="171450" indent="-171450">
+              <a:lnSpc>
+                <a:spcPct val="110000"/>
+              </a:lnSpc>
+              <a:spcAft>
+                <a:spcPts val="600"/>
+              </a:spcAft>
+            </a:pPr>
+            <a:r>
+              <a:rPr sz="1500" b="0">
+                <a:solidFill>
+                  <a:srgbClr val="1F2A3A"/>
+                </a:solidFill>
+                <a:latin typeface="맑은 고딕"/>
+                <a:ea typeface="맑은 고딕"/>
+                <a:cs typeface="맑은 고딕"/>
+              </a:rPr>
+              <a:t>• 냉각 명령, 재관측, 작업지시 등록은 CANCELLED</a:t>
+            </a:r>
+          </a:p>
+        </p:txBody>
+      </p:sp>
+      <p:sp>
+        <p:nvSpPr>
+          <p:cNvPr id="18" name="Rounded Rectangle 17"/>
+          <p:cNvSpPr/>
+          <p:nvPr/>
+        </p:nvSpPr>
+        <p:spPr>
+          <a:xfrm>
+            <a:off x="6781647" y="5420106"/>
+            <a:ext cx="1021080" cy="292608"/>
+          </a:xfrm>
+          <a:prstGeom prst="roundRect">
+            <a:avLst>
+              <a:gd name="adj" fmla="val 50000"/>
+            </a:avLst>
+          </a:prstGeom>
+          <a:solidFill>
+            <a:srgbClr val="5CB8F2"/>
+          </a:solidFill>
+          <a:ln>
+            <a:noFill/>
+          </a:ln>
+        </p:spPr>
+        <p:txBody>
+          <a:bodyPr rtlCol="0" anchor="ctr"/>
+          <a:lstStyle/>
+          <a:p>
+            <a:pPr algn="ctr"/>
+          </a:p>
+        </p:txBody>
+      </p:sp>
+      <p:sp>
+        <p:nvSpPr>
+          <p:cNvPr id="19" name="TextBox 18"/>
+          <p:cNvSpPr txBox="1"/>
+          <p:nvPr/>
+        </p:nvSpPr>
+        <p:spPr>
+          <a:xfrm>
+            <a:off x="6781647" y="5420106"/>
+            <a:ext cx="1021080" cy="292608"/>
+          </a:xfrm>
+          <a:prstGeom prst="rect">
+            <a:avLst/>
+          </a:prstGeom>
+          <a:noFill/>
+        </p:spPr>
+        <p:txBody>
+          <a:bodyPr wrap="square" anchor="ctr"/>
+          <a:lstStyle/>
+          <a:p>
+            <a:pPr algn="ctr" eaLnBrk="0">
+              <a:lnSpc>
+                <a:spcPct val="110000"/>
+              </a:lnSpc>
+            </a:pPr>
+            <a:r>
+              <a:rPr sz="1200" b="1">
+                <a:solidFill>
+                  <a:srgbClr val="13294B"/>
+                </a:solidFill>
+                <a:latin typeface="맑은 고딕"/>
+                <a:ea typeface="맑은 고딕"/>
+                <a:cs typeface="맑은 고딕"/>
+              </a:rPr>
+              <a:t>거절 종결</a:t>
+            </a:r>
+          </a:p>
+        </p:txBody>
+      </p:sp>
+      <p:sp>
+        <p:nvSpPr>
+          <p:cNvPr id="20" name="Oval 19"/>
+          <p:cNvSpPr/>
+          <p:nvPr/>
+        </p:nvSpPr>
+        <p:spPr>
+          <a:xfrm>
+            <a:off x="5821527" y="3717036"/>
+            <a:ext cx="548640" cy="548640"/>
+          </a:xfrm>
+          <a:prstGeom prst="ellipse">
+            <a:avLst/>
           </a:prstGeom>
           <a:solidFill>
             <a:srgbClr val="13294B"/>
@@ -19041,13 +20202,255 @@
       </p:sp>
       <p:sp>
         <p:nvSpPr>
+          <p:cNvPr id="21" name="TextBox 20"/>
+          <p:cNvSpPr txBox="1"/>
+          <p:nvPr/>
+        </p:nvSpPr>
+        <p:spPr>
+          <a:xfrm>
+            <a:off x="5821527" y="3717036"/>
+            <a:ext cx="548640" cy="548640"/>
+          </a:xfrm>
+          <a:prstGeom prst="rect">
+            <a:avLst/>
+          </a:prstGeom>
+          <a:noFill/>
+        </p:spPr>
+        <p:txBody>
+          <a:bodyPr wrap="square" anchor="ctr"/>
+          <a:lstStyle/>
+          <a:p>
+            <a:pPr algn="ctr" eaLnBrk="0">
+              <a:lnSpc>
+                <a:spcPct val="110000"/>
+              </a:lnSpc>
+            </a:pPr>
+            <a:r>
+              <a:rPr sz="1400" b="1">
+                <a:solidFill>
+                  <a:srgbClr val="FFFFFF"/>
+                </a:solidFill>
+                <a:latin typeface="맑은 고딕"/>
+                <a:ea typeface="맑은 고딕"/>
+                <a:cs typeface="맑은 고딕"/>
+              </a:rPr>
+              <a:t>vs</a:t>
+            </a:r>
+          </a:p>
+        </p:txBody>
+      </p:sp>
+    </p:spTree>
+  </p:cSld>
+  <p:clrMapOvr>
+    <a:masterClrMapping/>
+  </p:clrMapOvr>
+</p:sld>
+</file>
+
+<file path=ppt/slides/slide28.xml><?xml version="1.0" encoding="utf-8"?>
+<p:sld xmlns:a="http://schemas.openxmlformats.org/drawingml/2006/main" xmlns:p="http://schemas.openxmlformats.org/presentationml/2006/main" xmlns:r="http://schemas.openxmlformats.org/officeDocument/2006/relationships">
+  <p:cSld>
+    <p:bg>
+      <p:bgPr>
+        <a:solidFill>
+          <a:srgbClr val="FFFFFF"/>
+        </a:solidFill>
+        <a:effectLst/>
+      </p:bgPr>
+    </p:bg>
+    <p:spTree>
+      <p:nvGrpSpPr>
+        <p:cNvPr id="1" name=""/>
+        <p:cNvGrpSpPr/>
+        <p:nvPr/>
+      </p:nvGrpSpPr>
+      <p:grpSpPr/>
+      <p:sp>
+        <p:nvSpPr>
+          <p:cNvPr id="2" name="TextBox 1"/>
+          <p:cNvSpPr txBox="1"/>
+          <p:nvPr/>
+        </p:nvSpPr>
+        <p:spPr>
+          <a:xfrm>
+            <a:off x="457200" y="329184"/>
+            <a:ext cx="11277295" cy="603504"/>
+          </a:xfrm>
+          <a:prstGeom prst="rect">
+            <a:avLst/>
+          </a:prstGeom>
+          <a:noFill/>
+        </p:spPr>
+        <p:txBody>
+          <a:bodyPr wrap="square" anchor="ctr"/>
+          <a:lstStyle/>
+          <a:p>
+            <a:pPr algn="l" eaLnBrk="0">
+              <a:lnSpc>
+                <a:spcPct val="110000"/>
+              </a:lnSpc>
+            </a:pPr>
+            <a:r>
+              <a:rPr sz="2800" b="1">
+                <a:solidFill>
+                  <a:srgbClr val="13294B"/>
+                </a:solidFill>
+                <a:latin typeface="맑은 고딕"/>
+                <a:ea typeface="맑은 고딕"/>
+                <a:cs typeface="맑은 고딕"/>
+              </a:rPr>
+              <a:t>복습: 쿨러 사건 한 건을 프로세스로 읽기</a:t>
+            </a:r>
+          </a:p>
+        </p:txBody>
+      </p:sp>
+      <p:sp>
+        <p:nvSpPr>
+          <p:cNvPr id="3" name="TextBox 2"/>
+          <p:cNvSpPr txBox="1"/>
+          <p:nvPr/>
+        </p:nvSpPr>
+        <p:spPr>
+          <a:xfrm>
+            <a:off x="457200" y="932688"/>
+            <a:ext cx="11277295" cy="420624"/>
+          </a:xfrm>
+          <a:prstGeom prst="rect">
+            <a:avLst/>
+          </a:prstGeom>
+          <a:noFill/>
+        </p:spPr>
+        <p:txBody>
+          <a:bodyPr wrap="square" anchor="ctr"/>
+          <a:lstStyle/>
+          <a:p>
+            <a:pPr algn="l" eaLnBrk="0">
+              <a:lnSpc>
+                <a:spcPct val="110000"/>
+              </a:lnSpc>
+            </a:pPr>
+            <a:r>
+              <a:rPr sz="1600" b="0">
+                <a:solidFill>
+                  <a:srgbClr val="556175"/>
+                </a:solidFill>
+                <a:latin typeface="맑은 고딕"/>
+                <a:ea typeface="맑은 고딕"/>
+                <a:cs typeface="맑은 고딕"/>
+              </a:rPr>
+              <a:t>쿨러 사건의 장면마다 프로세스의 어느 개념인지 가려 읽으면, 헷갈리기 쉬운 짝이 서로 다른 일임이 드러난다.</a:t>
+            </a:r>
+          </a:p>
+        </p:txBody>
+      </p:sp>
+      <p:sp>
+        <p:nvSpPr>
+          <p:cNvPr id="4" name="Rectangle 3"/>
+          <p:cNvSpPr/>
+          <p:nvPr/>
+        </p:nvSpPr>
+        <p:spPr>
+          <a:xfrm>
+            <a:off x="548640" y="1408176"/>
+            <a:ext cx="11094415" cy="18288"/>
+          </a:xfrm>
+          <a:prstGeom prst="rect">
+            <a:avLst/>
+          </a:prstGeom>
+          <a:solidFill>
+            <a:srgbClr val="D3D9E1"/>
+          </a:solidFill>
+          <a:ln>
+            <a:noFill/>
+          </a:ln>
+        </p:spPr>
+        <p:txBody>
+          <a:bodyPr rtlCol="0" anchor="ctr"/>
+          <a:lstStyle/>
+          <a:p>
+            <a:pPr algn="ctr"/>
+          </a:p>
+        </p:txBody>
+      </p:sp>
+      <p:sp>
+        <p:nvSpPr>
+          <p:cNvPr id="5" name="TextBox 4"/>
+          <p:cNvSpPr txBox="1"/>
+          <p:nvPr/>
+        </p:nvSpPr>
+        <p:spPr>
+          <a:xfrm>
+            <a:off x="10911535" y="6473952"/>
+            <a:ext cx="822960" cy="274320"/>
+          </a:xfrm>
+          <a:prstGeom prst="rect">
+            <a:avLst/>
+          </a:prstGeom>
+          <a:noFill/>
+        </p:spPr>
+        <p:txBody>
+          <a:bodyPr wrap="square" anchor="t"/>
+          <a:lstStyle/>
+          <a:p>
+            <a:pPr algn="r" eaLnBrk="0">
+              <a:lnSpc>
+                <a:spcPct val="110000"/>
+              </a:lnSpc>
+            </a:pPr>
+            <a:r>
+              <a:rPr sz="1000" b="0">
+                <a:solidFill>
+                  <a:srgbClr val="556175"/>
+                </a:solidFill>
+                <a:latin typeface="맑은 고딕"/>
+                <a:ea typeface="맑은 고딕"/>
+                <a:cs typeface="맑은 고딕"/>
+              </a:rPr>
+              <a:t>28</a:t>
+            </a:r>
+          </a:p>
+        </p:txBody>
+      </p:sp>
+      <p:sp>
+        <p:nvSpPr>
+          <p:cNvPr id="6" name="Rounded Rectangle 5"/>
+          <p:cNvSpPr/>
+          <p:nvPr/>
+        </p:nvSpPr>
+        <p:spPr>
+          <a:xfrm>
+            <a:off x="548640" y="1627632"/>
+            <a:ext cx="11094415" cy="347472"/>
+          </a:xfrm>
+          <a:prstGeom prst="roundRect">
+            <a:avLst>
+              <a:gd name="adj" fmla="val 12000"/>
+            </a:avLst>
+          </a:prstGeom>
+          <a:solidFill>
+            <a:srgbClr val="13294B"/>
+          </a:solidFill>
+          <a:ln>
+            <a:noFill/>
+          </a:ln>
+        </p:spPr>
+        <p:txBody>
+          <a:bodyPr rtlCol="0" anchor="ctr"/>
+          <a:lstStyle/>
+          <a:p>
+            <a:pPr algn="ctr"/>
+          </a:p>
+        </p:txBody>
+      </p:sp>
+      <p:sp>
+        <p:nvSpPr>
           <p:cNvPr id="7" name="TextBox 6"/>
           <p:cNvSpPr txBox="1"/>
           <p:nvPr/>
         </p:nvSpPr>
         <p:spPr>
           <a:xfrm>
-            <a:off x="685800" y="2418587"/>
+            <a:off x="685800" y="1627632"/>
             <a:ext cx="2514600" cy="347472"/>
           </a:xfrm>
           <a:prstGeom prst="rect">
@@ -19073,7 +20476,7 @@
                 <a:ea typeface="맑은 고딕"/>
                 <a:cs typeface="맑은 고딕"/>
               </a:rPr>
-              <a:t>교시</a:t>
+              <a:t>쿨러 사건의 장면</a:t>
             </a:r>
           </a:p>
         </p:txBody>
@@ -19086,7 +20489,7 @@
         </p:nvSpPr>
         <p:spPr>
           <a:xfrm>
-            <a:off x="3200400" y="2418587"/>
+            <a:off x="3200400" y="1627632"/>
             <a:ext cx="6248095" cy="347472"/>
           </a:xfrm>
           <a:prstGeom prst="rect">
@@ -19112,7 +20515,7 @@
                 <a:ea typeface="맑은 고딕"/>
                 <a:cs typeface="맑은 고딕"/>
               </a:rPr>
-              <a:t>실습</a:t>
+              <a:t>프로세스의 말</a:t>
             </a:r>
           </a:p>
         </p:txBody>
@@ -19125,7 +20528,7 @@
         </p:nvSpPr>
         <p:spPr>
           <a:xfrm>
-            <a:off x="9448495" y="2418587"/>
+            <a:off x="9448495" y="1627632"/>
             <a:ext cx="2194560" cy="347472"/>
           </a:xfrm>
           <a:prstGeom prst="rect">
@@ -19151,7 +20554,7 @@
                 <a:ea typeface="맑은 고딕"/>
                 <a:cs typeface="맑은 고딕"/>
               </a:rPr>
-              <a:t>남길 결과</a:t>
+              <a:t>헷갈리기 쉬운 짝</a:t>
             </a:r>
           </a:p>
         </p:txBody>
@@ -19164,8 +20567,8 @@
         </p:nvSpPr>
         <p:spPr>
           <a:xfrm>
-            <a:off x="548640" y="2852927"/>
-            <a:ext cx="11094415" cy="850392"/>
+            <a:off x="548640" y="2061972"/>
+            <a:ext cx="11094415" cy="656843"/>
           </a:xfrm>
           <a:prstGeom prst="roundRect">
             <a:avLst>
@@ -19195,8 +20598,8 @@
         </p:nvSpPr>
         <p:spPr>
           <a:xfrm>
-            <a:off x="685800" y="2820923"/>
-            <a:ext cx="2514600" cy="914400"/>
+            <a:off x="685800" y="2029968"/>
+            <a:ext cx="2514600" cy="720851"/>
           </a:xfrm>
           <a:prstGeom prst="rect">
             <a:avLst/>
@@ -19221,7 +20624,7 @@
                 <a:ea typeface="맑은 고딕"/>
                 <a:cs typeface="맑은 고딕"/>
               </a:rPr>
-              <a:t>2교시</a:t>
+              <a:t>경보가 도착해 처리 건이 열렸다</a:t>
             </a:r>
           </a:p>
         </p:txBody>
@@ -19234,8 +20637,8 @@
         </p:nvSpPr>
         <p:spPr>
           <a:xfrm>
-            <a:off x="3200400" y="2820923"/>
-            <a:ext cx="6156655" cy="914400"/>
+            <a:off x="3200400" y="2029968"/>
+            <a:ext cx="6156655" cy="720851"/>
           </a:xfrm>
           <a:prstGeom prst="rect">
             <a:avLst/>
@@ -19260,7 +20663,7 @@
                 <a:ea typeface="맑은 고딕"/>
                 <a:cs typeface="맑은 고딕"/>
               </a:rPr>
-              <a:t>기본 승인 흐름에서</a:t>
+              <a:t>메시지 시작 이벤트</a:t>
             </a:r>
           </a:p>
           <a:p>
@@ -19278,7 +20681,7 @@
                 <a:ea typeface="맑은 고딕"/>
                 <a:cs typeface="맑은 고딕"/>
               </a:rPr>
-              <a:t>설비 대응 흐름 만들기</a:t>
+              <a:t>프로세스에서 처리 건 하나</a:t>
             </a:r>
           </a:p>
         </p:txBody>
@@ -19291,8 +20694,8 @@
         </p:nvSpPr>
         <p:spPr>
           <a:xfrm>
-            <a:off x="9448495" y="2820923"/>
-            <a:ext cx="2103120" cy="914400"/>
+            <a:off x="9448495" y="2029968"/>
+            <a:ext cx="2103120" cy="720851"/>
           </a:xfrm>
           <a:prstGeom prst="rect">
             <a:avLst/>
@@ -19317,25 +20720,7 @@
                 <a:ea typeface="맑은 고딕"/>
                 <a:cs typeface="맑은 고딕"/>
               </a:rPr>
-              <a:t>레인에 배치한</a:t>
-            </a:r>
-          </a:p>
-          <a:p>
-            <a:pPr algn="l" eaLnBrk="0">
-              <a:lnSpc>
-                <a:spcPct val="110000"/>
-              </a:lnSpc>
-            </a:pPr>
-            <a:r>
-              <a:rPr sz="1250" b="1">
-                <a:solidFill>
-                  <a:srgbClr val="556175"/>
-                </a:solidFill>
-                <a:latin typeface="맑은 고딕"/>
-                <a:ea typeface="맑은 고딕"/>
-                <a:cs typeface="맑은 고딕"/>
-              </a:rPr>
-              <a:t>설비 대응 흐름</a:t>
+              <a:t>프로세스와 처리 건</a:t>
             </a:r>
           </a:p>
         </p:txBody>
@@ -19348,8 +20733,8 @@
         </p:nvSpPr>
         <p:spPr>
           <a:xfrm>
-            <a:off x="548640" y="3767327"/>
-            <a:ext cx="11094415" cy="850392"/>
+            <a:off x="548640" y="2782824"/>
+            <a:ext cx="11094415" cy="656843"/>
           </a:xfrm>
           <a:prstGeom prst="roundRect">
             <a:avLst>
@@ -19379,8 +20764,8 @@
         </p:nvSpPr>
         <p:spPr>
           <a:xfrm>
-            <a:off x="685800" y="3735323"/>
-            <a:ext cx="2514600" cy="914400"/>
+            <a:off x="685800" y="2750820"/>
+            <a:ext cx="2514600" cy="720851"/>
           </a:xfrm>
           <a:prstGeom prst="rect">
             <a:avLst/>
@@ -19405,7 +20790,7 @@
                 <a:ea typeface="맑은 고딕"/>
                 <a:cs typeface="맑은 고딕"/>
               </a:rPr>
-              <a:t>3교시</a:t>
+              <a:t>추천안이 나왔지만 팬은 그대로다</a:t>
             </a:r>
           </a:p>
         </p:txBody>
@@ -19418,8 +20803,8 @@
         </p:nvSpPr>
         <p:spPr>
           <a:xfrm>
-            <a:off x="3200400" y="3735323"/>
-            <a:ext cx="6156655" cy="914400"/>
+            <a:off x="3200400" y="2750820"/>
+            <a:ext cx="6156655" cy="720851"/>
           </a:xfrm>
           <a:prstGeom prst="rect">
             <a:avLst/>
@@ -19444,7 +20829,7 @@
                 <a:ea typeface="맑은 고딕"/>
                 <a:cs typeface="맑은 고딕"/>
               </a:rPr>
-              <a:t>승인 · 거절 · 지연 경로 완성하기</a:t>
+              <a:t>Task 하나가 끝났다</a:t>
             </a:r>
           </a:p>
         </p:txBody>
@@ -19457,8 +20842,8 @@
         </p:nvSpPr>
         <p:spPr>
           <a:xfrm>
-            <a:off x="9448495" y="3735323"/>
-            <a:ext cx="2103120" cy="914400"/>
+            <a:off x="9448495" y="2750820"/>
+            <a:ext cx="2103120" cy="720851"/>
           </a:xfrm>
           <a:prstGeom prst="rect">
             <a:avLst/>
@@ -19483,25 +20868,7 @@
                 <a:ea typeface="맑은 고딕"/>
                 <a:cs typeface="맑은 고딕"/>
               </a:rPr>
-              <a:t>거절의 끝과</a:t>
-            </a:r>
-          </a:p>
-          <a:p>
-            <a:pPr algn="l" eaLnBrk="0">
-              <a:lnSpc>
-                <a:spcPct val="110000"/>
-              </a:lnSpc>
-            </a:pPr>
-            <a:r>
-              <a:rPr sz="1250" b="1">
-                <a:solidFill>
-                  <a:srgbClr val="556175"/>
-                </a:solidFill>
-                <a:latin typeface="맑은 고딕"/>
-                <a:ea typeface="맑은 고딕"/>
-                <a:cs typeface="맑은 고딕"/>
-              </a:rPr>
-              <a:t>취소하지 않는 알림</a:t>
+              <a:t>Task의 끝과 처리 건의 끝</a:t>
             </a:r>
           </a:p>
         </p:txBody>
@@ -19514,8 +20881,470 @@
         </p:nvSpPr>
         <p:spPr>
           <a:xfrm>
-            <a:off x="548640" y="4681727"/>
-            <a:ext cx="11094415" cy="850392"/>
+            <a:off x="548640" y="3503676"/>
+            <a:ext cx="11094415" cy="656843"/>
+          </a:xfrm>
+          <a:prstGeom prst="roundRect">
+            <a:avLst>
+              <a:gd name="adj" fmla="val 8000"/>
+            </a:avLst>
+          </a:prstGeom>
+          <a:solidFill>
+            <a:srgbClr val="F3F6F9"/>
+          </a:solidFill>
+          <a:ln>
+            <a:noFill/>
+          </a:ln>
+        </p:spPr>
+        <p:txBody>
+          <a:bodyPr rtlCol="0" anchor="ctr"/>
+          <a:lstStyle/>
+          <a:p>
+            <a:pPr algn="ctr"/>
+          </a:p>
+        </p:txBody>
+      </p:sp>
+      <p:sp>
+        <p:nvSpPr>
+          <p:cNvPr id="19" name="TextBox 18"/>
+          <p:cNvSpPr txBox="1"/>
+          <p:nvPr/>
+        </p:nvSpPr>
+        <p:spPr>
+          <a:xfrm>
+            <a:off x="685800" y="3471672"/>
+            <a:ext cx="2514600" cy="720851"/>
+          </a:xfrm>
+          <a:prstGeom prst="rect">
+            <a:avLst/>
+          </a:prstGeom>
+          <a:noFill/>
+        </p:spPr>
+        <p:txBody>
+          <a:bodyPr wrap="square" anchor="ctr"/>
+          <a:lstStyle/>
+          <a:p>
+            <a:pPr algn="l" eaLnBrk="0">
+              <a:lnSpc>
+                <a:spcPct val="110000"/>
+              </a:lnSpc>
+            </a:pPr>
+            <a:r>
+              <a:rPr sz="1600" b="1">
+                <a:solidFill>
+                  <a:srgbClr val="13294B"/>
+                </a:solidFill>
+                <a:latin typeface="맑은 고딕"/>
+                <a:ea typeface="맑은 고딕"/>
+                <a:cs typeface="맑은 고딕"/>
+              </a:rPr>
+              <a:t>운전원 승인에서 기다린다</a:t>
+            </a:r>
+          </a:p>
+        </p:txBody>
+      </p:sp>
+      <p:sp>
+        <p:nvSpPr>
+          <p:cNvPr id="20" name="TextBox 19"/>
+          <p:cNvSpPr txBox="1"/>
+          <p:nvPr/>
+        </p:nvSpPr>
+        <p:spPr>
+          <a:xfrm>
+            <a:off x="3200400" y="3471672"/>
+            <a:ext cx="6156655" cy="720851"/>
+          </a:xfrm>
+          <a:prstGeom prst="rect">
+            <a:avLst/>
+          </a:prstGeom>
+          <a:noFill/>
+        </p:spPr>
+        <p:txBody>
+          <a:bodyPr wrap="square" anchor="ctr"/>
+          <a:lstStyle/>
+          <a:p>
+            <a:pPr algn="l" eaLnBrk="0">
+              <a:lnSpc>
+                <a:spcPct val="110000"/>
+              </a:lnSpc>
+            </a:pPr>
+            <a:r>
+              <a:rPr sz="1400" b="0">
+                <a:solidFill>
+                  <a:srgbClr val="1F2A3A"/>
+                </a:solidFill>
+                <a:latin typeface="맑은 고딕"/>
+                <a:ea typeface="맑은 고딕"/>
+                <a:cs typeface="맑은 고딕"/>
+              </a:rPr>
+              <a:t>토큰이 사용자 작업에 머문 RUNNING</a:t>
+            </a:r>
+          </a:p>
+        </p:txBody>
+      </p:sp>
+      <p:sp>
+        <p:nvSpPr>
+          <p:cNvPr id="21" name="TextBox 20"/>
+          <p:cNvSpPr txBox="1"/>
+          <p:nvPr/>
+        </p:nvSpPr>
+        <p:spPr>
+          <a:xfrm>
+            <a:off x="9448495" y="3471672"/>
+            <a:ext cx="2103120" cy="720851"/>
+          </a:xfrm>
+          <a:prstGeom prst="rect">
+            <a:avLst/>
+          </a:prstGeom>
+          <a:noFill/>
+        </p:spPr>
+        <p:txBody>
+          <a:bodyPr wrap="square" anchor="ctr"/>
+          <a:lstStyle/>
+          <a:p>
+            <a:pPr algn="l" eaLnBrk="0">
+              <a:lnSpc>
+                <a:spcPct val="110000"/>
+              </a:lnSpc>
+            </a:pPr>
+            <a:r>
+              <a:rPr sz="1250" b="1">
+                <a:solidFill>
+                  <a:srgbClr val="556175"/>
+                </a:solidFill>
+                <a:latin typeface="맑은 고딕"/>
+                <a:ea typeface="맑은 고딕"/>
+                <a:cs typeface="맑은 고딕"/>
+              </a:rPr>
+              <a:t>승인 대기와 오류</a:t>
+            </a:r>
+          </a:p>
+        </p:txBody>
+      </p:sp>
+      <p:sp>
+        <p:nvSpPr>
+          <p:cNvPr id="22" name="Rounded Rectangle 21"/>
+          <p:cNvSpPr/>
+          <p:nvPr/>
+        </p:nvSpPr>
+        <p:spPr>
+          <a:xfrm>
+            <a:off x="548640" y="4224528"/>
+            <a:ext cx="11094415" cy="656843"/>
+          </a:xfrm>
+          <a:prstGeom prst="roundRect">
+            <a:avLst>
+              <a:gd name="adj" fmla="val 8000"/>
+            </a:avLst>
+          </a:prstGeom>
+          <a:solidFill>
+            <a:srgbClr val="F3F6F9"/>
+          </a:solidFill>
+          <a:ln>
+            <a:noFill/>
+          </a:ln>
+        </p:spPr>
+        <p:txBody>
+          <a:bodyPr rtlCol="0" anchor="ctr"/>
+          <a:lstStyle/>
+          <a:p>
+            <a:pPr algn="ctr"/>
+          </a:p>
+        </p:txBody>
+      </p:sp>
+      <p:sp>
+        <p:nvSpPr>
+          <p:cNvPr id="23" name="TextBox 22"/>
+          <p:cNvSpPr txBox="1"/>
+          <p:nvPr/>
+        </p:nvSpPr>
+        <p:spPr>
+          <a:xfrm>
+            <a:off x="685800" y="4192524"/>
+            <a:ext cx="2514600" cy="720851"/>
+          </a:xfrm>
+          <a:prstGeom prst="rect">
+            <a:avLst/>
+          </a:prstGeom>
+          <a:noFill/>
+        </p:spPr>
+        <p:txBody>
+          <a:bodyPr wrap="square" anchor="ctr"/>
+          <a:lstStyle/>
+          <a:p>
+            <a:pPr algn="l" eaLnBrk="0">
+              <a:lnSpc>
+                <a:spcPct val="110000"/>
+              </a:lnSpc>
+            </a:pPr>
+            <a:r>
+              <a:rPr sz="1600" b="1">
+                <a:solidFill>
+                  <a:srgbClr val="13294B"/>
+                </a:solidFill>
+                <a:latin typeface="맑은 고딕"/>
+                <a:ea typeface="맑은 고딕"/>
+                <a:cs typeface="맑은 고딕"/>
+              </a:rPr>
+              <a:t>승인? 게이트웨이에서 승인 쪽으로 간다</a:t>
+            </a:r>
+          </a:p>
+        </p:txBody>
+      </p:sp>
+      <p:sp>
+        <p:nvSpPr>
+          <p:cNvPr id="24" name="TextBox 23"/>
+          <p:cNvSpPr txBox="1"/>
+          <p:nvPr/>
+        </p:nvSpPr>
+        <p:spPr>
+          <a:xfrm>
+            <a:off x="3200400" y="4192524"/>
+            <a:ext cx="6156655" cy="720851"/>
+          </a:xfrm>
+          <a:prstGeom prst="rect">
+            <a:avLst/>
+          </a:prstGeom>
+          <a:noFill/>
+        </p:spPr>
+        <p:txBody>
+          <a:bodyPr wrap="square" anchor="ctr"/>
+          <a:lstStyle/>
+          <a:p>
+            <a:pPr algn="l" eaLnBrk="0">
+              <a:lnSpc>
+                <a:spcPct val="110000"/>
+              </a:lnSpc>
+            </a:pPr>
+            <a:r>
+              <a:rPr sz="1400" b="0">
+                <a:solidFill>
+                  <a:srgbClr val="1F2A3A"/>
+                </a:solidFill>
+                <a:latin typeface="맑은 고딕"/>
+                <a:ea typeface="맑은 고딕"/>
+                <a:cs typeface="맑은 고딕"/>
+              </a:rPr>
+              <a:t>approval 변수를 읽는 조건</a:t>
+            </a:r>
+          </a:p>
+        </p:txBody>
+      </p:sp>
+      <p:sp>
+        <p:nvSpPr>
+          <p:cNvPr id="25" name="TextBox 24"/>
+          <p:cNvSpPr txBox="1"/>
+          <p:nvPr/>
+        </p:nvSpPr>
+        <p:spPr>
+          <a:xfrm>
+            <a:off x="9448495" y="4192524"/>
+            <a:ext cx="2103120" cy="720851"/>
+          </a:xfrm>
+          <a:prstGeom prst="rect">
+            <a:avLst/>
+          </a:prstGeom>
+          <a:noFill/>
+        </p:spPr>
+        <p:txBody>
+          <a:bodyPr wrap="square" anchor="ctr"/>
+          <a:lstStyle/>
+          <a:p>
+            <a:pPr algn="l" eaLnBrk="0">
+              <a:lnSpc>
+                <a:spcPct val="110000"/>
+              </a:lnSpc>
+            </a:pPr>
+            <a:r>
+              <a:rPr sz="1250" b="1">
+                <a:solidFill>
+                  <a:srgbClr val="556175"/>
+                </a:solidFill>
+                <a:latin typeface="맑은 고딕"/>
+                <a:ea typeface="맑은 고딕"/>
+                <a:cs typeface="맑은 고딕"/>
+              </a:rPr>
+              <a:t>에이전트의 판단과 갈림의 조건</a:t>
+            </a:r>
+          </a:p>
+        </p:txBody>
+      </p:sp>
+      <p:sp>
+        <p:nvSpPr>
+          <p:cNvPr id="26" name="Rounded Rectangle 25"/>
+          <p:cNvSpPr/>
+          <p:nvPr/>
+        </p:nvSpPr>
+        <p:spPr>
+          <a:xfrm>
+            <a:off x="548640" y="4945380"/>
+            <a:ext cx="11094415" cy="656843"/>
+          </a:xfrm>
+          <a:prstGeom prst="roundRect">
+            <a:avLst>
+              <a:gd name="adj" fmla="val 8000"/>
+            </a:avLst>
+          </a:prstGeom>
+          <a:solidFill>
+            <a:srgbClr val="F3F6F9"/>
+          </a:solidFill>
+          <a:ln>
+            <a:noFill/>
+          </a:ln>
+        </p:spPr>
+        <p:txBody>
+          <a:bodyPr rtlCol="0" anchor="ctr"/>
+          <a:lstStyle/>
+          <a:p>
+            <a:pPr algn="ctr"/>
+          </a:p>
+        </p:txBody>
+      </p:sp>
+      <p:sp>
+        <p:nvSpPr>
+          <p:cNvPr id="27" name="TextBox 26"/>
+          <p:cNvSpPr txBox="1"/>
+          <p:nvPr/>
+        </p:nvSpPr>
+        <p:spPr>
+          <a:xfrm>
+            <a:off x="685800" y="4913376"/>
+            <a:ext cx="2514600" cy="720851"/>
+          </a:xfrm>
+          <a:prstGeom prst="rect">
+            <a:avLst/>
+          </a:prstGeom>
+          <a:noFill/>
+        </p:spPr>
+        <p:txBody>
+          <a:bodyPr wrap="square" anchor="ctr"/>
+          <a:lstStyle/>
+          <a:p>
+            <a:pPr algn="l" eaLnBrk="0">
+              <a:lnSpc>
+                <a:spcPct val="110000"/>
+              </a:lnSpc>
+            </a:pPr>
+            <a:r>
+              <a:rPr sz="1600" b="1">
+                <a:solidFill>
+                  <a:srgbClr val="13294B"/>
+                </a:solidFill>
+                <a:latin typeface="맑은 고딕"/>
+                <a:ea typeface="맑은 고딕"/>
+                <a:cs typeface="맑은 고딕"/>
+              </a:rPr>
+              <a:t>운전원이 기한 안에 승인했다</a:t>
+            </a:r>
+          </a:p>
+        </p:txBody>
+      </p:sp>
+      <p:sp>
+        <p:nvSpPr>
+          <p:cNvPr id="28" name="TextBox 27"/>
+          <p:cNvSpPr txBox="1"/>
+          <p:nvPr/>
+        </p:nvSpPr>
+        <p:spPr>
+          <a:xfrm>
+            <a:off x="3200400" y="4913376"/>
+            <a:ext cx="6156655" cy="720851"/>
+          </a:xfrm>
+          <a:prstGeom prst="rect">
+            <a:avLst/>
+          </a:prstGeom>
+          <a:noFill/>
+        </p:spPr>
+        <p:txBody>
+          <a:bodyPr wrap="square" anchor="ctr"/>
+          <a:lstStyle/>
+          <a:p>
+            <a:pPr algn="l" eaLnBrk="0">
+              <a:lnSpc>
+                <a:spcPct val="110000"/>
+              </a:lnSpc>
+            </a:pPr>
+            <a:r>
+              <a:rPr sz="1400" b="0">
+                <a:solidFill>
+                  <a:srgbClr val="1F2A3A"/>
+                </a:solidFill>
+                <a:latin typeface="맑은 고딕"/>
+                <a:ea typeface="맑은 고딕"/>
+                <a:cs typeface="맑은 고딕"/>
+              </a:rPr>
+              <a:t>비중단형 경계 타이머가 함께 거둬짐</a:t>
+            </a:r>
+          </a:p>
+          <a:p>
+            <a:pPr algn="l" eaLnBrk="0">
+              <a:lnSpc>
+                <a:spcPct val="110000"/>
+              </a:lnSpc>
+            </a:pPr>
+            <a:r>
+              <a:rPr sz="1400" b="0">
+                <a:solidFill>
+                  <a:srgbClr val="1F2A3A"/>
+                </a:solidFill>
+                <a:latin typeface="맑은 고딕"/>
+                <a:ea typeface="맑은 고딕"/>
+                <a:cs typeface="맑은 고딕"/>
+              </a:rPr>
+              <a:t>늦었다면 알림 가지만 열림</a:t>
+            </a:r>
+          </a:p>
+        </p:txBody>
+      </p:sp>
+      <p:sp>
+        <p:nvSpPr>
+          <p:cNvPr id="29" name="TextBox 28"/>
+          <p:cNvSpPr txBox="1"/>
+          <p:nvPr/>
+        </p:nvSpPr>
+        <p:spPr>
+          <a:xfrm>
+            <a:off x="9448495" y="4913376"/>
+            <a:ext cx="2103120" cy="720851"/>
+          </a:xfrm>
+          <a:prstGeom prst="rect">
+            <a:avLst/>
+          </a:prstGeom>
+          <a:noFill/>
+        </p:spPr>
+        <p:txBody>
+          <a:bodyPr wrap="square" anchor="ctr"/>
+          <a:lstStyle/>
+          <a:p>
+            <a:pPr algn="l" eaLnBrk="0">
+              <a:lnSpc>
+                <a:spcPct val="110000"/>
+              </a:lnSpc>
+            </a:pPr>
+            <a:r>
+              <a:rPr sz="1250" b="1">
+                <a:solidFill>
+                  <a:srgbClr val="556175"/>
+                </a:solidFill>
+                <a:latin typeface="맑은 고딕"/>
+                <a:ea typeface="맑은 고딕"/>
+                <a:cs typeface="맑은 고딕"/>
+              </a:rPr>
+              <a:t>알림과 종료</a:t>
+            </a:r>
+          </a:p>
+        </p:txBody>
+      </p:sp>
+      <p:sp>
+        <p:nvSpPr>
+          <p:cNvPr id="30" name="Rounded Rectangle 29"/>
+          <p:cNvSpPr/>
+          <p:nvPr/>
+        </p:nvSpPr>
+        <p:spPr>
+          <a:xfrm>
+            <a:off x="548640" y="5666232"/>
+            <a:ext cx="11094415" cy="656843"/>
           </a:xfrm>
           <a:prstGeom prst="roundRect">
             <a:avLst>
@@ -19539,14 +21368,824 @@
       </p:sp>
       <p:sp>
         <p:nvSpPr>
+          <p:cNvPr id="31" name="TextBox 30"/>
+          <p:cNvSpPr txBox="1"/>
+          <p:nvPr/>
+        </p:nvSpPr>
+        <p:spPr>
+          <a:xfrm>
+            <a:off x="685800" y="5634228"/>
+            <a:ext cx="2514600" cy="720851"/>
+          </a:xfrm>
+          <a:prstGeom prst="rect">
+            <a:avLst/>
+          </a:prstGeom>
+          <a:noFill/>
+        </p:spPr>
+        <p:txBody>
+          <a:bodyPr wrap="square" anchor="ctr"/>
+          <a:lstStyle/>
+          <a:p>
+            <a:pPr algn="l" eaLnBrk="0">
+              <a:lnSpc>
+                <a:spcPct val="110000"/>
+              </a:lnSpc>
+            </a:pPr>
+            <a:r>
+              <a:rPr sz="1600" b="1">
+                <a:solidFill>
+                  <a:srgbClr val="13294B"/>
+                </a:solidFill>
+                <a:latin typeface="맑은 고딕"/>
+                <a:ea typeface="맑은 고딕"/>
+                <a:cs typeface="맑은 고딕"/>
+              </a:rPr>
+              <a:t>결과 보고: 정상으로 끝났다</a:t>
+            </a:r>
+          </a:p>
+        </p:txBody>
+      </p:sp>
+      <p:sp>
+        <p:nvSpPr>
+          <p:cNvPr id="32" name="TextBox 31"/>
+          <p:cNvSpPr txBox="1"/>
+          <p:nvPr/>
+        </p:nvSpPr>
+        <p:spPr>
+          <a:xfrm>
+            <a:off x="3200400" y="5634228"/>
+            <a:ext cx="6156655" cy="720851"/>
+          </a:xfrm>
+          <a:prstGeom prst="rect">
+            <a:avLst/>
+          </a:prstGeom>
+          <a:noFill/>
+        </p:spPr>
+        <p:txBody>
+          <a:bodyPr wrap="square" anchor="ctr"/>
+          <a:lstStyle/>
+          <a:p>
+            <a:pPr algn="l" eaLnBrk="0">
+              <a:lnSpc>
+                <a:spcPct val="110000"/>
+              </a:lnSpc>
+            </a:pPr>
+            <a:r>
+              <a:rPr sz="1400" b="0">
+                <a:solidFill>
+                  <a:srgbClr val="1F2A3A"/>
+                </a:solidFill>
+                <a:latin typeface="맑은 고딕"/>
+                <a:ea typeface="맑은 고딕"/>
+                <a:cs typeface="맑은 고딕"/>
+              </a:rPr>
+              <a:t>끝 이벤트 E_end · COMPLETED</a:t>
+            </a:r>
+          </a:p>
+        </p:txBody>
+      </p:sp>
+      <p:sp>
+        <p:nvSpPr>
+          <p:cNvPr id="33" name="TextBox 32"/>
+          <p:cNvSpPr txBox="1"/>
+          <p:nvPr/>
+        </p:nvSpPr>
+        <p:spPr>
+          <a:xfrm>
+            <a:off x="9448495" y="5634228"/>
+            <a:ext cx="2103120" cy="720851"/>
+          </a:xfrm>
+          <a:prstGeom prst="rect">
+            <a:avLst/>
+          </a:prstGeom>
+          <a:noFill/>
+        </p:spPr>
+        <p:txBody>
+          <a:bodyPr wrap="square" anchor="ctr"/>
+          <a:lstStyle/>
+          <a:p>
+            <a:pPr algn="l" eaLnBrk="0">
+              <a:lnSpc>
+                <a:spcPct val="110000"/>
+              </a:lnSpc>
+            </a:pPr>
+            <a:r>
+              <a:rPr sz="1250" b="1">
+                <a:solidFill>
+                  <a:srgbClr val="1A6FC4"/>
+                </a:solidFill>
+                <a:latin typeface="맑은 고딕"/>
+                <a:ea typeface="맑은 고딕"/>
+                <a:cs typeface="맑은 고딕"/>
+              </a:rPr>
+              <a:t>COMPLETED와 성공</a:t>
+            </a:r>
+          </a:p>
+        </p:txBody>
+      </p:sp>
+    </p:spTree>
+  </p:cSld>
+  <p:clrMapOvr>
+    <a:masterClrMapping/>
+  </p:clrMapOvr>
+</p:sld>
+</file>
+
+<file path=ppt/slides/slide29.xml><?xml version="1.0" encoding="utf-8"?>
+<p:sld xmlns:a="http://schemas.openxmlformats.org/drawingml/2006/main" xmlns:p="http://schemas.openxmlformats.org/presentationml/2006/main" xmlns:r="http://schemas.openxmlformats.org/officeDocument/2006/relationships">
+  <p:cSld>
+    <p:bg>
+      <p:bgPr>
+        <a:solidFill>
+          <a:srgbClr val="FFFFFF"/>
+        </a:solidFill>
+        <a:effectLst/>
+      </p:bgPr>
+    </p:bg>
+    <p:spTree>
+      <p:nvGrpSpPr>
+        <p:cNvPr id="1" name=""/>
+        <p:cNvGrpSpPr/>
+        <p:nvPr/>
+      </p:nvGrpSpPr>
+      <p:grpSpPr/>
+      <p:sp>
+        <p:nvSpPr>
+          <p:cNvPr id="2" name="TextBox 1"/>
+          <p:cNvSpPr txBox="1"/>
+          <p:nvPr/>
+        </p:nvSpPr>
+        <p:spPr>
+          <a:xfrm>
+            <a:off x="457200" y="329184"/>
+            <a:ext cx="11277295" cy="603504"/>
+          </a:xfrm>
+          <a:prstGeom prst="rect">
+            <a:avLst/>
+          </a:prstGeom>
+          <a:noFill/>
+        </p:spPr>
+        <p:txBody>
+          <a:bodyPr wrap="square" anchor="ctr"/>
+          <a:lstStyle/>
+          <a:p>
+            <a:pPr algn="l" eaLnBrk="0">
+              <a:lnSpc>
+                <a:spcPct val="110000"/>
+              </a:lnSpc>
+            </a:pPr>
+            <a:r>
+              <a:rPr sz="2800" b="1">
+                <a:solidFill>
+                  <a:srgbClr val="13294B"/>
+                </a:solidFill>
+                <a:latin typeface="맑은 고딕"/>
+                <a:ea typeface="맑은 고딕"/>
+                <a:cs typeface="맑은 고딕"/>
+              </a:rPr>
+              <a:t>오늘 다룬 핵심 개념과 주요 용어 정리</a:t>
+            </a:r>
+          </a:p>
+        </p:txBody>
+      </p:sp>
+      <p:sp>
+        <p:nvSpPr>
+          <p:cNvPr id="3" name="TextBox 2"/>
+          <p:cNvSpPr txBox="1"/>
+          <p:nvPr/>
+        </p:nvSpPr>
+        <p:spPr>
+          <a:xfrm>
+            <a:off x="457200" y="932688"/>
+            <a:ext cx="11277295" cy="420624"/>
+          </a:xfrm>
+          <a:prstGeom prst="rect">
+            <a:avLst/>
+          </a:prstGeom>
+          <a:noFill/>
+        </p:spPr>
+        <p:txBody>
+          <a:bodyPr wrap="square" anchor="ctr"/>
+          <a:lstStyle/>
+          <a:p>
+            <a:pPr algn="l" eaLnBrk="0">
+              <a:lnSpc>
+                <a:spcPct val="110000"/>
+              </a:lnSpc>
+            </a:pPr>
+            <a:r>
+              <a:rPr sz="1600" b="0">
+                <a:solidFill>
+                  <a:srgbClr val="556175"/>
+                </a:solidFill>
+                <a:latin typeface="맑은 고딕"/>
+                <a:ea typeface="맑은 고딕"/>
+                <a:cs typeface="맑은 고딕"/>
+              </a:rPr>
+              <a:t>본문에서 정의한 여섯 용어의 정식 명칭과 뜻을 한곳에 모은다.</a:t>
+            </a:r>
+          </a:p>
+        </p:txBody>
+      </p:sp>
+      <p:sp>
+        <p:nvSpPr>
+          <p:cNvPr id="4" name="Rectangle 3"/>
+          <p:cNvSpPr/>
+          <p:nvPr/>
+        </p:nvSpPr>
+        <p:spPr>
+          <a:xfrm>
+            <a:off x="548640" y="1408176"/>
+            <a:ext cx="11094415" cy="18288"/>
+          </a:xfrm>
+          <a:prstGeom prst="rect">
+            <a:avLst/>
+          </a:prstGeom>
+          <a:solidFill>
+            <a:srgbClr val="D3D9E1"/>
+          </a:solidFill>
+          <a:ln>
+            <a:noFill/>
+          </a:ln>
+        </p:spPr>
+        <p:txBody>
+          <a:bodyPr rtlCol="0" anchor="ctr"/>
+          <a:lstStyle/>
+          <a:p>
+            <a:pPr algn="ctr"/>
+          </a:p>
+        </p:txBody>
+      </p:sp>
+      <p:sp>
+        <p:nvSpPr>
+          <p:cNvPr id="5" name="TextBox 4"/>
+          <p:cNvSpPr txBox="1"/>
+          <p:nvPr/>
+        </p:nvSpPr>
+        <p:spPr>
+          <a:xfrm>
+            <a:off x="10911535" y="6473952"/>
+            <a:ext cx="822960" cy="274320"/>
+          </a:xfrm>
+          <a:prstGeom prst="rect">
+            <a:avLst/>
+          </a:prstGeom>
+          <a:noFill/>
+        </p:spPr>
+        <p:txBody>
+          <a:bodyPr wrap="square" anchor="t"/>
+          <a:lstStyle/>
+          <a:p>
+            <a:pPr algn="r" eaLnBrk="0">
+              <a:lnSpc>
+                <a:spcPct val="110000"/>
+              </a:lnSpc>
+            </a:pPr>
+            <a:r>
+              <a:rPr sz="1000" b="0">
+                <a:solidFill>
+                  <a:srgbClr val="556175"/>
+                </a:solidFill>
+                <a:latin typeface="맑은 고딕"/>
+                <a:ea typeface="맑은 고딕"/>
+                <a:cs typeface="맑은 고딕"/>
+              </a:rPr>
+              <a:t>29</a:t>
+            </a:r>
+          </a:p>
+        </p:txBody>
+      </p:sp>
+      <p:sp>
+        <p:nvSpPr>
+          <p:cNvPr id="6" name="Rounded Rectangle 5"/>
+          <p:cNvSpPr/>
+          <p:nvPr/>
+        </p:nvSpPr>
+        <p:spPr>
+          <a:xfrm>
+            <a:off x="548640" y="1627632"/>
+            <a:ext cx="11094415" cy="347472"/>
+          </a:xfrm>
+          <a:prstGeom prst="roundRect">
+            <a:avLst>
+              <a:gd name="adj" fmla="val 12000"/>
+            </a:avLst>
+          </a:prstGeom>
+          <a:solidFill>
+            <a:srgbClr val="13294B"/>
+          </a:solidFill>
+          <a:ln>
+            <a:noFill/>
+          </a:ln>
+        </p:spPr>
+        <p:txBody>
+          <a:bodyPr rtlCol="0" anchor="ctr"/>
+          <a:lstStyle/>
+          <a:p>
+            <a:pPr algn="ctr"/>
+          </a:p>
+        </p:txBody>
+      </p:sp>
+      <p:sp>
+        <p:nvSpPr>
+          <p:cNvPr id="7" name="TextBox 6"/>
+          <p:cNvSpPr txBox="1"/>
+          <p:nvPr/>
+        </p:nvSpPr>
+        <p:spPr>
+          <a:xfrm>
+            <a:off x="685800" y="1627632"/>
+            <a:ext cx="2514600" cy="347472"/>
+          </a:xfrm>
+          <a:prstGeom prst="rect">
+            <a:avLst/>
+          </a:prstGeom>
+          <a:noFill/>
+        </p:spPr>
+        <p:txBody>
+          <a:bodyPr wrap="square" anchor="ctr"/>
+          <a:lstStyle/>
+          <a:p>
+            <a:pPr algn="l" eaLnBrk="0">
+              <a:lnSpc>
+                <a:spcPct val="110000"/>
+              </a:lnSpc>
+            </a:pPr>
+            <a:r>
+              <a:rPr sz="1300" b="1">
+                <a:solidFill>
+                  <a:srgbClr val="FFFFFF"/>
+                </a:solidFill>
+                <a:latin typeface="맑은 고딕"/>
+                <a:ea typeface="맑은 고딕"/>
+                <a:cs typeface="맑은 고딕"/>
+              </a:rPr>
+              <a:t>용어</a:t>
+            </a:r>
+          </a:p>
+        </p:txBody>
+      </p:sp>
+      <p:sp>
+        <p:nvSpPr>
+          <p:cNvPr id="8" name="TextBox 7"/>
+          <p:cNvSpPr txBox="1"/>
+          <p:nvPr/>
+        </p:nvSpPr>
+        <p:spPr>
+          <a:xfrm>
+            <a:off x="3200400" y="1627632"/>
+            <a:ext cx="8442655" cy="347472"/>
+          </a:xfrm>
+          <a:prstGeom prst="rect">
+            <a:avLst/>
+          </a:prstGeom>
+          <a:noFill/>
+        </p:spPr>
+        <p:txBody>
+          <a:bodyPr wrap="square" anchor="ctr"/>
+          <a:lstStyle/>
+          <a:p>
+            <a:pPr algn="l" eaLnBrk="0">
+              <a:lnSpc>
+                <a:spcPct val="110000"/>
+              </a:lnSpc>
+            </a:pPr>
+            <a:r>
+              <a:rPr sz="1300" b="1">
+                <a:solidFill>
+                  <a:srgbClr val="FFFFFF"/>
+                </a:solidFill>
+                <a:latin typeface="맑은 고딕"/>
+                <a:ea typeface="맑은 고딕"/>
+                <a:cs typeface="맑은 고딕"/>
+              </a:rPr>
+              <a:t>정식 명칭 · 풀이</a:t>
+            </a:r>
+          </a:p>
+        </p:txBody>
+      </p:sp>
+      <p:sp>
+        <p:nvSpPr>
+          <p:cNvPr id="9" name="Rounded Rectangle 8"/>
+          <p:cNvSpPr/>
+          <p:nvPr/>
+        </p:nvSpPr>
+        <p:spPr>
+          <a:xfrm>
+            <a:off x="548640" y="2061972"/>
+            <a:ext cx="11094415" cy="656843"/>
+          </a:xfrm>
+          <a:prstGeom prst="roundRect">
+            <a:avLst>
+              <a:gd name="adj" fmla="val 8000"/>
+            </a:avLst>
+          </a:prstGeom>
+          <a:solidFill>
+            <a:srgbClr val="F3F6F9"/>
+          </a:solidFill>
+          <a:ln>
+            <a:noFill/>
+          </a:ln>
+        </p:spPr>
+        <p:txBody>
+          <a:bodyPr rtlCol="0" anchor="ctr"/>
+          <a:lstStyle/>
+          <a:p>
+            <a:pPr algn="ctr"/>
+          </a:p>
+        </p:txBody>
+      </p:sp>
+      <p:sp>
+        <p:nvSpPr>
+          <p:cNvPr id="10" name="TextBox 9"/>
+          <p:cNvSpPr txBox="1"/>
+          <p:nvPr/>
+        </p:nvSpPr>
+        <p:spPr>
+          <a:xfrm>
+            <a:off x="685800" y="2029968"/>
+            <a:ext cx="2514600" cy="720851"/>
+          </a:xfrm>
+          <a:prstGeom prst="rect">
+            <a:avLst/>
+          </a:prstGeom>
+          <a:noFill/>
+        </p:spPr>
+        <p:txBody>
+          <a:bodyPr wrap="square" anchor="ctr"/>
+          <a:lstStyle/>
+          <a:p>
+            <a:pPr algn="l" eaLnBrk="0">
+              <a:lnSpc>
+                <a:spcPct val="110000"/>
+              </a:lnSpc>
+            </a:pPr>
+            <a:r>
+              <a:rPr sz="1600" b="1">
+                <a:solidFill>
+                  <a:srgbClr val="13294B"/>
+                </a:solidFill>
+                <a:latin typeface="맑은 고딕"/>
+                <a:ea typeface="맑은 고딕"/>
+                <a:cs typeface="맑은 고딕"/>
+              </a:rPr>
+              <a:t>비즈니스 프로세스</a:t>
+            </a:r>
+          </a:p>
+        </p:txBody>
+      </p:sp>
+      <p:sp>
+        <p:nvSpPr>
+          <p:cNvPr id="11" name="TextBox 10"/>
+          <p:cNvSpPr txBox="1"/>
+          <p:nvPr/>
+        </p:nvSpPr>
+        <p:spPr>
+          <a:xfrm>
+            <a:off x="3200400" y="2029968"/>
+            <a:ext cx="8351215" cy="720851"/>
+          </a:xfrm>
+          <a:prstGeom prst="rect">
+            <a:avLst/>
+          </a:prstGeom>
+          <a:noFill/>
+        </p:spPr>
+        <p:txBody>
+          <a:bodyPr wrap="square" anchor="ctr"/>
+          <a:lstStyle/>
+          <a:p>
+            <a:pPr algn="l" eaLnBrk="0">
+              <a:lnSpc>
+                <a:spcPct val="110000"/>
+              </a:lnSpc>
+            </a:pPr>
+            <a:r>
+              <a:rPr sz="1400" b="0">
+                <a:solidFill>
+                  <a:srgbClr val="1F2A3A"/>
+                </a:solidFill>
+                <a:latin typeface="맑은 고딕"/>
+                <a:ea typeface="맑은 고딕"/>
+                <a:cs typeface="맑은 고딕"/>
+              </a:rPr>
+              <a:t>Business Process</a:t>
+            </a:r>
+          </a:p>
+          <a:p>
+            <a:pPr algn="l" eaLnBrk="0">
+              <a:lnSpc>
+                <a:spcPct val="110000"/>
+              </a:lnSpc>
+            </a:pPr>
+            <a:r>
+              <a:rPr sz="1400" b="0">
+                <a:solidFill>
+                  <a:srgbClr val="1F2A3A"/>
+                </a:solidFill>
+                <a:latin typeface="맑은 고딕"/>
+                <a:ea typeface="맑은 고딕"/>
+                <a:cs typeface="맑은 고딕"/>
+              </a:rPr>
+              <a:t>원하는 결과를 내기 위해 관련된 작업과 흐름을 정한 묶음</a:t>
+            </a:r>
+          </a:p>
+        </p:txBody>
+      </p:sp>
+      <p:sp>
+        <p:nvSpPr>
+          <p:cNvPr id="12" name="Rounded Rectangle 11"/>
+          <p:cNvSpPr/>
+          <p:nvPr/>
+        </p:nvSpPr>
+        <p:spPr>
+          <a:xfrm>
+            <a:off x="548640" y="2782824"/>
+            <a:ext cx="11094415" cy="656843"/>
+          </a:xfrm>
+          <a:prstGeom prst="roundRect">
+            <a:avLst>
+              <a:gd name="adj" fmla="val 8000"/>
+            </a:avLst>
+          </a:prstGeom>
+          <a:solidFill>
+            <a:srgbClr val="F3F6F9"/>
+          </a:solidFill>
+          <a:ln>
+            <a:noFill/>
+          </a:ln>
+        </p:spPr>
+        <p:txBody>
+          <a:bodyPr rtlCol="0" anchor="ctr"/>
+          <a:lstStyle/>
+          <a:p>
+            <a:pPr algn="ctr"/>
+          </a:p>
+        </p:txBody>
+      </p:sp>
+      <p:sp>
+        <p:nvSpPr>
+          <p:cNvPr id="13" name="TextBox 12"/>
+          <p:cNvSpPr txBox="1"/>
+          <p:nvPr/>
+        </p:nvSpPr>
+        <p:spPr>
+          <a:xfrm>
+            <a:off x="685800" y="2750820"/>
+            <a:ext cx="2514600" cy="720851"/>
+          </a:xfrm>
+          <a:prstGeom prst="rect">
+            <a:avLst/>
+          </a:prstGeom>
+          <a:noFill/>
+        </p:spPr>
+        <p:txBody>
+          <a:bodyPr wrap="square" anchor="ctr"/>
+          <a:lstStyle/>
+          <a:p>
+            <a:pPr algn="l" eaLnBrk="0">
+              <a:lnSpc>
+                <a:spcPct val="110000"/>
+              </a:lnSpc>
+            </a:pPr>
+            <a:r>
+              <a:rPr sz="1600" b="1">
+                <a:solidFill>
+                  <a:srgbClr val="13294B"/>
+                </a:solidFill>
+                <a:latin typeface="맑은 고딕"/>
+                <a:ea typeface="맑은 고딕"/>
+                <a:cs typeface="맑은 고딕"/>
+              </a:rPr>
+              <a:t>BPMN</a:t>
+            </a:r>
+          </a:p>
+        </p:txBody>
+      </p:sp>
+      <p:sp>
+        <p:nvSpPr>
+          <p:cNvPr id="14" name="TextBox 13"/>
+          <p:cNvSpPr txBox="1"/>
+          <p:nvPr/>
+        </p:nvSpPr>
+        <p:spPr>
+          <a:xfrm>
+            <a:off x="3200400" y="2750820"/>
+            <a:ext cx="8351215" cy="720851"/>
+          </a:xfrm>
+          <a:prstGeom prst="rect">
+            <a:avLst/>
+          </a:prstGeom>
+          <a:noFill/>
+        </p:spPr>
+        <p:txBody>
+          <a:bodyPr wrap="square" anchor="ctr"/>
+          <a:lstStyle/>
+          <a:p>
+            <a:pPr algn="l" eaLnBrk="0">
+              <a:lnSpc>
+                <a:spcPct val="110000"/>
+              </a:lnSpc>
+            </a:pPr>
+            <a:r>
+              <a:rPr sz="1400" b="0">
+                <a:solidFill>
+                  <a:srgbClr val="1F2A3A"/>
+                </a:solidFill>
+                <a:latin typeface="맑은 고딕"/>
+                <a:ea typeface="맑은 고딕"/>
+                <a:cs typeface="맑은 고딕"/>
+              </a:rPr>
+              <a:t>Business Process Model and Notation</a:t>
+            </a:r>
+          </a:p>
+          <a:p>
+            <a:pPr algn="l" eaLnBrk="0">
+              <a:lnSpc>
+                <a:spcPct val="110000"/>
+              </a:lnSpc>
+            </a:pPr>
+            <a:r>
+              <a:rPr sz="1400" b="0">
+                <a:solidFill>
+                  <a:srgbClr val="1F2A3A"/>
+                </a:solidFill>
+                <a:latin typeface="맑은 고딕"/>
+                <a:ea typeface="맑은 고딕"/>
+                <a:cs typeface="맑은 고딕"/>
+              </a:rPr>
+              <a:t>도형과 선의 뜻을 정해 업무 프로세스를 그리는 표기 표준</a:t>
+            </a:r>
+          </a:p>
+        </p:txBody>
+      </p:sp>
+      <p:sp>
+        <p:nvSpPr>
+          <p:cNvPr id="15" name="Rounded Rectangle 14"/>
+          <p:cNvSpPr/>
+          <p:nvPr/>
+        </p:nvSpPr>
+        <p:spPr>
+          <a:xfrm>
+            <a:off x="548640" y="3503676"/>
+            <a:ext cx="11094415" cy="656843"/>
+          </a:xfrm>
+          <a:prstGeom prst="roundRect">
+            <a:avLst>
+              <a:gd name="adj" fmla="val 8000"/>
+            </a:avLst>
+          </a:prstGeom>
+          <a:solidFill>
+            <a:srgbClr val="F3F6F9"/>
+          </a:solidFill>
+          <a:ln>
+            <a:noFill/>
+          </a:ln>
+        </p:spPr>
+        <p:txBody>
+          <a:bodyPr rtlCol="0" anchor="ctr"/>
+          <a:lstStyle/>
+          <a:p>
+            <a:pPr algn="ctr"/>
+          </a:p>
+        </p:txBody>
+      </p:sp>
+      <p:sp>
+        <p:nvSpPr>
+          <p:cNvPr id="16" name="TextBox 15"/>
+          <p:cNvSpPr txBox="1"/>
+          <p:nvPr/>
+        </p:nvSpPr>
+        <p:spPr>
+          <a:xfrm>
+            <a:off x="685800" y="3471672"/>
+            <a:ext cx="2514600" cy="720851"/>
+          </a:xfrm>
+          <a:prstGeom prst="rect">
+            <a:avLst/>
+          </a:prstGeom>
+          <a:noFill/>
+        </p:spPr>
+        <p:txBody>
+          <a:bodyPr wrap="square" anchor="ctr"/>
+          <a:lstStyle/>
+          <a:p>
+            <a:pPr algn="l" eaLnBrk="0">
+              <a:lnSpc>
+                <a:spcPct val="110000"/>
+              </a:lnSpc>
+            </a:pPr>
+            <a:r>
+              <a:rPr sz="1600" b="1">
+                <a:solidFill>
+                  <a:srgbClr val="13294B"/>
+                </a:solidFill>
+                <a:latin typeface="맑은 고딕"/>
+                <a:ea typeface="맑은 고딕"/>
+                <a:cs typeface="맑은 고딕"/>
+              </a:rPr>
+              <a:t>경계 이벤트</a:t>
+            </a:r>
+          </a:p>
+        </p:txBody>
+      </p:sp>
+      <p:sp>
+        <p:nvSpPr>
+          <p:cNvPr id="17" name="TextBox 16"/>
+          <p:cNvSpPr txBox="1"/>
+          <p:nvPr/>
+        </p:nvSpPr>
+        <p:spPr>
+          <a:xfrm>
+            <a:off x="3200400" y="3471672"/>
+            <a:ext cx="8351215" cy="720851"/>
+          </a:xfrm>
+          <a:prstGeom prst="rect">
+            <a:avLst/>
+          </a:prstGeom>
+          <a:noFill/>
+        </p:spPr>
+        <p:txBody>
+          <a:bodyPr wrap="square" anchor="ctr"/>
+          <a:lstStyle/>
+          <a:p>
+            <a:pPr algn="l" eaLnBrk="0">
+              <a:lnSpc>
+                <a:spcPct val="110000"/>
+              </a:lnSpc>
+            </a:pPr>
+            <a:r>
+              <a:rPr sz="1400" b="0">
+                <a:solidFill>
+                  <a:srgbClr val="1F2A3A"/>
+                </a:solidFill>
+                <a:latin typeface="맑은 고딕"/>
+                <a:ea typeface="맑은 고딕"/>
+                <a:cs typeface="맑은 고딕"/>
+              </a:rPr>
+              <a:t>Boundary Event</a:t>
+            </a:r>
+          </a:p>
+          <a:p>
+            <a:pPr algn="l" eaLnBrk="0">
+              <a:lnSpc>
+                <a:spcPct val="110000"/>
+              </a:lnSpc>
+            </a:pPr>
+            <a:r>
+              <a:rPr sz="1400" b="0">
+                <a:solidFill>
+                  <a:srgbClr val="1F2A3A"/>
+                </a:solidFill>
+                <a:latin typeface="맑은 고딕"/>
+                <a:ea typeface="맑은 고딕"/>
+                <a:cs typeface="맑은 고딕"/>
+              </a:rPr>
+              <a:t>작업 테두리에 붙어 그 작업이 진행 중일 때 생기는 일에 반응하는 이벤트</a:t>
+            </a:r>
+          </a:p>
+        </p:txBody>
+      </p:sp>
+      <p:sp>
+        <p:nvSpPr>
+          <p:cNvPr id="18" name="Rounded Rectangle 17"/>
+          <p:cNvSpPr/>
+          <p:nvPr/>
+        </p:nvSpPr>
+        <p:spPr>
+          <a:xfrm>
+            <a:off x="548640" y="4224528"/>
+            <a:ext cx="11094415" cy="656843"/>
+          </a:xfrm>
+          <a:prstGeom prst="roundRect">
+            <a:avLst>
+              <a:gd name="adj" fmla="val 8000"/>
+            </a:avLst>
+          </a:prstGeom>
+          <a:solidFill>
+            <a:srgbClr val="F3F6F9"/>
+          </a:solidFill>
+          <a:ln>
+            <a:noFill/>
+          </a:ln>
+        </p:spPr>
+        <p:txBody>
+          <a:bodyPr rtlCol="0" anchor="ctr"/>
+          <a:lstStyle/>
+          <a:p>
+            <a:pPr algn="ctr"/>
+          </a:p>
+        </p:txBody>
+      </p:sp>
+      <p:sp>
+        <p:nvSpPr>
           <p:cNvPr id="19" name="TextBox 18"/>
           <p:cNvSpPr txBox="1"/>
           <p:nvPr/>
         </p:nvSpPr>
         <p:spPr>
           <a:xfrm>
-            <a:off x="685800" y="4649723"/>
-            <a:ext cx="2514600" cy="914400"/>
+            <a:off x="685800" y="4192524"/>
+            <a:ext cx="2514600" cy="720851"/>
           </a:xfrm>
           <a:prstGeom prst="rect">
             <a:avLst/>
@@ -19571,7 +22210,7 @@
                 <a:ea typeface="맑은 고딕"/>
                 <a:cs typeface="맑은 고딕"/>
               </a:rPr>
-              <a:t>4교시</a:t>
+              <a:t>프로세스 엔진</a:t>
             </a:r>
           </a:p>
         </p:txBody>
@@ -19584,8 +22223,8 @@
         </p:nvSpPr>
         <p:spPr>
           <a:xfrm>
-            <a:off x="3200400" y="4649723"/>
-            <a:ext cx="6156655" cy="914400"/>
+            <a:off x="3200400" y="4192524"/>
+            <a:ext cx="8351215" cy="720851"/>
           </a:xfrm>
           <a:prstGeom prst="rect">
             <a:avLst/>
@@ -19610,21 +22249,70 @@
                 <a:ea typeface="맑은 고딕"/>
                 <a:cs typeface="맑은 고딕"/>
               </a:rPr>
-              <a:t>BPMN과 등록된 실행 연결 비교하기</a:t>
-            </a:r>
-          </a:p>
-        </p:txBody>
-      </p:sp>
-      <p:sp>
-        <p:nvSpPr>
-          <p:cNvPr id="21" name="TextBox 20"/>
-          <p:cNvSpPr txBox="1"/>
-          <p:nvPr/>
-        </p:nvSpPr>
-        <p:spPr>
-          <a:xfrm>
-            <a:off x="9448495" y="4649723"/>
-            <a:ext cx="2103120" cy="914400"/>
+              <a:t>Process Engine</a:t>
+            </a:r>
+          </a:p>
+          <a:p>
+            <a:pPr algn="l" eaLnBrk="0">
+              <a:lnSpc>
+                <a:spcPct val="110000"/>
+              </a:lnSpc>
+            </a:pPr>
+            <a:r>
+              <a:rPr sz="1400" b="0">
+                <a:solidFill>
+                  <a:srgbClr val="1F2A3A"/>
+                </a:solidFill>
+                <a:latin typeface="맑은 고딕"/>
+                <a:ea typeface="맑은 고딕"/>
+                <a:cs typeface="맑은 고딕"/>
+              </a:rPr>
+              <a:t>프로세스 정의를 읽어 작업을 차례로 열고 결과를 넘기는 소프트웨어</a:t>
+            </a:r>
+          </a:p>
+        </p:txBody>
+      </p:sp>
+      <p:sp>
+        <p:nvSpPr>
+          <p:cNvPr id="21" name="Rounded Rectangle 20"/>
+          <p:cNvSpPr/>
+          <p:nvPr/>
+        </p:nvSpPr>
+        <p:spPr>
+          <a:xfrm>
+            <a:off x="548640" y="4945380"/>
+            <a:ext cx="11094415" cy="656843"/>
+          </a:xfrm>
+          <a:prstGeom prst="roundRect">
+            <a:avLst>
+              <a:gd name="adj" fmla="val 8000"/>
+            </a:avLst>
+          </a:prstGeom>
+          <a:solidFill>
+            <a:srgbClr val="F3F6F9"/>
+          </a:solidFill>
+          <a:ln>
+            <a:noFill/>
+          </a:ln>
+        </p:spPr>
+        <p:txBody>
+          <a:bodyPr rtlCol="0" anchor="ctr"/>
+          <a:lstStyle/>
+          <a:p>
+            <a:pPr algn="ctr"/>
+          </a:p>
+        </p:txBody>
+      </p:sp>
+      <p:sp>
+        <p:nvSpPr>
+          <p:cNvPr id="22" name="TextBox 21"/>
+          <p:cNvSpPr txBox="1"/>
+          <p:nvPr/>
+        </p:nvSpPr>
+        <p:spPr>
+          <a:xfrm>
+            <a:off x="685800" y="4913376"/>
+            <a:ext cx="2514600" cy="720851"/>
           </a:xfrm>
           <a:prstGeom prst="rect">
             <a:avLst/>
@@ -19641,17 +22329,38 @@
               </a:lnSpc>
             </a:pPr>
             <a:r>
-              <a:rPr sz="1250" b="1">
-                <a:solidFill>
-                  <a:srgbClr val="1A6FC4"/>
-                </a:solidFill>
-                <a:latin typeface="맑은 고딕"/>
-                <a:ea typeface="맑은 고딕"/>
-                <a:cs typeface="맑은 고딕"/>
-              </a:rPr>
-              <a:t>작업별 실행 기능 표시,</a:t>
-            </a:r>
-          </a:p>
+              <a:rPr sz="1600" b="1">
+                <a:solidFill>
+                  <a:srgbClr val="13294B"/>
+                </a:solidFill>
+                <a:latin typeface="맑은 고딕"/>
+                <a:ea typeface="맑은 고딕"/>
+                <a:cs typeface="맑은 고딕"/>
+              </a:rPr>
+              <a:t>오케스트레이션</a:t>
+            </a:r>
+          </a:p>
+        </p:txBody>
+      </p:sp>
+      <p:sp>
+        <p:nvSpPr>
+          <p:cNvPr id="23" name="TextBox 22"/>
+          <p:cNvSpPr txBox="1"/>
+          <p:nvPr/>
+        </p:nvSpPr>
+        <p:spPr>
+          <a:xfrm>
+            <a:off x="3200400" y="4913376"/>
+            <a:ext cx="8351215" cy="720851"/>
+          </a:xfrm>
+          <a:prstGeom prst="rect">
+            <a:avLst/>
+          </a:prstGeom>
+          <a:noFill/>
+        </p:spPr>
+        <p:txBody>
+          <a:bodyPr wrap="square" anchor="ctr"/>
+          <a:lstStyle/>
           <a:p>
             <a:pPr algn="l" eaLnBrk="0">
               <a:lnSpc>
@@ -19659,15 +22368,160 @@
               </a:lnSpc>
             </a:pPr>
             <a:r>
-              <a:rPr sz="1250" b="1">
-                <a:solidFill>
-                  <a:srgbClr val="1A6FC4"/>
-                </a:solidFill>
-                <a:latin typeface="맑은 고딕"/>
-                <a:ea typeface="맑은 고딕"/>
-                <a:cs typeface="맑은 고딕"/>
-              </a:rPr>
-              <a:t>그림과 실행 정의 구분</a:t>
+              <a:rPr sz="1400" b="0">
+                <a:solidFill>
+                  <a:srgbClr val="1F2A3A"/>
+                </a:solidFill>
+                <a:latin typeface="맑은 고딕"/>
+                <a:ea typeface="맑은 고딕"/>
+                <a:cs typeface="맑은 고딕"/>
+              </a:rPr>
+              <a:t>Orchestration</a:t>
+            </a:r>
+          </a:p>
+          <a:p>
+            <a:pPr algn="l" eaLnBrk="0">
+              <a:lnSpc>
+                <a:spcPct val="110000"/>
+              </a:lnSpc>
+            </a:pPr>
+            <a:r>
+              <a:rPr sz="1400" b="0">
+                <a:solidFill>
+                  <a:srgbClr val="1F2A3A"/>
+                </a:solidFill>
+                <a:latin typeface="맑은 고딕"/>
+                <a:ea typeface="맑은 고딕"/>
+                <a:cs typeface="맑은 고딕"/>
+              </a:rPr>
+              <a:t>중앙의 조정자가 작업의 순서와 호출을 이끄는 방식</a:t>
+            </a:r>
+          </a:p>
+        </p:txBody>
+      </p:sp>
+      <p:sp>
+        <p:nvSpPr>
+          <p:cNvPr id="24" name="Rounded Rectangle 23"/>
+          <p:cNvSpPr/>
+          <p:nvPr/>
+        </p:nvSpPr>
+        <p:spPr>
+          <a:xfrm>
+            <a:off x="548640" y="5666232"/>
+            <a:ext cx="11094415" cy="656843"/>
+          </a:xfrm>
+          <a:prstGeom prst="roundRect">
+            <a:avLst>
+              <a:gd name="adj" fmla="val 8000"/>
+            </a:avLst>
+          </a:prstGeom>
+          <a:solidFill>
+            <a:srgbClr val="F3F6F9"/>
+          </a:solidFill>
+          <a:ln>
+            <a:noFill/>
+          </a:ln>
+        </p:spPr>
+        <p:txBody>
+          <a:bodyPr rtlCol="0" anchor="ctr"/>
+          <a:lstStyle/>
+          <a:p>
+            <a:pPr algn="ctr"/>
+          </a:p>
+        </p:txBody>
+      </p:sp>
+      <p:sp>
+        <p:nvSpPr>
+          <p:cNvPr id="25" name="TextBox 24"/>
+          <p:cNvSpPr txBox="1"/>
+          <p:nvPr/>
+        </p:nvSpPr>
+        <p:spPr>
+          <a:xfrm>
+            <a:off x="685800" y="5634228"/>
+            <a:ext cx="2514600" cy="720851"/>
+          </a:xfrm>
+          <a:prstGeom prst="rect">
+            <a:avLst/>
+          </a:prstGeom>
+          <a:noFill/>
+        </p:spPr>
+        <p:txBody>
+          <a:bodyPr wrap="square" anchor="ctr"/>
+          <a:lstStyle/>
+          <a:p>
+            <a:pPr algn="l" eaLnBrk="0">
+              <a:lnSpc>
+                <a:spcPct val="110000"/>
+              </a:lnSpc>
+            </a:pPr>
+            <a:r>
+              <a:rPr sz="1600" b="1">
+                <a:solidFill>
+                  <a:srgbClr val="13294B"/>
+                </a:solidFill>
+                <a:latin typeface="맑은 고딕"/>
+                <a:ea typeface="맑은 고딕"/>
+                <a:cs typeface="맑은 고딕"/>
+              </a:rPr>
+              <a:t>토큰</a:t>
+            </a:r>
+          </a:p>
+        </p:txBody>
+      </p:sp>
+      <p:sp>
+        <p:nvSpPr>
+          <p:cNvPr id="26" name="TextBox 25"/>
+          <p:cNvSpPr txBox="1"/>
+          <p:nvPr/>
+        </p:nvSpPr>
+        <p:spPr>
+          <a:xfrm>
+            <a:off x="3200400" y="5634228"/>
+            <a:ext cx="8351215" cy="720851"/>
+          </a:xfrm>
+          <a:prstGeom prst="rect">
+            <a:avLst/>
+          </a:prstGeom>
+          <a:noFill/>
+        </p:spPr>
+        <p:txBody>
+          <a:bodyPr wrap="square" anchor="ctr"/>
+          <a:lstStyle/>
+          <a:p>
+            <a:pPr algn="l" eaLnBrk="0">
+              <a:lnSpc>
+                <a:spcPct val="110000"/>
+              </a:lnSpc>
+            </a:pPr>
+            <a:r>
+              <a:rPr sz="1400" b="0">
+                <a:solidFill>
+                  <a:srgbClr val="1F2A3A"/>
+                </a:solidFill>
+                <a:latin typeface="맑은 고딕"/>
+                <a:ea typeface="맑은 고딕"/>
+                <a:cs typeface="맑은 고딕"/>
+              </a:rPr>
+              <a:t>Token</a:t>
+            </a:r>
+          </a:p>
+          <a:p>
+            <a:pPr algn="l" eaLnBrk="0">
+              <a:lnSpc>
+                <a:spcPct val="110000"/>
+              </a:lnSpc>
+            </a:pPr>
+            <a:r>
+              <a:rPr sz="1400" b="0">
+                <a:solidFill>
+                  <a:srgbClr val="1F2A3A"/>
+                </a:solidFill>
+                <a:latin typeface="맑은 고딕"/>
+                <a:ea typeface="맑은 고딕"/>
+                <a:cs typeface="맑은 고딕"/>
+              </a:rPr>
+              <a:t>실행 중인 프로세스가 지금 어디에 있는지를 나타내는 표식</a:t>
             </a:r>
           </a:p>
         </p:txBody>
@@ -20492,6 +23346,3324 @@
 </p:sld>
 </file>
 
+<file path=ppt/slides/slide30.xml><?xml version="1.0" encoding="utf-8"?>
+<p:sld xmlns:a="http://schemas.openxmlformats.org/drawingml/2006/main" xmlns:p="http://schemas.openxmlformats.org/presentationml/2006/main" xmlns:r="http://schemas.openxmlformats.org/officeDocument/2006/relationships">
+  <p:cSld>
+    <p:bg>
+      <p:bgPr>
+        <a:solidFill>
+          <a:srgbClr val="E7F3FD"/>
+        </a:solidFill>
+        <a:effectLst/>
+      </p:bgPr>
+    </p:bg>
+    <p:spTree>
+      <p:nvGrpSpPr>
+        <p:cNvPr id="1" name=""/>
+        <p:cNvGrpSpPr/>
+        <p:nvPr/>
+      </p:nvGrpSpPr>
+      <p:grpSpPr/>
+      <p:sp>
+        <p:nvSpPr>
+          <p:cNvPr id="2" name="TextBox 1"/>
+          <p:cNvSpPr txBox="1"/>
+          <p:nvPr/>
+        </p:nvSpPr>
+        <p:spPr>
+          <a:xfrm>
+            <a:off x="457200" y="384048"/>
+            <a:ext cx="8229600" cy="457200"/>
+          </a:xfrm>
+          <a:prstGeom prst="rect">
+            <a:avLst/>
+          </a:prstGeom>
+          <a:noFill/>
+        </p:spPr>
+        <p:txBody>
+          <a:bodyPr wrap="square" anchor="t"/>
+          <a:lstStyle/>
+          <a:p>
+            <a:pPr algn="l" eaLnBrk="0">
+              <a:lnSpc>
+                <a:spcPct val="110000"/>
+              </a:lnSpc>
+            </a:pPr>
+            <a:r>
+              <a:rPr sz="2000" b="1">
+                <a:solidFill>
+                  <a:srgbClr val="5CB8F2"/>
+                </a:solidFill>
+                <a:latin typeface="맑은 고딕"/>
+                <a:ea typeface="맑은 고딕"/>
+                <a:cs typeface="맑은 고딕"/>
+              </a:rPr>
+              <a:t>경남대학교 피지컬AI 사관학교</a:t>
+            </a:r>
+          </a:p>
+        </p:txBody>
+      </p:sp>
+      <p:sp>
+        <p:nvSpPr>
+          <p:cNvPr id="3" name="Rectangle 2"/>
+          <p:cNvSpPr/>
+          <p:nvPr/>
+        </p:nvSpPr>
+        <p:spPr>
+          <a:xfrm>
+            <a:off x="548640" y="859536"/>
+            <a:ext cx="3606800" cy="41148"/>
+          </a:xfrm>
+          <a:prstGeom prst="rect">
+            <a:avLst/>
+          </a:prstGeom>
+          <a:solidFill>
+            <a:srgbClr val="5CB8F2"/>
+          </a:solidFill>
+          <a:ln>
+            <a:noFill/>
+          </a:ln>
+        </p:spPr>
+        <p:txBody>
+          <a:bodyPr rtlCol="0" anchor="ctr"/>
+          <a:lstStyle/>
+          <a:p>
+            <a:pPr algn="ctr"/>
+          </a:p>
+        </p:txBody>
+      </p:sp>
+      <p:sp>
+        <p:nvSpPr>
+          <p:cNvPr id="4" name="TextBox 3"/>
+          <p:cNvSpPr txBox="1"/>
+          <p:nvPr/>
+        </p:nvSpPr>
+        <p:spPr>
+          <a:xfrm>
+            <a:off x="731520" y="2011680"/>
+            <a:ext cx="10911535" cy="2011680"/>
+          </a:xfrm>
+          <a:prstGeom prst="rect">
+            <a:avLst/>
+          </a:prstGeom>
+          <a:noFill/>
+        </p:spPr>
+        <p:txBody>
+          <a:bodyPr wrap="square" anchor="ctr"/>
+          <a:lstStyle/>
+          <a:p>
+            <a:pPr algn="l" eaLnBrk="0">
+              <a:lnSpc>
+                <a:spcPct val="110000"/>
+              </a:lnSpc>
+            </a:pPr>
+            <a:r>
+              <a:rPr sz="3400" b="1">
+                <a:solidFill>
+                  <a:srgbClr val="13294B"/>
+                </a:solidFill>
+                <a:latin typeface="맑은 고딕"/>
+                <a:ea typeface="맑은 고딕"/>
+                <a:cs typeface="맑은 고딕"/>
+              </a:rPr>
+              <a:t>Review Quiz: 핵심 흐름 되짚어보기</a:t>
+            </a:r>
+          </a:p>
+        </p:txBody>
+      </p:sp>
+      <p:sp>
+        <p:nvSpPr>
+          <p:cNvPr id="5" name="TextBox 4"/>
+          <p:cNvSpPr txBox="1"/>
+          <p:nvPr/>
+        </p:nvSpPr>
+        <p:spPr>
+          <a:xfrm>
+            <a:off x="731520" y="4160520"/>
+            <a:ext cx="10911535" cy="457200"/>
+          </a:xfrm>
+          <a:prstGeom prst="rect">
+            <a:avLst/>
+          </a:prstGeom>
+          <a:noFill/>
+        </p:spPr>
+        <p:txBody>
+          <a:bodyPr wrap="square" anchor="t"/>
+          <a:lstStyle/>
+          <a:p>
+            <a:pPr algn="l" eaLnBrk="0">
+              <a:lnSpc>
+                <a:spcPct val="110000"/>
+              </a:lnSpc>
+            </a:pPr>
+            <a:r>
+              <a:rPr sz="1700" b="0">
+                <a:solidFill>
+                  <a:srgbClr val="556175"/>
+                </a:solidFill>
+                <a:latin typeface="맑은 고딕"/>
+                <a:ea typeface="맑은 고딕"/>
+                <a:cs typeface="맑은 고딕"/>
+              </a:rPr>
+              <a:t>배운 내용을 바탕으로 정답을 맞혀 보세요.</a:t>
+            </a:r>
+          </a:p>
+        </p:txBody>
+      </p:sp>
+    </p:spTree>
+  </p:cSld>
+  <p:clrMapOvr>
+    <a:masterClrMapping/>
+  </p:clrMapOvr>
+</p:sld>
+</file>
+
+<file path=ppt/slides/slide31.xml><?xml version="1.0" encoding="utf-8"?>
+<p:sld xmlns:a="http://schemas.openxmlformats.org/drawingml/2006/main" xmlns:p="http://schemas.openxmlformats.org/presentationml/2006/main" xmlns:r="http://schemas.openxmlformats.org/officeDocument/2006/relationships">
+  <p:cSld>
+    <p:bg>
+      <p:bgPr>
+        <a:solidFill>
+          <a:srgbClr val="FFFFFF"/>
+        </a:solidFill>
+        <a:effectLst/>
+      </p:bgPr>
+    </p:bg>
+    <p:spTree>
+      <p:nvGrpSpPr>
+        <p:cNvPr id="1" name=""/>
+        <p:cNvGrpSpPr/>
+        <p:nvPr/>
+      </p:nvGrpSpPr>
+      <p:grpSpPr/>
+      <p:sp>
+        <p:nvSpPr>
+          <p:cNvPr id="2" name="TextBox 1"/>
+          <p:cNvSpPr txBox="1"/>
+          <p:nvPr/>
+        </p:nvSpPr>
+        <p:spPr>
+          <a:xfrm>
+            <a:off x="457200" y="329184"/>
+            <a:ext cx="11277295" cy="603504"/>
+          </a:xfrm>
+          <a:prstGeom prst="rect">
+            <a:avLst/>
+          </a:prstGeom>
+          <a:noFill/>
+        </p:spPr>
+        <p:txBody>
+          <a:bodyPr wrap="square" anchor="ctr"/>
+          <a:lstStyle/>
+          <a:p>
+            <a:pPr algn="l" eaLnBrk="0">
+              <a:lnSpc>
+                <a:spcPct val="110000"/>
+              </a:lnSpc>
+            </a:pPr>
+            <a:r>
+              <a:rPr sz="2800" b="1">
+                <a:solidFill>
+                  <a:srgbClr val="13294B"/>
+                </a:solidFill>
+                <a:latin typeface="맑은 고딕"/>
+                <a:ea typeface="맑은 고딕"/>
+                <a:cs typeface="맑은 고딕"/>
+              </a:rPr>
+              <a:t>Quiz 1. 승인 지연 알림이 나간 처리 건</a:t>
+            </a:r>
+          </a:p>
+        </p:txBody>
+      </p:sp>
+      <p:sp>
+        <p:nvSpPr>
+          <p:cNvPr id="3" name="TextBox 2"/>
+          <p:cNvSpPr txBox="1"/>
+          <p:nvPr/>
+        </p:nvSpPr>
+        <p:spPr>
+          <a:xfrm>
+            <a:off x="457200" y="932688"/>
+            <a:ext cx="11277295" cy="420624"/>
+          </a:xfrm>
+          <a:prstGeom prst="rect">
+            <a:avLst/>
+          </a:prstGeom>
+          <a:noFill/>
+        </p:spPr>
+        <p:txBody>
+          <a:bodyPr wrap="square" anchor="ctr"/>
+          <a:lstStyle/>
+          <a:p>
+            <a:pPr algn="l" eaLnBrk="0">
+              <a:lnSpc>
+                <a:spcPct val="110000"/>
+              </a:lnSpc>
+            </a:pPr>
+            <a:r>
+              <a:rPr sz="1600" b="0">
+                <a:solidFill>
+                  <a:srgbClr val="556175"/>
+                </a:solidFill>
+                <a:latin typeface="맑은 고딕"/>
+                <a:ea typeface="맑은 고딕"/>
+                <a:cs typeface="맑은 고딕"/>
+              </a:rPr>
+              <a:t>긴급 대응 처리 건의 상태가 RUNNING이고 열려 있는 단계가 운전원 승인이며, 승인 지연 알림은 이미 나갔다.</a:t>
+            </a:r>
+          </a:p>
+        </p:txBody>
+      </p:sp>
+      <p:sp>
+        <p:nvSpPr>
+          <p:cNvPr id="4" name="Rectangle 3"/>
+          <p:cNvSpPr/>
+          <p:nvPr/>
+        </p:nvSpPr>
+        <p:spPr>
+          <a:xfrm>
+            <a:off x="548640" y="1408176"/>
+            <a:ext cx="11094415" cy="18288"/>
+          </a:xfrm>
+          <a:prstGeom prst="rect">
+            <a:avLst/>
+          </a:prstGeom>
+          <a:solidFill>
+            <a:srgbClr val="D3D9E1"/>
+          </a:solidFill>
+          <a:ln>
+            <a:noFill/>
+          </a:ln>
+        </p:spPr>
+        <p:txBody>
+          <a:bodyPr rtlCol="0" anchor="ctr"/>
+          <a:lstStyle/>
+          <a:p>
+            <a:pPr algn="ctr"/>
+          </a:p>
+        </p:txBody>
+      </p:sp>
+      <p:sp>
+        <p:nvSpPr>
+          <p:cNvPr id="5" name="TextBox 4"/>
+          <p:cNvSpPr txBox="1"/>
+          <p:nvPr/>
+        </p:nvSpPr>
+        <p:spPr>
+          <a:xfrm>
+            <a:off x="10911535" y="6473952"/>
+            <a:ext cx="822960" cy="274320"/>
+          </a:xfrm>
+          <a:prstGeom prst="rect">
+            <a:avLst/>
+          </a:prstGeom>
+          <a:noFill/>
+        </p:spPr>
+        <p:txBody>
+          <a:bodyPr wrap="square" anchor="t"/>
+          <a:lstStyle/>
+          <a:p>
+            <a:pPr algn="r" eaLnBrk="0">
+              <a:lnSpc>
+                <a:spcPct val="110000"/>
+              </a:lnSpc>
+            </a:pPr>
+            <a:r>
+              <a:rPr sz="1000" b="0">
+                <a:solidFill>
+                  <a:srgbClr val="556175"/>
+                </a:solidFill>
+                <a:latin typeface="맑은 고딕"/>
+                <a:ea typeface="맑은 고딕"/>
+                <a:cs typeface="맑은 고딕"/>
+              </a:rPr>
+              <a:t>31</a:t>
+            </a:r>
+          </a:p>
+        </p:txBody>
+      </p:sp>
+      <p:sp>
+        <p:nvSpPr>
+          <p:cNvPr id="6" name="Rounded Rectangle 5"/>
+          <p:cNvSpPr/>
+          <p:nvPr/>
+        </p:nvSpPr>
+        <p:spPr>
+          <a:xfrm>
+            <a:off x="548640" y="1627632"/>
+            <a:ext cx="11094415" cy="704088"/>
+          </a:xfrm>
+          <a:prstGeom prst="roundRect">
+            <a:avLst>
+              <a:gd name="adj" fmla="val 5000"/>
+            </a:avLst>
+          </a:prstGeom>
+          <a:solidFill>
+            <a:srgbClr val="E7F3FD"/>
+          </a:solidFill>
+          <a:ln>
+            <a:noFill/>
+          </a:ln>
+        </p:spPr>
+        <p:txBody>
+          <a:bodyPr rtlCol="0" anchor="ctr"/>
+          <a:lstStyle/>
+          <a:p>
+            <a:pPr algn="ctr"/>
+          </a:p>
+        </p:txBody>
+      </p:sp>
+      <p:sp>
+        <p:nvSpPr>
+          <p:cNvPr id="7" name="TextBox 6"/>
+          <p:cNvSpPr txBox="1"/>
+          <p:nvPr/>
+        </p:nvSpPr>
+        <p:spPr>
+          <a:xfrm>
+            <a:off x="777240" y="1627632"/>
+            <a:ext cx="10637215" cy="704088"/>
+          </a:xfrm>
+          <a:prstGeom prst="rect">
+            <a:avLst/>
+          </a:prstGeom>
+          <a:noFill/>
+        </p:spPr>
+        <p:txBody>
+          <a:bodyPr wrap="square" anchor="ctr"/>
+          <a:lstStyle/>
+          <a:p>
+            <a:pPr algn="l" eaLnBrk="0">
+              <a:lnSpc>
+                <a:spcPct val="110000"/>
+              </a:lnSpc>
+            </a:pPr>
+            <a:r>
+              <a:rPr sz="1900" b="1">
+                <a:solidFill>
+                  <a:srgbClr val="13294B"/>
+                </a:solidFill>
+                <a:latin typeface="맑은 고딕"/>
+                <a:ea typeface="맑은 고딕"/>
+                <a:cs typeface="맑은 고딕"/>
+              </a:rPr>
+              <a:t>이 처리 건에 대한 설명으로 옳은 것은?</a:t>
+            </a:r>
+          </a:p>
+        </p:txBody>
+      </p:sp>
+      <p:sp>
+        <p:nvSpPr>
+          <p:cNvPr id="8" name="Rounded Rectangle 7"/>
+          <p:cNvSpPr/>
+          <p:nvPr/>
+        </p:nvSpPr>
+        <p:spPr>
+          <a:xfrm>
+            <a:off x="548640" y="2560320"/>
+            <a:ext cx="11094415" cy="822960"/>
+          </a:xfrm>
+          <a:prstGeom prst="roundRect">
+            <a:avLst>
+              <a:gd name="adj" fmla="val 8000"/>
+            </a:avLst>
+          </a:prstGeom>
+          <a:solidFill>
+            <a:srgbClr val="F3F6F9"/>
+          </a:solidFill>
+          <a:ln>
+            <a:noFill/>
+          </a:ln>
+        </p:spPr>
+        <p:txBody>
+          <a:bodyPr rtlCol="0" anchor="ctr"/>
+          <a:lstStyle/>
+          <a:p>
+            <a:pPr algn="ctr"/>
+          </a:p>
+        </p:txBody>
+      </p:sp>
+      <p:sp>
+        <p:nvSpPr>
+          <p:cNvPr id="9" name="Oval 8"/>
+          <p:cNvSpPr/>
+          <p:nvPr/>
+        </p:nvSpPr>
+        <p:spPr>
+          <a:xfrm>
+            <a:off x="731520" y="2788920"/>
+            <a:ext cx="365760" cy="365760"/>
+          </a:xfrm>
+          <a:prstGeom prst="ellipse">
+            <a:avLst/>
+          </a:prstGeom>
+          <a:solidFill>
+            <a:srgbClr val="13294B"/>
+          </a:solidFill>
+          <a:ln>
+            <a:noFill/>
+          </a:ln>
+        </p:spPr>
+        <p:txBody>
+          <a:bodyPr rtlCol="0" anchor="ctr"/>
+          <a:lstStyle/>
+          <a:p>
+            <a:pPr algn="ctr"/>
+          </a:p>
+        </p:txBody>
+      </p:sp>
+      <p:sp>
+        <p:nvSpPr>
+          <p:cNvPr id="10" name="TextBox 9"/>
+          <p:cNvSpPr txBox="1"/>
+          <p:nvPr/>
+        </p:nvSpPr>
+        <p:spPr>
+          <a:xfrm>
+            <a:off x="731520" y="2788920"/>
+            <a:ext cx="365760" cy="365760"/>
+          </a:xfrm>
+          <a:prstGeom prst="rect">
+            <a:avLst/>
+          </a:prstGeom>
+          <a:noFill/>
+        </p:spPr>
+        <p:txBody>
+          <a:bodyPr wrap="square" anchor="ctr"/>
+          <a:lstStyle/>
+          <a:p>
+            <a:pPr algn="ctr" eaLnBrk="0">
+              <a:lnSpc>
+                <a:spcPct val="110000"/>
+              </a:lnSpc>
+            </a:pPr>
+            <a:r>
+              <a:rPr sz="1300" b="1">
+                <a:solidFill>
+                  <a:srgbClr val="FFFFFF"/>
+                </a:solidFill>
+                <a:latin typeface="맑은 고딕"/>
+                <a:ea typeface="맑은 고딕"/>
+                <a:cs typeface="맑은 고딕"/>
+              </a:rPr>
+              <a:t>1</a:t>
+            </a:r>
+          </a:p>
+        </p:txBody>
+      </p:sp>
+      <p:sp>
+        <p:nvSpPr>
+          <p:cNvPr id="11" name="TextBox 10"/>
+          <p:cNvSpPr txBox="1"/>
+          <p:nvPr/>
+        </p:nvSpPr>
+        <p:spPr>
+          <a:xfrm>
+            <a:off x="1234440" y="2514600"/>
+            <a:ext cx="10225735" cy="914400"/>
+          </a:xfrm>
+          <a:prstGeom prst="rect">
+            <a:avLst/>
+          </a:prstGeom>
+          <a:noFill/>
+        </p:spPr>
+        <p:txBody>
+          <a:bodyPr wrap="square" anchor="ctr"/>
+          <a:lstStyle/>
+          <a:p>
+            <a:pPr algn="l" eaLnBrk="0">
+              <a:lnSpc>
+                <a:spcPct val="110000"/>
+              </a:lnSpc>
+            </a:pPr>
+            <a:r>
+              <a:rPr sz="1550" b="1">
+                <a:solidFill>
+                  <a:srgbClr val="1F2A3A"/>
+                </a:solidFill>
+                <a:latin typeface="맑은 고딕"/>
+                <a:ea typeface="맑은 고딕"/>
+                <a:cs typeface="맑은 고딕"/>
+              </a:rPr>
+              <a:t>알림이 나갔으므로 처리 건은 거절로 닫혔다</a:t>
+            </a:r>
+          </a:p>
+        </p:txBody>
+      </p:sp>
+      <p:sp>
+        <p:nvSpPr>
+          <p:cNvPr id="12" name="Rounded Rectangle 11"/>
+          <p:cNvSpPr/>
+          <p:nvPr/>
+        </p:nvSpPr>
+        <p:spPr>
+          <a:xfrm>
+            <a:off x="548640" y="3474720"/>
+            <a:ext cx="11094415" cy="822960"/>
+          </a:xfrm>
+          <a:prstGeom prst="roundRect">
+            <a:avLst>
+              <a:gd name="adj" fmla="val 8000"/>
+            </a:avLst>
+          </a:prstGeom>
+          <a:solidFill>
+            <a:srgbClr val="F3F6F9"/>
+          </a:solidFill>
+          <a:ln>
+            <a:noFill/>
+          </a:ln>
+        </p:spPr>
+        <p:txBody>
+          <a:bodyPr rtlCol="0" anchor="ctr"/>
+          <a:lstStyle/>
+          <a:p>
+            <a:pPr algn="ctr"/>
+          </a:p>
+        </p:txBody>
+      </p:sp>
+      <p:sp>
+        <p:nvSpPr>
+          <p:cNvPr id="13" name="Oval 12"/>
+          <p:cNvSpPr/>
+          <p:nvPr/>
+        </p:nvSpPr>
+        <p:spPr>
+          <a:xfrm>
+            <a:off x="731520" y="3703320"/>
+            <a:ext cx="365760" cy="365760"/>
+          </a:xfrm>
+          <a:prstGeom prst="ellipse">
+            <a:avLst/>
+          </a:prstGeom>
+          <a:solidFill>
+            <a:srgbClr val="13294B"/>
+          </a:solidFill>
+          <a:ln>
+            <a:noFill/>
+          </a:ln>
+        </p:spPr>
+        <p:txBody>
+          <a:bodyPr rtlCol="0" anchor="ctr"/>
+          <a:lstStyle/>
+          <a:p>
+            <a:pPr algn="ctr"/>
+          </a:p>
+        </p:txBody>
+      </p:sp>
+      <p:sp>
+        <p:nvSpPr>
+          <p:cNvPr id="14" name="TextBox 13"/>
+          <p:cNvSpPr txBox="1"/>
+          <p:nvPr/>
+        </p:nvSpPr>
+        <p:spPr>
+          <a:xfrm>
+            <a:off x="731520" y="3703320"/>
+            <a:ext cx="365760" cy="365760"/>
+          </a:xfrm>
+          <a:prstGeom prst="rect">
+            <a:avLst/>
+          </a:prstGeom>
+          <a:noFill/>
+        </p:spPr>
+        <p:txBody>
+          <a:bodyPr wrap="square" anchor="ctr"/>
+          <a:lstStyle/>
+          <a:p>
+            <a:pPr algn="ctr" eaLnBrk="0">
+              <a:lnSpc>
+                <a:spcPct val="110000"/>
+              </a:lnSpc>
+            </a:pPr>
+            <a:r>
+              <a:rPr sz="1300" b="1">
+                <a:solidFill>
+                  <a:srgbClr val="FFFFFF"/>
+                </a:solidFill>
+                <a:latin typeface="맑은 고딕"/>
+                <a:ea typeface="맑은 고딕"/>
+                <a:cs typeface="맑은 고딕"/>
+              </a:rPr>
+              <a:t>2</a:t>
+            </a:r>
+          </a:p>
+        </p:txBody>
+      </p:sp>
+      <p:sp>
+        <p:nvSpPr>
+          <p:cNvPr id="15" name="TextBox 14"/>
+          <p:cNvSpPr txBox="1"/>
+          <p:nvPr/>
+        </p:nvSpPr>
+        <p:spPr>
+          <a:xfrm>
+            <a:off x="1234440" y="3429000"/>
+            <a:ext cx="10225735" cy="914400"/>
+          </a:xfrm>
+          <a:prstGeom prst="rect">
+            <a:avLst/>
+          </a:prstGeom>
+          <a:noFill/>
+        </p:spPr>
+        <p:txBody>
+          <a:bodyPr wrap="square" anchor="ctr"/>
+          <a:lstStyle/>
+          <a:p>
+            <a:pPr algn="l" eaLnBrk="0">
+              <a:lnSpc>
+                <a:spcPct val="110000"/>
+              </a:lnSpc>
+            </a:pPr>
+            <a:r>
+              <a:rPr sz="1550" b="1">
+                <a:solidFill>
+                  <a:srgbClr val="1F2A3A"/>
+                </a:solidFill>
+                <a:latin typeface="맑은 고딕"/>
+                <a:ea typeface="맑은 고딕"/>
+                <a:cs typeface="맑은 고딕"/>
+              </a:rPr>
+              <a:t>기한이 지났으므로 냉각 명령이 자동으로 나갔다</a:t>
+            </a:r>
+          </a:p>
+        </p:txBody>
+      </p:sp>
+      <p:sp>
+        <p:nvSpPr>
+          <p:cNvPr id="16" name="Rounded Rectangle 15"/>
+          <p:cNvSpPr/>
+          <p:nvPr/>
+        </p:nvSpPr>
+        <p:spPr>
+          <a:xfrm>
+            <a:off x="548640" y="4389120"/>
+            <a:ext cx="11094415" cy="822960"/>
+          </a:xfrm>
+          <a:prstGeom prst="roundRect">
+            <a:avLst>
+              <a:gd name="adj" fmla="val 8000"/>
+            </a:avLst>
+          </a:prstGeom>
+          <a:solidFill>
+            <a:srgbClr val="F3F6F9"/>
+          </a:solidFill>
+          <a:ln>
+            <a:noFill/>
+          </a:ln>
+        </p:spPr>
+        <p:txBody>
+          <a:bodyPr rtlCol="0" anchor="ctr"/>
+          <a:lstStyle/>
+          <a:p>
+            <a:pPr algn="ctr"/>
+          </a:p>
+        </p:txBody>
+      </p:sp>
+      <p:sp>
+        <p:nvSpPr>
+          <p:cNvPr id="17" name="Oval 16"/>
+          <p:cNvSpPr/>
+          <p:nvPr/>
+        </p:nvSpPr>
+        <p:spPr>
+          <a:xfrm>
+            <a:off x="731520" y="4617720"/>
+            <a:ext cx="365760" cy="365760"/>
+          </a:xfrm>
+          <a:prstGeom prst="ellipse">
+            <a:avLst/>
+          </a:prstGeom>
+          <a:solidFill>
+            <a:srgbClr val="13294B"/>
+          </a:solidFill>
+          <a:ln>
+            <a:noFill/>
+          </a:ln>
+        </p:spPr>
+        <p:txBody>
+          <a:bodyPr rtlCol="0" anchor="ctr"/>
+          <a:lstStyle/>
+          <a:p>
+            <a:pPr algn="ctr"/>
+          </a:p>
+        </p:txBody>
+      </p:sp>
+      <p:sp>
+        <p:nvSpPr>
+          <p:cNvPr id="18" name="TextBox 17"/>
+          <p:cNvSpPr txBox="1"/>
+          <p:nvPr/>
+        </p:nvSpPr>
+        <p:spPr>
+          <a:xfrm>
+            <a:off x="731520" y="4617720"/>
+            <a:ext cx="365760" cy="365760"/>
+          </a:xfrm>
+          <a:prstGeom prst="rect">
+            <a:avLst/>
+          </a:prstGeom>
+          <a:noFill/>
+        </p:spPr>
+        <p:txBody>
+          <a:bodyPr wrap="square" anchor="ctr"/>
+          <a:lstStyle/>
+          <a:p>
+            <a:pPr algn="ctr" eaLnBrk="0">
+              <a:lnSpc>
+                <a:spcPct val="110000"/>
+              </a:lnSpc>
+            </a:pPr>
+            <a:r>
+              <a:rPr sz="1300" b="1">
+                <a:solidFill>
+                  <a:srgbClr val="FFFFFF"/>
+                </a:solidFill>
+                <a:latin typeface="맑은 고딕"/>
+                <a:ea typeface="맑은 고딕"/>
+                <a:cs typeface="맑은 고딕"/>
+              </a:rPr>
+              <a:t>3</a:t>
+            </a:r>
+          </a:p>
+        </p:txBody>
+      </p:sp>
+      <p:sp>
+        <p:nvSpPr>
+          <p:cNvPr id="19" name="TextBox 18"/>
+          <p:cNvSpPr txBox="1"/>
+          <p:nvPr/>
+        </p:nvSpPr>
+        <p:spPr>
+          <a:xfrm>
+            <a:off x="1234440" y="4343400"/>
+            <a:ext cx="10225735" cy="914400"/>
+          </a:xfrm>
+          <a:prstGeom prst="rect">
+            <a:avLst/>
+          </a:prstGeom>
+          <a:noFill/>
+        </p:spPr>
+        <p:txBody>
+          <a:bodyPr wrap="square" anchor="ctr"/>
+          <a:lstStyle/>
+          <a:p>
+            <a:pPr algn="l" eaLnBrk="0">
+              <a:lnSpc>
+                <a:spcPct val="110000"/>
+              </a:lnSpc>
+            </a:pPr>
+            <a:r>
+              <a:rPr sz="1550" b="1">
+                <a:solidFill>
+                  <a:srgbClr val="1F2A3A"/>
+                </a:solidFill>
+                <a:latin typeface="맑은 고딕"/>
+                <a:ea typeface="맑은 고딕"/>
+                <a:cs typeface="맑은 고딕"/>
+              </a:rPr>
+              <a:t>승인 작업이 열린 채로 남아 운전원의 결정을 기다린다</a:t>
+            </a:r>
+          </a:p>
+        </p:txBody>
+      </p:sp>
+      <p:sp>
+        <p:nvSpPr>
+          <p:cNvPr id="20" name="Rounded Rectangle 19"/>
+          <p:cNvSpPr/>
+          <p:nvPr/>
+        </p:nvSpPr>
+        <p:spPr>
+          <a:xfrm>
+            <a:off x="548640" y="5303520"/>
+            <a:ext cx="11094415" cy="822960"/>
+          </a:xfrm>
+          <a:prstGeom prst="roundRect">
+            <a:avLst>
+              <a:gd name="adj" fmla="val 8000"/>
+            </a:avLst>
+          </a:prstGeom>
+          <a:solidFill>
+            <a:srgbClr val="F3F6F9"/>
+          </a:solidFill>
+          <a:ln>
+            <a:noFill/>
+          </a:ln>
+        </p:spPr>
+        <p:txBody>
+          <a:bodyPr rtlCol="0" anchor="ctr"/>
+          <a:lstStyle/>
+          <a:p>
+            <a:pPr algn="ctr"/>
+          </a:p>
+        </p:txBody>
+      </p:sp>
+      <p:sp>
+        <p:nvSpPr>
+          <p:cNvPr id="21" name="Oval 20"/>
+          <p:cNvSpPr/>
+          <p:nvPr/>
+        </p:nvSpPr>
+        <p:spPr>
+          <a:xfrm>
+            <a:off x="731520" y="5532120"/>
+            <a:ext cx="365760" cy="365760"/>
+          </a:xfrm>
+          <a:prstGeom prst="ellipse">
+            <a:avLst/>
+          </a:prstGeom>
+          <a:solidFill>
+            <a:srgbClr val="13294B"/>
+          </a:solidFill>
+          <a:ln>
+            <a:noFill/>
+          </a:ln>
+        </p:spPr>
+        <p:txBody>
+          <a:bodyPr rtlCol="0" anchor="ctr"/>
+          <a:lstStyle/>
+          <a:p>
+            <a:pPr algn="ctr"/>
+          </a:p>
+        </p:txBody>
+      </p:sp>
+      <p:sp>
+        <p:nvSpPr>
+          <p:cNvPr id="22" name="TextBox 21"/>
+          <p:cNvSpPr txBox="1"/>
+          <p:nvPr/>
+        </p:nvSpPr>
+        <p:spPr>
+          <a:xfrm>
+            <a:off x="731520" y="5532120"/>
+            <a:ext cx="365760" cy="365760"/>
+          </a:xfrm>
+          <a:prstGeom prst="rect">
+            <a:avLst/>
+          </a:prstGeom>
+          <a:noFill/>
+        </p:spPr>
+        <p:txBody>
+          <a:bodyPr wrap="square" anchor="ctr"/>
+          <a:lstStyle/>
+          <a:p>
+            <a:pPr algn="ctr" eaLnBrk="0">
+              <a:lnSpc>
+                <a:spcPct val="110000"/>
+              </a:lnSpc>
+            </a:pPr>
+            <a:r>
+              <a:rPr sz="1300" b="1">
+                <a:solidFill>
+                  <a:srgbClr val="FFFFFF"/>
+                </a:solidFill>
+                <a:latin typeface="맑은 고딕"/>
+                <a:ea typeface="맑은 고딕"/>
+                <a:cs typeface="맑은 고딕"/>
+              </a:rPr>
+              <a:t>4</a:t>
+            </a:r>
+          </a:p>
+        </p:txBody>
+      </p:sp>
+      <p:sp>
+        <p:nvSpPr>
+          <p:cNvPr id="23" name="TextBox 22"/>
+          <p:cNvSpPr txBox="1"/>
+          <p:nvPr/>
+        </p:nvSpPr>
+        <p:spPr>
+          <a:xfrm>
+            <a:off x="1234440" y="5257800"/>
+            <a:ext cx="10225735" cy="914400"/>
+          </a:xfrm>
+          <a:prstGeom prst="rect">
+            <a:avLst/>
+          </a:prstGeom>
+          <a:noFill/>
+        </p:spPr>
+        <p:txBody>
+          <a:bodyPr wrap="square" anchor="ctr"/>
+          <a:lstStyle/>
+          <a:p>
+            <a:pPr algn="l" eaLnBrk="0">
+              <a:lnSpc>
+                <a:spcPct val="110000"/>
+              </a:lnSpc>
+            </a:pPr>
+            <a:r>
+              <a:rPr sz="1550" b="1">
+                <a:solidFill>
+                  <a:srgbClr val="1F2A3A"/>
+                </a:solidFill>
+                <a:latin typeface="맑은 고딕"/>
+                <a:ea typeface="맑은 고딕"/>
+                <a:cs typeface="맑은 고딕"/>
+              </a:rPr>
+              <a:t>알림 가지가 끝났으므로 처리 건도 완료되었다</a:t>
+            </a:r>
+          </a:p>
+        </p:txBody>
+      </p:sp>
+    </p:spTree>
+  </p:cSld>
+  <p:clrMapOvr>
+    <a:masterClrMapping/>
+  </p:clrMapOvr>
+</p:sld>
+</file>
+
+<file path=ppt/slides/slide32.xml><?xml version="1.0" encoding="utf-8"?>
+<p:sld xmlns:a="http://schemas.openxmlformats.org/drawingml/2006/main" xmlns:p="http://schemas.openxmlformats.org/presentationml/2006/main" xmlns:r="http://schemas.openxmlformats.org/officeDocument/2006/relationships">
+  <p:cSld>
+    <p:bg>
+      <p:bgPr>
+        <a:solidFill>
+          <a:srgbClr val="FFFFFF"/>
+        </a:solidFill>
+        <a:effectLst/>
+      </p:bgPr>
+    </p:bg>
+    <p:spTree>
+      <p:nvGrpSpPr>
+        <p:cNvPr id="1" name=""/>
+        <p:cNvGrpSpPr/>
+        <p:nvPr/>
+      </p:nvGrpSpPr>
+      <p:grpSpPr/>
+      <p:sp>
+        <p:nvSpPr>
+          <p:cNvPr id="2" name="TextBox 1"/>
+          <p:cNvSpPr txBox="1"/>
+          <p:nvPr/>
+        </p:nvSpPr>
+        <p:spPr>
+          <a:xfrm>
+            <a:off x="457200" y="329184"/>
+            <a:ext cx="11277295" cy="603504"/>
+          </a:xfrm>
+          <a:prstGeom prst="rect">
+            <a:avLst/>
+          </a:prstGeom>
+          <a:noFill/>
+        </p:spPr>
+        <p:txBody>
+          <a:bodyPr wrap="square" anchor="ctr"/>
+          <a:lstStyle/>
+          <a:p>
+            <a:pPr algn="l" eaLnBrk="0">
+              <a:lnSpc>
+                <a:spcPct val="110000"/>
+              </a:lnSpc>
+            </a:pPr>
+            <a:r>
+              <a:rPr sz="2800" b="1">
+                <a:solidFill>
+                  <a:srgbClr val="13294B"/>
+                </a:solidFill>
+                <a:latin typeface="맑은 고딕"/>
+                <a:ea typeface="맑은 고딕"/>
+                <a:cs typeface="맑은 고딕"/>
+              </a:rPr>
+              <a:t>Quiz 2. 설비 명령이 나갔는지를 판단하는 근거</a:t>
+            </a:r>
+          </a:p>
+        </p:txBody>
+      </p:sp>
+      <p:sp>
+        <p:nvSpPr>
+          <p:cNvPr id="3" name="TextBox 2"/>
+          <p:cNvSpPr txBox="1"/>
+          <p:nvPr/>
+        </p:nvSpPr>
+        <p:spPr>
+          <a:xfrm>
+            <a:off x="457200" y="932688"/>
+            <a:ext cx="11277295" cy="420624"/>
+          </a:xfrm>
+          <a:prstGeom prst="rect">
+            <a:avLst/>
+          </a:prstGeom>
+          <a:noFill/>
+        </p:spPr>
+        <p:txBody>
+          <a:bodyPr wrap="square" anchor="ctr"/>
+          <a:lstStyle/>
+          <a:p>
+            <a:pPr algn="l" eaLnBrk="0">
+              <a:lnSpc>
+                <a:spcPct val="110000"/>
+              </a:lnSpc>
+            </a:pPr>
+            <a:r>
+              <a:rPr sz="1600" b="0">
+                <a:solidFill>
+                  <a:srgbClr val="556175"/>
+                </a:solidFill>
+                <a:latin typeface="맑은 고딕"/>
+                <a:ea typeface="맑은 고딕"/>
+                <a:cs typeface="맑은 고딕"/>
+              </a:rPr>
+              <a:t>처리 건은 COMPLETED·E_rejected이며, 냉각 명령 단계는 선택되지 않아 CANCELLED로 기록됐다.</a:t>
+            </a:r>
+          </a:p>
+        </p:txBody>
+      </p:sp>
+      <p:sp>
+        <p:nvSpPr>
+          <p:cNvPr id="4" name="Rectangle 3"/>
+          <p:cNvSpPr/>
+          <p:nvPr/>
+        </p:nvSpPr>
+        <p:spPr>
+          <a:xfrm>
+            <a:off x="548640" y="1408176"/>
+            <a:ext cx="11094415" cy="18288"/>
+          </a:xfrm>
+          <a:prstGeom prst="rect">
+            <a:avLst/>
+          </a:prstGeom>
+          <a:solidFill>
+            <a:srgbClr val="D3D9E1"/>
+          </a:solidFill>
+          <a:ln>
+            <a:noFill/>
+          </a:ln>
+        </p:spPr>
+        <p:txBody>
+          <a:bodyPr rtlCol="0" anchor="ctr"/>
+          <a:lstStyle/>
+          <a:p>
+            <a:pPr algn="ctr"/>
+          </a:p>
+        </p:txBody>
+      </p:sp>
+      <p:sp>
+        <p:nvSpPr>
+          <p:cNvPr id="5" name="TextBox 4"/>
+          <p:cNvSpPr txBox="1"/>
+          <p:nvPr/>
+        </p:nvSpPr>
+        <p:spPr>
+          <a:xfrm>
+            <a:off x="10911535" y="6473952"/>
+            <a:ext cx="822960" cy="274320"/>
+          </a:xfrm>
+          <a:prstGeom prst="rect">
+            <a:avLst/>
+          </a:prstGeom>
+          <a:noFill/>
+        </p:spPr>
+        <p:txBody>
+          <a:bodyPr wrap="square" anchor="t"/>
+          <a:lstStyle/>
+          <a:p>
+            <a:pPr algn="r" eaLnBrk="0">
+              <a:lnSpc>
+                <a:spcPct val="110000"/>
+              </a:lnSpc>
+            </a:pPr>
+            <a:r>
+              <a:rPr sz="1000" b="0">
+                <a:solidFill>
+                  <a:srgbClr val="556175"/>
+                </a:solidFill>
+                <a:latin typeface="맑은 고딕"/>
+                <a:ea typeface="맑은 고딕"/>
+                <a:cs typeface="맑은 고딕"/>
+              </a:rPr>
+              <a:t>32</a:t>
+            </a:r>
+          </a:p>
+        </p:txBody>
+      </p:sp>
+      <p:sp>
+        <p:nvSpPr>
+          <p:cNvPr id="6" name="Rounded Rectangle 5"/>
+          <p:cNvSpPr/>
+          <p:nvPr/>
+        </p:nvSpPr>
+        <p:spPr>
+          <a:xfrm>
+            <a:off x="548640" y="1627632"/>
+            <a:ext cx="11094415" cy="704088"/>
+          </a:xfrm>
+          <a:prstGeom prst="roundRect">
+            <a:avLst>
+              <a:gd name="adj" fmla="val 5000"/>
+            </a:avLst>
+          </a:prstGeom>
+          <a:solidFill>
+            <a:srgbClr val="E7F3FD"/>
+          </a:solidFill>
+          <a:ln>
+            <a:noFill/>
+          </a:ln>
+        </p:spPr>
+        <p:txBody>
+          <a:bodyPr rtlCol="0" anchor="ctr"/>
+          <a:lstStyle/>
+          <a:p>
+            <a:pPr algn="ctr"/>
+          </a:p>
+        </p:txBody>
+      </p:sp>
+      <p:sp>
+        <p:nvSpPr>
+          <p:cNvPr id="7" name="TextBox 6"/>
+          <p:cNvSpPr txBox="1"/>
+          <p:nvPr/>
+        </p:nvSpPr>
+        <p:spPr>
+          <a:xfrm>
+            <a:off x="777240" y="1627632"/>
+            <a:ext cx="10637215" cy="704088"/>
+          </a:xfrm>
+          <a:prstGeom prst="rect">
+            <a:avLst/>
+          </a:prstGeom>
+          <a:noFill/>
+        </p:spPr>
+        <p:txBody>
+          <a:bodyPr wrap="square" anchor="ctr"/>
+          <a:lstStyle/>
+          <a:p>
+            <a:pPr algn="l" eaLnBrk="0">
+              <a:lnSpc>
+                <a:spcPct val="110000"/>
+              </a:lnSpc>
+            </a:pPr>
+            <a:r>
+              <a:rPr sz="1900" b="1">
+                <a:solidFill>
+                  <a:srgbClr val="13294B"/>
+                </a:solidFill>
+                <a:latin typeface="맑은 고딕"/>
+                <a:ea typeface="맑은 고딕"/>
+                <a:cs typeface="맑은 고딕"/>
+              </a:rPr>
+              <a:t>이 처리 건에서 냉각 명령이 설비에 나갔는지를 판단한 것으로 옳은 것은?</a:t>
+            </a:r>
+          </a:p>
+        </p:txBody>
+      </p:sp>
+      <p:sp>
+        <p:nvSpPr>
+          <p:cNvPr id="8" name="Rounded Rectangle 7"/>
+          <p:cNvSpPr/>
+          <p:nvPr/>
+        </p:nvSpPr>
+        <p:spPr>
+          <a:xfrm>
+            <a:off x="548640" y="2560320"/>
+            <a:ext cx="11094415" cy="822960"/>
+          </a:xfrm>
+          <a:prstGeom prst="roundRect">
+            <a:avLst>
+              <a:gd name="adj" fmla="val 8000"/>
+            </a:avLst>
+          </a:prstGeom>
+          <a:solidFill>
+            <a:srgbClr val="F3F6F9"/>
+          </a:solidFill>
+          <a:ln>
+            <a:noFill/>
+          </a:ln>
+        </p:spPr>
+        <p:txBody>
+          <a:bodyPr rtlCol="0" anchor="ctr"/>
+          <a:lstStyle/>
+          <a:p>
+            <a:pPr algn="ctr"/>
+          </a:p>
+        </p:txBody>
+      </p:sp>
+      <p:sp>
+        <p:nvSpPr>
+          <p:cNvPr id="9" name="Oval 8"/>
+          <p:cNvSpPr/>
+          <p:nvPr/>
+        </p:nvSpPr>
+        <p:spPr>
+          <a:xfrm>
+            <a:off x="731520" y="2788920"/>
+            <a:ext cx="365760" cy="365760"/>
+          </a:xfrm>
+          <a:prstGeom prst="ellipse">
+            <a:avLst/>
+          </a:prstGeom>
+          <a:solidFill>
+            <a:srgbClr val="13294B"/>
+          </a:solidFill>
+          <a:ln>
+            <a:noFill/>
+          </a:ln>
+        </p:spPr>
+        <p:txBody>
+          <a:bodyPr rtlCol="0" anchor="ctr"/>
+          <a:lstStyle/>
+          <a:p>
+            <a:pPr algn="ctr"/>
+          </a:p>
+        </p:txBody>
+      </p:sp>
+      <p:sp>
+        <p:nvSpPr>
+          <p:cNvPr id="10" name="TextBox 9"/>
+          <p:cNvSpPr txBox="1"/>
+          <p:nvPr/>
+        </p:nvSpPr>
+        <p:spPr>
+          <a:xfrm>
+            <a:off x="731520" y="2788920"/>
+            <a:ext cx="365760" cy="365760"/>
+          </a:xfrm>
+          <a:prstGeom prst="rect">
+            <a:avLst/>
+          </a:prstGeom>
+          <a:noFill/>
+        </p:spPr>
+        <p:txBody>
+          <a:bodyPr wrap="square" anchor="ctr"/>
+          <a:lstStyle/>
+          <a:p>
+            <a:pPr algn="ctr" eaLnBrk="0">
+              <a:lnSpc>
+                <a:spcPct val="110000"/>
+              </a:lnSpc>
+            </a:pPr>
+            <a:r>
+              <a:rPr sz="1300" b="1">
+                <a:solidFill>
+                  <a:srgbClr val="FFFFFF"/>
+                </a:solidFill>
+                <a:latin typeface="맑은 고딕"/>
+                <a:ea typeface="맑은 고딕"/>
+                <a:cs typeface="맑은 고딕"/>
+              </a:rPr>
+              <a:t>1</a:t>
+            </a:r>
+          </a:p>
+        </p:txBody>
+      </p:sp>
+      <p:sp>
+        <p:nvSpPr>
+          <p:cNvPr id="11" name="TextBox 10"/>
+          <p:cNvSpPr txBox="1"/>
+          <p:nvPr/>
+        </p:nvSpPr>
+        <p:spPr>
+          <a:xfrm>
+            <a:off x="1234440" y="2514600"/>
+            <a:ext cx="10225735" cy="914400"/>
+          </a:xfrm>
+          <a:prstGeom prst="rect">
+            <a:avLst/>
+          </a:prstGeom>
+          <a:noFill/>
+        </p:spPr>
+        <p:txBody>
+          <a:bodyPr wrap="square" anchor="ctr"/>
+          <a:lstStyle/>
+          <a:p>
+            <a:pPr algn="l" eaLnBrk="0">
+              <a:lnSpc>
+                <a:spcPct val="110000"/>
+              </a:lnSpc>
+            </a:pPr>
+            <a:r>
+              <a:rPr sz="1550" b="1">
+                <a:solidFill>
+                  <a:srgbClr val="1F2A3A"/>
+                </a:solidFill>
+                <a:latin typeface="맑은 고딕"/>
+                <a:ea typeface="맑은 고딕"/>
+                <a:cs typeface="맑은 고딕"/>
+              </a:rPr>
+              <a:t>끝 이벤트가 E_rejected이고 냉각 명령 단계가 CANCELLED이므로 나가지 않았다</a:t>
+            </a:r>
+          </a:p>
+        </p:txBody>
+      </p:sp>
+      <p:sp>
+        <p:nvSpPr>
+          <p:cNvPr id="12" name="Rounded Rectangle 11"/>
+          <p:cNvSpPr/>
+          <p:nvPr/>
+        </p:nvSpPr>
+        <p:spPr>
+          <a:xfrm>
+            <a:off x="548640" y="3474720"/>
+            <a:ext cx="11094415" cy="822960"/>
+          </a:xfrm>
+          <a:prstGeom prst="roundRect">
+            <a:avLst>
+              <a:gd name="adj" fmla="val 8000"/>
+            </a:avLst>
+          </a:prstGeom>
+          <a:solidFill>
+            <a:srgbClr val="F3F6F9"/>
+          </a:solidFill>
+          <a:ln>
+            <a:noFill/>
+          </a:ln>
+        </p:spPr>
+        <p:txBody>
+          <a:bodyPr rtlCol="0" anchor="ctr"/>
+          <a:lstStyle/>
+          <a:p>
+            <a:pPr algn="ctr"/>
+          </a:p>
+        </p:txBody>
+      </p:sp>
+      <p:sp>
+        <p:nvSpPr>
+          <p:cNvPr id="13" name="Oval 12"/>
+          <p:cNvSpPr/>
+          <p:nvPr/>
+        </p:nvSpPr>
+        <p:spPr>
+          <a:xfrm>
+            <a:off x="731520" y="3703320"/>
+            <a:ext cx="365760" cy="365760"/>
+          </a:xfrm>
+          <a:prstGeom prst="ellipse">
+            <a:avLst/>
+          </a:prstGeom>
+          <a:solidFill>
+            <a:srgbClr val="13294B"/>
+          </a:solidFill>
+          <a:ln>
+            <a:noFill/>
+          </a:ln>
+        </p:spPr>
+        <p:txBody>
+          <a:bodyPr rtlCol="0" anchor="ctr"/>
+          <a:lstStyle/>
+          <a:p>
+            <a:pPr algn="ctr"/>
+          </a:p>
+        </p:txBody>
+      </p:sp>
+      <p:sp>
+        <p:nvSpPr>
+          <p:cNvPr id="14" name="TextBox 13"/>
+          <p:cNvSpPr txBox="1"/>
+          <p:nvPr/>
+        </p:nvSpPr>
+        <p:spPr>
+          <a:xfrm>
+            <a:off x="731520" y="3703320"/>
+            <a:ext cx="365760" cy="365760"/>
+          </a:xfrm>
+          <a:prstGeom prst="rect">
+            <a:avLst/>
+          </a:prstGeom>
+          <a:noFill/>
+        </p:spPr>
+        <p:txBody>
+          <a:bodyPr wrap="square" anchor="ctr"/>
+          <a:lstStyle/>
+          <a:p>
+            <a:pPr algn="ctr" eaLnBrk="0">
+              <a:lnSpc>
+                <a:spcPct val="110000"/>
+              </a:lnSpc>
+            </a:pPr>
+            <a:r>
+              <a:rPr sz="1300" b="1">
+                <a:solidFill>
+                  <a:srgbClr val="FFFFFF"/>
+                </a:solidFill>
+                <a:latin typeface="맑은 고딕"/>
+                <a:ea typeface="맑은 고딕"/>
+                <a:cs typeface="맑은 고딕"/>
+              </a:rPr>
+              <a:t>2</a:t>
+            </a:r>
+          </a:p>
+        </p:txBody>
+      </p:sp>
+      <p:sp>
+        <p:nvSpPr>
+          <p:cNvPr id="15" name="TextBox 14"/>
+          <p:cNvSpPr txBox="1"/>
+          <p:nvPr/>
+        </p:nvSpPr>
+        <p:spPr>
+          <a:xfrm>
+            <a:off x="1234440" y="3429000"/>
+            <a:ext cx="10225735" cy="914400"/>
+          </a:xfrm>
+          <a:prstGeom prst="rect">
+            <a:avLst/>
+          </a:prstGeom>
+          <a:noFill/>
+        </p:spPr>
+        <p:txBody>
+          <a:bodyPr wrap="square" anchor="ctr"/>
+          <a:lstStyle/>
+          <a:p>
+            <a:pPr algn="l" eaLnBrk="0">
+              <a:lnSpc>
+                <a:spcPct val="110000"/>
+              </a:lnSpc>
+            </a:pPr>
+            <a:r>
+              <a:rPr sz="1550" b="1">
+                <a:solidFill>
+                  <a:srgbClr val="1F2A3A"/>
+                </a:solidFill>
+                <a:latin typeface="맑은 고딕"/>
+                <a:ea typeface="맑은 고딕"/>
+                <a:cs typeface="맑은 고딕"/>
+              </a:rPr>
+              <a:t>status가 COMPLETED이므로 명령이 나가 유온이 회복되었다</a:t>
+            </a:r>
+          </a:p>
+        </p:txBody>
+      </p:sp>
+      <p:sp>
+        <p:nvSpPr>
+          <p:cNvPr id="16" name="Rounded Rectangle 15"/>
+          <p:cNvSpPr/>
+          <p:nvPr/>
+        </p:nvSpPr>
+        <p:spPr>
+          <a:xfrm>
+            <a:off x="548640" y="4389120"/>
+            <a:ext cx="11094415" cy="822960"/>
+          </a:xfrm>
+          <a:prstGeom prst="roundRect">
+            <a:avLst>
+              <a:gd name="adj" fmla="val 8000"/>
+            </a:avLst>
+          </a:prstGeom>
+          <a:solidFill>
+            <a:srgbClr val="F3F6F9"/>
+          </a:solidFill>
+          <a:ln>
+            <a:noFill/>
+          </a:ln>
+        </p:spPr>
+        <p:txBody>
+          <a:bodyPr rtlCol="0" anchor="ctr"/>
+          <a:lstStyle/>
+          <a:p>
+            <a:pPr algn="ctr"/>
+          </a:p>
+        </p:txBody>
+      </p:sp>
+      <p:sp>
+        <p:nvSpPr>
+          <p:cNvPr id="17" name="Oval 16"/>
+          <p:cNvSpPr/>
+          <p:nvPr/>
+        </p:nvSpPr>
+        <p:spPr>
+          <a:xfrm>
+            <a:off x="731520" y="4617720"/>
+            <a:ext cx="365760" cy="365760"/>
+          </a:xfrm>
+          <a:prstGeom prst="ellipse">
+            <a:avLst/>
+          </a:prstGeom>
+          <a:solidFill>
+            <a:srgbClr val="13294B"/>
+          </a:solidFill>
+          <a:ln>
+            <a:noFill/>
+          </a:ln>
+        </p:spPr>
+        <p:txBody>
+          <a:bodyPr rtlCol="0" anchor="ctr"/>
+          <a:lstStyle/>
+          <a:p>
+            <a:pPr algn="ctr"/>
+          </a:p>
+        </p:txBody>
+      </p:sp>
+      <p:sp>
+        <p:nvSpPr>
+          <p:cNvPr id="18" name="TextBox 17"/>
+          <p:cNvSpPr txBox="1"/>
+          <p:nvPr/>
+        </p:nvSpPr>
+        <p:spPr>
+          <a:xfrm>
+            <a:off x="731520" y="4617720"/>
+            <a:ext cx="365760" cy="365760"/>
+          </a:xfrm>
+          <a:prstGeom prst="rect">
+            <a:avLst/>
+          </a:prstGeom>
+          <a:noFill/>
+        </p:spPr>
+        <p:txBody>
+          <a:bodyPr wrap="square" anchor="ctr"/>
+          <a:lstStyle/>
+          <a:p>
+            <a:pPr algn="ctr" eaLnBrk="0">
+              <a:lnSpc>
+                <a:spcPct val="110000"/>
+              </a:lnSpc>
+            </a:pPr>
+            <a:r>
+              <a:rPr sz="1300" b="1">
+                <a:solidFill>
+                  <a:srgbClr val="FFFFFF"/>
+                </a:solidFill>
+                <a:latin typeface="맑은 고딕"/>
+                <a:ea typeface="맑은 고딕"/>
+                <a:cs typeface="맑은 고딕"/>
+              </a:rPr>
+              <a:t>3</a:t>
+            </a:r>
+          </a:p>
+        </p:txBody>
+      </p:sp>
+      <p:sp>
+        <p:nvSpPr>
+          <p:cNvPr id="19" name="TextBox 18"/>
+          <p:cNvSpPr txBox="1"/>
+          <p:nvPr/>
+        </p:nvSpPr>
+        <p:spPr>
+          <a:xfrm>
+            <a:off x="1234440" y="4343400"/>
+            <a:ext cx="10225735" cy="914400"/>
+          </a:xfrm>
+          <a:prstGeom prst="rect">
+            <a:avLst/>
+          </a:prstGeom>
+          <a:noFill/>
+        </p:spPr>
+        <p:txBody>
+          <a:bodyPr wrap="square" anchor="ctr"/>
+          <a:lstStyle/>
+          <a:p>
+            <a:pPr algn="l" eaLnBrk="0">
+              <a:lnSpc>
+                <a:spcPct val="110000"/>
+              </a:lnSpc>
+            </a:pPr>
+            <a:r>
+              <a:rPr sz="1550" b="1">
+                <a:solidFill>
+                  <a:srgbClr val="1F2A3A"/>
+                </a:solidFill>
+                <a:latin typeface="맑은 고딕"/>
+                <a:ea typeface="맑은 고딕"/>
+                <a:cs typeface="맑은 고딕"/>
+              </a:rPr>
+              <a:t>에이전트 단계가 DONE이므로 추천대로 명령이 나갔다</a:t>
+            </a:r>
+          </a:p>
+        </p:txBody>
+      </p:sp>
+      <p:sp>
+        <p:nvSpPr>
+          <p:cNvPr id="20" name="Rounded Rectangle 19"/>
+          <p:cNvSpPr/>
+          <p:nvPr/>
+        </p:nvSpPr>
+        <p:spPr>
+          <a:xfrm>
+            <a:off x="548640" y="5303520"/>
+            <a:ext cx="11094415" cy="822960"/>
+          </a:xfrm>
+          <a:prstGeom prst="roundRect">
+            <a:avLst>
+              <a:gd name="adj" fmla="val 8000"/>
+            </a:avLst>
+          </a:prstGeom>
+          <a:solidFill>
+            <a:srgbClr val="F3F6F9"/>
+          </a:solidFill>
+          <a:ln>
+            <a:noFill/>
+          </a:ln>
+        </p:spPr>
+        <p:txBody>
+          <a:bodyPr rtlCol="0" anchor="ctr"/>
+          <a:lstStyle/>
+          <a:p>
+            <a:pPr algn="ctr"/>
+          </a:p>
+        </p:txBody>
+      </p:sp>
+      <p:sp>
+        <p:nvSpPr>
+          <p:cNvPr id="21" name="Oval 20"/>
+          <p:cNvSpPr/>
+          <p:nvPr/>
+        </p:nvSpPr>
+        <p:spPr>
+          <a:xfrm>
+            <a:off x="731520" y="5532120"/>
+            <a:ext cx="365760" cy="365760"/>
+          </a:xfrm>
+          <a:prstGeom prst="ellipse">
+            <a:avLst/>
+          </a:prstGeom>
+          <a:solidFill>
+            <a:srgbClr val="13294B"/>
+          </a:solidFill>
+          <a:ln>
+            <a:noFill/>
+          </a:ln>
+        </p:spPr>
+        <p:txBody>
+          <a:bodyPr rtlCol="0" anchor="ctr"/>
+          <a:lstStyle/>
+          <a:p>
+            <a:pPr algn="ctr"/>
+          </a:p>
+        </p:txBody>
+      </p:sp>
+      <p:sp>
+        <p:nvSpPr>
+          <p:cNvPr id="22" name="TextBox 21"/>
+          <p:cNvSpPr txBox="1"/>
+          <p:nvPr/>
+        </p:nvSpPr>
+        <p:spPr>
+          <a:xfrm>
+            <a:off x="731520" y="5532120"/>
+            <a:ext cx="365760" cy="365760"/>
+          </a:xfrm>
+          <a:prstGeom prst="rect">
+            <a:avLst/>
+          </a:prstGeom>
+          <a:noFill/>
+        </p:spPr>
+        <p:txBody>
+          <a:bodyPr wrap="square" anchor="ctr"/>
+          <a:lstStyle/>
+          <a:p>
+            <a:pPr algn="ctr" eaLnBrk="0">
+              <a:lnSpc>
+                <a:spcPct val="110000"/>
+              </a:lnSpc>
+            </a:pPr>
+            <a:r>
+              <a:rPr sz="1300" b="1">
+                <a:solidFill>
+                  <a:srgbClr val="FFFFFF"/>
+                </a:solidFill>
+                <a:latin typeface="맑은 고딕"/>
+                <a:ea typeface="맑은 고딕"/>
+                <a:cs typeface="맑은 고딕"/>
+              </a:rPr>
+              <a:t>4</a:t>
+            </a:r>
+          </a:p>
+        </p:txBody>
+      </p:sp>
+      <p:sp>
+        <p:nvSpPr>
+          <p:cNvPr id="23" name="TextBox 22"/>
+          <p:cNvSpPr txBox="1"/>
+          <p:nvPr/>
+        </p:nvSpPr>
+        <p:spPr>
+          <a:xfrm>
+            <a:off x="1234440" y="5257800"/>
+            <a:ext cx="10225735" cy="914400"/>
+          </a:xfrm>
+          <a:prstGeom prst="rect">
+            <a:avLst/>
+          </a:prstGeom>
+          <a:noFill/>
+        </p:spPr>
+        <p:txBody>
+          <a:bodyPr wrap="square" anchor="ctr"/>
+          <a:lstStyle/>
+          <a:p>
+            <a:pPr algn="l" eaLnBrk="0">
+              <a:lnSpc>
+                <a:spcPct val="110000"/>
+              </a:lnSpc>
+            </a:pPr>
+            <a:r>
+              <a:rPr sz="1550" b="1">
+                <a:solidFill>
+                  <a:srgbClr val="1F2A3A"/>
+                </a:solidFill>
+                <a:latin typeface="맑은 고딕"/>
+                <a:ea typeface="맑은 고딕"/>
+                <a:cs typeface="맑은 고딕"/>
+              </a:rPr>
+              <a:t>기록으로는 알 수 없으므로 에이전트에게 다시 판단을 맡긴다</a:t>
+            </a:r>
+          </a:p>
+        </p:txBody>
+      </p:sp>
+    </p:spTree>
+  </p:cSld>
+  <p:clrMapOvr>
+    <a:masterClrMapping/>
+  </p:clrMapOvr>
+</p:sld>
+</file>
+
+<file path=ppt/slides/slide33.xml><?xml version="1.0" encoding="utf-8"?>
+<p:sld xmlns:a="http://schemas.openxmlformats.org/drawingml/2006/main" xmlns:p="http://schemas.openxmlformats.org/presentationml/2006/main" xmlns:r="http://schemas.openxmlformats.org/officeDocument/2006/relationships">
+  <p:cSld>
+    <p:bg>
+      <p:bgPr>
+        <a:solidFill>
+          <a:srgbClr val="FFFFFF"/>
+        </a:solidFill>
+        <a:effectLst/>
+      </p:bgPr>
+    </p:bg>
+    <p:spTree>
+      <p:nvGrpSpPr>
+        <p:cNvPr id="1" name=""/>
+        <p:cNvGrpSpPr/>
+        <p:nvPr/>
+      </p:nvGrpSpPr>
+      <p:grpSpPr/>
+      <p:sp>
+        <p:nvSpPr>
+          <p:cNvPr id="2" name="TextBox 1"/>
+          <p:cNvSpPr txBox="1"/>
+          <p:nvPr/>
+        </p:nvSpPr>
+        <p:spPr>
+          <a:xfrm>
+            <a:off x="457200" y="329184"/>
+            <a:ext cx="11277295" cy="603504"/>
+          </a:xfrm>
+          <a:prstGeom prst="rect">
+            <a:avLst/>
+          </a:prstGeom>
+          <a:noFill/>
+        </p:spPr>
+        <p:txBody>
+          <a:bodyPr wrap="square" anchor="ctr"/>
+          <a:lstStyle/>
+          <a:p>
+            <a:pPr algn="l" eaLnBrk="0">
+              <a:lnSpc>
+                <a:spcPct val="110000"/>
+              </a:lnSpc>
+            </a:pPr>
+            <a:r>
+              <a:rPr sz="2800" b="1">
+                <a:solidFill>
+                  <a:srgbClr val="13294B"/>
+                </a:solidFill>
+                <a:latin typeface="맑은 고딕"/>
+                <a:ea typeface="맑은 고딕"/>
+                <a:cs typeface="맑은 고딕"/>
+              </a:rPr>
+              <a:t>Quiz 3. 냉각 명령 작업을 여는 쪽</a:t>
+            </a:r>
+          </a:p>
+        </p:txBody>
+      </p:sp>
+      <p:sp>
+        <p:nvSpPr>
+          <p:cNvPr id="3" name="TextBox 2"/>
+          <p:cNvSpPr txBox="1"/>
+          <p:nvPr/>
+        </p:nvSpPr>
+        <p:spPr>
+          <a:xfrm>
+            <a:off x="457200" y="932688"/>
+            <a:ext cx="11277295" cy="420624"/>
+          </a:xfrm>
+          <a:prstGeom prst="rect">
+            <a:avLst/>
+          </a:prstGeom>
+          <a:noFill/>
+        </p:spPr>
+        <p:txBody>
+          <a:bodyPr wrap="square" anchor="ctr"/>
+          <a:lstStyle/>
+          <a:p>
+            <a:pPr algn="l" eaLnBrk="0">
+              <a:lnSpc>
+                <a:spcPct val="110000"/>
+              </a:lnSpc>
+            </a:pPr>
+            <a:r>
+              <a:rPr sz="1600" b="0">
+                <a:solidFill>
+                  <a:srgbClr val="556175"/>
+                </a:solidFill>
+                <a:latin typeface="맑은 고딕"/>
+                <a:ea typeface="맑은 고딕"/>
+                <a:cs typeface="맑은 고딕"/>
+              </a:rPr>
+              <a:t>에이전트가 팬 최대 운전을 권하는 추천안을 제출했고, 처리 건은 운전원 승인에서 기다리고 있다.</a:t>
+            </a:r>
+          </a:p>
+        </p:txBody>
+      </p:sp>
+      <p:sp>
+        <p:nvSpPr>
+          <p:cNvPr id="4" name="Rectangle 3"/>
+          <p:cNvSpPr/>
+          <p:nvPr/>
+        </p:nvSpPr>
+        <p:spPr>
+          <a:xfrm>
+            <a:off x="548640" y="1408176"/>
+            <a:ext cx="11094415" cy="18288"/>
+          </a:xfrm>
+          <a:prstGeom prst="rect">
+            <a:avLst/>
+          </a:prstGeom>
+          <a:solidFill>
+            <a:srgbClr val="D3D9E1"/>
+          </a:solidFill>
+          <a:ln>
+            <a:noFill/>
+          </a:ln>
+        </p:spPr>
+        <p:txBody>
+          <a:bodyPr rtlCol="0" anchor="ctr"/>
+          <a:lstStyle/>
+          <a:p>
+            <a:pPr algn="ctr"/>
+          </a:p>
+        </p:txBody>
+      </p:sp>
+      <p:sp>
+        <p:nvSpPr>
+          <p:cNvPr id="5" name="TextBox 4"/>
+          <p:cNvSpPr txBox="1"/>
+          <p:nvPr/>
+        </p:nvSpPr>
+        <p:spPr>
+          <a:xfrm>
+            <a:off x="10911535" y="6473952"/>
+            <a:ext cx="822960" cy="274320"/>
+          </a:xfrm>
+          <a:prstGeom prst="rect">
+            <a:avLst/>
+          </a:prstGeom>
+          <a:noFill/>
+        </p:spPr>
+        <p:txBody>
+          <a:bodyPr wrap="square" anchor="t"/>
+          <a:lstStyle/>
+          <a:p>
+            <a:pPr algn="r" eaLnBrk="0">
+              <a:lnSpc>
+                <a:spcPct val="110000"/>
+              </a:lnSpc>
+            </a:pPr>
+            <a:r>
+              <a:rPr sz="1000" b="0">
+                <a:solidFill>
+                  <a:srgbClr val="556175"/>
+                </a:solidFill>
+                <a:latin typeface="맑은 고딕"/>
+                <a:ea typeface="맑은 고딕"/>
+                <a:cs typeface="맑은 고딕"/>
+              </a:rPr>
+              <a:t>33</a:t>
+            </a:r>
+          </a:p>
+        </p:txBody>
+      </p:sp>
+      <p:sp>
+        <p:nvSpPr>
+          <p:cNvPr id="6" name="Rounded Rectangle 5"/>
+          <p:cNvSpPr/>
+          <p:nvPr/>
+        </p:nvSpPr>
+        <p:spPr>
+          <a:xfrm>
+            <a:off x="548640" y="1627632"/>
+            <a:ext cx="11094415" cy="704088"/>
+          </a:xfrm>
+          <a:prstGeom prst="roundRect">
+            <a:avLst>
+              <a:gd name="adj" fmla="val 5000"/>
+            </a:avLst>
+          </a:prstGeom>
+          <a:solidFill>
+            <a:srgbClr val="E7F3FD"/>
+          </a:solidFill>
+          <a:ln>
+            <a:noFill/>
+          </a:ln>
+        </p:spPr>
+        <p:txBody>
+          <a:bodyPr rtlCol="0" anchor="ctr"/>
+          <a:lstStyle/>
+          <a:p>
+            <a:pPr algn="ctr"/>
+          </a:p>
+        </p:txBody>
+      </p:sp>
+      <p:sp>
+        <p:nvSpPr>
+          <p:cNvPr id="7" name="TextBox 6"/>
+          <p:cNvSpPr txBox="1"/>
+          <p:nvPr/>
+        </p:nvSpPr>
+        <p:spPr>
+          <a:xfrm>
+            <a:off x="777240" y="1627632"/>
+            <a:ext cx="10637215" cy="704088"/>
+          </a:xfrm>
+          <a:prstGeom prst="rect">
+            <a:avLst/>
+          </a:prstGeom>
+          <a:noFill/>
+        </p:spPr>
+        <p:txBody>
+          <a:bodyPr wrap="square" anchor="ctr"/>
+          <a:lstStyle/>
+          <a:p>
+            <a:pPr algn="l" eaLnBrk="0">
+              <a:lnSpc>
+                <a:spcPct val="110000"/>
+              </a:lnSpc>
+            </a:pPr>
+            <a:r>
+              <a:rPr sz="1900" b="1">
+                <a:solidFill>
+                  <a:srgbClr val="13294B"/>
+                </a:solidFill>
+                <a:latin typeface="맑은 고딕"/>
+                <a:ea typeface="맑은 고딕"/>
+                <a:cs typeface="맑은 고딕"/>
+              </a:rPr>
+              <a:t>유효한 승인과 필요한 실행 조건 검사를 거친 뒤 냉각 명령 작업을 여는 것은?</a:t>
+            </a:r>
+          </a:p>
+        </p:txBody>
+      </p:sp>
+      <p:sp>
+        <p:nvSpPr>
+          <p:cNvPr id="8" name="Rounded Rectangle 7"/>
+          <p:cNvSpPr/>
+          <p:nvPr/>
+        </p:nvSpPr>
+        <p:spPr>
+          <a:xfrm>
+            <a:off x="548640" y="2560320"/>
+            <a:ext cx="11094415" cy="822960"/>
+          </a:xfrm>
+          <a:prstGeom prst="roundRect">
+            <a:avLst>
+              <a:gd name="adj" fmla="val 8000"/>
+            </a:avLst>
+          </a:prstGeom>
+          <a:solidFill>
+            <a:srgbClr val="F3F6F9"/>
+          </a:solidFill>
+          <a:ln>
+            <a:noFill/>
+          </a:ln>
+        </p:spPr>
+        <p:txBody>
+          <a:bodyPr rtlCol="0" anchor="ctr"/>
+          <a:lstStyle/>
+          <a:p>
+            <a:pPr algn="ctr"/>
+          </a:p>
+        </p:txBody>
+      </p:sp>
+      <p:sp>
+        <p:nvSpPr>
+          <p:cNvPr id="9" name="Oval 8"/>
+          <p:cNvSpPr/>
+          <p:nvPr/>
+        </p:nvSpPr>
+        <p:spPr>
+          <a:xfrm>
+            <a:off x="731520" y="2788920"/>
+            <a:ext cx="365760" cy="365760"/>
+          </a:xfrm>
+          <a:prstGeom prst="ellipse">
+            <a:avLst/>
+          </a:prstGeom>
+          <a:solidFill>
+            <a:srgbClr val="13294B"/>
+          </a:solidFill>
+          <a:ln>
+            <a:noFill/>
+          </a:ln>
+        </p:spPr>
+        <p:txBody>
+          <a:bodyPr rtlCol="0" anchor="ctr"/>
+          <a:lstStyle/>
+          <a:p>
+            <a:pPr algn="ctr"/>
+          </a:p>
+        </p:txBody>
+      </p:sp>
+      <p:sp>
+        <p:nvSpPr>
+          <p:cNvPr id="10" name="TextBox 9"/>
+          <p:cNvSpPr txBox="1"/>
+          <p:nvPr/>
+        </p:nvSpPr>
+        <p:spPr>
+          <a:xfrm>
+            <a:off x="731520" y="2788920"/>
+            <a:ext cx="365760" cy="365760"/>
+          </a:xfrm>
+          <a:prstGeom prst="rect">
+            <a:avLst/>
+          </a:prstGeom>
+          <a:noFill/>
+        </p:spPr>
+        <p:txBody>
+          <a:bodyPr wrap="square" anchor="ctr"/>
+          <a:lstStyle/>
+          <a:p>
+            <a:pPr algn="ctr" eaLnBrk="0">
+              <a:lnSpc>
+                <a:spcPct val="110000"/>
+              </a:lnSpc>
+            </a:pPr>
+            <a:r>
+              <a:rPr sz="1300" b="1">
+                <a:solidFill>
+                  <a:srgbClr val="FFFFFF"/>
+                </a:solidFill>
+                <a:latin typeface="맑은 고딕"/>
+                <a:ea typeface="맑은 고딕"/>
+                <a:cs typeface="맑은 고딕"/>
+              </a:rPr>
+              <a:t>1</a:t>
+            </a:r>
+          </a:p>
+        </p:txBody>
+      </p:sp>
+      <p:sp>
+        <p:nvSpPr>
+          <p:cNvPr id="11" name="TextBox 10"/>
+          <p:cNvSpPr txBox="1"/>
+          <p:nvPr/>
+        </p:nvSpPr>
+        <p:spPr>
+          <a:xfrm>
+            <a:off x="1234440" y="2514600"/>
+            <a:ext cx="10225735" cy="914400"/>
+          </a:xfrm>
+          <a:prstGeom prst="rect">
+            <a:avLst/>
+          </a:prstGeom>
+          <a:noFill/>
+        </p:spPr>
+        <p:txBody>
+          <a:bodyPr wrap="square" anchor="ctr"/>
+          <a:lstStyle/>
+          <a:p>
+            <a:pPr algn="l" eaLnBrk="0">
+              <a:lnSpc>
+                <a:spcPct val="110000"/>
+              </a:lnSpc>
+            </a:pPr>
+            <a:r>
+              <a:rPr sz="1550" b="1">
+                <a:solidFill>
+                  <a:srgbClr val="1F2A3A"/>
+                </a:solidFill>
+                <a:latin typeface="맑은 고딕"/>
+                <a:ea typeface="맑은 고딕"/>
+                <a:cs typeface="맑은 고딕"/>
+              </a:rPr>
+              <a:t>추천안을 제출한 에이전트</a:t>
+            </a:r>
+          </a:p>
+        </p:txBody>
+      </p:sp>
+      <p:sp>
+        <p:nvSpPr>
+          <p:cNvPr id="12" name="Rounded Rectangle 11"/>
+          <p:cNvSpPr/>
+          <p:nvPr/>
+        </p:nvSpPr>
+        <p:spPr>
+          <a:xfrm>
+            <a:off x="548640" y="3474720"/>
+            <a:ext cx="11094415" cy="822960"/>
+          </a:xfrm>
+          <a:prstGeom prst="roundRect">
+            <a:avLst>
+              <a:gd name="adj" fmla="val 8000"/>
+            </a:avLst>
+          </a:prstGeom>
+          <a:solidFill>
+            <a:srgbClr val="F3F6F9"/>
+          </a:solidFill>
+          <a:ln>
+            <a:noFill/>
+          </a:ln>
+        </p:spPr>
+        <p:txBody>
+          <a:bodyPr rtlCol="0" anchor="ctr"/>
+          <a:lstStyle/>
+          <a:p>
+            <a:pPr algn="ctr"/>
+          </a:p>
+        </p:txBody>
+      </p:sp>
+      <p:sp>
+        <p:nvSpPr>
+          <p:cNvPr id="13" name="Oval 12"/>
+          <p:cNvSpPr/>
+          <p:nvPr/>
+        </p:nvSpPr>
+        <p:spPr>
+          <a:xfrm>
+            <a:off x="731520" y="3703320"/>
+            <a:ext cx="365760" cy="365760"/>
+          </a:xfrm>
+          <a:prstGeom prst="ellipse">
+            <a:avLst/>
+          </a:prstGeom>
+          <a:solidFill>
+            <a:srgbClr val="13294B"/>
+          </a:solidFill>
+          <a:ln>
+            <a:noFill/>
+          </a:ln>
+        </p:spPr>
+        <p:txBody>
+          <a:bodyPr rtlCol="0" anchor="ctr"/>
+          <a:lstStyle/>
+          <a:p>
+            <a:pPr algn="ctr"/>
+          </a:p>
+        </p:txBody>
+      </p:sp>
+      <p:sp>
+        <p:nvSpPr>
+          <p:cNvPr id="14" name="TextBox 13"/>
+          <p:cNvSpPr txBox="1"/>
+          <p:nvPr/>
+        </p:nvSpPr>
+        <p:spPr>
+          <a:xfrm>
+            <a:off x="731520" y="3703320"/>
+            <a:ext cx="365760" cy="365760"/>
+          </a:xfrm>
+          <a:prstGeom prst="rect">
+            <a:avLst/>
+          </a:prstGeom>
+          <a:noFill/>
+        </p:spPr>
+        <p:txBody>
+          <a:bodyPr wrap="square" anchor="ctr"/>
+          <a:lstStyle/>
+          <a:p>
+            <a:pPr algn="ctr" eaLnBrk="0">
+              <a:lnSpc>
+                <a:spcPct val="110000"/>
+              </a:lnSpc>
+            </a:pPr>
+            <a:r>
+              <a:rPr sz="1300" b="1">
+                <a:solidFill>
+                  <a:srgbClr val="FFFFFF"/>
+                </a:solidFill>
+                <a:latin typeface="맑은 고딕"/>
+                <a:ea typeface="맑은 고딕"/>
+                <a:cs typeface="맑은 고딕"/>
+              </a:rPr>
+              <a:t>2</a:t>
+            </a:r>
+          </a:p>
+        </p:txBody>
+      </p:sp>
+      <p:sp>
+        <p:nvSpPr>
+          <p:cNvPr id="15" name="TextBox 14"/>
+          <p:cNvSpPr txBox="1"/>
+          <p:nvPr/>
+        </p:nvSpPr>
+        <p:spPr>
+          <a:xfrm>
+            <a:off x="1234440" y="3429000"/>
+            <a:ext cx="10225735" cy="914400"/>
+          </a:xfrm>
+          <a:prstGeom prst="rect">
+            <a:avLst/>
+          </a:prstGeom>
+          <a:noFill/>
+        </p:spPr>
+        <p:txBody>
+          <a:bodyPr wrap="square" anchor="ctr"/>
+          <a:lstStyle/>
+          <a:p>
+            <a:pPr algn="l" eaLnBrk="0">
+              <a:lnSpc>
+                <a:spcPct val="110000"/>
+              </a:lnSpc>
+            </a:pPr>
+            <a:r>
+              <a:rPr sz="1550" b="1">
+                <a:solidFill>
+                  <a:srgbClr val="1F2A3A"/>
+                </a:solidFill>
+                <a:latin typeface="맑은 고딕"/>
+                <a:ea typeface="맑은 고딕"/>
+                <a:cs typeface="맑은 고딕"/>
+              </a:rPr>
+              <a:t>명령을 받아 PLC에 전하는 SCADA</a:t>
+            </a:r>
+          </a:p>
+        </p:txBody>
+      </p:sp>
+      <p:sp>
+        <p:nvSpPr>
+          <p:cNvPr id="16" name="Rounded Rectangle 15"/>
+          <p:cNvSpPr/>
+          <p:nvPr/>
+        </p:nvSpPr>
+        <p:spPr>
+          <a:xfrm>
+            <a:off x="548640" y="4389120"/>
+            <a:ext cx="11094415" cy="822960"/>
+          </a:xfrm>
+          <a:prstGeom prst="roundRect">
+            <a:avLst>
+              <a:gd name="adj" fmla="val 8000"/>
+            </a:avLst>
+          </a:prstGeom>
+          <a:solidFill>
+            <a:srgbClr val="F3F6F9"/>
+          </a:solidFill>
+          <a:ln>
+            <a:noFill/>
+          </a:ln>
+        </p:spPr>
+        <p:txBody>
+          <a:bodyPr rtlCol="0" anchor="ctr"/>
+          <a:lstStyle/>
+          <a:p>
+            <a:pPr algn="ctr"/>
+          </a:p>
+        </p:txBody>
+      </p:sp>
+      <p:sp>
+        <p:nvSpPr>
+          <p:cNvPr id="17" name="Oval 16"/>
+          <p:cNvSpPr/>
+          <p:nvPr/>
+        </p:nvSpPr>
+        <p:spPr>
+          <a:xfrm>
+            <a:off x="731520" y="4617720"/>
+            <a:ext cx="365760" cy="365760"/>
+          </a:xfrm>
+          <a:prstGeom prst="ellipse">
+            <a:avLst/>
+          </a:prstGeom>
+          <a:solidFill>
+            <a:srgbClr val="13294B"/>
+          </a:solidFill>
+          <a:ln>
+            <a:noFill/>
+          </a:ln>
+        </p:spPr>
+        <p:txBody>
+          <a:bodyPr rtlCol="0" anchor="ctr"/>
+          <a:lstStyle/>
+          <a:p>
+            <a:pPr algn="ctr"/>
+          </a:p>
+        </p:txBody>
+      </p:sp>
+      <p:sp>
+        <p:nvSpPr>
+          <p:cNvPr id="18" name="TextBox 17"/>
+          <p:cNvSpPr txBox="1"/>
+          <p:nvPr/>
+        </p:nvSpPr>
+        <p:spPr>
+          <a:xfrm>
+            <a:off x="731520" y="4617720"/>
+            <a:ext cx="365760" cy="365760"/>
+          </a:xfrm>
+          <a:prstGeom prst="rect">
+            <a:avLst/>
+          </a:prstGeom>
+          <a:noFill/>
+        </p:spPr>
+        <p:txBody>
+          <a:bodyPr wrap="square" anchor="ctr"/>
+          <a:lstStyle/>
+          <a:p>
+            <a:pPr algn="ctr" eaLnBrk="0">
+              <a:lnSpc>
+                <a:spcPct val="110000"/>
+              </a:lnSpc>
+            </a:pPr>
+            <a:r>
+              <a:rPr sz="1300" b="1">
+                <a:solidFill>
+                  <a:srgbClr val="FFFFFF"/>
+                </a:solidFill>
+                <a:latin typeface="맑은 고딕"/>
+                <a:ea typeface="맑은 고딕"/>
+                <a:cs typeface="맑은 고딕"/>
+              </a:rPr>
+              <a:t>3</a:t>
+            </a:r>
+          </a:p>
+        </p:txBody>
+      </p:sp>
+      <p:sp>
+        <p:nvSpPr>
+          <p:cNvPr id="19" name="TextBox 18"/>
+          <p:cNvSpPr txBox="1"/>
+          <p:nvPr/>
+        </p:nvSpPr>
+        <p:spPr>
+          <a:xfrm>
+            <a:off x="1234440" y="4343400"/>
+            <a:ext cx="10225735" cy="914400"/>
+          </a:xfrm>
+          <a:prstGeom prst="rect">
+            <a:avLst/>
+          </a:prstGeom>
+          <a:noFill/>
+        </p:spPr>
+        <p:txBody>
+          <a:bodyPr wrap="square" anchor="ctr"/>
+          <a:lstStyle/>
+          <a:p>
+            <a:pPr algn="l" eaLnBrk="0">
+              <a:lnSpc>
+                <a:spcPct val="110000"/>
+              </a:lnSpc>
+            </a:pPr>
+            <a:r>
+              <a:rPr sz="1550" b="1">
+                <a:solidFill>
+                  <a:srgbClr val="1F2A3A"/>
+                </a:solidFill>
+                <a:latin typeface="맑은 고딕"/>
+                <a:ea typeface="맑은 고딕"/>
+                <a:cs typeface="맑은 고딕"/>
+              </a:rPr>
+              <a:t>승인한 운전원</a:t>
+            </a:r>
+          </a:p>
+        </p:txBody>
+      </p:sp>
+      <p:sp>
+        <p:nvSpPr>
+          <p:cNvPr id="20" name="Rounded Rectangle 19"/>
+          <p:cNvSpPr/>
+          <p:nvPr/>
+        </p:nvSpPr>
+        <p:spPr>
+          <a:xfrm>
+            <a:off x="548640" y="5303520"/>
+            <a:ext cx="11094415" cy="822960"/>
+          </a:xfrm>
+          <a:prstGeom prst="roundRect">
+            <a:avLst>
+              <a:gd name="adj" fmla="val 8000"/>
+            </a:avLst>
+          </a:prstGeom>
+          <a:solidFill>
+            <a:srgbClr val="F3F6F9"/>
+          </a:solidFill>
+          <a:ln>
+            <a:noFill/>
+          </a:ln>
+        </p:spPr>
+        <p:txBody>
+          <a:bodyPr rtlCol="0" anchor="ctr"/>
+          <a:lstStyle/>
+          <a:p>
+            <a:pPr algn="ctr"/>
+          </a:p>
+        </p:txBody>
+      </p:sp>
+      <p:sp>
+        <p:nvSpPr>
+          <p:cNvPr id="21" name="Oval 20"/>
+          <p:cNvSpPr/>
+          <p:nvPr/>
+        </p:nvSpPr>
+        <p:spPr>
+          <a:xfrm>
+            <a:off x="731520" y="5532120"/>
+            <a:ext cx="365760" cy="365760"/>
+          </a:xfrm>
+          <a:prstGeom prst="ellipse">
+            <a:avLst/>
+          </a:prstGeom>
+          <a:solidFill>
+            <a:srgbClr val="13294B"/>
+          </a:solidFill>
+          <a:ln>
+            <a:noFill/>
+          </a:ln>
+        </p:spPr>
+        <p:txBody>
+          <a:bodyPr rtlCol="0" anchor="ctr"/>
+          <a:lstStyle/>
+          <a:p>
+            <a:pPr algn="ctr"/>
+          </a:p>
+        </p:txBody>
+      </p:sp>
+      <p:sp>
+        <p:nvSpPr>
+          <p:cNvPr id="22" name="TextBox 21"/>
+          <p:cNvSpPr txBox="1"/>
+          <p:nvPr/>
+        </p:nvSpPr>
+        <p:spPr>
+          <a:xfrm>
+            <a:off x="731520" y="5532120"/>
+            <a:ext cx="365760" cy="365760"/>
+          </a:xfrm>
+          <a:prstGeom prst="rect">
+            <a:avLst/>
+          </a:prstGeom>
+          <a:noFill/>
+        </p:spPr>
+        <p:txBody>
+          <a:bodyPr wrap="square" anchor="ctr"/>
+          <a:lstStyle/>
+          <a:p>
+            <a:pPr algn="ctr" eaLnBrk="0">
+              <a:lnSpc>
+                <a:spcPct val="110000"/>
+              </a:lnSpc>
+            </a:pPr>
+            <a:r>
+              <a:rPr sz="1300" b="1">
+                <a:solidFill>
+                  <a:srgbClr val="FFFFFF"/>
+                </a:solidFill>
+                <a:latin typeface="맑은 고딕"/>
+                <a:ea typeface="맑은 고딕"/>
+                <a:cs typeface="맑은 고딕"/>
+              </a:rPr>
+              <a:t>4</a:t>
+            </a:r>
+          </a:p>
+        </p:txBody>
+      </p:sp>
+      <p:sp>
+        <p:nvSpPr>
+          <p:cNvPr id="23" name="TextBox 22"/>
+          <p:cNvSpPr txBox="1"/>
+          <p:nvPr/>
+        </p:nvSpPr>
+        <p:spPr>
+          <a:xfrm>
+            <a:off x="1234440" y="5257800"/>
+            <a:ext cx="10225735" cy="914400"/>
+          </a:xfrm>
+          <a:prstGeom prst="rect">
+            <a:avLst/>
+          </a:prstGeom>
+          <a:noFill/>
+        </p:spPr>
+        <p:txBody>
+          <a:bodyPr wrap="square" anchor="ctr"/>
+          <a:lstStyle/>
+          <a:p>
+            <a:pPr algn="l" eaLnBrk="0">
+              <a:lnSpc>
+                <a:spcPct val="110000"/>
+              </a:lnSpc>
+            </a:pPr>
+            <a:r>
+              <a:rPr sz="1550" b="1">
+                <a:solidFill>
+                  <a:srgbClr val="1F2A3A"/>
+                </a:solidFill>
+                <a:latin typeface="맑은 고딕"/>
+                <a:ea typeface="맑은 고딕"/>
+                <a:cs typeface="맑은 고딕"/>
+              </a:rPr>
+              <a:t>프로세스 엔진</a:t>
+            </a:r>
+          </a:p>
+        </p:txBody>
+      </p:sp>
+    </p:spTree>
+  </p:cSld>
+  <p:clrMapOvr>
+    <a:masterClrMapping/>
+  </p:clrMapOvr>
+</p:sld>
+</file>
+
+<file path=ppt/slides/slide34.xml><?xml version="1.0" encoding="utf-8"?>
+<p:sld xmlns:a="http://schemas.openxmlformats.org/drawingml/2006/main" xmlns:p="http://schemas.openxmlformats.org/presentationml/2006/main" xmlns:r="http://schemas.openxmlformats.org/officeDocument/2006/relationships">
+  <p:cSld>
+    <p:bg>
+      <p:bgPr>
+        <a:solidFill>
+          <a:srgbClr val="FFFFFF"/>
+        </a:solidFill>
+        <a:effectLst/>
+      </p:bgPr>
+    </p:bg>
+    <p:spTree>
+      <p:nvGrpSpPr>
+        <p:cNvPr id="1" name=""/>
+        <p:cNvGrpSpPr/>
+        <p:nvPr/>
+      </p:nvGrpSpPr>
+      <p:grpSpPr/>
+      <p:sp>
+        <p:nvSpPr>
+          <p:cNvPr id="2" name="TextBox 1"/>
+          <p:cNvSpPr txBox="1"/>
+          <p:nvPr/>
+        </p:nvSpPr>
+        <p:spPr>
+          <a:xfrm>
+            <a:off x="457200" y="329184"/>
+            <a:ext cx="11277295" cy="603504"/>
+          </a:xfrm>
+          <a:prstGeom prst="rect">
+            <a:avLst/>
+          </a:prstGeom>
+          <a:noFill/>
+        </p:spPr>
+        <p:txBody>
+          <a:bodyPr wrap="square" anchor="ctr"/>
+          <a:lstStyle/>
+          <a:p>
+            <a:pPr algn="l" eaLnBrk="0">
+              <a:lnSpc>
+                <a:spcPct val="110000"/>
+              </a:lnSpc>
+            </a:pPr>
+            <a:r>
+              <a:rPr sz="2800" b="1">
+                <a:solidFill>
+                  <a:srgbClr val="13294B"/>
+                </a:solidFill>
+                <a:latin typeface="맑은 고딕"/>
+                <a:ea typeface="맑은 고딕"/>
+                <a:cs typeface="맑은 고딕"/>
+              </a:rPr>
+              <a:t>정답과 판단 기준</a:t>
+            </a:r>
+          </a:p>
+        </p:txBody>
+      </p:sp>
+      <p:sp>
+        <p:nvSpPr>
+          <p:cNvPr id="3" name="TextBox 2"/>
+          <p:cNvSpPr txBox="1"/>
+          <p:nvPr/>
+        </p:nvSpPr>
+        <p:spPr>
+          <a:xfrm>
+            <a:off x="457200" y="932688"/>
+            <a:ext cx="11277295" cy="420624"/>
+          </a:xfrm>
+          <a:prstGeom prst="rect">
+            <a:avLst/>
+          </a:prstGeom>
+          <a:noFill/>
+        </p:spPr>
+        <p:txBody>
+          <a:bodyPr wrap="square" anchor="ctr"/>
+          <a:lstStyle/>
+          <a:p>
+            <a:pPr algn="l" eaLnBrk="0">
+              <a:lnSpc>
+                <a:spcPct val="110000"/>
+              </a:lnSpc>
+            </a:pPr>
+            <a:r>
+              <a:rPr sz="1600" b="0">
+                <a:solidFill>
+                  <a:srgbClr val="556175"/>
+                </a:solidFill>
+                <a:latin typeface="맑은 고딕"/>
+                <a:ea typeface="맑은 고딕"/>
+                <a:cs typeface="맑은 고딕"/>
+              </a:rPr>
+              <a:t>세 문항은 처리 건의 상태, 판단의 근거가 되는 기록, 작업을 여는 책임의 경계를 바르게 읽는지 확인한다.</a:t>
+            </a:r>
+          </a:p>
+        </p:txBody>
+      </p:sp>
+      <p:sp>
+        <p:nvSpPr>
+          <p:cNvPr id="4" name="Rectangle 3"/>
+          <p:cNvSpPr/>
+          <p:nvPr/>
+        </p:nvSpPr>
+        <p:spPr>
+          <a:xfrm>
+            <a:off x="548640" y="1408176"/>
+            <a:ext cx="11094415" cy="18288"/>
+          </a:xfrm>
+          <a:prstGeom prst="rect">
+            <a:avLst/>
+          </a:prstGeom>
+          <a:solidFill>
+            <a:srgbClr val="D3D9E1"/>
+          </a:solidFill>
+          <a:ln>
+            <a:noFill/>
+          </a:ln>
+        </p:spPr>
+        <p:txBody>
+          <a:bodyPr rtlCol="0" anchor="ctr"/>
+          <a:lstStyle/>
+          <a:p>
+            <a:pPr algn="ctr"/>
+          </a:p>
+        </p:txBody>
+      </p:sp>
+      <p:sp>
+        <p:nvSpPr>
+          <p:cNvPr id="5" name="TextBox 4"/>
+          <p:cNvSpPr txBox="1"/>
+          <p:nvPr/>
+        </p:nvSpPr>
+        <p:spPr>
+          <a:xfrm>
+            <a:off x="10911535" y="6473952"/>
+            <a:ext cx="822960" cy="274320"/>
+          </a:xfrm>
+          <a:prstGeom prst="rect">
+            <a:avLst/>
+          </a:prstGeom>
+          <a:noFill/>
+        </p:spPr>
+        <p:txBody>
+          <a:bodyPr wrap="square" anchor="t"/>
+          <a:lstStyle/>
+          <a:p>
+            <a:pPr algn="r" eaLnBrk="0">
+              <a:lnSpc>
+                <a:spcPct val="110000"/>
+              </a:lnSpc>
+            </a:pPr>
+            <a:r>
+              <a:rPr sz="1000" b="0">
+                <a:solidFill>
+                  <a:srgbClr val="556175"/>
+                </a:solidFill>
+                <a:latin typeface="맑은 고딕"/>
+                <a:ea typeface="맑은 고딕"/>
+                <a:cs typeface="맑은 고딕"/>
+              </a:rPr>
+              <a:t>34</a:t>
+            </a:r>
+          </a:p>
+        </p:txBody>
+      </p:sp>
+      <p:sp>
+        <p:nvSpPr>
+          <p:cNvPr id="6" name="Rounded Rectangle 5"/>
+          <p:cNvSpPr/>
+          <p:nvPr/>
+        </p:nvSpPr>
+        <p:spPr>
+          <a:xfrm>
+            <a:off x="548640" y="2418587"/>
+            <a:ext cx="11094415" cy="347472"/>
+          </a:xfrm>
+          <a:prstGeom prst="roundRect">
+            <a:avLst>
+              <a:gd name="adj" fmla="val 12000"/>
+            </a:avLst>
+          </a:prstGeom>
+          <a:solidFill>
+            <a:srgbClr val="13294B"/>
+          </a:solidFill>
+          <a:ln>
+            <a:noFill/>
+          </a:ln>
+        </p:spPr>
+        <p:txBody>
+          <a:bodyPr rtlCol="0" anchor="ctr"/>
+          <a:lstStyle/>
+          <a:p>
+            <a:pPr algn="ctr"/>
+          </a:p>
+        </p:txBody>
+      </p:sp>
+      <p:sp>
+        <p:nvSpPr>
+          <p:cNvPr id="7" name="TextBox 6"/>
+          <p:cNvSpPr txBox="1"/>
+          <p:nvPr/>
+        </p:nvSpPr>
+        <p:spPr>
+          <a:xfrm>
+            <a:off x="685800" y="2418587"/>
+            <a:ext cx="2514600" cy="347472"/>
+          </a:xfrm>
+          <a:prstGeom prst="rect">
+            <a:avLst/>
+          </a:prstGeom>
+          <a:noFill/>
+        </p:spPr>
+        <p:txBody>
+          <a:bodyPr wrap="square" anchor="ctr"/>
+          <a:lstStyle/>
+          <a:p>
+            <a:pPr algn="l" eaLnBrk="0">
+              <a:lnSpc>
+                <a:spcPct val="110000"/>
+              </a:lnSpc>
+            </a:pPr>
+            <a:r>
+              <a:rPr sz="1300" b="1">
+                <a:solidFill>
+                  <a:srgbClr val="FFFFFF"/>
+                </a:solidFill>
+                <a:latin typeface="맑은 고딕"/>
+                <a:ea typeface="맑은 고딕"/>
+                <a:cs typeface="맑은 고딕"/>
+              </a:rPr>
+              <a:t>문항</a:t>
+            </a:r>
+          </a:p>
+        </p:txBody>
+      </p:sp>
+      <p:sp>
+        <p:nvSpPr>
+          <p:cNvPr id="8" name="TextBox 7"/>
+          <p:cNvSpPr txBox="1"/>
+          <p:nvPr/>
+        </p:nvSpPr>
+        <p:spPr>
+          <a:xfrm>
+            <a:off x="3200400" y="2418587"/>
+            <a:ext cx="6248095" cy="347472"/>
+          </a:xfrm>
+          <a:prstGeom prst="rect">
+            <a:avLst/>
+          </a:prstGeom>
+          <a:noFill/>
+        </p:spPr>
+        <p:txBody>
+          <a:bodyPr wrap="square" anchor="ctr"/>
+          <a:lstStyle/>
+          <a:p>
+            <a:pPr algn="l" eaLnBrk="0">
+              <a:lnSpc>
+                <a:spcPct val="110000"/>
+              </a:lnSpc>
+            </a:pPr>
+            <a:r>
+              <a:rPr sz="1300" b="1">
+                <a:solidFill>
+                  <a:srgbClr val="FFFFFF"/>
+                </a:solidFill>
+                <a:latin typeface="맑은 고딕"/>
+                <a:ea typeface="맑은 고딕"/>
+                <a:cs typeface="맑은 고딕"/>
+              </a:rPr>
+              <a:t>판단 기준</a:t>
+            </a:r>
+          </a:p>
+        </p:txBody>
+      </p:sp>
+      <p:sp>
+        <p:nvSpPr>
+          <p:cNvPr id="9" name="TextBox 8"/>
+          <p:cNvSpPr txBox="1"/>
+          <p:nvPr/>
+        </p:nvSpPr>
+        <p:spPr>
+          <a:xfrm>
+            <a:off x="9448495" y="2418587"/>
+            <a:ext cx="2194560" cy="347472"/>
+          </a:xfrm>
+          <a:prstGeom prst="rect">
+            <a:avLst/>
+          </a:prstGeom>
+          <a:noFill/>
+        </p:spPr>
+        <p:txBody>
+          <a:bodyPr wrap="square" anchor="ctr"/>
+          <a:lstStyle/>
+          <a:p>
+            <a:pPr algn="l" eaLnBrk="0">
+              <a:lnSpc>
+                <a:spcPct val="110000"/>
+              </a:lnSpc>
+            </a:pPr>
+            <a:r>
+              <a:rPr sz="1300" b="1">
+                <a:solidFill>
+                  <a:srgbClr val="FFFFFF"/>
+                </a:solidFill>
+                <a:latin typeface="맑은 고딕"/>
+                <a:ea typeface="맑은 고딕"/>
+                <a:cs typeface="맑은 고딕"/>
+              </a:rPr>
+              <a:t>정답</a:t>
+            </a:r>
+          </a:p>
+        </p:txBody>
+      </p:sp>
+      <p:sp>
+        <p:nvSpPr>
+          <p:cNvPr id="10" name="Rounded Rectangle 9"/>
+          <p:cNvSpPr/>
+          <p:nvPr/>
+        </p:nvSpPr>
+        <p:spPr>
+          <a:xfrm>
+            <a:off x="548640" y="2852927"/>
+            <a:ext cx="11094415" cy="850392"/>
+          </a:xfrm>
+          <a:prstGeom prst="roundRect">
+            <a:avLst>
+              <a:gd name="adj" fmla="val 8000"/>
+            </a:avLst>
+          </a:prstGeom>
+          <a:solidFill>
+            <a:srgbClr val="F3F6F9"/>
+          </a:solidFill>
+          <a:ln>
+            <a:noFill/>
+          </a:ln>
+        </p:spPr>
+        <p:txBody>
+          <a:bodyPr rtlCol="0" anchor="ctr"/>
+          <a:lstStyle/>
+          <a:p>
+            <a:pPr algn="ctr"/>
+          </a:p>
+        </p:txBody>
+      </p:sp>
+      <p:sp>
+        <p:nvSpPr>
+          <p:cNvPr id="11" name="TextBox 10"/>
+          <p:cNvSpPr txBox="1"/>
+          <p:nvPr/>
+        </p:nvSpPr>
+        <p:spPr>
+          <a:xfrm>
+            <a:off x="685800" y="2820923"/>
+            <a:ext cx="2514600" cy="914400"/>
+          </a:xfrm>
+          <a:prstGeom prst="rect">
+            <a:avLst/>
+          </a:prstGeom>
+          <a:noFill/>
+        </p:spPr>
+        <p:txBody>
+          <a:bodyPr wrap="square" anchor="ctr"/>
+          <a:lstStyle/>
+          <a:p>
+            <a:pPr algn="l" eaLnBrk="0">
+              <a:lnSpc>
+                <a:spcPct val="110000"/>
+              </a:lnSpc>
+            </a:pPr>
+            <a:r>
+              <a:rPr sz="1600" b="1">
+                <a:solidFill>
+                  <a:srgbClr val="13294B"/>
+                </a:solidFill>
+                <a:latin typeface="맑은 고딕"/>
+                <a:ea typeface="맑은 고딕"/>
+                <a:cs typeface="맑은 고딕"/>
+              </a:rPr>
+              <a:t>Quiz 1</a:t>
+            </a:r>
+          </a:p>
+        </p:txBody>
+      </p:sp>
+      <p:sp>
+        <p:nvSpPr>
+          <p:cNvPr id="12" name="TextBox 11"/>
+          <p:cNvSpPr txBox="1"/>
+          <p:nvPr/>
+        </p:nvSpPr>
+        <p:spPr>
+          <a:xfrm>
+            <a:off x="3200400" y="2820923"/>
+            <a:ext cx="6156655" cy="914400"/>
+          </a:xfrm>
+          <a:prstGeom prst="rect">
+            <a:avLst/>
+          </a:prstGeom>
+          <a:noFill/>
+        </p:spPr>
+        <p:txBody>
+          <a:bodyPr wrap="square" anchor="ctr"/>
+          <a:lstStyle/>
+          <a:p>
+            <a:pPr algn="l" eaLnBrk="0">
+              <a:lnSpc>
+                <a:spcPct val="110000"/>
+              </a:lnSpc>
+            </a:pPr>
+            <a:r>
+              <a:rPr sz="1400" b="0">
+                <a:solidFill>
+                  <a:srgbClr val="1F2A3A"/>
+                </a:solidFill>
+                <a:latin typeface="맑은 고딕"/>
+                <a:ea typeface="맑은 고딕"/>
+                <a:cs typeface="맑은 고딕"/>
+              </a:rPr>
+              <a:t>승인 지연 타이머는 비중단형이다. 알림 가지만 끝나고 승인 작업은 열린 채로 기다린다.</a:t>
+            </a:r>
+          </a:p>
+        </p:txBody>
+      </p:sp>
+      <p:sp>
+        <p:nvSpPr>
+          <p:cNvPr id="13" name="TextBox 12"/>
+          <p:cNvSpPr txBox="1"/>
+          <p:nvPr/>
+        </p:nvSpPr>
+        <p:spPr>
+          <a:xfrm>
+            <a:off x="9448495" y="2820923"/>
+            <a:ext cx="2103120" cy="914400"/>
+          </a:xfrm>
+          <a:prstGeom prst="rect">
+            <a:avLst/>
+          </a:prstGeom>
+          <a:noFill/>
+        </p:spPr>
+        <p:txBody>
+          <a:bodyPr wrap="square" anchor="ctr"/>
+          <a:lstStyle/>
+          <a:p>
+            <a:pPr algn="l" eaLnBrk="0">
+              <a:lnSpc>
+                <a:spcPct val="110000"/>
+              </a:lnSpc>
+            </a:pPr>
+            <a:r>
+              <a:rPr sz="1250" b="1">
+                <a:solidFill>
+                  <a:srgbClr val="556175"/>
+                </a:solidFill>
+                <a:latin typeface="맑은 고딕"/>
+                <a:ea typeface="맑은 고딕"/>
+                <a:cs typeface="맑은 고딕"/>
+              </a:rPr>
+              <a:t>3번</a:t>
+            </a:r>
+          </a:p>
+        </p:txBody>
+      </p:sp>
+      <p:sp>
+        <p:nvSpPr>
+          <p:cNvPr id="14" name="Rounded Rectangle 13"/>
+          <p:cNvSpPr/>
+          <p:nvPr/>
+        </p:nvSpPr>
+        <p:spPr>
+          <a:xfrm>
+            <a:off x="548640" y="3767327"/>
+            <a:ext cx="11094415" cy="850392"/>
+          </a:xfrm>
+          <a:prstGeom prst="roundRect">
+            <a:avLst>
+              <a:gd name="adj" fmla="val 8000"/>
+            </a:avLst>
+          </a:prstGeom>
+          <a:solidFill>
+            <a:srgbClr val="F3F6F9"/>
+          </a:solidFill>
+          <a:ln>
+            <a:noFill/>
+          </a:ln>
+        </p:spPr>
+        <p:txBody>
+          <a:bodyPr rtlCol="0" anchor="ctr"/>
+          <a:lstStyle/>
+          <a:p>
+            <a:pPr algn="ctr"/>
+          </a:p>
+        </p:txBody>
+      </p:sp>
+      <p:sp>
+        <p:nvSpPr>
+          <p:cNvPr id="15" name="TextBox 14"/>
+          <p:cNvSpPr txBox="1"/>
+          <p:nvPr/>
+        </p:nvSpPr>
+        <p:spPr>
+          <a:xfrm>
+            <a:off x="685800" y="3735323"/>
+            <a:ext cx="2514600" cy="914400"/>
+          </a:xfrm>
+          <a:prstGeom prst="rect">
+            <a:avLst/>
+          </a:prstGeom>
+          <a:noFill/>
+        </p:spPr>
+        <p:txBody>
+          <a:bodyPr wrap="square" anchor="ctr"/>
+          <a:lstStyle/>
+          <a:p>
+            <a:pPr algn="l" eaLnBrk="0">
+              <a:lnSpc>
+                <a:spcPct val="110000"/>
+              </a:lnSpc>
+            </a:pPr>
+            <a:r>
+              <a:rPr sz="1600" b="1">
+                <a:solidFill>
+                  <a:srgbClr val="13294B"/>
+                </a:solidFill>
+                <a:latin typeface="맑은 고딕"/>
+                <a:ea typeface="맑은 고딕"/>
+                <a:cs typeface="맑은 고딕"/>
+              </a:rPr>
+              <a:t>Quiz 2</a:t>
+            </a:r>
+          </a:p>
+        </p:txBody>
+      </p:sp>
+      <p:sp>
+        <p:nvSpPr>
+          <p:cNvPr id="16" name="TextBox 15"/>
+          <p:cNvSpPr txBox="1"/>
+          <p:nvPr/>
+        </p:nvSpPr>
+        <p:spPr>
+          <a:xfrm>
+            <a:off x="3200400" y="3735323"/>
+            <a:ext cx="6156655" cy="914400"/>
+          </a:xfrm>
+          <a:prstGeom prst="rect">
+            <a:avLst/>
+          </a:prstGeom>
+          <a:noFill/>
+        </p:spPr>
+        <p:txBody>
+          <a:bodyPr wrap="square" anchor="ctr"/>
+          <a:lstStyle/>
+          <a:p>
+            <a:pPr algn="l" eaLnBrk="0">
+              <a:lnSpc>
+                <a:spcPct val="110000"/>
+              </a:lnSpc>
+            </a:pPr>
+            <a:r>
+              <a:rPr sz="1400" b="0">
+                <a:solidFill>
+                  <a:srgbClr val="1F2A3A"/>
+                </a:solidFill>
+                <a:latin typeface="맑은 고딕"/>
+                <a:ea typeface="맑은 고딕"/>
+                <a:cs typeface="맑은 고딕"/>
+              </a:rPr>
+              <a:t>COMPLETED는 실행이 끝났다는 뜻이다. 결과는 끝 이벤트와 단계의 상태로 읽는다.</a:t>
+            </a:r>
+          </a:p>
+        </p:txBody>
+      </p:sp>
+      <p:sp>
+        <p:nvSpPr>
+          <p:cNvPr id="17" name="TextBox 16"/>
+          <p:cNvSpPr txBox="1"/>
+          <p:nvPr/>
+        </p:nvSpPr>
+        <p:spPr>
+          <a:xfrm>
+            <a:off x="9448495" y="3735323"/>
+            <a:ext cx="2103120" cy="914400"/>
+          </a:xfrm>
+          <a:prstGeom prst="rect">
+            <a:avLst/>
+          </a:prstGeom>
+          <a:noFill/>
+        </p:spPr>
+        <p:txBody>
+          <a:bodyPr wrap="square" anchor="ctr"/>
+          <a:lstStyle/>
+          <a:p>
+            <a:pPr algn="l" eaLnBrk="0">
+              <a:lnSpc>
+                <a:spcPct val="110000"/>
+              </a:lnSpc>
+            </a:pPr>
+            <a:r>
+              <a:rPr sz="1250" b="1">
+                <a:solidFill>
+                  <a:srgbClr val="556175"/>
+                </a:solidFill>
+                <a:latin typeface="맑은 고딕"/>
+                <a:ea typeface="맑은 고딕"/>
+                <a:cs typeface="맑은 고딕"/>
+              </a:rPr>
+              <a:t>1번</a:t>
+            </a:r>
+          </a:p>
+        </p:txBody>
+      </p:sp>
+      <p:sp>
+        <p:nvSpPr>
+          <p:cNvPr id="18" name="Rounded Rectangle 17"/>
+          <p:cNvSpPr/>
+          <p:nvPr/>
+        </p:nvSpPr>
+        <p:spPr>
+          <a:xfrm>
+            <a:off x="548640" y="4681727"/>
+            <a:ext cx="11094415" cy="850392"/>
+          </a:xfrm>
+          <a:prstGeom prst="roundRect">
+            <a:avLst>
+              <a:gd name="adj" fmla="val 8000"/>
+            </a:avLst>
+          </a:prstGeom>
+          <a:solidFill>
+            <a:srgbClr val="F3F6F9"/>
+          </a:solidFill>
+          <a:ln>
+            <a:noFill/>
+          </a:ln>
+        </p:spPr>
+        <p:txBody>
+          <a:bodyPr rtlCol="0" anchor="ctr"/>
+          <a:lstStyle/>
+          <a:p>
+            <a:pPr algn="ctr"/>
+          </a:p>
+        </p:txBody>
+      </p:sp>
+      <p:sp>
+        <p:nvSpPr>
+          <p:cNvPr id="19" name="TextBox 18"/>
+          <p:cNvSpPr txBox="1"/>
+          <p:nvPr/>
+        </p:nvSpPr>
+        <p:spPr>
+          <a:xfrm>
+            <a:off x="685800" y="4649723"/>
+            <a:ext cx="2514600" cy="914400"/>
+          </a:xfrm>
+          <a:prstGeom prst="rect">
+            <a:avLst/>
+          </a:prstGeom>
+          <a:noFill/>
+        </p:spPr>
+        <p:txBody>
+          <a:bodyPr wrap="square" anchor="ctr"/>
+          <a:lstStyle/>
+          <a:p>
+            <a:pPr algn="l" eaLnBrk="0">
+              <a:lnSpc>
+                <a:spcPct val="110000"/>
+              </a:lnSpc>
+            </a:pPr>
+            <a:r>
+              <a:rPr sz="1600" b="1">
+                <a:solidFill>
+                  <a:srgbClr val="13294B"/>
+                </a:solidFill>
+                <a:latin typeface="맑은 고딕"/>
+                <a:ea typeface="맑은 고딕"/>
+                <a:cs typeface="맑은 고딕"/>
+              </a:rPr>
+              <a:t>Quiz 3</a:t>
+            </a:r>
+          </a:p>
+        </p:txBody>
+      </p:sp>
+      <p:sp>
+        <p:nvSpPr>
+          <p:cNvPr id="20" name="TextBox 19"/>
+          <p:cNvSpPr txBox="1"/>
+          <p:nvPr/>
+        </p:nvSpPr>
+        <p:spPr>
+          <a:xfrm>
+            <a:off x="3200400" y="4649723"/>
+            <a:ext cx="6156655" cy="914400"/>
+          </a:xfrm>
+          <a:prstGeom prst="rect">
+            <a:avLst/>
+          </a:prstGeom>
+          <a:noFill/>
+        </p:spPr>
+        <p:txBody>
+          <a:bodyPr wrap="square" anchor="ctr"/>
+          <a:lstStyle/>
+          <a:p>
+            <a:pPr algn="l" eaLnBrk="0">
+              <a:lnSpc>
+                <a:spcPct val="110000"/>
+              </a:lnSpc>
+            </a:pPr>
+            <a:r>
+              <a:rPr sz="1400" b="0">
+                <a:solidFill>
+                  <a:srgbClr val="1F2A3A"/>
+                </a:solidFill>
+                <a:latin typeface="맑은 고딕"/>
+                <a:ea typeface="맑은 고딕"/>
+                <a:cs typeface="맑은 고딕"/>
+              </a:rPr>
+              <a:t>에이전트는 추천까지, 운전원은 승인까지 한다. 승인·실행 조건을 확인해 다음 작업을 여는 것은 엔진이다.</a:t>
+            </a:r>
+          </a:p>
+        </p:txBody>
+      </p:sp>
+      <p:sp>
+        <p:nvSpPr>
+          <p:cNvPr id="21" name="TextBox 20"/>
+          <p:cNvSpPr txBox="1"/>
+          <p:nvPr/>
+        </p:nvSpPr>
+        <p:spPr>
+          <a:xfrm>
+            <a:off x="9448495" y="4649723"/>
+            <a:ext cx="2103120" cy="914400"/>
+          </a:xfrm>
+          <a:prstGeom prst="rect">
+            <a:avLst/>
+          </a:prstGeom>
+          <a:noFill/>
+        </p:spPr>
+        <p:txBody>
+          <a:bodyPr wrap="square" anchor="ctr"/>
+          <a:lstStyle/>
+          <a:p>
+            <a:pPr algn="l" eaLnBrk="0">
+              <a:lnSpc>
+                <a:spcPct val="110000"/>
+              </a:lnSpc>
+            </a:pPr>
+            <a:r>
+              <a:rPr sz="1250" b="1">
+                <a:solidFill>
+                  <a:srgbClr val="556175"/>
+                </a:solidFill>
+                <a:latin typeface="맑은 고딕"/>
+                <a:ea typeface="맑은 고딕"/>
+                <a:cs typeface="맑은 고딕"/>
+              </a:rPr>
+              <a:t>4번</a:t>
+            </a:r>
+          </a:p>
+        </p:txBody>
+      </p:sp>
+    </p:spTree>
+  </p:cSld>
+  <p:clrMapOvr>
+    <a:masterClrMapping/>
+  </p:clrMapOvr>
+</p:sld>
+</file>
+
 <file path=ppt/slides/slide4.xml><?xml version="1.0" encoding="utf-8"?>
 <p:sld xmlns:a="http://schemas.openxmlformats.org/drawingml/2006/main" xmlns:p="http://schemas.openxmlformats.org/presentationml/2006/main" xmlns:r="http://schemas.openxmlformats.org/officeDocument/2006/relationships">
   <p:cSld>
@@ -20939,7 +27111,7 @@
       </p:sp>
       <p:pic>
         <p:nvPicPr>
-          <p:cNvPr id="6" name="삽화:남은일_추천뒤.svg" descr="illust_547839554219813924_1793113376.png"/>
+          <p:cNvPr id="6" name="삽화:남은일_추천뒤.svg" descr="illust_8692687707505317693_1793113376.png"/>
           <p:cNvPicPr>
             <a:picLocks noChangeAspect="1"/>
           </p:cNvPicPr>
@@ -22833,7 +29005,7 @@
       </p:sp>
       <p:pic>
         <p:nvPicPr>
-          <p:cNvPr id="6" name="삽화:요소묶음.svg" descr="illust_8356089296097152938_1793113376.png"/>
+          <p:cNvPr id="6" name="삽화:요소묶음.svg" descr="illust_5296984646125972022_1793113376.png"/>
           <p:cNvPicPr>
             <a:picLocks noChangeAspect="1"/>
           </p:cNvPicPr>
@@ -23470,7 +29642,7 @@
       </p:sp>
       <p:pic>
         <p:nvPicPr>
-          <p:cNvPr id="6" name="삽화:흐름_전체.svg" descr="illust_2025642816273673792_1793113376.png"/>
+          <p:cNvPr id="6" name="삽화:흐름_전체.svg" descr="illust_8087771329663764057_1793113376.png"/>
           <p:cNvPicPr>
             <a:picLocks noChangeAspect="1"/>
           </p:cNvPicPr>

--- a/산출물/통합반/이론_오프라인/08회차/통합반_오프라인_08회차.pptx
+++ b/산출물/통합반/이론_오프라인/08회차/통합반_오프라인_08회차.pptx
@@ -550,11 +550,6 @@
           </a:p>
           <a:p>
             <a:r>
-              <a:t>· 이론은 온라인 9회차 교재의 장에서 오늘 실습에 쓰는 것만</a:t>
-            </a:r>
-          </a:p>
-          <a:p>
-            <a:r>
               <a:t>[다음] 학습목표</a:t>
             </a:r>
           </a:p>
@@ -635,7 +630,7 @@
           </a:p>
           <a:p>
             <a:r>
-              <a:t>· 실습에서 bpmn.io로 시작 → 요청 확인 → 승인 또는 반려 → 종료를 그린다</a:t>
+              <a:t>· 이벤트 → 사용자 작업 · 서비스 작업 → 배타 게이트웨이 → 갈림의 조건과 기본 흐름</a:t>
             </a:r>
           </a:p>
           <a:p>
@@ -830,7 +825,7 @@
           </a:p>
           <a:p>
             <a:r>
-              <a:t>· 표식 없는 작업: 원인 진단 · 냉각 조치 제안. BPMN 표준에 에이전트 작업 요소가 없어, HYD는 표식 없는 작업으로 그리고 맡을 에이전트는 연결할 때 정한다 — 실습에서 매핑 자료로</a:t>
+              <a:t>· 표식 없는 작업: 원인 진단 · 냉각 조치 제안. BPMN 표준에 에이전트 작업 요소가 없어, HYD는 표식 없는 작업으로 그리고 맡을 에이전트는 연결할 때 정한다</a:t>
             </a:r>
           </a:p>
           <a:p>
@@ -1115,7 +1110,7 @@
           </a:p>
           <a:p>
             <a:r>
-              <a:t>· 실습에서 승인 · 거절 경로를 잇고 승인 작업을 취소하지 않는 지연 알림을 더한다</a:t>
+              <a:t>· 풀과 레인 → 책임 배치 → 경계 타이머 → 승인 자리 → 같은 그림의 세 경로</a:t>
             </a:r>
           </a:p>
           <a:p>
@@ -1420,7 +1415,7 @@
           </a:p>
           <a:p>
             <a:r>
-              <a:t>· HYD 가져오기는 작업의 경계 타이머만 지원, 흐름 중간의 타이머는 받지 않는다 → 실습도 테두리에</a:t>
+              <a:t>· HYD 가져오기는 작업의 경계 타이머만 지원, 흐름 중간의 타이머는 받지 않는다</a:t>
             </a:r>
           </a:p>
           <a:p>
@@ -1510,7 +1505,7 @@
           </a:p>
           <a:p>
             <a:r>
-              <a:t>· 기한이 지나면 승인 지연 알림 가지만 열리고 승인 작업은 계속 기다린다 = 완료 조건의 「응답 없음」</a:t>
+              <a:t>· 기한이 지나면 승인 지연 알림 가지만 열리고 승인 작업은 계속 기다린다 = 다음 장의 「응답 없음」 경로</a:t>
             </a:r>
           </a:p>
           <a:p>
@@ -1605,7 +1600,7 @@
           </a:p>
           <a:p>
             <a:r>
-              <a:t>· 2 이벤트 · 작업 · 분기: 실습에서 기본 승인 흐름을 그리고 설비 대응으로 확장</a:t>
+              <a:t>· 2 이벤트 · 작업 · 분기: 흐름을 여닫는 사건, 사람 · 시스템의 작업, 승인 여부의 갈림</a:t>
             </a:r>
           </a:p>
           <a:p>
@@ -1800,7 +1795,7 @@
           </a:p>
           <a:p>
             <a:r>
-              <a:t>· 실습에서 내 그림의 작업마다 대응하는 실행 기능을 표시한다</a:t>
+              <a:t>· 그림만으로는 일어나지 않는 일 → 엔진과 오케스트레이션 → 토큰 → 작업 종류별 기다림 → 승인 대기와 COMPLETED</a:t>
             </a:r>
           </a:p>
           <a:p>
@@ -1895,7 +1890,7 @@
           </a:p>
           <a:p>
             <a:r>
-              <a:t>· 사람이 챙기면 AS-IS로 돌아간다 → 그림을 읽고 대신 해 줄 실행 주체가 필요</a:t>
+              <a:t>· 사람이 일일이 챙기던 방식으로 돌아간다 → 그림을 읽고 대신 해 줄 실행 주체가 필요</a:t>
             </a:r>
           </a:p>
           <a:p>
@@ -1995,7 +1990,7 @@
           </a:p>
           <a:p>
             <a:r>
-              <a:t>[다음] 작업의 종류에 따라 엔진이 기다리는 것</a:t>
+              <a:t>[다음] 토큰</a:t>
             </a:r>
           </a:p>
         </p:txBody>
@@ -2065,32 +2060,32 @@
           <a:lstStyle/>
           <a:p>
             <a:r>
-              <a:t>[짚을 곳] 카드 셋 왼쪽부터</a:t>
-            </a:r>
-          </a:p>
-          <a:p>
-            <a:r>
-              <a:t>· 사용자 작업(운전원 승인): 담당 역할의 작업함에 놓고 승인 · 거절을 기다린다</a:t>
-            </a:r>
-          </a:p>
-          <a:p>
-            <a:r>
-              <a:t>· 서비스 작업(냉각 명령 · 재관측 · 작업지시 등록): 엔진이 시스템을 호출, 결과와 완료 조건 확인. 호출 실패 · 결과 누락을 성공으로 넘기지 않는다</a:t>
-            </a:r>
-          </a:p>
-          <a:p>
-            <a:r>
-              <a:t>· 에이전트 단계(원인 진단 · 냉각 조치 제안): 지정된 에이전트에게 맡기고 추천안 제출을 기다린다. 에이전트가 다음 작업을 직접 열지 않는다 — 제출 · 검사 뒤 엔진이 연다. 제출과 진행을 따로 기록</a:t>
-            </a:r>
-          </a:p>
-          <a:p>
-            <a:r>
-              <a:t>· 어느 경우든 작업이 끝나야 토큰이 넘어간다. 승인도 역할 확인 + 다음 단계로 전달된 뒤에야 냉각 명령, 전달 실패면 넘어가지 않는다</a:t>
-            </a:r>
-          </a:p>
-          <a:p>
-            <a:r>
-              <a:t>[다음] 토큰</a:t>
+              <a:t>[짚을 곳] 운전원 승인 오른쪽 위의 파란 점</a:t>
+            </a:r>
+          </a:p>
+          <a:p>
+            <a:r>
+              <a:t>· 토큰(Token): 프로세스의 현재 위치 표식. 시작 이벤트에서 생겨, 작업이 끝날 때마다 선을 따라 옮기고, 게이트웨이에선 참인 선, 끝 이벤트에서 사라진다</a:t>
+            </a:r>
+          </a:p>
+          <a:p>
+            <a:r>
+              <a:t>· 지금은 운전원 승인에 있음: 에이전트 작업은 끝났고 냉각 명령엔 아직 — 운전원 차례</a:t>
+            </a:r>
+          </a:p>
+          <a:p>
+            <a:r>
+              <a:t>· 쿨러 사건: 에이전트 단계에 오래, 승인은 짧게, 냉각 명령은 순식간, 재관측에서 다시 한동안 → 단계마다 닿은 시각 · 끝난 시각이 토큰의 흔적 = 모니터링이 읽는 것</a:t>
+            </a:r>
+          </a:p>
+          <a:p>
+            <a:r>
+              <a:t>· BPMN 실행 설명의 표준 개념. HYD 화면엔 토큰이란 물체 대신 열린 단계와 기록. 언어 모델의 입력 토큰과 다른 개념</a:t>
+            </a:r>
+          </a:p>
+          <a:p>
+            <a:r>
+              <a:t>[다음] 작업의 종류에 따라 엔진이 기다리는 것</a:t>
             </a:r>
           </a:p>
         </p:txBody>
@@ -2160,27 +2155,27 @@
           <a:lstStyle/>
           <a:p>
             <a:r>
-              <a:t>[짚을 곳] 운전원 승인 오른쪽 위의 파란 점</a:t>
-            </a:r>
-          </a:p>
-          <a:p>
-            <a:r>
-              <a:t>· 토큰(Token): 프로세스의 현재 위치 표식. 시작 이벤트에서 생겨, 작업이 끝날 때마다 선을 따라 옮기고, 게이트웨이에선 참인 선, 끝 이벤트에서 사라진다</a:t>
-            </a:r>
-          </a:p>
-          <a:p>
-            <a:r>
-              <a:t>· 지금은 운전원 승인에 있음: 에이전트 작업은 끝났고 냉각 명령엔 아직 — 운전원 차례</a:t>
-            </a:r>
-          </a:p>
-          <a:p>
-            <a:r>
-              <a:t>· 쿨러 사건: 에이전트 단계에 오래, 승인은 짧게, 냉각 명령은 순식간, 재관측에서 다시 한동안 → 단계마다 닿은 시각 · 끝난 시각이 토큰의 흔적 = 모니터링이 읽는 것</a:t>
-            </a:r>
-          </a:p>
-          <a:p>
-            <a:r>
-              <a:t>· BPMN 실행 설명의 표준 개념. HYD 화면엔 토큰이란 물체 대신 열린 단계와 기록. 언어 모델의 입력 토큰과 다른 개념</a:t>
+              <a:t>[짚을 곳] 카드 셋 왼쪽부터</a:t>
+            </a:r>
+          </a:p>
+          <a:p>
+            <a:r>
+              <a:t>· 사용자 작업(운전원 승인): 담당 역할의 작업함에 놓고 승인 · 거절을 기다린다</a:t>
+            </a:r>
+          </a:p>
+          <a:p>
+            <a:r>
+              <a:t>· 서비스 작업(냉각 명령 · 재관측 · 작업지시 등록): 엔진이 시스템을 호출, 결과와 완료 조건 확인. 호출 실패 · 결과 누락을 성공으로 넘기지 않는다</a:t>
+            </a:r>
+          </a:p>
+          <a:p>
+            <a:r>
+              <a:t>· 에이전트 단계(원인 진단 · 냉각 조치 제안): 지정된 에이전트에게 맡기고 추천안 제출을 기다린다. 에이전트가 다음 작업을 직접 열지 않는다 — 제출 · 검사 뒤 엔진이 연다. 제출과 진행을 따로 기록</a:t>
+            </a:r>
+          </a:p>
+          <a:p>
+            <a:r>
+              <a:t>· 어느 경우든 작업이 끝나야 토큰이 넘어간다. 승인도 역할 확인 + 다음 단계로 전달된 뒤에야 냉각 명령, 전달 실패면 넘어가지 않는다</a:t>
             </a:r>
           </a:p>
           <a:p>
@@ -2555,12 +2550,22 @@
           <a:lstStyle/>
           <a:p>
             <a:r>
-              <a:t>[짚을 곳] 표 여섯 줄 위에서부터</a:t>
+              <a:t>[짚을 곳] 표 아홉 줄 위에서부터</a:t>
             </a:r>
           </a:p>
           <a:p>
             <a:r>
               <a:t>· 비즈니스 프로세스: 결과를 내기 위한 작업과 흐름의 묶음. BPMN: 도형과 선의 뜻을 정한 업무 프로세스 표기 표준</a:t>
+            </a:r>
+          </a:p>
+          <a:p>
+            <a:r>
+              <a:t>· 사용자 작업은 사람이, 서비스 작업은 엔진이 시스템을 호출해 수행. 배타 게이트웨이: 조건이 참인 한 갈래로만, 기본 흐름은 어느 조건도 맞지 않을 때 가는 선</a:t>
+            </a:r>
+          </a:p>
+          <a:p>
+            <a:r>
+              <a:t>· 풀: 참여자 하나의 영역, 레인: 그 안에서 활동을 담당 역할별로 묶는 칸</a:t>
             </a:r>
           </a:p>
           <a:p>
@@ -3135,11 +3140,6 @@
           </a:p>
           <a:p>
             <a:r>
-              <a:t>· 맺음: 추천이 승인 · 실행 · 확인을 거쳐 끝난 업무가 되기까지를 프로세스로 정의하고, 그리고, 실행 기록으로 읽었다</a:t>
-            </a:r>
-          </a:p>
-          <a:p>
-            <a:r>
               <a:t>· 이어지는 실습: bpmn.io에서 시작 → 요청 확인 → 승인 또는 반려 → 종료를 그린 뒤 쿨러 경보 → 원인 분석 · 조치 제안 → 운전원 승인 → 설비 명령 → 효과 확인 → 보고로 넓혀 역할별 레인에 놓고, 승인 · 거절의 끝 경로와 승인 작업을 취소하지 않는 지연 알림 타이머를 더한다</a:t>
             </a:r>
           </a:p>
@@ -3525,7 +3525,7 @@
           </a:p>
           <a:p>
             <a:r>
-              <a:t>· HYD: 편집기에서 그린 파일을 가져와 지원 범위 검사 + 에이전트 · 시스템 연결 → 실행 정의. 실습은 이렇게 등록된 기준 흐름과 내 그림을 견준다</a:t>
+              <a:t>· HYD: 편집기에서 그린 파일을 가져와 지원 범위 검사 + 에이전트 · 시스템 연결 → 실행 정의</a:t>
             </a:r>
           </a:p>
           <a:p>
@@ -7638,7 +7638,7 @@
       </p:sp>
       <p:pic>
         <p:nvPicPr>
-          <p:cNvPr id="6" name="삽화:이벤트.svg" descr="illust_544076058878879135_1793113376.png"/>
+          <p:cNvPr id="6" name="삽화:이벤트.svg" descr="illust_5171870941646270582_1793113376.png"/>
           <p:cNvPicPr>
             <a:picLocks noChangeAspect="1"/>
           </p:cNvPicPr>
@@ -8128,7 +8128,7 @@
       </p:sp>
       <p:pic>
         <p:nvPicPr>
-          <p:cNvPr id="6" name="삽화:작업종류.svg" descr="illust_6092367623924379861_1793113376.png"/>
+          <p:cNvPr id="6" name="삽화:작업종류.svg" descr="illust_3739651875616094678_1793113376.png"/>
           <p:cNvPicPr>
             <a:picLocks noChangeAspect="1"/>
           </p:cNvPicPr>
@@ -8639,7 +8639,7 @@
       </p:sp>
       <p:pic>
         <p:nvPicPr>
-          <p:cNvPr id="6" name="삽화:게이트웨이.svg" descr="illust_1442749405823302275_1793113376.png"/>
+          <p:cNvPr id="6" name="삽화:게이트웨이.svg" descr="illust_4217363566335515628_1793113376.png"/>
           <p:cNvPicPr>
             <a:picLocks noChangeAspect="1"/>
           </p:cNvPicPr>
@@ -10406,7 +10406,7 @@
       </p:sp>
       <p:pic>
         <p:nvPicPr>
-          <p:cNvPr id="6" name="삽화:풀과레인.svg" descr="illust_1093054581801260302_1793113376.png"/>
+          <p:cNvPr id="6" name="삽화:풀과레인.svg" descr="illust_1577020283039883458_1793113376.png"/>
           <p:cNvPicPr>
             <a:picLocks noChangeAspect="1"/>
           </p:cNvPicPr>
@@ -12230,7 +12230,7 @@
       </p:sp>
       <p:pic>
         <p:nvPicPr>
-          <p:cNvPr id="6" name="삽화:경계타이머.svg" descr="illust_6370616562040097849_1793113376.png"/>
+          <p:cNvPr id="6" name="삽화:경계타이머.svg" descr="illust_5481248402999468214_1793113376.png"/>
           <p:cNvPicPr>
             <a:picLocks noChangeAspect="1"/>
           </p:cNvPicPr>
@@ -12720,7 +12720,7 @@
       </p:sp>
       <p:pic>
         <p:nvPicPr>
-          <p:cNvPr id="6" name="삽화:승인자리.svg" descr="illust_5119605850778934621_1793113376.png"/>
+          <p:cNvPr id="6" name="삽화:승인자리.svg" descr="illust_8646490883969154509_1793113376.png"/>
           <p:cNvPicPr>
             <a:picLocks noChangeAspect="1"/>
           </p:cNvPicPr>
@@ -17110,7 +17110,7 @@
                 <a:ea typeface="맑은 고딕"/>
                 <a:cs typeface="맑은 고딕"/>
               </a:rPr>
-              <a:t>작업의 종류에 따라 엔진이 기다리는 것</a:t>
+              <a:t>토큰: 프로세스의 현재 위치</a:t>
             </a:r>
           </a:p>
         </p:txBody>
@@ -17149,7 +17149,7 @@
                 <a:ea typeface="맑은 고딕"/>
                 <a:cs typeface="맑은 고딕"/>
               </a:rPr>
-              <a:t>엔진은 작업의 종류에 따라 사람의 응답, 시스템의 처리 결과, 에이전트의 제출을 기다린 뒤 토큰을 넘긴다.</a:t>
+              <a:t>토큰은 프로세스의 현재 위치를 나타내는 표식으로, 시작 이벤트에서 생겨 끝 이벤트에서 사라진다.</a:t>
             </a:r>
           </a:p>
         </p:txBody>
@@ -17222,71 +17222,9 @@
           </a:p>
         </p:txBody>
       </p:sp>
-      <p:sp>
-        <p:nvSpPr>
-          <p:cNvPr id="6" name="Rounded Rectangle 5"/>
-          <p:cNvSpPr/>
-          <p:nvPr/>
-        </p:nvSpPr>
-        <p:spPr>
-          <a:xfrm>
-            <a:off x="548640" y="2224150"/>
-            <a:ext cx="3515258" cy="3534410"/>
-          </a:xfrm>
-          <a:prstGeom prst="roundRect">
-            <a:avLst>
-              <a:gd name="adj" fmla="val 4000"/>
-            </a:avLst>
-          </a:prstGeom>
-          <a:solidFill>
-            <a:srgbClr val="FFFFFF"/>
-          </a:solidFill>
-          <a:ln w="15875">
-            <a:solidFill>
-              <a:srgbClr val="D3D9E1"/>
-            </a:solidFill>
-          </a:ln>
-        </p:spPr>
-        <p:txBody>
-          <a:bodyPr rtlCol="0" anchor="ctr"/>
-          <a:lstStyle/>
-          <a:p>
-            <a:pPr algn="ctr"/>
-          </a:p>
-        </p:txBody>
-      </p:sp>
-      <p:sp>
-        <p:nvSpPr>
-          <p:cNvPr id="7" name="Oval 6"/>
-          <p:cNvSpPr/>
-          <p:nvPr/>
-        </p:nvSpPr>
-        <p:spPr>
-          <a:xfrm>
-            <a:off x="777240" y="2425319"/>
-            <a:ext cx="731520" cy="731520"/>
-          </a:xfrm>
-          <a:prstGeom prst="ellipse">
-            <a:avLst/>
-          </a:prstGeom>
-          <a:solidFill>
-            <a:srgbClr val="E7F3FD"/>
-          </a:solidFill>
-          <a:ln>
-            <a:noFill/>
-          </a:ln>
-        </p:spPr>
-        <p:txBody>
-          <a:bodyPr rtlCol="0" anchor="ctr"/>
-          <a:lstStyle/>
-          <a:p>
-            <a:pPr algn="ctr"/>
-          </a:p>
-        </p:txBody>
-      </p:sp>
       <p:pic>
         <p:nvPicPr>
-          <p:cNvPr id="8" name="아이콘:user-check" descr="user-check_13294B_1.6.png"/>
+          <p:cNvPr id="6" name="삽화:흐름_토큰_승인대기.svg" descr="illust_5832159500083008612_1793113376.png"/>
           <p:cNvPicPr>
             <a:picLocks noChangeAspect="1"/>
           </p:cNvPicPr>
@@ -17300,8 +17238,8 @@
         </p:blipFill>
         <p:spPr>
           <a:xfrm>
-            <a:off x="930859" y="2578938"/>
-            <a:ext cx="424281" cy="424281"/>
+            <a:off x="641100" y="1627632"/>
+            <a:ext cx="10909495" cy="4727448"/>
           </a:xfrm>
           <a:prstGeom prst="rect">
             <a:avLst/>
@@ -17310,14 +17248,119 @@
       </p:pic>
       <p:sp>
         <p:nvSpPr>
+          <p:cNvPr id="7" name="TextBox 6"/>
+          <p:cNvSpPr txBox="1"/>
+          <p:nvPr/>
+        </p:nvSpPr>
+        <p:spPr>
+          <a:xfrm>
+            <a:off x="6641322" y="1769455"/>
+            <a:ext cx="4363798" cy="507618"/>
+          </a:xfrm>
+          <a:prstGeom prst="rect">
+            <a:avLst/>
+          </a:prstGeom>
+          <a:noFill/>
+        </p:spPr>
+        <p:txBody>
+          <a:bodyPr wrap="square" anchor="t"/>
+          <a:lstStyle/>
+          <a:p>
+            <a:pPr algn="ctr" eaLnBrk="0">
+              <a:lnSpc>
+                <a:spcPct val="110000"/>
+              </a:lnSpc>
+              <a:spcAft>
+                <a:spcPts val="100"/>
+              </a:spcAft>
+            </a:pPr>
+            <a:r>
+              <a:rPr sz="1350" b="1">
+                <a:solidFill>
+                  <a:srgbClr val="1A6FC4"/>
+                </a:solidFill>
+                <a:latin typeface="맑은 고딕"/>
+                <a:ea typeface="맑은 고딕"/>
+                <a:cs typeface="맑은 고딕"/>
+              </a:rPr>
+              <a:t>토큰</a:t>
+            </a:r>
+          </a:p>
+          <a:p>
+            <a:pPr algn="ctr" eaLnBrk="0">
+              <a:lnSpc>
+                <a:spcPct val="110000"/>
+              </a:lnSpc>
+              <a:spcAft>
+                <a:spcPts val="100"/>
+              </a:spcAft>
+            </a:pPr>
+            <a:r>
+              <a:rPr sz="1100" b="0">
+                <a:solidFill>
+                  <a:srgbClr val="556175"/>
+                </a:solidFill>
+                <a:latin typeface="맑은 고딕"/>
+                <a:ea typeface="맑은 고딕"/>
+                <a:cs typeface="맑은 고딕"/>
+              </a:rPr>
+              <a:t>Token · 프로세스의 현재 위치</a:t>
+            </a:r>
+          </a:p>
+        </p:txBody>
+      </p:sp>
+      <p:sp>
+        <p:nvSpPr>
+          <p:cNvPr id="8" name="TextBox 7"/>
+          <p:cNvSpPr txBox="1"/>
+          <p:nvPr/>
+        </p:nvSpPr>
+        <p:spPr>
+          <a:xfrm>
+            <a:off x="3564844" y="2027101"/>
+            <a:ext cx="1200044" cy="337185"/>
+          </a:xfrm>
+          <a:prstGeom prst="rect">
+            <a:avLst/>
+          </a:prstGeom>
+          <a:noFill/>
+        </p:spPr>
+        <p:txBody>
+          <a:bodyPr wrap="square" anchor="t"/>
+          <a:lstStyle/>
+          <a:p>
+            <a:pPr algn="ctr" eaLnBrk="0">
+              <a:lnSpc>
+                <a:spcPct val="110000"/>
+              </a:lnSpc>
+              <a:spcAft>
+                <a:spcPts val="100"/>
+              </a:spcAft>
+            </a:pPr>
+            <a:r>
+              <a:rPr sz="1350" b="1">
+                <a:solidFill>
+                  <a:srgbClr val="13294B"/>
+                </a:solidFill>
+                <a:latin typeface="맑은 고딕"/>
+                <a:ea typeface="맑은 고딕"/>
+                <a:cs typeface="맑은 고딕"/>
+              </a:rPr>
+              <a:t>운전원 승인</a:t>
+            </a:r>
+          </a:p>
+        </p:txBody>
+      </p:sp>
+      <p:sp>
+        <p:nvSpPr>
           <p:cNvPr id="9" name="TextBox 8"/>
           <p:cNvSpPr txBox="1"/>
           <p:nvPr/>
         </p:nvSpPr>
         <p:spPr>
           <a:xfrm>
-            <a:off x="713232" y="3248279"/>
-            <a:ext cx="3186074" cy="2007362"/>
+            <a:off x="2282979" y="2870950"/>
+            <a:ext cx="1352777" cy="546353"/>
           </a:xfrm>
           <a:prstGeom prst="rect">
             <a:avLst/>
@@ -17328,16 +17371,16 @@
           <a:bodyPr wrap="square" anchor="t"/>
           <a:lstStyle/>
           <a:p>
-            <a:pPr algn="l" eaLnBrk="0">
+            <a:pPr algn="ctr" eaLnBrk="0">
               <a:lnSpc>
                 <a:spcPct val="110000"/>
               </a:lnSpc>
               <a:spcAft>
-                <a:spcPts val="400"/>
+                <a:spcPts val="100"/>
               </a:spcAft>
             </a:pPr>
             <a:r>
-              <a:rPr sz="2050" b="1">
+              <a:rPr sz="1350" b="1">
                 <a:solidFill>
                   <a:srgbClr val="13294B"/>
                 </a:solidFill>
@@ -17345,132 +17388,167 @@
                 <a:ea typeface="맑은 고딕"/>
                 <a:cs typeface="맑은 고딕"/>
               </a:rPr>
-              <a:t>사용자 작업</a:t>
-            </a:r>
-          </a:p>
-          <a:p>
-            <a:pPr algn="l" eaLnBrk="0" marL="188595" indent="-188595">
+              <a:t>원인 진단 · 냉각 조치 제안</a:t>
+            </a:r>
+          </a:p>
+        </p:txBody>
+      </p:sp>
+      <p:sp>
+        <p:nvSpPr>
+          <p:cNvPr id="10" name="TextBox 9"/>
+          <p:cNvSpPr txBox="1"/>
+          <p:nvPr/>
+        </p:nvSpPr>
+        <p:spPr>
+          <a:xfrm>
+            <a:off x="1546588" y="3424062"/>
+            <a:ext cx="872759" cy="546353"/>
+          </a:xfrm>
+          <a:prstGeom prst="rect">
+            <a:avLst/>
+          </a:prstGeom>
+          <a:noFill/>
+        </p:spPr>
+        <p:txBody>
+          <a:bodyPr wrap="square" anchor="t"/>
+          <a:lstStyle/>
+          <a:p>
+            <a:pPr algn="ctr" eaLnBrk="0">
               <a:lnSpc>
                 <a:spcPct val="110000"/>
               </a:lnSpc>
               <a:spcAft>
-                <a:spcPts val="400"/>
+                <a:spcPts val="100"/>
               </a:spcAft>
             </a:pPr>
             <a:r>
-              <a:rPr sz="1650" b="0">
-                <a:solidFill>
-                  <a:srgbClr val="1F2A3A"/>
-                </a:solidFill>
-                <a:latin typeface="맑은 고딕"/>
-                <a:ea typeface="맑은 고딕"/>
-                <a:cs typeface="맑은 고딕"/>
-              </a:rPr>
-              <a:t>• 운전원 승인</a:t>
-            </a:r>
-          </a:p>
-          <a:p>
-            <a:pPr algn="l" eaLnBrk="0" marL="188595" indent="-188595">
+              <a:rPr sz="1350" b="1">
+                <a:solidFill>
+                  <a:srgbClr val="13294B"/>
+                </a:solidFill>
+                <a:latin typeface="맑은 고딕"/>
+                <a:ea typeface="맑은 고딕"/>
+                <a:cs typeface="맑은 고딕"/>
+              </a:rPr>
+              <a:t>시작 이벤트</a:t>
+            </a:r>
+          </a:p>
+        </p:txBody>
+      </p:sp>
+      <p:sp>
+        <p:nvSpPr>
+          <p:cNvPr id="11" name="TextBox 10"/>
+          <p:cNvSpPr txBox="1"/>
+          <p:nvPr/>
+        </p:nvSpPr>
+        <p:spPr>
+          <a:xfrm>
+            <a:off x="10350550" y="3376787"/>
+            <a:ext cx="981854" cy="337185"/>
+          </a:xfrm>
+          <a:prstGeom prst="rect">
+            <a:avLst/>
+          </a:prstGeom>
+          <a:noFill/>
+        </p:spPr>
+        <p:txBody>
+          <a:bodyPr wrap="square" anchor="t"/>
+          <a:lstStyle/>
+          <a:p>
+            <a:pPr algn="ctr" eaLnBrk="0">
               <a:lnSpc>
                 <a:spcPct val="110000"/>
               </a:lnSpc>
               <a:spcAft>
-                <a:spcPts val="400"/>
+                <a:spcPts val="100"/>
               </a:spcAft>
             </a:pPr>
             <a:r>
-              <a:rPr sz="1650" b="0">
-                <a:solidFill>
-                  <a:srgbClr val="1F2A3A"/>
-                </a:solidFill>
-                <a:latin typeface="맑은 고딕"/>
-                <a:ea typeface="맑은 고딕"/>
-                <a:cs typeface="맑은 고딕"/>
-              </a:rPr>
-              <a:t>• 담당 역할의 작업함에 놓인다</a:t>
-            </a:r>
-          </a:p>
-          <a:p>
-            <a:pPr algn="l" eaLnBrk="0" marL="188595" indent="-188595">
+              <a:rPr sz="1350" b="1">
+                <a:solidFill>
+                  <a:srgbClr val="13294B"/>
+                </a:solidFill>
+                <a:latin typeface="맑은 고딕"/>
+                <a:ea typeface="맑은 고딕"/>
+                <a:cs typeface="맑은 고딕"/>
+              </a:rPr>
+              <a:t>끝 이벤트</a:t>
+            </a:r>
+          </a:p>
+        </p:txBody>
+      </p:sp>
+      <p:sp>
+        <p:nvSpPr>
+          <p:cNvPr id="12" name="TextBox 11"/>
+          <p:cNvSpPr txBox="1"/>
+          <p:nvPr/>
+        </p:nvSpPr>
+        <p:spPr>
+          <a:xfrm>
+            <a:off x="4666703" y="4199363"/>
+            <a:ext cx="1200044" cy="337185"/>
+          </a:xfrm>
+          <a:prstGeom prst="rect">
+            <a:avLst/>
+          </a:prstGeom>
+          <a:noFill/>
+        </p:spPr>
+        <p:txBody>
+          <a:bodyPr wrap="square" anchor="t"/>
+          <a:lstStyle/>
+          <a:p>
+            <a:pPr algn="ctr" eaLnBrk="0">
               <a:lnSpc>
                 <a:spcPct val="110000"/>
               </a:lnSpc>
               <a:spcAft>
-                <a:spcPts val="400"/>
+                <a:spcPts val="100"/>
               </a:spcAft>
             </a:pPr>
             <a:r>
-              <a:rPr sz="1650" b="0">
-                <a:solidFill>
-                  <a:srgbClr val="1F2A3A"/>
-                </a:solidFill>
-                <a:latin typeface="맑은 고딕"/>
-                <a:ea typeface="맑은 고딕"/>
-                <a:cs typeface="맑은 고딕"/>
-              </a:rPr>
-              <a:t>• 사람이 승인하거나 거절하면 끝난다</a:t>
-            </a:r>
-          </a:p>
-        </p:txBody>
-      </p:sp>
-      <p:sp>
-        <p:nvSpPr>
-          <p:cNvPr id="10" name="Rounded Rectangle 9"/>
-          <p:cNvSpPr/>
-          <p:nvPr/>
-        </p:nvSpPr>
-        <p:spPr>
-          <a:xfrm>
-            <a:off x="777240" y="5328793"/>
-            <a:ext cx="1075944" cy="292608"/>
-          </a:xfrm>
-          <a:prstGeom prst="roundRect">
-            <a:avLst>
-              <a:gd name="adj" fmla="val 50000"/>
-            </a:avLst>
-          </a:prstGeom>
-          <a:solidFill>
-            <a:srgbClr val="D3D9E1"/>
-          </a:solidFill>
-          <a:ln>
-            <a:noFill/>
-          </a:ln>
-        </p:spPr>
-        <p:txBody>
-          <a:bodyPr rtlCol="0" anchor="ctr"/>
-          <a:lstStyle/>
-          <a:p>
-            <a:pPr algn="ctr"/>
-          </a:p>
-        </p:txBody>
-      </p:sp>
-      <p:sp>
-        <p:nvSpPr>
-          <p:cNvPr id="11" name="TextBox 10"/>
-          <p:cNvSpPr txBox="1"/>
-          <p:nvPr/>
-        </p:nvSpPr>
-        <p:spPr>
-          <a:xfrm>
-            <a:off x="777240" y="5328793"/>
-            <a:ext cx="1075944" cy="292608"/>
-          </a:xfrm>
-          <a:prstGeom prst="rect">
-            <a:avLst/>
-          </a:prstGeom>
-          <a:noFill/>
-        </p:spPr>
-        <p:txBody>
-          <a:bodyPr wrap="square" anchor="ctr"/>
+              <a:rPr sz="1350" b="1">
+                <a:solidFill>
+                  <a:srgbClr val="13294B"/>
+                </a:solidFill>
+                <a:latin typeface="맑은 고딕"/>
+                <a:ea typeface="맑은 고딕"/>
+                <a:cs typeface="맑은 고딕"/>
+              </a:rPr>
+              <a:t>냉각 명령</a:t>
+            </a:r>
+          </a:p>
+        </p:txBody>
+      </p:sp>
+      <p:sp>
+        <p:nvSpPr>
+          <p:cNvPr id="13" name="TextBox 12"/>
+          <p:cNvSpPr txBox="1"/>
+          <p:nvPr/>
+        </p:nvSpPr>
+        <p:spPr>
+          <a:xfrm>
+            <a:off x="6194033" y="4199363"/>
+            <a:ext cx="1090949" cy="337185"/>
+          </a:xfrm>
+          <a:prstGeom prst="rect">
+            <a:avLst/>
+          </a:prstGeom>
+          <a:noFill/>
+        </p:spPr>
+        <p:txBody>
+          <a:bodyPr wrap="square" anchor="t"/>
           <a:lstStyle/>
           <a:p>
             <a:pPr algn="ctr" eaLnBrk="0">
               <a:lnSpc>
                 <a:spcPct val="110000"/>
               </a:lnSpc>
-            </a:pPr>
-            <a:r>
-              <a:rPr sz="1200" b="1">
+              <a:spcAft>
+                <a:spcPts val="100"/>
+              </a:spcAft>
+            </a:pPr>
+            <a:r>
+              <a:rPr sz="1350" b="1">
                 <a:solidFill>
                   <a:srgbClr val="13294B"/>
                 </a:solidFill>
@@ -17478,97 +17556,53 @@
                 <a:ea typeface="맑은 고딕"/>
                 <a:cs typeface="맑은 고딕"/>
               </a:rPr>
-              <a:t>User Task</a:t>
-            </a:r>
-          </a:p>
-        </p:txBody>
-      </p:sp>
-      <p:sp>
-        <p:nvSpPr>
-          <p:cNvPr id="12" name="Rounded Rectangle 11"/>
-          <p:cNvSpPr/>
-          <p:nvPr/>
-        </p:nvSpPr>
-        <p:spPr>
-          <a:xfrm>
-            <a:off x="4338218" y="2224150"/>
-            <a:ext cx="3515258" cy="3534410"/>
-          </a:xfrm>
-          <a:prstGeom prst="roundRect">
-            <a:avLst>
-              <a:gd name="adj" fmla="val 4000"/>
-            </a:avLst>
-          </a:prstGeom>
-          <a:solidFill>
-            <a:srgbClr val="FFFFFF"/>
-          </a:solidFill>
-          <a:ln w="15875">
-            <a:solidFill>
-              <a:srgbClr val="D3D9E1"/>
-            </a:solidFill>
-          </a:ln>
-        </p:spPr>
-        <p:txBody>
-          <a:bodyPr rtlCol="0" anchor="ctr"/>
-          <a:lstStyle/>
-          <a:p>
-            <a:pPr algn="ctr"/>
-          </a:p>
-        </p:txBody>
-      </p:sp>
-      <p:sp>
-        <p:nvSpPr>
-          <p:cNvPr id="13" name="Oval 12"/>
-          <p:cNvSpPr/>
-          <p:nvPr/>
-        </p:nvSpPr>
-        <p:spPr>
-          <a:xfrm>
-            <a:off x="4566818" y="2425319"/>
-            <a:ext cx="731520" cy="731520"/>
-          </a:xfrm>
-          <a:prstGeom prst="ellipse">
-            <a:avLst/>
-          </a:prstGeom>
-          <a:solidFill>
-            <a:srgbClr val="E7F3FD"/>
-          </a:solidFill>
-          <a:ln>
-            <a:noFill/>
-          </a:ln>
-        </p:spPr>
-        <p:txBody>
-          <a:bodyPr rtlCol="0" anchor="ctr"/>
-          <a:lstStyle/>
-          <a:p>
-            <a:pPr algn="ctr"/>
-          </a:p>
-        </p:txBody>
-      </p:sp>
-      <p:pic>
-        <p:nvPicPr>
-          <p:cNvPr id="14" name="아이콘:settings" descr="settings_13294B_1.6.png"/>
-          <p:cNvPicPr>
-            <a:picLocks noChangeAspect="1"/>
-          </p:cNvPicPr>
-          <p:nvPr/>
-        </p:nvPicPr>
-        <p:blipFill>
-          <a:blip r:embed="rId4"/>
-          <a:stretch>
-            <a:fillRect/>
-          </a:stretch>
-        </p:blipFill>
-        <p:spPr>
-          <a:xfrm>
-            <a:off x="4720437" y="2578938"/>
-            <a:ext cx="424281" cy="424281"/>
-          </a:xfrm>
-          <a:prstGeom prst="rect">
-            <a:avLst/>
-          </a:prstGeom>
-        </p:spPr>
-      </p:pic>
+              <a:t>재관측</a:t>
+            </a:r>
+          </a:p>
+        </p:txBody>
+      </p:sp>
+      <p:sp>
+        <p:nvSpPr>
+          <p:cNvPr id="14" name="TextBox 13"/>
+          <p:cNvSpPr txBox="1"/>
+          <p:nvPr/>
+        </p:nvSpPr>
+        <p:spPr>
+          <a:xfrm>
+            <a:off x="8397751" y="4081177"/>
+            <a:ext cx="981854" cy="546353"/>
+          </a:xfrm>
+          <a:prstGeom prst="rect">
+            <a:avLst/>
+          </a:prstGeom>
+          <a:noFill/>
+        </p:spPr>
+        <p:txBody>
+          <a:bodyPr wrap="square" anchor="t"/>
+          <a:lstStyle/>
+          <a:p>
+            <a:pPr algn="ctr" eaLnBrk="0">
+              <a:lnSpc>
+                <a:spcPct val="110000"/>
+              </a:lnSpc>
+              <a:spcAft>
+                <a:spcPts val="100"/>
+              </a:spcAft>
+            </a:pPr>
+            <a:r>
+              <a:rPr sz="1350" b="1">
+                <a:solidFill>
+                  <a:srgbClr val="13294B"/>
+                </a:solidFill>
+                <a:latin typeface="맑은 고딕"/>
+                <a:ea typeface="맑은 고딕"/>
+                <a:cs typeface="맑은 고딕"/>
+              </a:rPr>
+              <a:t>작업지시 등록</a:t>
+            </a:r>
+          </a:p>
+        </p:txBody>
+      </p:sp>
       <p:sp>
         <p:nvSpPr>
           <p:cNvPr id="15" name="TextBox 14"/>
@@ -17577,8 +17611,8 @@
         </p:nvSpPr>
         <p:spPr>
           <a:xfrm>
-            <a:off x="4502810" y="3248279"/>
-            <a:ext cx="3186074" cy="2007362"/>
+            <a:off x="9717799" y="4081177"/>
+            <a:ext cx="1090949" cy="546353"/>
           </a:xfrm>
           <a:prstGeom prst="rect">
             <a:avLst/>
@@ -17589,16 +17623,16 @@
           <a:bodyPr wrap="square" anchor="t"/>
           <a:lstStyle/>
           <a:p>
-            <a:pPr algn="l" eaLnBrk="0">
+            <a:pPr algn="ctr" eaLnBrk="0">
               <a:lnSpc>
                 <a:spcPct val="110000"/>
               </a:lnSpc>
               <a:spcAft>
-                <a:spcPts val="400"/>
+                <a:spcPts val="100"/>
               </a:spcAft>
             </a:pPr>
             <a:r>
-              <a:rPr sz="2050" b="1">
+              <a:rPr sz="1350" b="1">
                 <a:solidFill>
                   <a:srgbClr val="13294B"/>
                 </a:solidFill>
@@ -17606,132 +17640,125 @@
                 <a:ea typeface="맑은 고딕"/>
                 <a:cs typeface="맑은 고딕"/>
               </a:rPr>
-              <a:t>서비스 작업</a:t>
-            </a:r>
-          </a:p>
-          <a:p>
-            <a:pPr algn="l" eaLnBrk="0" marL="188595" indent="-188595">
+              <a:t>결과 보고: 정상</a:t>
+            </a:r>
+          </a:p>
+        </p:txBody>
+      </p:sp>
+      <p:sp>
+        <p:nvSpPr>
+          <p:cNvPr id="16" name="TextBox 15"/>
+          <p:cNvSpPr txBox="1"/>
+          <p:nvPr/>
+        </p:nvSpPr>
+        <p:spPr>
+          <a:xfrm>
+            <a:off x="7284982" y="4941573"/>
+            <a:ext cx="1090949" cy="546353"/>
+          </a:xfrm>
+          <a:prstGeom prst="rect">
+            <a:avLst/>
+          </a:prstGeom>
+          <a:noFill/>
+        </p:spPr>
+        <p:txBody>
+          <a:bodyPr wrap="square" anchor="t"/>
+          <a:lstStyle/>
+          <a:p>
+            <a:pPr algn="ctr" eaLnBrk="0">
               <a:lnSpc>
                 <a:spcPct val="110000"/>
               </a:lnSpc>
               <a:spcAft>
-                <a:spcPts val="400"/>
+                <a:spcPts val="100"/>
               </a:spcAft>
             </a:pPr>
             <a:r>
-              <a:rPr sz="1650" b="0">
-                <a:solidFill>
-                  <a:srgbClr val="1F2A3A"/>
-                </a:solidFill>
-                <a:latin typeface="맑은 고딕"/>
-                <a:ea typeface="맑은 고딕"/>
-                <a:cs typeface="맑은 고딕"/>
-              </a:rPr>
-              <a:t>• 냉각 명령, 재관측, 작업지시 등록</a:t>
-            </a:r>
-          </a:p>
-          <a:p>
-            <a:pPr algn="l" eaLnBrk="0" marL="188595" indent="-188595">
+              <a:rPr sz="1350" b="1">
+                <a:solidFill>
+                  <a:srgbClr val="13294B"/>
+                </a:solidFill>
+                <a:latin typeface="맑은 고딕"/>
+                <a:ea typeface="맑은 고딕"/>
+                <a:cs typeface="맑은 고딕"/>
+              </a:rPr>
+              <a:t>결과 보고: 미달</a:t>
+            </a:r>
+          </a:p>
+        </p:txBody>
+      </p:sp>
+      <p:sp>
+        <p:nvSpPr>
+          <p:cNvPr id="17" name="TextBox 16"/>
+          <p:cNvSpPr txBox="1"/>
+          <p:nvPr/>
+        </p:nvSpPr>
+        <p:spPr>
+          <a:xfrm>
+            <a:off x="5474006" y="4941573"/>
+            <a:ext cx="1090949" cy="546353"/>
+          </a:xfrm>
+          <a:prstGeom prst="rect">
+            <a:avLst/>
+          </a:prstGeom>
+          <a:noFill/>
+        </p:spPr>
+        <p:txBody>
+          <a:bodyPr wrap="square" anchor="t"/>
+          <a:lstStyle/>
+          <a:p>
+            <a:pPr algn="ctr" eaLnBrk="0">
               <a:lnSpc>
                 <a:spcPct val="110000"/>
               </a:lnSpc>
               <a:spcAft>
-                <a:spcPts val="400"/>
+                <a:spcPts val="100"/>
               </a:spcAft>
             </a:pPr>
             <a:r>
-              <a:rPr sz="1650" b="0">
-                <a:solidFill>
-                  <a:srgbClr val="1F2A3A"/>
-                </a:solidFill>
-                <a:latin typeface="맑은 고딕"/>
-                <a:ea typeface="맑은 고딕"/>
-                <a:cs typeface="맑은 고딕"/>
-              </a:rPr>
-              <a:t>• 엔진이 해당 시스템을 호출한다</a:t>
-            </a:r>
-          </a:p>
-          <a:p>
-            <a:pPr algn="l" eaLnBrk="0" marL="188595" indent="-188595">
+              <a:rPr sz="1350" b="1">
+                <a:solidFill>
+                  <a:srgbClr val="13294B"/>
+                </a:solidFill>
+                <a:latin typeface="맑은 고딕"/>
+                <a:ea typeface="맑은 고딕"/>
+                <a:cs typeface="맑은 고딕"/>
+              </a:rPr>
+              <a:t>결과 보고: 거절</a:t>
+            </a:r>
+          </a:p>
+        </p:txBody>
+      </p:sp>
+      <p:sp>
+        <p:nvSpPr>
+          <p:cNvPr id="18" name="TextBox 17"/>
+          <p:cNvSpPr txBox="1"/>
+          <p:nvPr/>
+        </p:nvSpPr>
+        <p:spPr>
+          <a:xfrm>
+            <a:off x="3968496" y="4941573"/>
+            <a:ext cx="981854" cy="546353"/>
+          </a:xfrm>
+          <a:prstGeom prst="rect">
+            <a:avLst/>
+          </a:prstGeom>
+          <a:noFill/>
+        </p:spPr>
+        <p:txBody>
+          <a:bodyPr wrap="square" anchor="t"/>
+          <a:lstStyle/>
+          <a:p>
+            <a:pPr algn="ctr" eaLnBrk="0">
               <a:lnSpc>
                 <a:spcPct val="110000"/>
               </a:lnSpc>
               <a:spcAft>
-                <a:spcPts val="400"/>
+                <a:spcPts val="100"/>
               </a:spcAft>
             </a:pPr>
             <a:r>
-              <a:rPr sz="1650" b="0">
-                <a:solidFill>
-                  <a:srgbClr val="1F2A3A"/>
-                </a:solidFill>
-                <a:latin typeface="맑은 고딕"/>
-                <a:ea typeface="맑은 고딕"/>
-                <a:cs typeface="맑은 고딕"/>
-              </a:rPr>
-              <a:t>• 결과와 완료 조건을 확인한다</a:t>
-            </a:r>
-          </a:p>
-        </p:txBody>
-      </p:sp>
-      <p:sp>
-        <p:nvSpPr>
-          <p:cNvPr id="16" name="Rounded Rectangle 15"/>
-          <p:cNvSpPr/>
-          <p:nvPr/>
-        </p:nvSpPr>
-        <p:spPr>
-          <a:xfrm>
-            <a:off x="4566818" y="5328793"/>
-            <a:ext cx="1313687" cy="292608"/>
-          </a:xfrm>
-          <a:prstGeom prst="roundRect">
-            <a:avLst>
-              <a:gd name="adj" fmla="val 50000"/>
-            </a:avLst>
-          </a:prstGeom>
-          <a:solidFill>
-            <a:srgbClr val="D3D9E1"/>
-          </a:solidFill>
-          <a:ln>
-            <a:noFill/>
-          </a:ln>
-        </p:spPr>
-        <p:txBody>
-          <a:bodyPr rtlCol="0" anchor="ctr"/>
-          <a:lstStyle/>
-          <a:p>
-            <a:pPr algn="ctr"/>
-          </a:p>
-        </p:txBody>
-      </p:sp>
-      <p:sp>
-        <p:nvSpPr>
-          <p:cNvPr id="17" name="TextBox 16"/>
-          <p:cNvSpPr txBox="1"/>
-          <p:nvPr/>
-        </p:nvSpPr>
-        <p:spPr>
-          <a:xfrm>
-            <a:off x="4566818" y="5328793"/>
-            <a:ext cx="1313687" cy="292608"/>
-          </a:xfrm>
-          <a:prstGeom prst="rect">
-            <a:avLst/>
-          </a:prstGeom>
-          <a:noFill/>
-        </p:spPr>
-        <p:txBody>
-          <a:bodyPr wrap="square" anchor="ctr"/>
-          <a:lstStyle/>
-          <a:p>
-            <a:pPr algn="ctr" eaLnBrk="0">
-              <a:lnSpc>
-                <a:spcPct val="110000"/>
-              </a:lnSpc>
-            </a:pPr>
-            <a:r>
-              <a:rPr sz="1200" b="1">
+              <a:rPr sz="1350" b="1">
                 <a:solidFill>
                   <a:srgbClr val="13294B"/>
                 </a:solidFill>
@@ -17739,268 +17766,7 @@
                 <a:ea typeface="맑은 고딕"/>
                 <a:cs typeface="맑은 고딕"/>
               </a:rPr>
-              <a:t>Service Task</a:t>
-            </a:r>
-          </a:p>
-        </p:txBody>
-      </p:sp>
-      <p:sp>
-        <p:nvSpPr>
-          <p:cNvPr id="18" name="Rounded Rectangle 17"/>
-          <p:cNvSpPr/>
-          <p:nvPr/>
-        </p:nvSpPr>
-        <p:spPr>
-          <a:xfrm>
-            <a:off x="8127796" y="2224150"/>
-            <a:ext cx="3515258" cy="3534410"/>
-          </a:xfrm>
-          <a:prstGeom prst="roundRect">
-            <a:avLst>
-              <a:gd name="adj" fmla="val 4000"/>
-            </a:avLst>
-          </a:prstGeom>
-          <a:solidFill>
-            <a:srgbClr val="FFFFFF"/>
-          </a:solidFill>
-          <a:ln w="28575">
-            <a:solidFill>
-              <a:srgbClr val="5CB8F2"/>
-            </a:solidFill>
-          </a:ln>
-        </p:spPr>
-        <p:txBody>
-          <a:bodyPr rtlCol="0" anchor="ctr"/>
-          <a:lstStyle/>
-          <a:p>
-            <a:pPr algn="ctr"/>
-          </a:p>
-        </p:txBody>
-      </p:sp>
-      <p:sp>
-        <p:nvSpPr>
-          <p:cNvPr id="19" name="Oval 18"/>
-          <p:cNvSpPr/>
-          <p:nvPr/>
-        </p:nvSpPr>
-        <p:spPr>
-          <a:xfrm>
-            <a:off x="8356396" y="2425319"/>
-            <a:ext cx="731520" cy="731520"/>
-          </a:xfrm>
-          <a:prstGeom prst="ellipse">
-            <a:avLst/>
-          </a:prstGeom>
-          <a:solidFill>
-            <a:srgbClr val="5CB8F2"/>
-          </a:solidFill>
-          <a:ln>
-            <a:noFill/>
-          </a:ln>
-        </p:spPr>
-        <p:txBody>
-          <a:bodyPr rtlCol="0" anchor="ctr"/>
-          <a:lstStyle/>
-          <a:p>
-            <a:pPr algn="ctr"/>
-          </a:p>
-        </p:txBody>
-      </p:sp>
-      <p:pic>
-        <p:nvPicPr>
-          <p:cNvPr id="20" name="아이콘:robot" descr="robot_13294B_1.6.png"/>
-          <p:cNvPicPr>
-            <a:picLocks noChangeAspect="1"/>
-          </p:cNvPicPr>
-          <p:nvPr/>
-        </p:nvPicPr>
-        <p:blipFill>
-          <a:blip r:embed="rId5"/>
-          <a:stretch>
-            <a:fillRect/>
-          </a:stretch>
-        </p:blipFill>
-        <p:spPr>
-          <a:xfrm>
-            <a:off x="8510016" y="2578938"/>
-            <a:ext cx="424281" cy="424281"/>
-          </a:xfrm>
-          <a:prstGeom prst="rect">
-            <a:avLst/>
-          </a:prstGeom>
-        </p:spPr>
-      </p:pic>
-      <p:sp>
-        <p:nvSpPr>
-          <p:cNvPr id="21" name="TextBox 20"/>
-          <p:cNvSpPr txBox="1"/>
-          <p:nvPr/>
-        </p:nvSpPr>
-        <p:spPr>
-          <a:xfrm>
-            <a:off x="8292388" y="3248279"/>
-            <a:ext cx="3186074" cy="2007362"/>
-          </a:xfrm>
-          <a:prstGeom prst="rect">
-            <a:avLst/>
-          </a:prstGeom>
-          <a:noFill/>
-        </p:spPr>
-        <p:txBody>
-          <a:bodyPr wrap="square" anchor="t"/>
-          <a:lstStyle/>
-          <a:p>
-            <a:pPr algn="l" eaLnBrk="0">
-              <a:lnSpc>
-                <a:spcPct val="110000"/>
-              </a:lnSpc>
-              <a:spcAft>
-                <a:spcPts val="400"/>
-              </a:spcAft>
-            </a:pPr>
-            <a:r>
-              <a:rPr sz="2050" b="1">
-                <a:solidFill>
-                  <a:srgbClr val="13294B"/>
-                </a:solidFill>
-                <a:latin typeface="맑은 고딕"/>
-                <a:ea typeface="맑은 고딕"/>
-                <a:cs typeface="맑은 고딕"/>
-              </a:rPr>
-              <a:t>에이전트 단계</a:t>
-            </a:r>
-          </a:p>
-          <a:p>
-            <a:pPr algn="l" eaLnBrk="0" marL="188595" indent="-188595">
-              <a:lnSpc>
-                <a:spcPct val="110000"/>
-              </a:lnSpc>
-              <a:spcAft>
-                <a:spcPts val="400"/>
-              </a:spcAft>
-            </a:pPr>
-            <a:r>
-              <a:rPr sz="1650" b="0">
-                <a:solidFill>
-                  <a:srgbClr val="1F2A3A"/>
-                </a:solidFill>
-                <a:latin typeface="맑은 고딕"/>
-                <a:ea typeface="맑은 고딕"/>
-                <a:cs typeface="맑은 고딕"/>
-              </a:rPr>
-              <a:t>• 원인 진단 · 냉각 조치 제안</a:t>
-            </a:r>
-          </a:p>
-          <a:p>
-            <a:pPr algn="l" eaLnBrk="0" marL="188595" indent="-188595">
-              <a:lnSpc>
-                <a:spcPct val="110000"/>
-              </a:lnSpc>
-              <a:spcAft>
-                <a:spcPts val="400"/>
-              </a:spcAft>
-            </a:pPr>
-            <a:r>
-              <a:rPr sz="1650" b="0">
-                <a:solidFill>
-                  <a:srgbClr val="1F2A3A"/>
-                </a:solidFill>
-                <a:latin typeface="맑은 고딕"/>
-                <a:ea typeface="맑은 고딕"/>
-                <a:cs typeface="맑은 고딕"/>
-              </a:rPr>
-              <a:t>• 지정된 에이전트에게 맡겨진다</a:t>
-            </a:r>
-          </a:p>
-          <a:p>
-            <a:pPr algn="l" eaLnBrk="0" marL="188595" indent="-188595">
-              <a:lnSpc>
-                <a:spcPct val="110000"/>
-              </a:lnSpc>
-              <a:spcAft>
-                <a:spcPts val="400"/>
-              </a:spcAft>
-            </a:pPr>
-            <a:r>
-              <a:rPr sz="1650" b="0">
-                <a:solidFill>
-                  <a:srgbClr val="1F2A3A"/>
-                </a:solidFill>
-                <a:latin typeface="맑은 고딕"/>
-                <a:ea typeface="맑은 고딕"/>
-                <a:cs typeface="맑은 고딕"/>
-              </a:rPr>
-              <a:t>• 정해진 결과 제출·검사 뒤 진행한다</a:t>
-            </a:r>
-          </a:p>
-        </p:txBody>
-      </p:sp>
-      <p:sp>
-        <p:nvSpPr>
-          <p:cNvPr id="22" name="Rounded Rectangle 21"/>
-          <p:cNvSpPr/>
-          <p:nvPr/>
-        </p:nvSpPr>
-        <p:spPr>
-          <a:xfrm>
-            <a:off x="8356396" y="5328793"/>
-            <a:ext cx="975360" cy="292608"/>
-          </a:xfrm>
-          <a:prstGeom prst="roundRect">
-            <a:avLst>
-              <a:gd name="adj" fmla="val 50000"/>
-            </a:avLst>
-          </a:prstGeom>
-          <a:solidFill>
-            <a:srgbClr val="5CB8F2"/>
-          </a:solidFill>
-          <a:ln>
-            <a:noFill/>
-          </a:ln>
-        </p:spPr>
-        <p:txBody>
-          <a:bodyPr rtlCol="0" anchor="ctr"/>
-          <a:lstStyle/>
-          <a:p>
-            <a:pPr algn="ctr"/>
-          </a:p>
-        </p:txBody>
-      </p:sp>
-      <p:sp>
-        <p:nvSpPr>
-          <p:cNvPr id="23" name="TextBox 22"/>
-          <p:cNvSpPr txBox="1"/>
-          <p:nvPr/>
-        </p:nvSpPr>
-        <p:spPr>
-          <a:xfrm>
-            <a:off x="8356396" y="5328793"/>
-            <a:ext cx="975360" cy="292608"/>
-          </a:xfrm>
-          <a:prstGeom prst="rect">
-            <a:avLst/>
-          </a:prstGeom>
-          <a:noFill/>
-        </p:spPr>
-        <p:txBody>
-          <a:bodyPr wrap="square" anchor="ctr"/>
-          <a:lstStyle/>
-          <a:p>
-            <a:pPr algn="ctr" eaLnBrk="0">
-              <a:lnSpc>
-                <a:spcPct val="110000"/>
-              </a:lnSpc>
-            </a:pPr>
-            <a:r>
-              <a:rPr sz="1200" b="1">
-                <a:solidFill>
-                  <a:srgbClr val="13294B"/>
-                </a:solidFill>
-                <a:latin typeface="맑은 고딕"/>
-                <a:ea typeface="맑은 고딕"/>
-                <a:cs typeface="맑은 고딕"/>
-              </a:rPr>
-              <a:t>에이전트</a:t>
+              <a:t>승인 지연 알림</a:t>
             </a:r>
           </a:p>
         </p:txBody>
@@ -18065,7 +17831,7 @@
                 <a:ea typeface="맑은 고딕"/>
                 <a:cs typeface="맑은 고딕"/>
               </a:rPr>
-              <a:t>토큰: 프로세스의 현재 위치</a:t>
+              <a:t>작업의 종류에 따라 엔진이 기다리는 것</a:t>
             </a:r>
           </a:p>
         </p:txBody>
@@ -18104,7 +17870,7 @@
                 <a:ea typeface="맑은 고딕"/>
                 <a:cs typeface="맑은 고딕"/>
               </a:rPr>
-              <a:t>토큰은 프로세스의 현재 위치를 나타내는 표식으로, 시작 이벤트에서 생겨 끝 이벤트에서 사라진다.</a:t>
+              <a:t>엔진은 작업의 종류에 따라 사람의 응답, 시스템의 처리 결과, 에이전트의 제출을 기다린 뒤 토큰을 넘긴다.</a:t>
             </a:r>
           </a:p>
         </p:txBody>
@@ -18177,9 +17943,71 @@
           </a:p>
         </p:txBody>
       </p:sp>
+      <p:sp>
+        <p:nvSpPr>
+          <p:cNvPr id="6" name="Rounded Rectangle 5"/>
+          <p:cNvSpPr/>
+          <p:nvPr/>
+        </p:nvSpPr>
+        <p:spPr>
+          <a:xfrm>
+            <a:off x="548640" y="2224150"/>
+            <a:ext cx="3515258" cy="3534410"/>
+          </a:xfrm>
+          <a:prstGeom prst="roundRect">
+            <a:avLst>
+              <a:gd name="adj" fmla="val 4000"/>
+            </a:avLst>
+          </a:prstGeom>
+          <a:solidFill>
+            <a:srgbClr val="FFFFFF"/>
+          </a:solidFill>
+          <a:ln w="15875">
+            <a:solidFill>
+              <a:srgbClr val="D3D9E1"/>
+            </a:solidFill>
+          </a:ln>
+        </p:spPr>
+        <p:txBody>
+          <a:bodyPr rtlCol="0" anchor="ctr"/>
+          <a:lstStyle/>
+          <a:p>
+            <a:pPr algn="ctr"/>
+          </a:p>
+        </p:txBody>
+      </p:sp>
+      <p:sp>
+        <p:nvSpPr>
+          <p:cNvPr id="7" name="Oval 6"/>
+          <p:cNvSpPr/>
+          <p:nvPr/>
+        </p:nvSpPr>
+        <p:spPr>
+          <a:xfrm>
+            <a:off x="777240" y="2425319"/>
+            <a:ext cx="731520" cy="731520"/>
+          </a:xfrm>
+          <a:prstGeom prst="ellipse">
+            <a:avLst/>
+          </a:prstGeom>
+          <a:solidFill>
+            <a:srgbClr val="E7F3FD"/>
+          </a:solidFill>
+          <a:ln>
+            <a:noFill/>
+          </a:ln>
+        </p:spPr>
+        <p:txBody>
+          <a:bodyPr rtlCol="0" anchor="ctr"/>
+          <a:lstStyle/>
+          <a:p>
+            <a:pPr algn="ctr"/>
+          </a:p>
+        </p:txBody>
+      </p:sp>
       <p:pic>
         <p:nvPicPr>
-          <p:cNvPr id="6" name="삽화:흐름_토큰_승인대기.svg" descr="illust_3422145033427414730_1793113376.png"/>
+          <p:cNvPr id="8" name="아이콘:user-check" descr="user-check_13294B_1.6.png"/>
           <p:cNvPicPr>
             <a:picLocks noChangeAspect="1"/>
           </p:cNvPicPr>
@@ -18193,8 +18021,8 @@
         </p:blipFill>
         <p:spPr>
           <a:xfrm>
-            <a:off x="641100" y="1627632"/>
-            <a:ext cx="10909495" cy="4727448"/>
+            <a:off x="930859" y="2578938"/>
+            <a:ext cx="424281" cy="424281"/>
           </a:xfrm>
           <a:prstGeom prst="rect">
             <a:avLst/>
@@ -18203,14 +18031,14 @@
       </p:pic>
       <p:sp>
         <p:nvSpPr>
-          <p:cNvPr id="7" name="TextBox 6"/>
-          <p:cNvSpPr txBox="1"/>
-          <p:nvPr/>
-        </p:nvSpPr>
-        <p:spPr>
-          <a:xfrm>
-            <a:off x="6641322" y="1769455"/>
-            <a:ext cx="4363798" cy="507618"/>
+          <p:cNvPr id="9" name="TextBox 8"/>
+          <p:cNvSpPr txBox="1"/>
+          <p:nvPr/>
+        </p:nvSpPr>
+        <p:spPr>
+          <a:xfrm>
+            <a:off x="713232" y="3248279"/>
+            <a:ext cx="3186074" cy="2007362"/>
           </a:xfrm>
           <a:prstGeom prst="rect">
             <a:avLst/>
@@ -18221,79 +18049,671 @@
           <a:bodyPr wrap="square" anchor="t"/>
           <a:lstStyle/>
           <a:p>
+            <a:pPr algn="l" eaLnBrk="0">
+              <a:lnSpc>
+                <a:spcPct val="110000"/>
+              </a:lnSpc>
+              <a:spcAft>
+                <a:spcPts val="400"/>
+              </a:spcAft>
+            </a:pPr>
+            <a:r>
+              <a:rPr sz="2050" b="1">
+                <a:solidFill>
+                  <a:srgbClr val="13294B"/>
+                </a:solidFill>
+                <a:latin typeface="맑은 고딕"/>
+                <a:ea typeface="맑은 고딕"/>
+                <a:cs typeface="맑은 고딕"/>
+              </a:rPr>
+              <a:t>사용자 작업</a:t>
+            </a:r>
+          </a:p>
+          <a:p>
+            <a:pPr algn="l" eaLnBrk="0" marL="188595" indent="-188595">
+              <a:lnSpc>
+                <a:spcPct val="110000"/>
+              </a:lnSpc>
+              <a:spcAft>
+                <a:spcPts val="400"/>
+              </a:spcAft>
+            </a:pPr>
+            <a:r>
+              <a:rPr sz="1650" b="0">
+                <a:solidFill>
+                  <a:srgbClr val="1F2A3A"/>
+                </a:solidFill>
+                <a:latin typeface="맑은 고딕"/>
+                <a:ea typeface="맑은 고딕"/>
+                <a:cs typeface="맑은 고딕"/>
+              </a:rPr>
+              <a:t>• 운전원 승인</a:t>
+            </a:r>
+          </a:p>
+          <a:p>
+            <a:pPr algn="l" eaLnBrk="0" marL="188595" indent="-188595">
+              <a:lnSpc>
+                <a:spcPct val="110000"/>
+              </a:lnSpc>
+              <a:spcAft>
+                <a:spcPts val="400"/>
+              </a:spcAft>
+            </a:pPr>
+            <a:r>
+              <a:rPr sz="1650" b="0">
+                <a:solidFill>
+                  <a:srgbClr val="1F2A3A"/>
+                </a:solidFill>
+                <a:latin typeface="맑은 고딕"/>
+                <a:ea typeface="맑은 고딕"/>
+                <a:cs typeface="맑은 고딕"/>
+              </a:rPr>
+              <a:t>• 담당 역할의 작업함에 놓인다</a:t>
+            </a:r>
+          </a:p>
+          <a:p>
+            <a:pPr algn="l" eaLnBrk="0" marL="188595" indent="-188595">
+              <a:lnSpc>
+                <a:spcPct val="110000"/>
+              </a:lnSpc>
+              <a:spcAft>
+                <a:spcPts val="400"/>
+              </a:spcAft>
+            </a:pPr>
+            <a:r>
+              <a:rPr sz="1650" b="0">
+                <a:solidFill>
+                  <a:srgbClr val="1F2A3A"/>
+                </a:solidFill>
+                <a:latin typeface="맑은 고딕"/>
+                <a:ea typeface="맑은 고딕"/>
+                <a:cs typeface="맑은 고딕"/>
+              </a:rPr>
+              <a:t>• 사람이 승인하거나 거절하면 끝난다</a:t>
+            </a:r>
+          </a:p>
+        </p:txBody>
+      </p:sp>
+      <p:sp>
+        <p:nvSpPr>
+          <p:cNvPr id="10" name="Rounded Rectangle 9"/>
+          <p:cNvSpPr/>
+          <p:nvPr/>
+        </p:nvSpPr>
+        <p:spPr>
+          <a:xfrm>
+            <a:off x="777240" y="5328793"/>
+            <a:ext cx="1075944" cy="292608"/>
+          </a:xfrm>
+          <a:prstGeom prst="roundRect">
+            <a:avLst>
+              <a:gd name="adj" fmla="val 50000"/>
+            </a:avLst>
+          </a:prstGeom>
+          <a:solidFill>
+            <a:srgbClr val="D3D9E1"/>
+          </a:solidFill>
+          <a:ln>
+            <a:noFill/>
+          </a:ln>
+        </p:spPr>
+        <p:txBody>
+          <a:bodyPr rtlCol="0" anchor="ctr"/>
+          <a:lstStyle/>
+          <a:p>
+            <a:pPr algn="ctr"/>
+          </a:p>
+        </p:txBody>
+      </p:sp>
+      <p:sp>
+        <p:nvSpPr>
+          <p:cNvPr id="11" name="TextBox 10"/>
+          <p:cNvSpPr txBox="1"/>
+          <p:nvPr/>
+        </p:nvSpPr>
+        <p:spPr>
+          <a:xfrm>
+            <a:off x="777240" y="5328793"/>
+            <a:ext cx="1075944" cy="292608"/>
+          </a:xfrm>
+          <a:prstGeom prst="rect">
+            <a:avLst/>
+          </a:prstGeom>
+          <a:noFill/>
+        </p:spPr>
+        <p:txBody>
+          <a:bodyPr wrap="square" anchor="ctr"/>
+          <a:lstStyle/>
+          <a:p>
             <a:pPr algn="ctr" eaLnBrk="0">
               <a:lnSpc>
                 <a:spcPct val="110000"/>
               </a:lnSpc>
+            </a:pPr>
+            <a:r>
+              <a:rPr sz="1200" b="1">
+                <a:solidFill>
+                  <a:srgbClr val="13294B"/>
+                </a:solidFill>
+                <a:latin typeface="맑은 고딕"/>
+                <a:ea typeface="맑은 고딕"/>
+                <a:cs typeface="맑은 고딕"/>
+              </a:rPr>
+              <a:t>User Task</a:t>
+            </a:r>
+          </a:p>
+        </p:txBody>
+      </p:sp>
+      <p:sp>
+        <p:nvSpPr>
+          <p:cNvPr id="12" name="Rounded Rectangle 11"/>
+          <p:cNvSpPr/>
+          <p:nvPr/>
+        </p:nvSpPr>
+        <p:spPr>
+          <a:xfrm>
+            <a:off x="4338218" y="2224150"/>
+            <a:ext cx="3515258" cy="3534410"/>
+          </a:xfrm>
+          <a:prstGeom prst="roundRect">
+            <a:avLst>
+              <a:gd name="adj" fmla="val 4000"/>
+            </a:avLst>
+          </a:prstGeom>
+          <a:solidFill>
+            <a:srgbClr val="FFFFFF"/>
+          </a:solidFill>
+          <a:ln w="15875">
+            <a:solidFill>
+              <a:srgbClr val="D3D9E1"/>
+            </a:solidFill>
+          </a:ln>
+        </p:spPr>
+        <p:txBody>
+          <a:bodyPr rtlCol="0" anchor="ctr"/>
+          <a:lstStyle/>
+          <a:p>
+            <a:pPr algn="ctr"/>
+          </a:p>
+        </p:txBody>
+      </p:sp>
+      <p:sp>
+        <p:nvSpPr>
+          <p:cNvPr id="13" name="Oval 12"/>
+          <p:cNvSpPr/>
+          <p:nvPr/>
+        </p:nvSpPr>
+        <p:spPr>
+          <a:xfrm>
+            <a:off x="4566818" y="2425319"/>
+            <a:ext cx="731520" cy="731520"/>
+          </a:xfrm>
+          <a:prstGeom prst="ellipse">
+            <a:avLst/>
+          </a:prstGeom>
+          <a:solidFill>
+            <a:srgbClr val="E7F3FD"/>
+          </a:solidFill>
+          <a:ln>
+            <a:noFill/>
+          </a:ln>
+        </p:spPr>
+        <p:txBody>
+          <a:bodyPr rtlCol="0" anchor="ctr"/>
+          <a:lstStyle/>
+          <a:p>
+            <a:pPr algn="ctr"/>
+          </a:p>
+        </p:txBody>
+      </p:sp>
+      <p:pic>
+        <p:nvPicPr>
+          <p:cNvPr id="14" name="아이콘:settings" descr="settings_13294B_1.6.png"/>
+          <p:cNvPicPr>
+            <a:picLocks noChangeAspect="1"/>
+          </p:cNvPicPr>
+          <p:nvPr/>
+        </p:nvPicPr>
+        <p:blipFill>
+          <a:blip r:embed="rId4"/>
+          <a:stretch>
+            <a:fillRect/>
+          </a:stretch>
+        </p:blipFill>
+        <p:spPr>
+          <a:xfrm>
+            <a:off x="4720437" y="2578938"/>
+            <a:ext cx="424281" cy="424281"/>
+          </a:xfrm>
+          <a:prstGeom prst="rect">
+            <a:avLst/>
+          </a:prstGeom>
+        </p:spPr>
+      </p:pic>
+      <p:sp>
+        <p:nvSpPr>
+          <p:cNvPr id="15" name="TextBox 14"/>
+          <p:cNvSpPr txBox="1"/>
+          <p:nvPr/>
+        </p:nvSpPr>
+        <p:spPr>
+          <a:xfrm>
+            <a:off x="4502810" y="3248279"/>
+            <a:ext cx="3186074" cy="2007362"/>
+          </a:xfrm>
+          <a:prstGeom prst="rect">
+            <a:avLst/>
+          </a:prstGeom>
+          <a:noFill/>
+        </p:spPr>
+        <p:txBody>
+          <a:bodyPr wrap="square" anchor="t"/>
+          <a:lstStyle/>
+          <a:p>
+            <a:pPr algn="l" eaLnBrk="0">
+              <a:lnSpc>
+                <a:spcPct val="110000"/>
+              </a:lnSpc>
               <a:spcAft>
-                <a:spcPts val="100"/>
+                <a:spcPts val="400"/>
               </a:spcAft>
             </a:pPr>
             <a:r>
-              <a:rPr sz="1350" b="1">
-                <a:solidFill>
-                  <a:srgbClr val="1A6FC4"/>
-                </a:solidFill>
-                <a:latin typeface="맑은 고딕"/>
-                <a:ea typeface="맑은 고딕"/>
-                <a:cs typeface="맑은 고딕"/>
-              </a:rPr>
-              <a:t>토큰</a:t>
-            </a:r>
-          </a:p>
+              <a:rPr sz="2050" b="1">
+                <a:solidFill>
+                  <a:srgbClr val="13294B"/>
+                </a:solidFill>
+                <a:latin typeface="맑은 고딕"/>
+                <a:ea typeface="맑은 고딕"/>
+                <a:cs typeface="맑은 고딕"/>
+              </a:rPr>
+              <a:t>서비스 작업</a:t>
+            </a:r>
+          </a:p>
+          <a:p>
+            <a:pPr algn="l" eaLnBrk="0" marL="188595" indent="-188595">
+              <a:lnSpc>
+                <a:spcPct val="110000"/>
+              </a:lnSpc>
+              <a:spcAft>
+                <a:spcPts val="400"/>
+              </a:spcAft>
+            </a:pPr>
+            <a:r>
+              <a:rPr sz="1650" b="0">
+                <a:solidFill>
+                  <a:srgbClr val="1F2A3A"/>
+                </a:solidFill>
+                <a:latin typeface="맑은 고딕"/>
+                <a:ea typeface="맑은 고딕"/>
+                <a:cs typeface="맑은 고딕"/>
+              </a:rPr>
+              <a:t>• 냉각 명령, 재관측, 작업지시 등록</a:t>
+            </a:r>
+          </a:p>
+          <a:p>
+            <a:pPr algn="l" eaLnBrk="0" marL="188595" indent="-188595">
+              <a:lnSpc>
+                <a:spcPct val="110000"/>
+              </a:lnSpc>
+              <a:spcAft>
+                <a:spcPts val="400"/>
+              </a:spcAft>
+            </a:pPr>
+            <a:r>
+              <a:rPr sz="1650" b="0">
+                <a:solidFill>
+                  <a:srgbClr val="1F2A3A"/>
+                </a:solidFill>
+                <a:latin typeface="맑은 고딕"/>
+                <a:ea typeface="맑은 고딕"/>
+                <a:cs typeface="맑은 고딕"/>
+              </a:rPr>
+              <a:t>• 엔진이 해당 시스템을 호출한다</a:t>
+            </a:r>
+          </a:p>
+          <a:p>
+            <a:pPr algn="l" eaLnBrk="0" marL="188595" indent="-188595">
+              <a:lnSpc>
+                <a:spcPct val="110000"/>
+              </a:lnSpc>
+              <a:spcAft>
+                <a:spcPts val="400"/>
+              </a:spcAft>
+            </a:pPr>
+            <a:r>
+              <a:rPr sz="1650" b="0">
+                <a:solidFill>
+                  <a:srgbClr val="1F2A3A"/>
+                </a:solidFill>
+                <a:latin typeface="맑은 고딕"/>
+                <a:ea typeface="맑은 고딕"/>
+                <a:cs typeface="맑은 고딕"/>
+              </a:rPr>
+              <a:t>• 결과와 완료 조건을 확인한다</a:t>
+            </a:r>
+          </a:p>
+        </p:txBody>
+      </p:sp>
+      <p:sp>
+        <p:nvSpPr>
+          <p:cNvPr id="16" name="Rounded Rectangle 15"/>
+          <p:cNvSpPr/>
+          <p:nvPr/>
+        </p:nvSpPr>
+        <p:spPr>
+          <a:xfrm>
+            <a:off x="4566818" y="5328793"/>
+            <a:ext cx="1313687" cy="292608"/>
+          </a:xfrm>
+          <a:prstGeom prst="roundRect">
+            <a:avLst>
+              <a:gd name="adj" fmla="val 50000"/>
+            </a:avLst>
+          </a:prstGeom>
+          <a:solidFill>
+            <a:srgbClr val="D3D9E1"/>
+          </a:solidFill>
+          <a:ln>
+            <a:noFill/>
+          </a:ln>
+        </p:spPr>
+        <p:txBody>
+          <a:bodyPr rtlCol="0" anchor="ctr"/>
+          <a:lstStyle/>
+          <a:p>
+            <a:pPr algn="ctr"/>
+          </a:p>
+        </p:txBody>
+      </p:sp>
+      <p:sp>
+        <p:nvSpPr>
+          <p:cNvPr id="17" name="TextBox 16"/>
+          <p:cNvSpPr txBox="1"/>
+          <p:nvPr/>
+        </p:nvSpPr>
+        <p:spPr>
+          <a:xfrm>
+            <a:off x="4566818" y="5328793"/>
+            <a:ext cx="1313687" cy="292608"/>
+          </a:xfrm>
+          <a:prstGeom prst="rect">
+            <a:avLst/>
+          </a:prstGeom>
+          <a:noFill/>
+        </p:spPr>
+        <p:txBody>
+          <a:bodyPr wrap="square" anchor="ctr"/>
+          <a:lstStyle/>
           <a:p>
             <a:pPr algn="ctr" eaLnBrk="0">
               <a:lnSpc>
                 <a:spcPct val="110000"/>
               </a:lnSpc>
+            </a:pPr>
+            <a:r>
+              <a:rPr sz="1200" b="1">
+                <a:solidFill>
+                  <a:srgbClr val="13294B"/>
+                </a:solidFill>
+                <a:latin typeface="맑은 고딕"/>
+                <a:ea typeface="맑은 고딕"/>
+                <a:cs typeface="맑은 고딕"/>
+              </a:rPr>
+              <a:t>Service Task</a:t>
+            </a:r>
+          </a:p>
+        </p:txBody>
+      </p:sp>
+      <p:sp>
+        <p:nvSpPr>
+          <p:cNvPr id="18" name="Rounded Rectangle 17"/>
+          <p:cNvSpPr/>
+          <p:nvPr/>
+        </p:nvSpPr>
+        <p:spPr>
+          <a:xfrm>
+            <a:off x="8127796" y="2224150"/>
+            <a:ext cx="3515258" cy="3534410"/>
+          </a:xfrm>
+          <a:prstGeom prst="roundRect">
+            <a:avLst>
+              <a:gd name="adj" fmla="val 4000"/>
+            </a:avLst>
+          </a:prstGeom>
+          <a:solidFill>
+            <a:srgbClr val="FFFFFF"/>
+          </a:solidFill>
+          <a:ln w="28575">
+            <a:solidFill>
+              <a:srgbClr val="5CB8F2"/>
+            </a:solidFill>
+          </a:ln>
+        </p:spPr>
+        <p:txBody>
+          <a:bodyPr rtlCol="0" anchor="ctr"/>
+          <a:lstStyle/>
+          <a:p>
+            <a:pPr algn="ctr"/>
+          </a:p>
+        </p:txBody>
+      </p:sp>
+      <p:sp>
+        <p:nvSpPr>
+          <p:cNvPr id="19" name="Oval 18"/>
+          <p:cNvSpPr/>
+          <p:nvPr/>
+        </p:nvSpPr>
+        <p:spPr>
+          <a:xfrm>
+            <a:off x="8356396" y="2425319"/>
+            <a:ext cx="731520" cy="731520"/>
+          </a:xfrm>
+          <a:prstGeom prst="ellipse">
+            <a:avLst/>
+          </a:prstGeom>
+          <a:solidFill>
+            <a:srgbClr val="5CB8F2"/>
+          </a:solidFill>
+          <a:ln>
+            <a:noFill/>
+          </a:ln>
+        </p:spPr>
+        <p:txBody>
+          <a:bodyPr rtlCol="0" anchor="ctr"/>
+          <a:lstStyle/>
+          <a:p>
+            <a:pPr algn="ctr"/>
+          </a:p>
+        </p:txBody>
+      </p:sp>
+      <p:pic>
+        <p:nvPicPr>
+          <p:cNvPr id="20" name="아이콘:robot" descr="robot_13294B_1.6.png"/>
+          <p:cNvPicPr>
+            <a:picLocks noChangeAspect="1"/>
+          </p:cNvPicPr>
+          <p:nvPr/>
+        </p:nvPicPr>
+        <p:blipFill>
+          <a:blip r:embed="rId5"/>
+          <a:stretch>
+            <a:fillRect/>
+          </a:stretch>
+        </p:blipFill>
+        <p:spPr>
+          <a:xfrm>
+            <a:off x="8510016" y="2578938"/>
+            <a:ext cx="424281" cy="424281"/>
+          </a:xfrm>
+          <a:prstGeom prst="rect">
+            <a:avLst/>
+          </a:prstGeom>
+        </p:spPr>
+      </p:pic>
+      <p:sp>
+        <p:nvSpPr>
+          <p:cNvPr id="21" name="TextBox 20"/>
+          <p:cNvSpPr txBox="1"/>
+          <p:nvPr/>
+        </p:nvSpPr>
+        <p:spPr>
+          <a:xfrm>
+            <a:off x="8292388" y="3248279"/>
+            <a:ext cx="3186074" cy="2007362"/>
+          </a:xfrm>
+          <a:prstGeom prst="rect">
+            <a:avLst/>
+          </a:prstGeom>
+          <a:noFill/>
+        </p:spPr>
+        <p:txBody>
+          <a:bodyPr wrap="square" anchor="t"/>
+          <a:lstStyle/>
+          <a:p>
+            <a:pPr algn="l" eaLnBrk="0">
+              <a:lnSpc>
+                <a:spcPct val="110000"/>
+              </a:lnSpc>
               <a:spcAft>
-                <a:spcPts val="100"/>
+                <a:spcPts val="400"/>
               </a:spcAft>
             </a:pPr>
             <a:r>
-              <a:rPr sz="1100" b="0">
-                <a:solidFill>
-                  <a:srgbClr val="556175"/>
-                </a:solidFill>
-                <a:latin typeface="맑은 고딕"/>
-                <a:ea typeface="맑은 고딕"/>
-                <a:cs typeface="맑은 고딕"/>
-              </a:rPr>
-              <a:t>Token · 프로세스의 현재 위치</a:t>
-            </a:r>
-          </a:p>
-        </p:txBody>
-      </p:sp>
-      <p:sp>
-        <p:nvSpPr>
-          <p:cNvPr id="8" name="TextBox 7"/>
-          <p:cNvSpPr txBox="1"/>
-          <p:nvPr/>
-        </p:nvSpPr>
-        <p:spPr>
-          <a:xfrm>
-            <a:off x="3564844" y="2027101"/>
-            <a:ext cx="1200044" cy="337185"/>
-          </a:xfrm>
-          <a:prstGeom prst="rect">
-            <a:avLst/>
-          </a:prstGeom>
-          <a:noFill/>
-        </p:spPr>
-        <p:txBody>
-          <a:bodyPr wrap="square" anchor="t"/>
+              <a:rPr sz="2050" b="1">
+                <a:solidFill>
+                  <a:srgbClr val="13294B"/>
+                </a:solidFill>
+                <a:latin typeface="맑은 고딕"/>
+                <a:ea typeface="맑은 고딕"/>
+                <a:cs typeface="맑은 고딕"/>
+              </a:rPr>
+              <a:t>에이전트 단계</a:t>
+            </a:r>
+          </a:p>
+          <a:p>
+            <a:pPr algn="l" eaLnBrk="0" marL="188595" indent="-188595">
+              <a:lnSpc>
+                <a:spcPct val="110000"/>
+              </a:lnSpc>
+              <a:spcAft>
+                <a:spcPts val="400"/>
+              </a:spcAft>
+            </a:pPr>
+            <a:r>
+              <a:rPr sz="1650" b="0">
+                <a:solidFill>
+                  <a:srgbClr val="1F2A3A"/>
+                </a:solidFill>
+                <a:latin typeface="맑은 고딕"/>
+                <a:ea typeface="맑은 고딕"/>
+                <a:cs typeface="맑은 고딕"/>
+              </a:rPr>
+              <a:t>• 원인 진단 · 냉각 조치 제안</a:t>
+            </a:r>
+          </a:p>
+          <a:p>
+            <a:pPr algn="l" eaLnBrk="0" marL="188595" indent="-188595">
+              <a:lnSpc>
+                <a:spcPct val="110000"/>
+              </a:lnSpc>
+              <a:spcAft>
+                <a:spcPts val="400"/>
+              </a:spcAft>
+            </a:pPr>
+            <a:r>
+              <a:rPr sz="1650" b="0">
+                <a:solidFill>
+                  <a:srgbClr val="1F2A3A"/>
+                </a:solidFill>
+                <a:latin typeface="맑은 고딕"/>
+                <a:ea typeface="맑은 고딕"/>
+                <a:cs typeface="맑은 고딕"/>
+              </a:rPr>
+              <a:t>• 지정된 에이전트에게 맡겨진다</a:t>
+            </a:r>
+          </a:p>
+          <a:p>
+            <a:pPr algn="l" eaLnBrk="0" marL="188595" indent="-188595">
+              <a:lnSpc>
+                <a:spcPct val="110000"/>
+              </a:lnSpc>
+              <a:spcAft>
+                <a:spcPts val="400"/>
+              </a:spcAft>
+            </a:pPr>
+            <a:r>
+              <a:rPr sz="1650" b="0">
+                <a:solidFill>
+                  <a:srgbClr val="1F2A3A"/>
+                </a:solidFill>
+                <a:latin typeface="맑은 고딕"/>
+                <a:ea typeface="맑은 고딕"/>
+                <a:cs typeface="맑은 고딕"/>
+              </a:rPr>
+              <a:t>• 정해진 결과 제출·검사 뒤 진행한다</a:t>
+            </a:r>
+          </a:p>
+        </p:txBody>
+      </p:sp>
+      <p:sp>
+        <p:nvSpPr>
+          <p:cNvPr id="22" name="Rounded Rectangle 21"/>
+          <p:cNvSpPr/>
+          <p:nvPr/>
+        </p:nvSpPr>
+        <p:spPr>
+          <a:xfrm>
+            <a:off x="8356396" y="5328793"/>
+            <a:ext cx="975360" cy="292608"/>
+          </a:xfrm>
+          <a:prstGeom prst="roundRect">
+            <a:avLst>
+              <a:gd name="adj" fmla="val 50000"/>
+            </a:avLst>
+          </a:prstGeom>
+          <a:solidFill>
+            <a:srgbClr val="5CB8F2"/>
+          </a:solidFill>
+          <a:ln>
+            <a:noFill/>
+          </a:ln>
+        </p:spPr>
+        <p:txBody>
+          <a:bodyPr rtlCol="0" anchor="ctr"/>
+          <a:lstStyle/>
+          <a:p>
+            <a:pPr algn="ctr"/>
+          </a:p>
+        </p:txBody>
+      </p:sp>
+      <p:sp>
+        <p:nvSpPr>
+          <p:cNvPr id="23" name="TextBox 22"/>
+          <p:cNvSpPr txBox="1"/>
+          <p:nvPr/>
+        </p:nvSpPr>
+        <p:spPr>
+          <a:xfrm>
+            <a:off x="8356396" y="5328793"/>
+            <a:ext cx="975360" cy="292608"/>
+          </a:xfrm>
+          <a:prstGeom prst="rect">
+            <a:avLst/>
+          </a:prstGeom>
+          <a:noFill/>
+        </p:spPr>
+        <p:txBody>
+          <a:bodyPr wrap="square" anchor="ctr"/>
           <a:lstStyle/>
           <a:p>
             <a:pPr algn="ctr" eaLnBrk="0">
               <a:lnSpc>
                 <a:spcPct val="110000"/>
               </a:lnSpc>
-              <a:spcAft>
-                <a:spcPts val="100"/>
-              </a:spcAft>
-            </a:pPr>
-            <a:r>
-              <a:rPr sz="1350" b="1">
+            </a:pPr>
+            <a:r>
+              <a:rPr sz="1200" b="1">
                 <a:solidFill>
                   <a:srgbClr val="13294B"/>
                 </a:solidFill>
@@ -18301,427 +18721,7 @@
                 <a:ea typeface="맑은 고딕"/>
                 <a:cs typeface="맑은 고딕"/>
               </a:rPr>
-              <a:t>운전원 승인</a:t>
-            </a:r>
-          </a:p>
-        </p:txBody>
-      </p:sp>
-      <p:sp>
-        <p:nvSpPr>
-          <p:cNvPr id="9" name="TextBox 8"/>
-          <p:cNvSpPr txBox="1"/>
-          <p:nvPr/>
-        </p:nvSpPr>
-        <p:spPr>
-          <a:xfrm>
-            <a:off x="2282979" y="2870950"/>
-            <a:ext cx="1352777" cy="546353"/>
-          </a:xfrm>
-          <a:prstGeom prst="rect">
-            <a:avLst/>
-          </a:prstGeom>
-          <a:noFill/>
-        </p:spPr>
-        <p:txBody>
-          <a:bodyPr wrap="square" anchor="t"/>
-          <a:lstStyle/>
-          <a:p>
-            <a:pPr algn="ctr" eaLnBrk="0">
-              <a:lnSpc>
-                <a:spcPct val="110000"/>
-              </a:lnSpc>
-              <a:spcAft>
-                <a:spcPts val="100"/>
-              </a:spcAft>
-            </a:pPr>
-            <a:r>
-              <a:rPr sz="1350" b="1">
-                <a:solidFill>
-                  <a:srgbClr val="13294B"/>
-                </a:solidFill>
-                <a:latin typeface="맑은 고딕"/>
-                <a:ea typeface="맑은 고딕"/>
-                <a:cs typeface="맑은 고딕"/>
-              </a:rPr>
-              <a:t>원인 진단 · 냉각 조치 제안</a:t>
-            </a:r>
-          </a:p>
-        </p:txBody>
-      </p:sp>
-      <p:sp>
-        <p:nvSpPr>
-          <p:cNvPr id="10" name="TextBox 9"/>
-          <p:cNvSpPr txBox="1"/>
-          <p:nvPr/>
-        </p:nvSpPr>
-        <p:spPr>
-          <a:xfrm>
-            <a:off x="1546588" y="3424062"/>
-            <a:ext cx="872759" cy="546353"/>
-          </a:xfrm>
-          <a:prstGeom prst="rect">
-            <a:avLst/>
-          </a:prstGeom>
-          <a:noFill/>
-        </p:spPr>
-        <p:txBody>
-          <a:bodyPr wrap="square" anchor="t"/>
-          <a:lstStyle/>
-          <a:p>
-            <a:pPr algn="ctr" eaLnBrk="0">
-              <a:lnSpc>
-                <a:spcPct val="110000"/>
-              </a:lnSpc>
-              <a:spcAft>
-                <a:spcPts val="100"/>
-              </a:spcAft>
-            </a:pPr>
-            <a:r>
-              <a:rPr sz="1350" b="1">
-                <a:solidFill>
-                  <a:srgbClr val="13294B"/>
-                </a:solidFill>
-                <a:latin typeface="맑은 고딕"/>
-                <a:ea typeface="맑은 고딕"/>
-                <a:cs typeface="맑은 고딕"/>
-              </a:rPr>
-              <a:t>시작 이벤트</a:t>
-            </a:r>
-          </a:p>
-        </p:txBody>
-      </p:sp>
-      <p:sp>
-        <p:nvSpPr>
-          <p:cNvPr id="11" name="TextBox 10"/>
-          <p:cNvSpPr txBox="1"/>
-          <p:nvPr/>
-        </p:nvSpPr>
-        <p:spPr>
-          <a:xfrm>
-            <a:off x="10350550" y="3376787"/>
-            <a:ext cx="981854" cy="337185"/>
-          </a:xfrm>
-          <a:prstGeom prst="rect">
-            <a:avLst/>
-          </a:prstGeom>
-          <a:noFill/>
-        </p:spPr>
-        <p:txBody>
-          <a:bodyPr wrap="square" anchor="t"/>
-          <a:lstStyle/>
-          <a:p>
-            <a:pPr algn="ctr" eaLnBrk="0">
-              <a:lnSpc>
-                <a:spcPct val="110000"/>
-              </a:lnSpc>
-              <a:spcAft>
-                <a:spcPts val="100"/>
-              </a:spcAft>
-            </a:pPr>
-            <a:r>
-              <a:rPr sz="1350" b="1">
-                <a:solidFill>
-                  <a:srgbClr val="13294B"/>
-                </a:solidFill>
-                <a:latin typeface="맑은 고딕"/>
-                <a:ea typeface="맑은 고딕"/>
-                <a:cs typeface="맑은 고딕"/>
-              </a:rPr>
-              <a:t>끝 이벤트</a:t>
-            </a:r>
-          </a:p>
-        </p:txBody>
-      </p:sp>
-      <p:sp>
-        <p:nvSpPr>
-          <p:cNvPr id="12" name="TextBox 11"/>
-          <p:cNvSpPr txBox="1"/>
-          <p:nvPr/>
-        </p:nvSpPr>
-        <p:spPr>
-          <a:xfrm>
-            <a:off x="4666703" y="4199363"/>
-            <a:ext cx="1200044" cy="337185"/>
-          </a:xfrm>
-          <a:prstGeom prst="rect">
-            <a:avLst/>
-          </a:prstGeom>
-          <a:noFill/>
-        </p:spPr>
-        <p:txBody>
-          <a:bodyPr wrap="square" anchor="t"/>
-          <a:lstStyle/>
-          <a:p>
-            <a:pPr algn="ctr" eaLnBrk="0">
-              <a:lnSpc>
-                <a:spcPct val="110000"/>
-              </a:lnSpc>
-              <a:spcAft>
-                <a:spcPts val="100"/>
-              </a:spcAft>
-            </a:pPr>
-            <a:r>
-              <a:rPr sz="1350" b="1">
-                <a:solidFill>
-                  <a:srgbClr val="13294B"/>
-                </a:solidFill>
-                <a:latin typeface="맑은 고딕"/>
-                <a:ea typeface="맑은 고딕"/>
-                <a:cs typeface="맑은 고딕"/>
-              </a:rPr>
-              <a:t>냉각 명령</a:t>
-            </a:r>
-          </a:p>
-        </p:txBody>
-      </p:sp>
-      <p:sp>
-        <p:nvSpPr>
-          <p:cNvPr id="13" name="TextBox 12"/>
-          <p:cNvSpPr txBox="1"/>
-          <p:nvPr/>
-        </p:nvSpPr>
-        <p:spPr>
-          <a:xfrm>
-            <a:off x="6194033" y="4199363"/>
-            <a:ext cx="1090949" cy="337185"/>
-          </a:xfrm>
-          <a:prstGeom prst="rect">
-            <a:avLst/>
-          </a:prstGeom>
-          <a:noFill/>
-        </p:spPr>
-        <p:txBody>
-          <a:bodyPr wrap="square" anchor="t"/>
-          <a:lstStyle/>
-          <a:p>
-            <a:pPr algn="ctr" eaLnBrk="0">
-              <a:lnSpc>
-                <a:spcPct val="110000"/>
-              </a:lnSpc>
-              <a:spcAft>
-                <a:spcPts val="100"/>
-              </a:spcAft>
-            </a:pPr>
-            <a:r>
-              <a:rPr sz="1350" b="1">
-                <a:solidFill>
-                  <a:srgbClr val="13294B"/>
-                </a:solidFill>
-                <a:latin typeface="맑은 고딕"/>
-                <a:ea typeface="맑은 고딕"/>
-                <a:cs typeface="맑은 고딕"/>
-              </a:rPr>
-              <a:t>재관측</a:t>
-            </a:r>
-          </a:p>
-        </p:txBody>
-      </p:sp>
-      <p:sp>
-        <p:nvSpPr>
-          <p:cNvPr id="14" name="TextBox 13"/>
-          <p:cNvSpPr txBox="1"/>
-          <p:nvPr/>
-        </p:nvSpPr>
-        <p:spPr>
-          <a:xfrm>
-            <a:off x="8397751" y="4081177"/>
-            <a:ext cx="981854" cy="546353"/>
-          </a:xfrm>
-          <a:prstGeom prst="rect">
-            <a:avLst/>
-          </a:prstGeom>
-          <a:noFill/>
-        </p:spPr>
-        <p:txBody>
-          <a:bodyPr wrap="square" anchor="t"/>
-          <a:lstStyle/>
-          <a:p>
-            <a:pPr algn="ctr" eaLnBrk="0">
-              <a:lnSpc>
-                <a:spcPct val="110000"/>
-              </a:lnSpc>
-              <a:spcAft>
-                <a:spcPts val="100"/>
-              </a:spcAft>
-            </a:pPr>
-            <a:r>
-              <a:rPr sz="1350" b="1">
-                <a:solidFill>
-                  <a:srgbClr val="13294B"/>
-                </a:solidFill>
-                <a:latin typeface="맑은 고딕"/>
-                <a:ea typeface="맑은 고딕"/>
-                <a:cs typeface="맑은 고딕"/>
-              </a:rPr>
-              <a:t>작업지시 등록</a:t>
-            </a:r>
-          </a:p>
-        </p:txBody>
-      </p:sp>
-      <p:sp>
-        <p:nvSpPr>
-          <p:cNvPr id="15" name="TextBox 14"/>
-          <p:cNvSpPr txBox="1"/>
-          <p:nvPr/>
-        </p:nvSpPr>
-        <p:spPr>
-          <a:xfrm>
-            <a:off x="9717799" y="4081177"/>
-            <a:ext cx="1090949" cy="546353"/>
-          </a:xfrm>
-          <a:prstGeom prst="rect">
-            <a:avLst/>
-          </a:prstGeom>
-          <a:noFill/>
-        </p:spPr>
-        <p:txBody>
-          <a:bodyPr wrap="square" anchor="t"/>
-          <a:lstStyle/>
-          <a:p>
-            <a:pPr algn="ctr" eaLnBrk="0">
-              <a:lnSpc>
-                <a:spcPct val="110000"/>
-              </a:lnSpc>
-              <a:spcAft>
-                <a:spcPts val="100"/>
-              </a:spcAft>
-            </a:pPr>
-            <a:r>
-              <a:rPr sz="1350" b="1">
-                <a:solidFill>
-                  <a:srgbClr val="13294B"/>
-                </a:solidFill>
-                <a:latin typeface="맑은 고딕"/>
-                <a:ea typeface="맑은 고딕"/>
-                <a:cs typeface="맑은 고딕"/>
-              </a:rPr>
-              <a:t>결과 보고: 정상</a:t>
-            </a:r>
-          </a:p>
-        </p:txBody>
-      </p:sp>
-      <p:sp>
-        <p:nvSpPr>
-          <p:cNvPr id="16" name="TextBox 15"/>
-          <p:cNvSpPr txBox="1"/>
-          <p:nvPr/>
-        </p:nvSpPr>
-        <p:spPr>
-          <a:xfrm>
-            <a:off x="7284982" y="4941573"/>
-            <a:ext cx="1090949" cy="546353"/>
-          </a:xfrm>
-          <a:prstGeom prst="rect">
-            <a:avLst/>
-          </a:prstGeom>
-          <a:noFill/>
-        </p:spPr>
-        <p:txBody>
-          <a:bodyPr wrap="square" anchor="t"/>
-          <a:lstStyle/>
-          <a:p>
-            <a:pPr algn="ctr" eaLnBrk="0">
-              <a:lnSpc>
-                <a:spcPct val="110000"/>
-              </a:lnSpc>
-              <a:spcAft>
-                <a:spcPts val="100"/>
-              </a:spcAft>
-            </a:pPr>
-            <a:r>
-              <a:rPr sz="1350" b="1">
-                <a:solidFill>
-                  <a:srgbClr val="13294B"/>
-                </a:solidFill>
-                <a:latin typeface="맑은 고딕"/>
-                <a:ea typeface="맑은 고딕"/>
-                <a:cs typeface="맑은 고딕"/>
-              </a:rPr>
-              <a:t>결과 보고: 미달</a:t>
-            </a:r>
-          </a:p>
-        </p:txBody>
-      </p:sp>
-      <p:sp>
-        <p:nvSpPr>
-          <p:cNvPr id="17" name="TextBox 16"/>
-          <p:cNvSpPr txBox="1"/>
-          <p:nvPr/>
-        </p:nvSpPr>
-        <p:spPr>
-          <a:xfrm>
-            <a:off x="5474006" y="4941573"/>
-            <a:ext cx="1090949" cy="546353"/>
-          </a:xfrm>
-          <a:prstGeom prst="rect">
-            <a:avLst/>
-          </a:prstGeom>
-          <a:noFill/>
-        </p:spPr>
-        <p:txBody>
-          <a:bodyPr wrap="square" anchor="t"/>
-          <a:lstStyle/>
-          <a:p>
-            <a:pPr algn="ctr" eaLnBrk="0">
-              <a:lnSpc>
-                <a:spcPct val="110000"/>
-              </a:lnSpc>
-              <a:spcAft>
-                <a:spcPts val="100"/>
-              </a:spcAft>
-            </a:pPr>
-            <a:r>
-              <a:rPr sz="1350" b="1">
-                <a:solidFill>
-                  <a:srgbClr val="13294B"/>
-                </a:solidFill>
-                <a:latin typeface="맑은 고딕"/>
-                <a:ea typeface="맑은 고딕"/>
-                <a:cs typeface="맑은 고딕"/>
-              </a:rPr>
-              <a:t>결과 보고: 거절</a:t>
-            </a:r>
-          </a:p>
-        </p:txBody>
-      </p:sp>
-      <p:sp>
-        <p:nvSpPr>
-          <p:cNvPr id="18" name="TextBox 17"/>
-          <p:cNvSpPr txBox="1"/>
-          <p:nvPr/>
-        </p:nvSpPr>
-        <p:spPr>
-          <a:xfrm>
-            <a:off x="3968496" y="4941573"/>
-            <a:ext cx="981854" cy="546353"/>
-          </a:xfrm>
-          <a:prstGeom prst="rect">
-            <a:avLst/>
-          </a:prstGeom>
-          <a:noFill/>
-        </p:spPr>
-        <p:txBody>
-          <a:bodyPr wrap="square" anchor="t"/>
-          <a:lstStyle/>
-          <a:p>
-            <a:pPr algn="ctr" eaLnBrk="0">
-              <a:lnSpc>
-                <a:spcPct val="110000"/>
-              </a:lnSpc>
-              <a:spcAft>
-                <a:spcPts val="100"/>
-              </a:spcAft>
-            </a:pPr>
-            <a:r>
-              <a:rPr sz="1350" b="1">
-                <a:solidFill>
-                  <a:srgbClr val="13294B"/>
-                </a:solidFill>
-                <a:latin typeface="맑은 고딕"/>
-                <a:ea typeface="맑은 고딕"/>
-                <a:cs typeface="맑은 고딕"/>
-              </a:rPr>
-              <a:t>승인 지연 알림</a:t>
+              <a:t>에이전트</a:t>
             </a:r>
           </a:p>
         </p:txBody>
@@ -21582,7 +21582,7 @@
                 <a:ea typeface="맑은 고딕"/>
                 <a:cs typeface="맑은 고딕"/>
               </a:rPr>
-              <a:t>본문에서 정의한 여섯 용어의 정식 명칭과 뜻을 한곳에 모은다.</a:t>
+              <a:t>본문에서 정의한 아홉 용어의 정식 명칭과 뜻을 한곳에 모은다.</a:t>
             </a:r>
           </a:p>
         </p:txBody>
@@ -21663,7 +21663,7 @@
         </p:nvSpPr>
         <p:spPr>
           <a:xfrm>
-            <a:off x="548640" y="1627632"/>
+            <a:off x="548640" y="1627631"/>
             <a:ext cx="11094415" cy="347472"/>
           </a:xfrm>
           <a:prstGeom prst="roundRect">
@@ -21694,7 +21694,7 @@
         </p:nvSpPr>
         <p:spPr>
           <a:xfrm>
-            <a:off x="685800" y="1627632"/>
+            <a:off x="685800" y="1627631"/>
             <a:ext cx="2514600" cy="347472"/>
           </a:xfrm>
           <a:prstGeom prst="rect">
@@ -21733,7 +21733,7 @@
         </p:nvSpPr>
         <p:spPr>
           <a:xfrm>
-            <a:off x="3200400" y="1627632"/>
+            <a:off x="3200400" y="1627631"/>
             <a:ext cx="8442655" cy="347472"/>
           </a:xfrm>
           <a:prstGeom prst="rect">
@@ -21773,7 +21773,7 @@
         <p:spPr>
           <a:xfrm>
             <a:off x="548640" y="2061972"/>
-            <a:ext cx="11094415" cy="656843"/>
+            <a:ext cx="11094415" cy="416560"/>
           </a:xfrm>
           <a:prstGeom prst="roundRect">
             <a:avLst>
@@ -21803,8 +21803,8 @@
         </p:nvSpPr>
         <p:spPr>
           <a:xfrm>
-            <a:off x="685800" y="2029968"/>
-            <a:ext cx="2514600" cy="720851"/>
+            <a:off x="685800" y="2029967"/>
+            <a:ext cx="2514600" cy="480568"/>
           </a:xfrm>
           <a:prstGeom prst="rect">
             <a:avLst/>
@@ -21821,7 +21821,7 @@
               </a:lnSpc>
             </a:pPr>
             <a:r>
-              <a:rPr sz="1600" b="1">
+              <a:rPr sz="1450" b="1">
                 <a:solidFill>
                   <a:srgbClr val="13294B"/>
                 </a:solidFill>
@@ -21842,8 +21842,8 @@
         </p:nvSpPr>
         <p:spPr>
           <a:xfrm>
-            <a:off x="3200400" y="2029968"/>
-            <a:ext cx="8351215" cy="720851"/>
+            <a:off x="3200400" y="2029967"/>
+            <a:ext cx="8351215" cy="480568"/>
           </a:xfrm>
           <a:prstGeom prst="rect">
             <a:avLst/>
@@ -21860,7 +21860,7 @@
               </a:lnSpc>
             </a:pPr>
             <a:r>
-              <a:rPr sz="1400" b="0">
+              <a:rPr sz="1250" b="0">
                 <a:solidFill>
                   <a:srgbClr val="1F2A3A"/>
                 </a:solidFill>
@@ -21878,7 +21878,7 @@
               </a:lnSpc>
             </a:pPr>
             <a:r>
-              <a:rPr sz="1400" b="0">
+              <a:rPr sz="1250" b="0">
                 <a:solidFill>
                   <a:srgbClr val="1F2A3A"/>
                 </a:solidFill>
@@ -21899,8 +21899,8 @@
         </p:nvSpPr>
         <p:spPr>
           <a:xfrm>
-            <a:off x="548640" y="2782824"/>
-            <a:ext cx="11094415" cy="656843"/>
+            <a:off x="548640" y="2542540"/>
+            <a:ext cx="11094415" cy="416560"/>
           </a:xfrm>
           <a:prstGeom prst="roundRect">
             <a:avLst>
@@ -21930,8 +21930,8 @@
         </p:nvSpPr>
         <p:spPr>
           <a:xfrm>
-            <a:off x="685800" y="2750820"/>
-            <a:ext cx="2514600" cy="720851"/>
+            <a:off x="685800" y="2510536"/>
+            <a:ext cx="2514600" cy="480568"/>
           </a:xfrm>
           <a:prstGeom prst="rect">
             <a:avLst/>
@@ -21948,7 +21948,7 @@
               </a:lnSpc>
             </a:pPr>
             <a:r>
-              <a:rPr sz="1600" b="1">
+              <a:rPr sz="1450" b="1">
                 <a:solidFill>
                   <a:srgbClr val="13294B"/>
                 </a:solidFill>
@@ -21969,8 +21969,8 @@
         </p:nvSpPr>
         <p:spPr>
           <a:xfrm>
-            <a:off x="3200400" y="2750820"/>
-            <a:ext cx="8351215" cy="720851"/>
+            <a:off x="3200400" y="2510536"/>
+            <a:ext cx="8351215" cy="480568"/>
           </a:xfrm>
           <a:prstGeom prst="rect">
             <a:avLst/>
@@ -21987,7 +21987,7 @@
               </a:lnSpc>
             </a:pPr>
             <a:r>
-              <a:rPr sz="1400" b="0">
+              <a:rPr sz="1250" b="0">
                 <a:solidFill>
                   <a:srgbClr val="1F2A3A"/>
                 </a:solidFill>
@@ -22005,7 +22005,7 @@
               </a:lnSpc>
             </a:pPr>
             <a:r>
-              <a:rPr sz="1400" b="0">
+              <a:rPr sz="1250" b="0">
                 <a:solidFill>
                   <a:srgbClr val="1F2A3A"/>
                 </a:solidFill>
@@ -22026,8 +22026,8 @@
         </p:nvSpPr>
         <p:spPr>
           <a:xfrm>
-            <a:off x="548640" y="3503676"/>
-            <a:ext cx="11094415" cy="656843"/>
+            <a:off x="548640" y="3023108"/>
+            <a:ext cx="11094415" cy="416560"/>
           </a:xfrm>
           <a:prstGeom prst="roundRect">
             <a:avLst>
@@ -22057,8 +22057,8 @@
         </p:nvSpPr>
         <p:spPr>
           <a:xfrm>
-            <a:off x="685800" y="3471672"/>
-            <a:ext cx="2514600" cy="720851"/>
+            <a:off x="685800" y="2991104"/>
+            <a:ext cx="2514600" cy="480568"/>
           </a:xfrm>
           <a:prstGeom prst="rect">
             <a:avLst/>
@@ -22075,7 +22075,7 @@
               </a:lnSpc>
             </a:pPr>
             <a:r>
-              <a:rPr sz="1600" b="1">
+              <a:rPr sz="1450" b="1">
                 <a:solidFill>
                   <a:srgbClr val="13294B"/>
                 </a:solidFill>
@@ -22083,7 +22083,7 @@
                 <a:ea typeface="맑은 고딕"/>
                 <a:cs typeface="맑은 고딕"/>
               </a:rPr>
-              <a:t>경계 이벤트</a:t>
+              <a:t>사용자 작업 · 서비스 작업</a:t>
             </a:r>
           </a:p>
         </p:txBody>
@@ -22096,8 +22096,8 @@
         </p:nvSpPr>
         <p:spPr>
           <a:xfrm>
-            <a:off x="3200400" y="3471672"/>
-            <a:ext cx="8351215" cy="720851"/>
+            <a:off x="3200400" y="2991104"/>
+            <a:ext cx="8351215" cy="480568"/>
           </a:xfrm>
           <a:prstGeom prst="rect">
             <a:avLst/>
@@ -22114,7 +22114,7 @@
               </a:lnSpc>
             </a:pPr>
             <a:r>
-              <a:rPr sz="1400" b="0">
+              <a:rPr sz="1250" b="0">
                 <a:solidFill>
                   <a:srgbClr val="1F2A3A"/>
                 </a:solidFill>
@@ -22122,7 +22122,7 @@
                 <a:ea typeface="맑은 고딕"/>
                 <a:cs typeface="맑은 고딕"/>
               </a:rPr>
-              <a:t>Boundary Event</a:t>
+              <a:t>User Task · Service Task</a:t>
             </a:r>
           </a:p>
           <a:p>
@@ -22132,7 +22132,7 @@
               </a:lnSpc>
             </a:pPr>
             <a:r>
-              <a:rPr sz="1400" b="0">
+              <a:rPr sz="1250" b="0">
                 <a:solidFill>
                   <a:srgbClr val="1F2A3A"/>
                 </a:solidFill>
@@ -22140,7 +22140,7 @@
                 <a:ea typeface="맑은 고딕"/>
                 <a:cs typeface="맑은 고딕"/>
               </a:rPr>
-              <a:t>작업 테두리에 붙어 그 작업이 진행 중일 때 생기는 일에 반응하는 이벤트</a:t>
+              <a:t>사람이 수행하는 작업, 그리고 엔진이 시스템을 호출해 수행하는 작업</a:t>
             </a:r>
           </a:p>
         </p:txBody>
@@ -22153,8 +22153,8 @@
         </p:nvSpPr>
         <p:spPr>
           <a:xfrm>
-            <a:off x="548640" y="4224528"/>
-            <a:ext cx="11094415" cy="656843"/>
+            <a:off x="548640" y="3503676"/>
+            <a:ext cx="11094415" cy="416560"/>
           </a:xfrm>
           <a:prstGeom prst="roundRect">
             <a:avLst>
@@ -22184,8 +22184,8 @@
         </p:nvSpPr>
         <p:spPr>
           <a:xfrm>
-            <a:off x="685800" y="4192524"/>
-            <a:ext cx="2514600" cy="720851"/>
+            <a:off x="685800" y="3471672"/>
+            <a:ext cx="2514600" cy="480568"/>
           </a:xfrm>
           <a:prstGeom prst="rect">
             <a:avLst/>
@@ -22202,7 +22202,7 @@
               </a:lnSpc>
             </a:pPr>
             <a:r>
-              <a:rPr sz="1600" b="1">
+              <a:rPr sz="1350" b="1">
                 <a:solidFill>
                   <a:srgbClr val="13294B"/>
                 </a:solidFill>
@@ -22210,7 +22210,7 @@
                 <a:ea typeface="맑은 고딕"/>
                 <a:cs typeface="맑은 고딕"/>
               </a:rPr>
-              <a:t>프로세스 엔진</a:t>
+              <a:t>배타 게이트웨이 · 기본 흐름</a:t>
             </a:r>
           </a:p>
         </p:txBody>
@@ -22223,8 +22223,8 @@
         </p:nvSpPr>
         <p:spPr>
           <a:xfrm>
-            <a:off x="3200400" y="4192524"/>
-            <a:ext cx="8351215" cy="720851"/>
+            <a:off x="3200400" y="3471672"/>
+            <a:ext cx="8351215" cy="480568"/>
           </a:xfrm>
           <a:prstGeom prst="rect">
             <a:avLst/>
@@ -22241,7 +22241,7 @@
               </a:lnSpc>
             </a:pPr>
             <a:r>
-              <a:rPr sz="1400" b="0">
+              <a:rPr sz="1250" b="0">
                 <a:solidFill>
                   <a:srgbClr val="1F2A3A"/>
                 </a:solidFill>
@@ -22249,7 +22249,7 @@
                 <a:ea typeface="맑은 고딕"/>
                 <a:cs typeface="맑은 고딕"/>
               </a:rPr>
-              <a:t>Process Engine</a:t>
+              <a:t>Exclusive Gateway · Default Flow</a:t>
             </a:r>
           </a:p>
           <a:p>
@@ -22259,7 +22259,7 @@
               </a:lnSpc>
             </a:pPr>
             <a:r>
-              <a:rPr sz="1400" b="0">
+              <a:rPr sz="1250" b="0">
                 <a:solidFill>
                   <a:srgbClr val="1F2A3A"/>
                 </a:solidFill>
@@ -22267,7 +22267,7 @@
                 <a:ea typeface="맑은 고딕"/>
                 <a:cs typeface="맑은 고딕"/>
               </a:rPr>
-              <a:t>프로세스 정의를 읽어 작업을 차례로 열고 결과를 넘기는 소프트웨어</a:t>
+              <a:t>조건이 참인 한 갈래로만 보내는 갈림, 그리고 어느 조건도 맞지 않을 때 가는 선</a:t>
             </a:r>
           </a:p>
         </p:txBody>
@@ -22280,8 +22280,8 @@
         </p:nvSpPr>
         <p:spPr>
           <a:xfrm>
-            <a:off x="548640" y="4945380"/>
-            <a:ext cx="11094415" cy="656843"/>
+            <a:off x="548640" y="3984244"/>
+            <a:ext cx="11094415" cy="416560"/>
           </a:xfrm>
           <a:prstGeom prst="roundRect">
             <a:avLst>
@@ -22311,8 +22311,8 @@
         </p:nvSpPr>
         <p:spPr>
           <a:xfrm>
-            <a:off x="685800" y="4913376"/>
-            <a:ext cx="2514600" cy="720851"/>
+            <a:off x="685800" y="3952239"/>
+            <a:ext cx="2514600" cy="480568"/>
           </a:xfrm>
           <a:prstGeom prst="rect">
             <a:avLst/>
@@ -22329,7 +22329,7 @@
               </a:lnSpc>
             </a:pPr>
             <a:r>
-              <a:rPr sz="1600" b="1">
+              <a:rPr sz="1450" b="1">
                 <a:solidFill>
                   <a:srgbClr val="13294B"/>
                 </a:solidFill>
@@ -22337,7 +22337,7 @@
                 <a:ea typeface="맑은 고딕"/>
                 <a:cs typeface="맑은 고딕"/>
               </a:rPr>
-              <a:t>오케스트레이션</a:t>
+              <a:t>풀과 레인</a:t>
             </a:r>
           </a:p>
         </p:txBody>
@@ -22350,8 +22350,8 @@
         </p:nvSpPr>
         <p:spPr>
           <a:xfrm>
-            <a:off x="3200400" y="4913376"/>
-            <a:ext cx="8351215" cy="720851"/>
+            <a:off x="3200400" y="3952239"/>
+            <a:ext cx="8351215" cy="480568"/>
           </a:xfrm>
           <a:prstGeom prst="rect">
             <a:avLst/>
@@ -22368,7 +22368,7 @@
               </a:lnSpc>
             </a:pPr>
             <a:r>
-              <a:rPr sz="1400" b="0">
+              <a:rPr sz="1250" b="0">
                 <a:solidFill>
                   <a:srgbClr val="1F2A3A"/>
                 </a:solidFill>
@@ -22376,7 +22376,7 @@
                 <a:ea typeface="맑은 고딕"/>
                 <a:cs typeface="맑은 고딕"/>
               </a:rPr>
-              <a:t>Orchestration</a:t>
+              <a:t>Pool · Lane</a:t>
             </a:r>
           </a:p>
           <a:p>
@@ -22386,7 +22386,7 @@
               </a:lnSpc>
             </a:pPr>
             <a:r>
-              <a:rPr sz="1400" b="0">
+              <a:rPr sz="1250" b="0">
                 <a:solidFill>
                   <a:srgbClr val="1F2A3A"/>
                 </a:solidFill>
@@ -22394,7 +22394,7 @@
                 <a:ea typeface="맑은 고딕"/>
                 <a:cs typeface="맑은 고딕"/>
               </a:rPr>
-              <a:t>중앙의 조정자가 작업의 순서와 호출을 이끄는 방식</a:t>
+              <a:t>참여자 하나의 영역, 그리고 그 안에서 활동을 담당 역할별로 묶는 칸</a:t>
             </a:r>
           </a:p>
         </p:txBody>
@@ -22407,8 +22407,8 @@
         </p:nvSpPr>
         <p:spPr>
           <a:xfrm>
-            <a:off x="548640" y="5666232"/>
-            <a:ext cx="11094415" cy="656843"/>
+            <a:off x="548640" y="4464811"/>
+            <a:ext cx="11094415" cy="416560"/>
           </a:xfrm>
           <a:prstGeom prst="roundRect">
             <a:avLst>
@@ -22438,8 +22438,8 @@
         </p:nvSpPr>
         <p:spPr>
           <a:xfrm>
-            <a:off x="685800" y="5634228"/>
-            <a:ext cx="2514600" cy="720851"/>
+            <a:off x="685800" y="4432807"/>
+            <a:ext cx="2514600" cy="480568"/>
           </a:xfrm>
           <a:prstGeom prst="rect">
             <a:avLst/>
@@ -22456,7 +22456,7 @@
               </a:lnSpc>
             </a:pPr>
             <a:r>
-              <a:rPr sz="1600" b="1">
+              <a:rPr sz="1450" b="1">
                 <a:solidFill>
                   <a:srgbClr val="13294B"/>
                 </a:solidFill>
@@ -22464,6 +22464,387 @@
                 <a:ea typeface="맑은 고딕"/>
                 <a:cs typeface="맑은 고딕"/>
               </a:rPr>
+              <a:t>경계 이벤트</a:t>
+            </a:r>
+          </a:p>
+        </p:txBody>
+      </p:sp>
+      <p:sp>
+        <p:nvSpPr>
+          <p:cNvPr id="26" name="TextBox 25"/>
+          <p:cNvSpPr txBox="1"/>
+          <p:nvPr/>
+        </p:nvSpPr>
+        <p:spPr>
+          <a:xfrm>
+            <a:off x="3200400" y="4432807"/>
+            <a:ext cx="8351215" cy="480568"/>
+          </a:xfrm>
+          <a:prstGeom prst="rect">
+            <a:avLst/>
+          </a:prstGeom>
+          <a:noFill/>
+        </p:spPr>
+        <p:txBody>
+          <a:bodyPr wrap="square" anchor="ctr"/>
+          <a:lstStyle/>
+          <a:p>
+            <a:pPr algn="l" eaLnBrk="0">
+              <a:lnSpc>
+                <a:spcPct val="110000"/>
+              </a:lnSpc>
+            </a:pPr>
+            <a:r>
+              <a:rPr sz="1250" b="0">
+                <a:solidFill>
+                  <a:srgbClr val="1F2A3A"/>
+                </a:solidFill>
+                <a:latin typeface="맑은 고딕"/>
+                <a:ea typeface="맑은 고딕"/>
+                <a:cs typeface="맑은 고딕"/>
+              </a:rPr>
+              <a:t>Boundary Event</a:t>
+            </a:r>
+          </a:p>
+          <a:p>
+            <a:pPr algn="l" eaLnBrk="0">
+              <a:lnSpc>
+                <a:spcPct val="110000"/>
+              </a:lnSpc>
+            </a:pPr>
+            <a:r>
+              <a:rPr sz="1250" b="0">
+                <a:solidFill>
+                  <a:srgbClr val="1F2A3A"/>
+                </a:solidFill>
+                <a:latin typeface="맑은 고딕"/>
+                <a:ea typeface="맑은 고딕"/>
+                <a:cs typeface="맑은 고딕"/>
+              </a:rPr>
+              <a:t>작업 테두리에 붙어 그 작업이 진행 중일 때 생기는 일에 반응하는 이벤트</a:t>
+            </a:r>
+          </a:p>
+        </p:txBody>
+      </p:sp>
+      <p:sp>
+        <p:nvSpPr>
+          <p:cNvPr id="27" name="Rounded Rectangle 26"/>
+          <p:cNvSpPr/>
+          <p:nvPr/>
+        </p:nvSpPr>
+        <p:spPr>
+          <a:xfrm>
+            <a:off x="548640" y="4945380"/>
+            <a:ext cx="11094415" cy="416560"/>
+          </a:xfrm>
+          <a:prstGeom prst="roundRect">
+            <a:avLst>
+              <a:gd name="adj" fmla="val 8000"/>
+            </a:avLst>
+          </a:prstGeom>
+          <a:solidFill>
+            <a:srgbClr val="F3F6F9"/>
+          </a:solidFill>
+          <a:ln>
+            <a:noFill/>
+          </a:ln>
+        </p:spPr>
+        <p:txBody>
+          <a:bodyPr rtlCol="0" anchor="ctr"/>
+          <a:lstStyle/>
+          <a:p>
+            <a:pPr algn="ctr"/>
+          </a:p>
+        </p:txBody>
+      </p:sp>
+      <p:sp>
+        <p:nvSpPr>
+          <p:cNvPr id="28" name="TextBox 27"/>
+          <p:cNvSpPr txBox="1"/>
+          <p:nvPr/>
+        </p:nvSpPr>
+        <p:spPr>
+          <a:xfrm>
+            <a:off x="685800" y="4913376"/>
+            <a:ext cx="2514600" cy="480568"/>
+          </a:xfrm>
+          <a:prstGeom prst="rect">
+            <a:avLst/>
+          </a:prstGeom>
+          <a:noFill/>
+        </p:spPr>
+        <p:txBody>
+          <a:bodyPr wrap="square" anchor="ctr"/>
+          <a:lstStyle/>
+          <a:p>
+            <a:pPr algn="l" eaLnBrk="0">
+              <a:lnSpc>
+                <a:spcPct val="110000"/>
+              </a:lnSpc>
+            </a:pPr>
+            <a:r>
+              <a:rPr sz="1450" b="1">
+                <a:solidFill>
+                  <a:srgbClr val="13294B"/>
+                </a:solidFill>
+                <a:latin typeface="맑은 고딕"/>
+                <a:ea typeface="맑은 고딕"/>
+                <a:cs typeface="맑은 고딕"/>
+              </a:rPr>
+              <a:t>프로세스 엔진</a:t>
+            </a:r>
+          </a:p>
+        </p:txBody>
+      </p:sp>
+      <p:sp>
+        <p:nvSpPr>
+          <p:cNvPr id="29" name="TextBox 28"/>
+          <p:cNvSpPr txBox="1"/>
+          <p:nvPr/>
+        </p:nvSpPr>
+        <p:spPr>
+          <a:xfrm>
+            <a:off x="3200400" y="4913376"/>
+            <a:ext cx="8351215" cy="480568"/>
+          </a:xfrm>
+          <a:prstGeom prst="rect">
+            <a:avLst/>
+          </a:prstGeom>
+          <a:noFill/>
+        </p:spPr>
+        <p:txBody>
+          <a:bodyPr wrap="square" anchor="ctr"/>
+          <a:lstStyle/>
+          <a:p>
+            <a:pPr algn="l" eaLnBrk="0">
+              <a:lnSpc>
+                <a:spcPct val="110000"/>
+              </a:lnSpc>
+            </a:pPr>
+            <a:r>
+              <a:rPr sz="1250" b="0">
+                <a:solidFill>
+                  <a:srgbClr val="1F2A3A"/>
+                </a:solidFill>
+                <a:latin typeface="맑은 고딕"/>
+                <a:ea typeface="맑은 고딕"/>
+                <a:cs typeface="맑은 고딕"/>
+              </a:rPr>
+              <a:t>Process Engine</a:t>
+            </a:r>
+          </a:p>
+          <a:p>
+            <a:pPr algn="l" eaLnBrk="0">
+              <a:lnSpc>
+                <a:spcPct val="110000"/>
+              </a:lnSpc>
+            </a:pPr>
+            <a:r>
+              <a:rPr sz="1250" b="0">
+                <a:solidFill>
+                  <a:srgbClr val="1F2A3A"/>
+                </a:solidFill>
+                <a:latin typeface="맑은 고딕"/>
+                <a:ea typeface="맑은 고딕"/>
+                <a:cs typeface="맑은 고딕"/>
+              </a:rPr>
+              <a:t>프로세스 정의를 읽어 작업을 차례로 열고 결과를 넘기는 소프트웨어</a:t>
+            </a:r>
+          </a:p>
+        </p:txBody>
+      </p:sp>
+      <p:sp>
+        <p:nvSpPr>
+          <p:cNvPr id="30" name="Rounded Rectangle 29"/>
+          <p:cNvSpPr/>
+          <p:nvPr/>
+        </p:nvSpPr>
+        <p:spPr>
+          <a:xfrm>
+            <a:off x="548640" y="5425948"/>
+            <a:ext cx="11094415" cy="416560"/>
+          </a:xfrm>
+          <a:prstGeom prst="roundRect">
+            <a:avLst>
+              <a:gd name="adj" fmla="val 8000"/>
+            </a:avLst>
+          </a:prstGeom>
+          <a:solidFill>
+            <a:srgbClr val="F3F6F9"/>
+          </a:solidFill>
+          <a:ln>
+            <a:noFill/>
+          </a:ln>
+        </p:spPr>
+        <p:txBody>
+          <a:bodyPr rtlCol="0" anchor="ctr"/>
+          <a:lstStyle/>
+          <a:p>
+            <a:pPr algn="ctr"/>
+          </a:p>
+        </p:txBody>
+      </p:sp>
+      <p:sp>
+        <p:nvSpPr>
+          <p:cNvPr id="31" name="TextBox 30"/>
+          <p:cNvSpPr txBox="1"/>
+          <p:nvPr/>
+        </p:nvSpPr>
+        <p:spPr>
+          <a:xfrm>
+            <a:off x="685800" y="5393944"/>
+            <a:ext cx="2514600" cy="480568"/>
+          </a:xfrm>
+          <a:prstGeom prst="rect">
+            <a:avLst/>
+          </a:prstGeom>
+          <a:noFill/>
+        </p:spPr>
+        <p:txBody>
+          <a:bodyPr wrap="square" anchor="ctr"/>
+          <a:lstStyle/>
+          <a:p>
+            <a:pPr algn="l" eaLnBrk="0">
+              <a:lnSpc>
+                <a:spcPct val="110000"/>
+              </a:lnSpc>
+            </a:pPr>
+            <a:r>
+              <a:rPr sz="1450" b="1">
+                <a:solidFill>
+                  <a:srgbClr val="13294B"/>
+                </a:solidFill>
+                <a:latin typeface="맑은 고딕"/>
+                <a:ea typeface="맑은 고딕"/>
+                <a:cs typeface="맑은 고딕"/>
+              </a:rPr>
+              <a:t>오케스트레이션</a:t>
+            </a:r>
+          </a:p>
+        </p:txBody>
+      </p:sp>
+      <p:sp>
+        <p:nvSpPr>
+          <p:cNvPr id="32" name="TextBox 31"/>
+          <p:cNvSpPr txBox="1"/>
+          <p:nvPr/>
+        </p:nvSpPr>
+        <p:spPr>
+          <a:xfrm>
+            <a:off x="3200400" y="5393944"/>
+            <a:ext cx="8351215" cy="480568"/>
+          </a:xfrm>
+          <a:prstGeom prst="rect">
+            <a:avLst/>
+          </a:prstGeom>
+          <a:noFill/>
+        </p:spPr>
+        <p:txBody>
+          <a:bodyPr wrap="square" anchor="ctr"/>
+          <a:lstStyle/>
+          <a:p>
+            <a:pPr algn="l" eaLnBrk="0">
+              <a:lnSpc>
+                <a:spcPct val="110000"/>
+              </a:lnSpc>
+            </a:pPr>
+            <a:r>
+              <a:rPr sz="1250" b="0">
+                <a:solidFill>
+                  <a:srgbClr val="1F2A3A"/>
+                </a:solidFill>
+                <a:latin typeface="맑은 고딕"/>
+                <a:ea typeface="맑은 고딕"/>
+                <a:cs typeface="맑은 고딕"/>
+              </a:rPr>
+              <a:t>Orchestration</a:t>
+            </a:r>
+          </a:p>
+          <a:p>
+            <a:pPr algn="l" eaLnBrk="0">
+              <a:lnSpc>
+                <a:spcPct val="110000"/>
+              </a:lnSpc>
+            </a:pPr>
+            <a:r>
+              <a:rPr sz="1250" b="0">
+                <a:solidFill>
+                  <a:srgbClr val="1F2A3A"/>
+                </a:solidFill>
+                <a:latin typeface="맑은 고딕"/>
+                <a:ea typeface="맑은 고딕"/>
+                <a:cs typeface="맑은 고딕"/>
+              </a:rPr>
+              <a:t>중앙의 조정자가 작업의 순서와 호출을 이끄는 방식</a:t>
+            </a:r>
+          </a:p>
+        </p:txBody>
+      </p:sp>
+      <p:sp>
+        <p:nvSpPr>
+          <p:cNvPr id="33" name="Rounded Rectangle 32"/>
+          <p:cNvSpPr/>
+          <p:nvPr/>
+        </p:nvSpPr>
+        <p:spPr>
+          <a:xfrm>
+            <a:off x="548640" y="5906516"/>
+            <a:ext cx="11094415" cy="416560"/>
+          </a:xfrm>
+          <a:prstGeom prst="roundRect">
+            <a:avLst>
+              <a:gd name="adj" fmla="val 8000"/>
+            </a:avLst>
+          </a:prstGeom>
+          <a:solidFill>
+            <a:srgbClr val="F3F6F9"/>
+          </a:solidFill>
+          <a:ln>
+            <a:noFill/>
+          </a:ln>
+        </p:spPr>
+        <p:txBody>
+          <a:bodyPr rtlCol="0" anchor="ctr"/>
+          <a:lstStyle/>
+          <a:p>
+            <a:pPr algn="ctr"/>
+          </a:p>
+        </p:txBody>
+      </p:sp>
+      <p:sp>
+        <p:nvSpPr>
+          <p:cNvPr id="34" name="TextBox 33"/>
+          <p:cNvSpPr txBox="1"/>
+          <p:nvPr/>
+        </p:nvSpPr>
+        <p:spPr>
+          <a:xfrm>
+            <a:off x="685800" y="5874512"/>
+            <a:ext cx="2514600" cy="480568"/>
+          </a:xfrm>
+          <a:prstGeom prst="rect">
+            <a:avLst/>
+          </a:prstGeom>
+          <a:noFill/>
+        </p:spPr>
+        <p:txBody>
+          <a:bodyPr wrap="square" anchor="ctr"/>
+          <a:lstStyle/>
+          <a:p>
+            <a:pPr algn="l" eaLnBrk="0">
+              <a:lnSpc>
+                <a:spcPct val="110000"/>
+              </a:lnSpc>
+            </a:pPr>
+            <a:r>
+              <a:rPr sz="1450" b="1">
+                <a:solidFill>
+                  <a:srgbClr val="13294B"/>
+                </a:solidFill>
+                <a:latin typeface="맑은 고딕"/>
+                <a:ea typeface="맑은 고딕"/>
+                <a:cs typeface="맑은 고딕"/>
+              </a:rPr>
               <a:t>토큰</a:t>
             </a:r>
           </a:p>
@@ -22471,14 +22852,14 @@
       </p:sp>
       <p:sp>
         <p:nvSpPr>
-          <p:cNvPr id="26" name="TextBox 25"/>
-          <p:cNvSpPr txBox="1"/>
-          <p:nvPr/>
-        </p:nvSpPr>
-        <p:spPr>
-          <a:xfrm>
-            <a:off x="3200400" y="5634228"/>
-            <a:ext cx="8351215" cy="720851"/>
+          <p:cNvPr id="35" name="TextBox 34"/>
+          <p:cNvSpPr txBox="1"/>
+          <p:nvPr/>
+        </p:nvSpPr>
+        <p:spPr>
+          <a:xfrm>
+            <a:off x="3200400" y="5874512"/>
+            <a:ext cx="8351215" cy="480568"/>
           </a:xfrm>
           <a:prstGeom prst="rect">
             <a:avLst/>
@@ -22495,7 +22876,7 @@
               </a:lnSpc>
             </a:pPr>
             <a:r>
-              <a:rPr sz="1400" b="0">
+              <a:rPr sz="1250" b="0">
                 <a:solidFill>
                   <a:srgbClr val="1F2A3A"/>
                 </a:solidFill>
@@ -22513,7 +22894,7 @@
               </a:lnSpc>
             </a:pPr>
             <a:r>
-              <a:rPr sz="1400" b="0">
+              <a:rPr sz="1250" b="0">
                 <a:solidFill>
                   <a:srgbClr val="1F2A3A"/>
                 </a:solidFill>
@@ -27111,7 +27492,7 @@
       </p:sp>
       <p:pic>
         <p:nvPicPr>
-          <p:cNvPr id="6" name="삽화:남은일_추천뒤.svg" descr="illust_8692687707505317693_1793113376.png"/>
+          <p:cNvPr id="6" name="삽화:남은일_추천뒤.svg" descr="illust_130947182675913921_1793113376.png"/>
           <p:cNvPicPr>
             <a:picLocks noChangeAspect="1"/>
           </p:cNvPicPr>
@@ -29005,7 +29386,7 @@
       </p:sp>
       <p:pic>
         <p:nvPicPr>
-          <p:cNvPr id="6" name="삽화:요소묶음.svg" descr="illust_5296984646125972022_1793113376.png"/>
+          <p:cNvPr id="6" name="삽화:요소묶음.svg" descr="illust_1281288356049071511_1793113376.png"/>
           <p:cNvPicPr>
             <a:picLocks noChangeAspect="1"/>
           </p:cNvPicPr>
@@ -29642,7 +30023,7 @@
       </p:sp>
       <p:pic>
         <p:nvPicPr>
-          <p:cNvPr id="6" name="삽화:흐름_전체.svg" descr="illust_8087771329663764057_1793113376.png"/>
+          <p:cNvPr id="6" name="삽화:흐름_전체.svg" descr="illust_7671792913176514925_1793113376.png"/>
           <p:cNvPicPr>
             <a:picLocks noChangeAspect="1"/>
           </p:cNvPicPr>
